--- a/docs/261002.pptx
+++ b/docs/261002.pptx
@@ -11,10 +11,14 @@
     <p:sldId id="256" r:id="rId2"/>
     <p:sldId id="257" r:id="rId12"/>
     <p:sldId id="258" r:id="rId13"/>
+    <p:sldId id="266" r:id="rId40"/>
     <p:sldId id="259" r:id="rId14"/>
     <p:sldId id="260" r:id="rId15"/>
     <p:sldId id="261" r:id="rId16"/>
     <p:sldId id="262" r:id="rId17"/>
+    <p:sldId id="263" r:id="rId18"/>
+    <p:sldId id="264" r:id="rId19"/>
+    <p:sldId id="265" r:id="rId20"/>
   </p:sldIdLst>
   <p:sldSz cx="12192000" cy="6858000"/>
   <p:notesSz cx="6858000" cy="9144000"/>
@@ -4707,6 +4711,794 @@
 </p:sld>
 </file>
 
+<file path=ppt/slides/slide10.xml><?xml version="1.0" encoding="utf-8"?>
+<p:sld xmlns:a="http://schemas.openxmlformats.org/drawingml/2006/main" xmlns:p="http://schemas.openxmlformats.org/presentationml/2006/main" xmlns:r="http://schemas.openxmlformats.org/officeDocument/2006/relationships">
+  <p:cSld>
+    <p:spTree>
+      <p:nvGrpSpPr>
+        <p:cNvPr id="1" name=""/>
+        <p:cNvGrpSpPr/>
+        <p:nvPr/>
+      </p:nvGrpSpPr>
+      <p:grpSpPr/>
+      <p:sp>
+        <p:nvSpPr>
+          <p:cNvPr id="2" name="Title 1"/>
+          <p:cNvSpPr>
+            <a:spLocks noGrp="1"/>
+          </p:cNvSpPr>
+          <p:nvPr>
+            <p:ph type="title"/>
+          </p:nvPr>
+        </p:nvSpPr>
+        <p:spPr/>
+        <p:txBody>
+          <a:bodyPr/>
+          <a:lstStyle/>
+          <a:p>
+            <a:r>
+              <a:t>Figure 3. FPCA 계수 역변환 - Slice별 logit 기여도 (FPCA-only)</a:t>
+            </a:r>
+          </a:p>
+        </p:txBody>
+      </p:sp>
+      <p:pic>
+        <p:nvPicPr>
+          <p:cNvPr id="3" name="Picture 2" descr="fpca_recovered_curve.png"/>
+          <p:cNvPicPr>
+            <a:picLocks noChangeAspect="1"/>
+          </p:cNvPicPr>
+          <p:nvPr/>
+        </p:nvPicPr>
+        <p:blipFill>
+          <a:blip r:embed="rId2"/>
+          <a:stretch>
+            <a:fillRect/>
+          </a:stretch>
+        </p:blipFill>
+        <p:spPr>
+          <a:xfrm>
+            <a:off x="508000" y="1812276"/>
+            <a:ext cx="11176000" cy="3806168"/>
+          </a:xfrm>
+          <a:prstGeom prst="rect">
+            <a:avLst/>
+          </a:prstGeom>
+        </p:spPr>
+      </p:pic>
+    </p:spTree>
+  </p:cSld>
+  <p:clrMapOvr>
+    <a:masterClrMapping/>
+  </p:clrMapOvr>
+</p:sld>
+</file>
+
+<file path=ppt/slides/slide11.xml><?xml version="1.0" encoding="utf-8"?>
+<p:sld xmlns:a="http://schemas.openxmlformats.org/drawingml/2006/main" xmlns:p="http://schemas.openxmlformats.org/presentationml/2006/main" xmlns:r="http://schemas.openxmlformats.org/officeDocument/2006/relationships">
+  <p:cSld>
+    <p:spTree>
+      <p:nvGrpSpPr>
+        <p:cNvPr id="1" name=""/>
+        <p:cNvGrpSpPr/>
+        <p:nvPr/>
+      </p:nvGrpSpPr>
+      <p:grpSpPr/>
+      <p:sp>
+        <p:nvSpPr>
+          <p:cNvPr id="2" name="Title 1"/>
+          <p:cNvSpPr>
+            <a:spLocks noGrp="1"/>
+          </p:cNvSpPr>
+          <p:nvPr>
+            <p:ph type="title"/>
+          </p:nvPr>
+        </p:nvSpPr>
+        <p:spPr/>
+        <p:txBody>
+          <a:bodyPr/>
+          <a:lstStyle/>
+          <a:p>
+            <a:r>
+              <a:t>Table 1-1. Undersampling 적용 근거 — AUC는 유지, Sensitivity는 회복</a:t>
+            </a:r>
+          </a:p>
+        </p:txBody>
+      </p:sp>
+      <p:sp>
+        <p:nvSpPr>
+          <p:cNvPr id="4" name="Rationale Text"/>
+          <p:cNvSpPr>
+            <a:spLocks noGrp="1"/>
+          </p:cNvSpPr>
+          <p:nvPr/>
+        </p:nvSpPr>
+        <p:spPr>
+          <a:xfrm>
+            <a:off x="508000" y="975360"/>
+            <a:ext cx="11176000" cy="1900000"/>
+          </a:xfrm>
+          <a:prstGeom prst="rect">
+            <a:avLst/>
+          </a:prstGeom>
+        </p:spPr>
+        <p:txBody>
+          <a:bodyPr wrap="square">
+            <a:normAutofit/>
+          </a:bodyPr>
+          <a:lstStyle/>
+          <a:p>
+            <a:pPr marL="228600" indent="-228600">
+              <a:buFont typeface="Arial"/>
+              <a:buChar char="•"/>
+            </a:pPr>
+            <a:r>
+              <a:rPr sz="1300"/>
+              <a:t>Original prevalence(HTN 19~31%, DM 11~19%, CKD 8~17%)에서 0.5 cutoff 기준 Sensitivity 0.01~0.05로 붕괴(Specificity만 0.8~1.0)</a:t>
+            </a:r>
+          </a:p>
+          <a:p>
+            <a:pPr marL="228600" indent="-228600">
+              <a:buFont typeface="Arial"/>
+              <a:buChar char="•"/>
+            </a:pPr>
+            <a:r>
+              <a:rPr sz="1300"/>
+              <a:t>AUC는 순위 기반 지표라 prevalence에 둔감 → 언더샘플링해도 discrimination(AUC)은 거의 유지</a:t>
+            </a:r>
+          </a:p>
+          <a:p>
+            <a:pPr marL="228600" indent="-228600">
+              <a:buFont typeface="Arial"/>
+              <a:buChar char="•"/>
+            </a:pPr>
+            <a:r>
+              <a:rPr sz="1300"/>
+              <a:t>음성군을 양성군 수만큼 1:1 랜덤 언더샘플링(balanced_idx, code/clinic4_logistic_regression.py) 후 재학습 → AUC는 거의 그대로, Sensitivity는 0.5~0.8대로 회복</a:t>
+            </a:r>
+          </a:p>
+        </p:txBody>
+      </p:sp>
+      <p:graphicFrame>
+        <p:nvGraphicFramePr>
+          <p:cNvPr id="3" name="Table 2"/>
+          <p:cNvGraphicFramePr>
+            <a:graphicFrameLocks noGrp="1"/>
+          </p:cNvGraphicFramePr>
+          <p:nvPr/>
+        </p:nvGraphicFramePr>
+        <p:xfrm>
+          <a:off x="508000" y="3000000"/>
+          <a:ext cx="11176000" cy="3420000"/>
+        </p:xfrm>
+        <a:graphic>
+          <a:graphicData uri="http://schemas.openxmlformats.org/drawingml/2006/table">
+            <a:tbl>
+              <a:tblPr firstRow="1" bandRow="1">
+                <a:tableStyleId>{5C22544A-7EE6-4342-B048-85BDC9FD1C3A}</a:tableStyleId>
+              </a:tblPr>
+              <a:tblGrid>
+                <a:gridCol w="2235200"/>
+                <a:gridCol w="2235200"/>
+                <a:gridCol w="2235200"/>
+                <a:gridCol w="2235200"/>
+                <a:gridCol w="2235200"/>
+              </a:tblGrid>
+              <a:tr h="380000">
+                <a:tc>
+                  <a:txBody>
+                    <a:bodyPr/>
+                    <a:lstStyle/>
+                    <a:p>
+                      <a:r>
+                        <a:rPr sz="1100" b="1"/>
+                        <a:t>Disease</a:t>
+                      </a:r>
+                    </a:p>
+                  </a:txBody>
+                  <a:tcPr/>
+                </a:tc>
+                <a:tc>
+                  <a:txBody>
+                    <a:bodyPr/>
+                    <a:lstStyle/>
+                    <a:p>
+                      <a:r>
+                        <a:rPr sz="1100" b="1"/>
+                        <a:t>Cohort</a:t>
+                      </a:r>
+                    </a:p>
+                  </a:txBody>
+                  <a:tcPr/>
+                </a:tc>
+                <a:tc>
+                  <a:txBody>
+                    <a:bodyPr/>
+                    <a:lstStyle/>
+                    <a:p>
+                      <a:r>
+                        <a:rPr sz="1100" b="1"/>
+                        <a:t>AUC (orig→balanced)</a:t>
+                      </a:r>
+                    </a:p>
+                  </a:txBody>
+                  <a:tcPr/>
+                </a:tc>
+                <a:tc>
+                  <a:txBody>
+                    <a:bodyPr/>
+                    <a:lstStyle/>
+                    <a:p>
+                      <a:r>
+                        <a:rPr sz="1100" b="1"/>
+                        <a:t>Sensitivity (orig→balanced)</a:t>
+                      </a:r>
+                    </a:p>
+                  </a:txBody>
+                  <a:tcPr/>
+                </a:tc>
+                <a:tc>
+                  <a:txBody>
+                    <a:bodyPr/>
+                    <a:lstStyle/>
+                    <a:p>
+                      <a:r>
+                        <a:rPr sz="1100" b="1"/>
+                        <a:t>Specificity (orig→balanced)</a:t>
+                      </a:r>
+                    </a:p>
+                  </a:txBody>
+                  <a:tcPr/>
+                </a:tc>
+              </a:tr>
+              <a:tr h="380000">
+                <a:tc>
+                  <a:txBody>
+                    <a:bodyPr/>
+                    <a:lstStyle/>
+                    <a:p>
+                      <a:r>
+                        <a:rPr sz="1100" b="0"/>
+                        <a:t>고혈압(HTN)</a:t>
+                      </a:r>
+                    </a:p>
+                  </a:txBody>
+                  <a:tcPr/>
+                </a:tc>
+                <a:tc>
+                  <a:txBody>
+                    <a:bodyPr/>
+                    <a:lstStyle/>
+                    <a:p>
+                      <a:r>
+                        <a:rPr sz="1100" b="0"/>
+                        <a:t>Internal (Gangnam)</a:t>
+                      </a:r>
+                    </a:p>
+                  </a:txBody>
+                  <a:tcPr/>
+                </a:tc>
+                <a:tc>
+                  <a:txBody>
+                    <a:bodyPr/>
+                    <a:lstStyle/>
+                    <a:p>
+                      <a:r>
+                        <a:rPr sz="1100" b="0"/>
+                        <a:t>0.761→0.780</a:t>
+                      </a:r>
+                    </a:p>
+                  </a:txBody>
+                  <a:tcPr/>
+                </a:tc>
+                <a:tc>
+                  <a:txBody>
+                    <a:bodyPr/>
+                    <a:lstStyle/>
+                    <a:p>
+                      <a:r>
+                        <a:rPr sz="1100" b="0"/>
+                        <a:t>0.481→0.766</a:t>
+                      </a:r>
+                    </a:p>
+                  </a:txBody>
+                  <a:tcPr/>
+                </a:tc>
+                <a:tc>
+                  <a:txBody>
+                    <a:bodyPr/>
+                    <a:lstStyle/>
+                    <a:p>
+                      <a:r>
+                        <a:rPr sz="1100" b="0"/>
+                        <a:t>0.817→0.654</a:t>
+                      </a:r>
+                    </a:p>
+                  </a:txBody>
+                  <a:tcPr/>
+                </a:tc>
+              </a:tr>
+              <a:tr h="380000">
+                <a:tc>
+                  <a:txBody>
+                    <a:bodyPr/>
+                    <a:lstStyle/>
+                    <a:p>
+                      <a:r>
+                        <a:rPr sz="1100" b="0"/>
+                        <a:t/>
+                      </a:r>
+                    </a:p>
+                  </a:txBody>
+                  <a:tcPr/>
+                </a:tc>
+                <a:tc>
+                  <a:txBody>
+                    <a:bodyPr/>
+                    <a:lstStyle/>
+                    <a:p>
+                      <a:r>
+                        <a:rPr sz="1100" b="0"/>
+                        <a:t>External (Sinchon)</a:t>
+                      </a:r>
+                    </a:p>
+                  </a:txBody>
+                  <a:tcPr/>
+                </a:tc>
+                <a:tc>
+                  <a:txBody>
+                    <a:bodyPr/>
+                    <a:lstStyle/>
+                    <a:p>
+                      <a:r>
+                        <a:rPr sz="1100" b="0"/>
+                        <a:t>0.715→0.722</a:t>
+                      </a:r>
+                    </a:p>
+                  </a:txBody>
+                  <a:tcPr/>
+                </a:tc>
+                <a:tc>
+                  <a:txBody>
+                    <a:bodyPr/>
+                    <a:lstStyle/>
+                    <a:p>
+                      <a:r>
+                        <a:rPr sz="1100" b="0"/>
+                        <a:t>0.450→0.750</a:t>
+                      </a:r>
+                    </a:p>
+                  </a:txBody>
+                  <a:tcPr/>
+                </a:tc>
+                <a:tc>
+                  <a:txBody>
+                    <a:bodyPr/>
+                    <a:lstStyle/>
+                    <a:p>
+                      <a:r>
+                        <a:rPr sz="1100" b="0"/>
+                        <a:t>0.813→0.576</a:t>
+                      </a:r>
+                    </a:p>
+                  </a:txBody>
+                  <a:tcPr/>
+                </a:tc>
+              </a:tr>
+              <a:tr h="380000">
+                <a:tc>
+                  <a:txBody>
+                    <a:bodyPr/>
+                    <a:lstStyle/>
+                    <a:p>
+                      <a:r>
+                        <a:rPr sz="1100" b="0"/>
+                        <a:t/>
+                      </a:r>
+                    </a:p>
+                  </a:txBody>
+                  <a:tcPr/>
+                </a:tc>
+                <a:tc>
+                  <a:txBody>
+                    <a:bodyPr/>
+                    <a:lstStyle/>
+                    <a:p>
+                      <a:r>
+                        <a:rPr sz="1100" b="0"/>
+                        <a:t>External (New10000)</a:t>
+                      </a:r>
+                    </a:p>
+                  </a:txBody>
+                  <a:tcPr/>
+                </a:tc>
+                <a:tc>
+                  <a:txBody>
+                    <a:bodyPr/>
+                    <a:lstStyle/>
+                    <a:p>
+                      <a:r>
+                        <a:rPr sz="1100" b="0"/>
+                        <a:t>0.664→0.658</a:t>
+                      </a:r>
+                    </a:p>
+                  </a:txBody>
+                  <a:tcPr/>
+                </a:tc>
+                <a:tc>
+                  <a:txBody>
+                    <a:bodyPr/>
+                    <a:lstStyle/>
+                    <a:p>
+                      <a:r>
+                        <a:rPr sz="1100" b="0"/>
+                        <a:t>0.283→0.593</a:t>
+                      </a:r>
+                    </a:p>
+                  </a:txBody>
+                  <a:tcPr/>
+                </a:tc>
+                <a:tc>
+                  <a:txBody>
+                    <a:bodyPr/>
+                    <a:lstStyle/>
+                    <a:p>
+                      <a:r>
+                        <a:rPr sz="1100" b="0"/>
+                        <a:t>0.844→0.618</a:t>
+                      </a:r>
+                    </a:p>
+                  </a:txBody>
+                  <a:tcPr/>
+                </a:tc>
+              </a:tr>
+              <a:tr h="380000">
+                <a:tc>
+                  <a:txBody>
+                    <a:bodyPr/>
+                    <a:lstStyle/>
+                    <a:p>
+                      <a:r>
+                        <a:rPr sz="1100" b="0"/>
+                        <a:t>당뇨병(DM)</a:t>
+                      </a:r>
+                    </a:p>
+                  </a:txBody>
+                  <a:tcPr/>
+                </a:tc>
+                <a:tc>
+                  <a:txBody>
+                    <a:bodyPr/>
+                    <a:lstStyle/>
+                    <a:p>
+                      <a:r>
+                        <a:rPr sz="1100" b="0"/>
+                        <a:t>Internal (Gangnam)</a:t>
+                      </a:r>
+                    </a:p>
+                  </a:txBody>
+                  <a:tcPr/>
+                </a:tc>
+                <a:tc>
+                  <a:txBody>
+                    <a:bodyPr/>
+                    <a:lstStyle/>
+                    <a:p>
+                      <a:r>
+                        <a:rPr sz="1100" b="0"/>
+                        <a:t>0.653→0.761</a:t>
+                      </a:r>
+                    </a:p>
+                  </a:txBody>
+                  <a:tcPr/>
+                </a:tc>
+                <a:tc>
+                  <a:txBody>
+                    <a:bodyPr/>
+                    <a:lstStyle/>
+                    <a:p>
+                      <a:r>
+                        <a:rPr sz="1100" b="0"/>
+                        <a:t>0.021→0.809</a:t>
+                      </a:r>
+                    </a:p>
+                  </a:txBody>
+                  <a:tcPr/>
+                </a:tc>
+                <a:tc>
+                  <a:txBody>
+                    <a:bodyPr/>
+                    <a:lstStyle/>
+                    <a:p>
+                      <a:r>
+                        <a:rPr sz="1100" b="0"/>
+                        <a:t>0.990→0.638</a:t>
+                      </a:r>
+                    </a:p>
+                  </a:txBody>
+                  <a:tcPr/>
+                </a:tc>
+              </a:tr>
+              <a:tr h="380000">
+                <a:tc>
+                  <a:txBody>
+                    <a:bodyPr/>
+                    <a:lstStyle/>
+                    <a:p>
+                      <a:r>
+                        <a:rPr sz="1100" b="0"/>
+                        <a:t/>
+                      </a:r>
+                    </a:p>
+                  </a:txBody>
+                  <a:tcPr/>
+                </a:tc>
+                <a:tc>
+                  <a:txBody>
+                    <a:bodyPr/>
+                    <a:lstStyle/>
+                    <a:p>
+                      <a:r>
+                        <a:rPr sz="1100" b="0"/>
+                        <a:t>External (Sinchon)</a:t>
+                      </a:r>
+                    </a:p>
+                  </a:txBody>
+                  <a:tcPr/>
+                </a:tc>
+                <a:tc>
+                  <a:txBody>
+                    <a:bodyPr/>
+                    <a:lstStyle/>
+                    <a:p>
+                      <a:r>
+                        <a:rPr sz="1100" b="0"/>
+                        <a:t>0.647→0.682</a:t>
+                      </a:r>
+                    </a:p>
+                  </a:txBody>
+                  <a:tcPr/>
+                </a:tc>
+                <a:tc>
+                  <a:txBody>
+                    <a:bodyPr/>
+                    <a:lstStyle/>
+                    <a:p>
+                      <a:r>
+                        <a:rPr sz="1100" b="0"/>
+                        <a:t>0.018→0.690</a:t>
+                      </a:r>
+                    </a:p>
+                  </a:txBody>
+                  <a:tcPr/>
+                </a:tc>
+                <a:tc>
+                  <a:txBody>
+                    <a:bodyPr/>
+                    <a:lstStyle/>
+                    <a:p>
+                      <a:r>
+                        <a:rPr sz="1100" b="0"/>
+                        <a:t>0.991→0.582</a:t>
+                      </a:r>
+                    </a:p>
+                  </a:txBody>
+                  <a:tcPr/>
+                </a:tc>
+              </a:tr>
+              <a:tr h="380000">
+                <a:tc>
+                  <a:txBody>
+                    <a:bodyPr/>
+                    <a:lstStyle/>
+                    <a:p>
+                      <a:r>
+                        <a:rPr sz="1100" b="0"/>
+                        <a:t/>
+                      </a:r>
+                    </a:p>
+                  </a:txBody>
+                  <a:tcPr/>
+                </a:tc>
+                <a:tc>
+                  <a:txBody>
+                    <a:bodyPr/>
+                    <a:lstStyle/>
+                    <a:p>
+                      <a:r>
+                        <a:rPr sz="1100" b="0"/>
+                        <a:t>External (New10000)</a:t>
+                      </a:r>
+                    </a:p>
+                  </a:txBody>
+                  <a:tcPr/>
+                </a:tc>
+                <a:tc>
+                  <a:txBody>
+                    <a:bodyPr/>
+                    <a:lstStyle/>
+                    <a:p>
+                      <a:r>
+                        <a:rPr sz="1100" b="0"/>
+                        <a:t>0.633→0.646</a:t>
+                      </a:r>
+                    </a:p>
+                  </a:txBody>
+                  <a:tcPr/>
+                </a:tc>
+                <a:tc>
+                  <a:txBody>
+                    <a:bodyPr/>
+                    <a:lstStyle/>
+                    <a:p>
+                      <a:r>
+                        <a:rPr sz="1100" b="0"/>
+                        <a:t>0.013→0.595</a:t>
+                      </a:r>
+                    </a:p>
+                  </a:txBody>
+                  <a:tcPr/>
+                </a:tc>
+                <a:tc>
+                  <a:txBody>
+                    <a:bodyPr/>
+                    <a:lstStyle/>
+                    <a:p>
+                      <a:r>
+                        <a:rPr sz="1100" b="0"/>
+                        <a:t>0.994→0.611</a:t>
+                      </a:r>
+                    </a:p>
+                  </a:txBody>
+                  <a:tcPr/>
+                </a:tc>
+              </a:tr>
+              <a:tr h="380000">
+                <a:tc>
+                  <a:txBody>
+                    <a:bodyPr/>
+                    <a:lstStyle/>
+                    <a:p>
+                      <a:r>
+                        <a:rPr sz="1100" b="0"/>
+                        <a:t>만성신장질환(CKD)</a:t>
+                      </a:r>
+                    </a:p>
+                  </a:txBody>
+                  <a:tcPr/>
+                </a:tc>
+                <a:tc>
+                  <a:txBody>
+                    <a:bodyPr/>
+                    <a:lstStyle/>
+                    <a:p>
+                      <a:r>
+                        <a:rPr sz="1100" b="0"/>
+                        <a:t>Internal (Gangnam)</a:t>
+                      </a:r>
+                    </a:p>
+                  </a:txBody>
+                  <a:tcPr/>
+                </a:tc>
+                <a:tc>
+                  <a:txBody>
+                    <a:bodyPr/>
+                    <a:lstStyle/>
+                    <a:p>
+                      <a:r>
+                        <a:rPr sz="1100" b="0"/>
+                        <a:t>0.765→0.794</a:t>
+                      </a:r>
+                    </a:p>
+                  </a:txBody>
+                  <a:tcPr/>
+                </a:tc>
+                <a:tc>
+                  <a:txBody>
+                    <a:bodyPr/>
+                    <a:lstStyle/>
+                    <a:p>
+                      <a:r>
+                        <a:rPr sz="1100" b="0"/>
+                        <a:t>0.048→0.571</a:t>
+                      </a:r>
+                    </a:p>
+                  </a:txBody>
+                  <a:tcPr/>
+                </a:tc>
+                <a:tc>
+                  <a:txBody>
+                    <a:bodyPr/>
+                    <a:lstStyle/>
+                    <a:p>
+                      <a:r>
+                        <a:rPr sz="1100" b="0"/>
+                        <a:t>1.000→0.810</a:t>
+                      </a:r>
+                    </a:p>
+                  </a:txBody>
+                  <a:tcPr/>
+                </a:tc>
+              </a:tr>
+              <a:tr h="380000">
+                <a:tc>
+                  <a:txBody>
+                    <a:bodyPr/>
+                    <a:lstStyle/>
+                    <a:p>
+                      <a:r>
+                        <a:rPr sz="1100" b="0"/>
+                        <a:t/>
+                      </a:r>
+                    </a:p>
+                  </a:txBody>
+                  <a:tcPr/>
+                </a:tc>
+                <a:tc>
+                  <a:txBody>
+                    <a:bodyPr/>
+                    <a:lstStyle/>
+                    <a:p>
+                      <a:r>
+                        <a:rPr sz="1100" b="0"/>
+                        <a:t>External (Sinchon)</a:t>
+                      </a:r>
+                    </a:p>
+                  </a:txBody>
+                  <a:tcPr/>
+                </a:tc>
+                <a:tc>
+                  <a:txBody>
+                    <a:bodyPr/>
+                    <a:lstStyle/>
+                    <a:p>
+                      <a:r>
+                        <a:rPr sz="1100" b="0"/>
+                        <a:t>0.613→0.600</a:t>
+                      </a:r>
+                    </a:p>
+                  </a:txBody>
+                  <a:tcPr/>
+                </a:tc>
+                <a:tc>
+                  <a:txBody>
+                    <a:bodyPr/>
+                    <a:lstStyle/>
+                    <a:p>
+                      <a:r>
+                        <a:rPr sz="1100" b="0"/>
+                        <a:t>0.005→0.516</a:t>
+                      </a:r>
+                    </a:p>
+                  </a:txBody>
+                  <a:tcPr/>
+                </a:tc>
+                <a:tc>
+                  <a:txBody>
+                    <a:bodyPr/>
+                    <a:lstStyle/>
+                    <a:p>
+                      <a:r>
+                        <a:rPr sz="1100" b="0"/>
+                        <a:t>1.000→0.606</a:t>
+                      </a:r>
+                    </a:p>
+                  </a:txBody>
+                  <a:tcPr/>
+                </a:tc>
+              </a:tr>
+            </a:tbl>
+          </a:graphicData>
+        </a:graphic>
+      </p:graphicFrame>
+    </p:spTree>
+  </p:cSld>
+  <p:clrMapOvr>
+    <a:masterClrMapping/>
+  </p:clrMapOvr>
+</p:sld>
+</file>
+
 <file path=ppt/slides/slide2.xml><?xml version="1.0" encoding="utf-8"?>
 <p:sld xmlns:a="http://schemas.openxmlformats.org/drawingml/2006/main" xmlns:p="http://schemas.openxmlformats.org/presentationml/2006/main" xmlns:r="http://schemas.openxmlformats.org/officeDocument/2006/relationships">
   <p:cSld>
@@ -4757,95 +5549,56 @@
               <a:defRPr sz="2000"/>
             </a:pPr>
             <a:r>
-              <a:t>Internal: data/gangnam_final_dataset.xlsx metadata sheet (n=1,260)</a:t>
+              <a:rPr sz="2000"/>
+              <a:t>Dataset: Internal(Gangnam, n=1,260), External ①(Sinchon, n=1,123), External ②(New10000, n=10,400; CKD 컬럼 없어 HTN/DM만 검증)</a:t>
             </a:r>
           </a:p>
           <a:p>
-            <a:pPr>
-              <a:defRPr sz="2000"/>
-            </a:pPr>
             <a:r>
-              <a:t>External ①: data/sinchon_final_dataset.xlsx metadata sheet (n=1,123)</a:t>
+              <a:rPr sz="2000"/>
+              <a:t>Input: Clinic4 = Sex(M/F) + Age + Height + Weight (age/height/weight는 internal 기준 StandardScaler로 표준화)</a:t>
             </a:r>
           </a:p>
           <a:p>
-            <a:pPr>
-              <a:defRPr sz="2000"/>
-            </a:pPr>
             <a:r>
-              <a:t>External ②: data/new10000_final_dataset.xlsx metadata sheet (n=10,400; CKD 컬럼 없어 HTN/DM만 검증)</a:t>
-            </a:r>
-          </a:p>
-          <a:p>
-            <a:pPr>
-              <a:defRPr sz="2000"/>
-            </a:pPr>
-            <a:r>
-              <a:t>Input: Clinic4 = Sex(M/F) + Age + Height + Weight (age/height/weight는 internal 기준 표준화)</a:t>
-            </a:r>
-          </a:p>
-          <a:p>
-            <a:pPr>
-              <a:defRPr sz="2000"/>
-            </a:pPr>
-            <a:r>
+              <a:rPr sz="2000"/>
               <a:t>Outcome: HTN / DM / CKD 각각 독립적인 logistic regression</a:t>
             </a:r>
           </a:p>
           <a:p>
-            <a:pPr>
-              <a:defRPr sz="2000"/>
-            </a:pPr>
             <a:r>
-              <a:t>하이퍼파라미터 튜닝: GridSearchCV(5-fold, scoring=roc_auc)로 internal에서 C를 AUC 최대화 기준 탐색</a:t>
+              <a:rPr sz="2000"/>
+              <a:t>Split: 질병 라벨로 stratify한 patient-level train:valid:test = 7:1:2 (질병마다 별도 split)</a:t>
             </a:r>
           </a:p>
           <a:p>
-            <a:pPr>
-              <a:defRPr sz="2000"/>
-            </a:pPr>
             <a:r>
-              <a:t>확정된 C로 internal 5-fold Stratified CV 진행: AUC는 fold별 평균±표준편차, Acc/Sens/Spec은 pooled OOF로 산출</a:t>
+              <a:rPr sz="2000"/>
+              <a:t>하이퍼파라미터 튜닝: GridSearchCV(C×penalty grid, scoring=roc_auc), valid를 단일 predefined fold로 사용해 train에서 탐색</a:t>
             </a:r>
           </a:p>
           <a:p>
-            <a:pPr>
-              <a:defRPr sz="2000"/>
-            </a:pPr>
             <a:r>
-              <a:t>Accuracy용 threshold: internal OOF ROC에서 Youden's J(Sens+Spec-1) 최대 지점</a:t>
+              <a:rPr sz="2000"/>
+              <a:t>성능: 선택된 하이퍼파라미터로 train 재학습 → held-out test(20%) AUC 1회 산출 (fold 평균/CI 아님)</a:t>
             </a:r>
           </a:p>
           <a:p>
-            <a:pPr>
-              <a:defRPr sz="2000"/>
-            </a:pPr>
             <a:r>
-              <a:t>외부검증: internal 전체로 학습한 모델(scaler 포함)을 각 external에 frozen 적용(재학습 없음), threshold도 internal 값을 그대로 사용. AUC는 bootstrap 95% CI(2,000회)</a:t>
+              <a:rPr sz="2000"/>
+              <a:t>외부검증: train+valid로 재학습한 frozen 모델(scaler 포함)을 external에 그대로 적용(재학습 없음)</a:t>
             </a:r>
           </a:p>
           <a:p>
-            <a:pPr>
-              <a:defRPr sz="2000"/>
-            </a:pPr>
             <a:r>
-              <a:t>Coefficient/p-value: 규제(regularization) 없는 statsmodels Logit(MLE)을 internal 전체에 별도 적합 (Wald test)</a:t>
+              <a:rPr sz="2000"/>
+              <a:t>Coefficient/p-value: 정규화 없는 statsmodels Logit(MLE)을 train+valid에 별도 적합 (Wald test)</a:t>
             </a:r>
           </a:p>
           <a:p>
-            <a:pPr>
-              <a:defRPr sz="2000"/>
-            </a:pPr>
             <a:r>
-              <a:t>+AEC 성능비교: baseline에 AEC(aec_128 곡선, liver→pubis 128구간)를 추가 input으로 넣은 2개 모델 — FPCA(elbow n=3, fold별 PCA refit으로 누수 방지) / Upper-Lower ratio(곡선 앞뒤 half 평균 비율)</a:t>
-            </a:r>
-          </a:p>
-          <a:p>
-            <a:pPr>
-              <a:defRPr sz="2000"/>
-            </a:pPr>
-            <a:r>
-              <a:t>모델간 유의성: baseline과 +AEC 모델의 AUC 차이를 같은 환자 집합에서 DeLong paired test로 검정, BH-FDR로 다중비교 보정</a:t>
+              <a:rPr sz="2000"/>
+              <a:t>+AEC: aec_128 원본 곡선(전처리 없음) → FPCA(elbow n=3, internal 1회 fit·frozen) + Upper/Lower ratio를 추가 input으로 결합(fpca_ratio) 및 개별 ablation(fpca_only/ratio_only)으로 비교. baseline vs +AEC는 현재 AUC만 비교(유의성 검정 미수행)</a:t>
             </a:r>
           </a:p>
         </p:txBody>
@@ -4884,7 +5637,7 @@
           <a:lstStyle/>
           <a:p>
             <a:r>
-              <a:t>Table 1. Clinic4 Baseline 성능 (Internal 5-fold CV / External frozen)</a:t>
+              <a:t>Table 1. Clinic4 Baseline 성능 (Internal held-out test 20% / External 전체 코호트 frozen)</a:t>
             </a:r>
           </a:p>
         </p:txBody>
@@ -4908,15 +5661,12 @@
                 <a:tableStyleId>{5C22544A-7EE6-4342-B048-85BDC9FD1C3A}</a:tableStyleId>
               </a:tblPr>
               <a:tblGrid>
-                <a:gridCol w="1241777"/>
-                <a:gridCol w="1241777"/>
-                <a:gridCol w="1241777"/>
-                <a:gridCol w="1241777"/>
-                <a:gridCol w="1241777"/>
-                <a:gridCol w="1241777"/>
-                <a:gridCol w="1241777"/>
-                <a:gridCol w="1241777"/>
-                <a:gridCol w="1241784"/>
+                <a:gridCol w="1862666"/>
+                <a:gridCol w="1862666"/>
+                <a:gridCol w="1862666"/>
+                <a:gridCol w="1862666"/>
+                <a:gridCol w="1862666"/>
+                <a:gridCol w="1862670"/>
               </a:tblGrid>
               <a:tr h="608888">
                 <a:tc>
@@ -4924,10 +5674,8 @@
                     <a:bodyPr/>
                     <a:lstStyle/>
                     <a:p>
-                      <a:pPr>
-                        <a:defRPr sz="1100" b="1"/>
-                      </a:pPr>
-                      <a:r>
+                      <a:r>
+                        <a:rPr sz="1100" b="1"/>
                         <a:t>Cohort</a:t>
                       </a:r>
                     </a:p>
@@ -4939,10 +5687,8 @@
                     <a:bodyPr/>
                     <a:lstStyle/>
                     <a:p>
-                      <a:pPr>
-                        <a:defRPr sz="1100" b="1"/>
-                      </a:pPr>
-                      <a:r>
+                      <a:r>
+                        <a:rPr sz="1100" b="1"/>
                         <a:t>Disease</a:t>
                       </a:r>
                     </a:p>
@@ -4954,10 +5700,8 @@
                     <a:bodyPr/>
                     <a:lstStyle/>
                     <a:p>
-                      <a:pPr>
-                        <a:defRPr sz="1100" b="1"/>
-                      </a:pPr>
-                      <a:r>
+                      <a:r>
+                        <a:rPr sz="1100" b="1"/>
                         <a:t>n (pos)</a:t>
                       </a:r>
                     </a:p>
@@ -4969,86 +5713,35 @@
                     <a:bodyPr/>
                     <a:lstStyle/>
                     <a:p>
-                      <a:pPr>
-                        <a:defRPr sz="1100" b="1"/>
-                      </a:pPr>
-                      <a:r>
-                        <a:t>Best C</a:t>
-                      </a:r>
-                    </a:p>
-                  </a:txBody>
-                  <a:tcPr/>
-                </a:tc>
-                <a:tc>
-                  <a:txBody>
-                    <a:bodyPr/>
-                    <a:lstStyle/>
-                    <a:p>
-                      <a:pPr>
-                        <a:defRPr sz="1100" b="1"/>
-                      </a:pPr>
-                      <a:r>
+                      <a:r>
+                        <a:rPr sz="1100" b="1"/>
+                        <a:t>Best C (penalty)</a:t>
+                      </a:r>
+                    </a:p>
+                  </a:txBody>
+                  <a:tcPr/>
+                </a:tc>
+                <a:tc>
+                  <a:txBody>
+                    <a:bodyPr/>
+                    <a:lstStyle/>
+                    <a:p>
+                      <a:r>
+                        <a:rPr sz="1100" b="1"/>
+                        <a:t>Valid AUC</a:t>
+                      </a:r>
+                    </a:p>
+                  </a:txBody>
+                  <a:tcPr/>
+                </a:tc>
+                <a:tc>
+                  <a:txBody>
+                    <a:bodyPr/>
+                    <a:lstStyle/>
+                    <a:p>
+                      <a:r>
+                        <a:rPr sz="1100" b="1"/>
                         <a:t>AUC</a:t>
-                      </a:r>
-                    </a:p>
-                  </a:txBody>
-                  <a:tcPr/>
-                </a:tc>
-                <a:tc>
-                  <a:txBody>
-                    <a:bodyPr/>
-                    <a:lstStyle/>
-                    <a:p>
-                      <a:pPr>
-                        <a:defRPr sz="1100" b="1"/>
-                      </a:pPr>
-                      <a:r>
-                        <a:t>Threshold</a:t>
-                      </a:r>
-                    </a:p>
-                  </a:txBody>
-                  <a:tcPr/>
-                </a:tc>
-                <a:tc>
-                  <a:txBody>
-                    <a:bodyPr/>
-                    <a:lstStyle/>
-                    <a:p>
-                      <a:pPr>
-                        <a:defRPr sz="1100" b="1"/>
-                      </a:pPr>
-                      <a:r>
-                        <a:t>Sensitivity</a:t>
-                      </a:r>
-                    </a:p>
-                  </a:txBody>
-                  <a:tcPr/>
-                </a:tc>
-                <a:tc>
-                  <a:txBody>
-                    <a:bodyPr/>
-                    <a:lstStyle/>
-                    <a:p>
-                      <a:pPr>
-                        <a:defRPr sz="1100" b="1"/>
-                      </a:pPr>
-                      <a:r>
-                        <a:t>Specificity</a:t>
-                      </a:r>
-                    </a:p>
-                  </a:txBody>
-                  <a:tcPr/>
-                </a:tc>
-                <a:tc>
-                  <a:txBody>
-                    <a:bodyPr/>
-                    <a:lstStyle/>
-                    <a:p>
-                      <a:pPr>
-                        <a:defRPr sz="1100" b="1"/>
-                      </a:pPr>
-                      <a:r>
-                        <a:t>Accuracy</a:t>
                       </a:r>
                     </a:p>
                   </a:txBody>
@@ -5061,131 +5754,74 @@
                     <a:bodyPr/>
                     <a:lstStyle/>
                     <a:p>
-                      <a:pPr>
-                        <a:defRPr sz="1100"/>
-                      </a:pPr>
-                      <a:r>
+                      <a:r>
+                        <a:rPr sz="1100" b="0"/>
                         <a:t>Internal (Gangnam)</a:t>
                       </a:r>
                     </a:p>
                   </a:txBody>
                   <a:tcPr/>
                 </a:tc>
-                <a:tc rowSpan="3">
-                  <a:txBody>
-                    <a:bodyPr/>
-                    <a:lstStyle/>
-                    <a:p>
-                      <a:pPr>
-                        <a:defRPr sz="1100"/>
-                      </a:pPr>
-                      <a:r>
+                <a:tc>
+                  <a:txBody>
+                    <a:bodyPr/>
+                    <a:lstStyle/>
+                    <a:p>
+                      <a:r>
+                        <a:rPr sz="1100" b="0"/>
                         <a:t>고혈압(HTN)</a:t>
                       </a:r>
                     </a:p>
                   </a:txBody>
-                  <a:tcPr anchor="ctr"/>
-                </a:tc>
-                <a:tc>
-                  <a:txBody>
-                    <a:bodyPr/>
-                    <a:lstStyle/>
-                    <a:p>
-                      <a:pPr>
-                        <a:defRPr sz="1100"/>
-                      </a:pPr>
-                      <a:r>
-                        <a:t>1260 (386)</a:t>
-                      </a:r>
-                    </a:p>
-                  </a:txBody>
-                  <a:tcPr/>
-                </a:tc>
-                <a:tc>
-                  <a:txBody>
-                    <a:bodyPr/>
-                    <a:lstStyle/>
-                    <a:p>
-                      <a:pPr>
-                        <a:defRPr sz="1100"/>
-                      </a:pPr>
-                      <a:r>
-                        <a:t>0.1</a:t>
-                      </a:r>
-                    </a:p>
-                  </a:txBody>
-                  <a:tcPr/>
-                </a:tc>
-                <a:tc>
-                  <a:txBody>
-                    <a:bodyPr/>
-                    <a:lstStyle/>
-                    <a:p>
-                      <a:pPr>
-                        <a:defRPr sz="1100"/>
-                      </a:pPr>
-                      <a:r>
-                        <a:t>0.796 ± 0.02</a:t>
-                      </a:r>
-                    </a:p>
-                  </a:txBody>
-                  <a:tcPr/>
-                </a:tc>
-                <a:tc>
-                  <a:txBody>
-                    <a:bodyPr/>
-                    <a:lstStyle/>
-                    <a:p>
-                      <a:pPr>
-                        <a:defRPr sz="1100"/>
-                      </a:pPr>
-                      <a:r>
-                        <a:t>0.287</a:t>
-                      </a:r>
-                    </a:p>
-                  </a:txBody>
-                  <a:tcPr/>
-                </a:tc>
-                <a:tc>
-                  <a:txBody>
-                    <a:bodyPr/>
-                    <a:lstStyle/>
-                    <a:p>
-                      <a:pPr>
-                        <a:defRPr sz="1100"/>
-                      </a:pPr>
-                      <a:r>
-                        <a:t>0.78</a:t>
-                      </a:r>
-                    </a:p>
-                  </a:txBody>
-                  <a:tcPr/>
-                </a:tc>
-                <a:tc>
-                  <a:txBody>
-                    <a:bodyPr/>
-                    <a:lstStyle/>
-                    <a:p>
-                      <a:pPr>
-                        <a:defRPr sz="1100"/>
-                      </a:pPr>
-                      <a:r>
-                        <a:t>0.676</a:t>
-                      </a:r>
-                    </a:p>
-                  </a:txBody>
-                  <a:tcPr/>
-                </a:tc>
-                <a:tc>
-                  <a:txBody>
-                    <a:bodyPr/>
-                    <a:lstStyle/>
-                    <a:p>
-                      <a:pPr>
-                        <a:defRPr sz="1100"/>
-                      </a:pPr>
-                      <a:r>
-                        <a:t>0.708</a:t>
+                  <a:tcPr/>
+                </a:tc>
+                <a:tc>
+                  <a:txBody>
+                    <a:bodyPr/>
+                    <a:lstStyle/>
+                    <a:p>
+                      <a:r>
+                        <a:rPr sz="1100" b="0"/>
+                        <a:t>252 (77)</a:t>
+                      </a:r>
+                    </a:p>
+                  </a:txBody>
+                  <a:tcPr/>
+                </a:tc>
+                <a:tc>
+                  <a:txBody>
+                    <a:bodyPr/>
+                    <a:lstStyle/>
+                    <a:p>
+                      <a:r>
+                        <a:rPr sz="1100" b="0"/>
+                        <a:t>100 (l2)</a:t>
+                      </a:r>
+                    </a:p>
+                  </a:txBody>
+                  <a:tcPr/>
+                </a:tc>
+                <a:tc>
+                  <a:txBody>
+                    <a:bodyPr/>
+                    <a:lstStyle/>
+                    <a:p>
+                      <a:r>
+                        <a:rPr sz="1100" b="0"/>
+                        <a:t>0.805</a:t>
+                      </a:r>
+                    </a:p>
+                  </a:txBody>
+                  <a:tcPr/>
+                </a:tc>
+                <a:tc>
+                  <a:txBody>
+                    <a:bodyPr/>
+                    <a:lstStyle/>
+                    <a:p>
+                      <a:r>
+                        <a:rPr sz="1100" b="0"/>
+                        <a:t>0.761</a:t>
                       </a:r>
                     </a:p>
                   </a:txBody>
@@ -5198,124 +5834,74 @@
                     <a:bodyPr/>
                     <a:lstStyle/>
                     <a:p>
-                      <a:pPr>
-                        <a:defRPr sz="1100"/>
-                      </a:pPr>
-                      <a:r>
+                      <a:r>
+                        <a:rPr sz="1100" b="0"/>
                         <a:t>External (Sinchon)</a:t>
                       </a:r>
                     </a:p>
                   </a:txBody>
                   <a:tcPr/>
                 </a:tc>
-                <a:tc vMerge="1">
-                  <a:txBody>
-                    <a:bodyPr/>
-                    <a:lstStyle/>
-                    <a:p/>
-                  </a:txBody>
-                  <a:tcPr/>
-                </a:tc>
-                <a:tc>
-                  <a:txBody>
-                    <a:bodyPr/>
-                    <a:lstStyle/>
-                    <a:p>
-                      <a:pPr>
-                        <a:defRPr sz="1100"/>
-                      </a:pPr>
-                      <a:r>
-                        <a:t>1123 (507)</a:t>
-                      </a:r>
-                    </a:p>
-                  </a:txBody>
-                  <a:tcPr/>
-                </a:tc>
-                <a:tc>
-                  <a:txBody>
-                    <a:bodyPr/>
-                    <a:lstStyle/>
-                    <a:p>
-                      <a:pPr>
-                        <a:defRPr sz="1100"/>
-                      </a:pPr>
-                      <a:r>
-                        <a:t>0.1</a:t>
-                      </a:r>
-                    </a:p>
-                  </a:txBody>
-                  <a:tcPr/>
-                </a:tc>
-                <a:tc>
-                  <a:txBody>
-                    <a:bodyPr/>
-                    <a:lstStyle/>
-                    <a:p>
-                      <a:pPr>
-                        <a:defRPr sz="1100"/>
-                      </a:pPr>
-                      <a:r>
-                        <a:t>0.72 [0.69, 0.75]</a:t>
-                      </a:r>
-                    </a:p>
-                  </a:txBody>
-                  <a:tcPr/>
-                </a:tc>
-                <a:tc>
-                  <a:txBody>
-                    <a:bodyPr/>
-                    <a:lstStyle/>
-                    <a:p>
-                      <a:pPr>
-                        <a:defRPr sz="1100"/>
-                      </a:pPr>
-                      <a:r>
-                        <a:t>0.287</a:t>
-                      </a:r>
-                    </a:p>
-                  </a:txBody>
-                  <a:tcPr/>
-                </a:tc>
-                <a:tc>
-                  <a:txBody>
-                    <a:bodyPr/>
-                    <a:lstStyle/>
-                    <a:p>
-                      <a:pPr>
-                        <a:defRPr sz="1100"/>
-                      </a:pPr>
-                      <a:r>
-                        <a:t>0.759</a:t>
-                      </a:r>
-                    </a:p>
-                  </a:txBody>
-                  <a:tcPr/>
-                </a:tc>
-                <a:tc>
-                  <a:txBody>
-                    <a:bodyPr/>
-                    <a:lstStyle/>
-                    <a:p>
-                      <a:pPr>
-                        <a:defRPr sz="1100"/>
-                      </a:pPr>
-                      <a:r>
-                        <a:t>0.591</a:t>
-                      </a:r>
-                    </a:p>
-                  </a:txBody>
-                  <a:tcPr/>
-                </a:tc>
-                <a:tc>
-                  <a:txBody>
-                    <a:bodyPr/>
-                    <a:lstStyle/>
-                    <a:p>
-                      <a:pPr>
-                        <a:defRPr sz="1100"/>
-                      </a:pPr>
-                      <a:r>
-                        <a:t>0.667</a:t>
+                <a:tc>
+                  <a:txBody>
+                    <a:bodyPr/>
+                    <a:lstStyle/>
+                    <a:p>
+                      <a:r>
+                        <a:rPr sz="1100" b="0"/>
+                        <a:t/>
+                      </a:r>
+                    </a:p>
+                  </a:txBody>
+                  <a:tcPr/>
+                </a:tc>
+                <a:tc>
+                  <a:txBody>
+                    <a:bodyPr/>
+                    <a:lstStyle/>
+                    <a:p>
+                      <a:r>
+                        <a:rPr sz="1100" b="0"/>
+                        <a:t>1123 (506)</a:t>
+                      </a:r>
+                    </a:p>
+                  </a:txBody>
+                  <a:tcPr/>
+                </a:tc>
+                <a:tc>
+                  <a:txBody>
+                    <a:bodyPr/>
+                    <a:lstStyle/>
+                    <a:p>
+                      <a:r>
+                        <a:rPr sz="1100" b="0"/>
+                        <a:t>-</a:t>
+                      </a:r>
+                    </a:p>
+                  </a:txBody>
+                  <a:tcPr/>
+                </a:tc>
+                <a:tc>
+                  <a:txBody>
+                    <a:bodyPr/>
+                    <a:lstStyle/>
+                    <a:p>
+                      <a:r>
+                        <a:rPr sz="1100" b="0"/>
+                        <a:t>-</a:t>
+                      </a:r>
+                    </a:p>
+                  </a:txBody>
+                  <a:tcPr/>
+                </a:tc>
+                <a:tc>
+                  <a:txBody>
+                    <a:bodyPr/>
+                    <a:lstStyle/>
+                    <a:p>
+                      <a:r>
+                        <a:rPr sz="1100" b="0"/>
+                        <a:t>0.715</a:t>
                       </a:r>
                     </a:p>
                   </a:txBody>
@@ -5328,124 +5914,74 @@
                     <a:bodyPr/>
                     <a:lstStyle/>
                     <a:p>
-                      <a:pPr>
-                        <a:defRPr sz="1100"/>
-                      </a:pPr>
-                      <a:r>
+                      <a:r>
+                        <a:rPr sz="1100" b="0"/>
                         <a:t>External (New10000)</a:t>
                       </a:r>
                     </a:p>
                   </a:txBody>
                   <a:tcPr/>
                 </a:tc>
-                <a:tc vMerge="1">
-                  <a:txBody>
-                    <a:bodyPr/>
-                    <a:lstStyle/>
-                    <a:p/>
-                  </a:txBody>
-                  <a:tcPr/>
-                </a:tc>
-                <a:tc>
-                  <a:txBody>
-                    <a:bodyPr/>
-                    <a:lstStyle/>
-                    <a:p>
-                      <a:pPr>
-                        <a:defRPr sz="1100"/>
-                      </a:pPr>
-                      <a:r>
-                        <a:t>10400 (2104)</a:t>
-                      </a:r>
-                    </a:p>
-                  </a:txBody>
-                  <a:tcPr/>
-                </a:tc>
-                <a:tc>
-                  <a:txBody>
-                    <a:bodyPr/>
-                    <a:lstStyle/>
-                    <a:p>
-                      <a:pPr>
-                        <a:defRPr sz="1100"/>
-                      </a:pPr>
-                      <a:r>
-                        <a:t>0.1</a:t>
-                      </a:r>
-                    </a:p>
-                  </a:txBody>
-                  <a:tcPr/>
-                </a:tc>
-                <a:tc>
-                  <a:txBody>
-                    <a:bodyPr/>
-                    <a:lstStyle/>
-                    <a:p>
-                      <a:pPr>
-                        <a:defRPr sz="1100"/>
-                      </a:pPr>
-                      <a:r>
-                        <a:t>0.655 [0.643, 0.667]</a:t>
-                      </a:r>
-                    </a:p>
-                  </a:txBody>
-                  <a:tcPr/>
-                </a:tc>
-                <a:tc>
-                  <a:txBody>
-                    <a:bodyPr/>
-                    <a:lstStyle/>
-                    <a:p>
-                      <a:pPr>
-                        <a:defRPr sz="1100"/>
-                      </a:pPr>
-                      <a:r>
-                        <a:t>0.287</a:t>
-                      </a:r>
-                    </a:p>
-                  </a:txBody>
-                  <a:tcPr/>
-                </a:tc>
-                <a:tc>
-                  <a:txBody>
-                    <a:bodyPr/>
-                    <a:lstStyle/>
-                    <a:p>
-                      <a:pPr>
-                        <a:defRPr sz="1100"/>
-                      </a:pPr>
-                      <a:r>
-                        <a:t>0.625</a:t>
-                      </a:r>
-                    </a:p>
-                  </a:txBody>
-                  <a:tcPr/>
-                </a:tc>
-                <a:tc>
-                  <a:txBody>
-                    <a:bodyPr/>
-                    <a:lstStyle/>
-                    <a:p>
-                      <a:pPr>
-                        <a:defRPr sz="1100"/>
-                      </a:pPr>
-                      <a:r>
-                        <a:t>0.605</a:t>
-                      </a:r>
-                    </a:p>
-                  </a:txBody>
-                  <a:tcPr/>
-                </a:tc>
-                <a:tc>
-                  <a:txBody>
-                    <a:bodyPr/>
-                    <a:lstStyle/>
-                    <a:p>
-                      <a:pPr>
-                        <a:defRPr sz="1100"/>
-                      </a:pPr>
-                      <a:r>
-                        <a:t>0.61</a:t>
+                <a:tc>
+                  <a:txBody>
+                    <a:bodyPr/>
+                    <a:lstStyle/>
+                    <a:p>
+                      <a:r>
+                        <a:rPr sz="1100" b="0"/>
+                        <a:t/>
+                      </a:r>
+                    </a:p>
+                  </a:txBody>
+                  <a:tcPr/>
+                </a:tc>
+                <a:tc>
+                  <a:txBody>
+                    <a:bodyPr/>
+                    <a:lstStyle/>
+                    <a:p>
+                      <a:r>
+                        <a:rPr sz="1100" b="0"/>
+                        <a:t>10400 (2101)</a:t>
+                      </a:r>
+                    </a:p>
+                  </a:txBody>
+                  <a:tcPr/>
+                </a:tc>
+                <a:tc>
+                  <a:txBody>
+                    <a:bodyPr/>
+                    <a:lstStyle/>
+                    <a:p>
+                      <a:r>
+                        <a:rPr sz="1100" b="0"/>
+                        <a:t>-</a:t>
+                      </a:r>
+                    </a:p>
+                  </a:txBody>
+                  <a:tcPr/>
+                </a:tc>
+                <a:tc>
+                  <a:txBody>
+                    <a:bodyPr/>
+                    <a:lstStyle/>
+                    <a:p>
+                      <a:r>
+                        <a:rPr sz="1100" b="0"/>
+                        <a:t>-</a:t>
+                      </a:r>
+                    </a:p>
+                  </a:txBody>
+                  <a:tcPr/>
+                </a:tc>
+                <a:tc>
+                  <a:txBody>
+                    <a:bodyPr/>
+                    <a:lstStyle/>
+                    <a:p>
+                      <a:r>
+                        <a:rPr sz="1100" b="0"/>
+                        <a:t>0.655</a:t>
                       </a:r>
                     </a:p>
                   </a:txBody>
@@ -5458,131 +5994,74 @@
                     <a:bodyPr/>
                     <a:lstStyle/>
                     <a:p>
-                      <a:pPr>
-                        <a:defRPr sz="1100"/>
-                      </a:pPr>
-                      <a:r>
+                      <a:r>
+                        <a:rPr sz="1100" b="0"/>
                         <a:t>Internal (Gangnam)</a:t>
                       </a:r>
                     </a:p>
                   </a:txBody>
                   <a:tcPr/>
                 </a:tc>
-                <a:tc rowSpan="3">
-                  <a:txBody>
-                    <a:bodyPr/>
-                    <a:lstStyle/>
-                    <a:p>
-                      <a:pPr>
-                        <a:defRPr sz="1100"/>
-                      </a:pPr>
-                      <a:r>
+                <a:tc>
+                  <a:txBody>
+                    <a:bodyPr/>
+                    <a:lstStyle/>
+                    <a:p>
+                      <a:r>
+                        <a:rPr sz="1100" b="0"/>
                         <a:t>당뇨병(DM)</a:t>
                       </a:r>
                     </a:p>
                   </a:txBody>
-                  <a:tcPr anchor="ctr"/>
-                </a:tc>
-                <a:tc>
-                  <a:txBody>
-                    <a:bodyPr/>
-                    <a:lstStyle/>
-                    <a:p>
-                      <a:pPr>
-                        <a:defRPr sz="1100"/>
-                      </a:pPr>
-                      <a:r>
-                        <a:t>1260 (233)</a:t>
-                      </a:r>
-                    </a:p>
-                  </a:txBody>
-                  <a:tcPr/>
-                </a:tc>
-                <a:tc>
-                  <a:txBody>
-                    <a:bodyPr/>
-                    <a:lstStyle/>
-                    <a:p>
-                      <a:pPr>
-                        <a:defRPr sz="1100"/>
-                      </a:pPr>
-                      <a:r>
-                        <a:t>316.2278</a:t>
-                      </a:r>
-                    </a:p>
-                  </a:txBody>
-                  <a:tcPr/>
-                </a:tc>
-                <a:tc>
-                  <a:txBody>
-                    <a:bodyPr/>
-                    <a:lstStyle/>
-                    <a:p>
-                      <a:pPr>
-                        <a:defRPr sz="1100"/>
-                      </a:pPr>
-                      <a:r>
-                        <a:t>0.722 ± 0.043</a:t>
-                      </a:r>
-                    </a:p>
-                  </a:txBody>
-                  <a:tcPr/>
-                </a:tc>
-                <a:tc>
-                  <a:txBody>
-                    <a:bodyPr/>
-                    <a:lstStyle/>
-                    <a:p>
-                      <a:pPr>
-                        <a:defRPr sz="1100"/>
-                      </a:pPr>
-                      <a:r>
-                        <a:t>0.138</a:t>
-                      </a:r>
-                    </a:p>
-                  </a:txBody>
-                  <a:tcPr/>
-                </a:tc>
-                <a:tc>
-                  <a:txBody>
-                    <a:bodyPr/>
-                    <a:lstStyle/>
-                    <a:p>
-                      <a:pPr>
-                        <a:defRPr sz="1100"/>
-                      </a:pPr>
-                      <a:r>
-                        <a:t>0.854</a:t>
-                      </a:r>
-                    </a:p>
-                  </a:txBody>
-                  <a:tcPr/>
-                </a:tc>
-                <a:tc>
-                  <a:txBody>
-                    <a:bodyPr/>
-                    <a:lstStyle/>
-                    <a:p>
-                      <a:pPr>
-                        <a:defRPr sz="1100"/>
-                      </a:pPr>
-                      <a:r>
-                        <a:t>0.505</a:t>
-                      </a:r>
-                    </a:p>
-                  </a:txBody>
-                  <a:tcPr/>
-                </a:tc>
-                <a:tc>
-                  <a:txBody>
-                    <a:bodyPr/>
-                    <a:lstStyle/>
-                    <a:p>
-                      <a:pPr>
-                        <a:defRPr sz="1100"/>
-                      </a:pPr>
-                      <a:r>
-                        <a:t>0.57</a:t>
+                  <a:tcPr/>
+                </a:tc>
+                <a:tc>
+                  <a:txBody>
+                    <a:bodyPr/>
+                    <a:lstStyle/>
+                    <a:p>
+                      <a:r>
+                        <a:rPr sz="1100" b="0"/>
+                        <a:t>252 (47)</a:t>
+                      </a:r>
+                    </a:p>
+                  </a:txBody>
+                  <a:tcPr/>
+                </a:tc>
+                <a:tc>
+                  <a:txBody>
+                    <a:bodyPr/>
+                    <a:lstStyle/>
+                    <a:p>
+                      <a:r>
+                        <a:rPr sz="1100" b="0"/>
+                        <a:t>0.1 (l1)</a:t>
+                      </a:r>
+                    </a:p>
+                  </a:txBody>
+                  <a:tcPr/>
+                </a:tc>
+                <a:tc>
+                  <a:txBody>
+                    <a:bodyPr/>
+                    <a:lstStyle/>
+                    <a:p>
+                      <a:r>
+                        <a:rPr sz="1100" b="0"/>
+                        <a:t>0.712</a:t>
+                      </a:r>
+                    </a:p>
+                  </a:txBody>
+                  <a:tcPr/>
+                </a:tc>
+                <a:tc>
+                  <a:txBody>
+                    <a:bodyPr/>
+                    <a:lstStyle/>
+                    <a:p>
+                      <a:r>
+                        <a:rPr sz="1100" b="0"/>
+                        <a:t>0.653</a:t>
                       </a:r>
                     </a:p>
                   </a:txBody>
@@ -5595,33 +6074,34 @@
                     <a:bodyPr/>
                     <a:lstStyle/>
                     <a:p>
-                      <a:pPr>
-                        <a:defRPr sz="1100"/>
-                      </a:pPr>
-                      <a:r>
+                      <a:r>
+                        <a:rPr sz="1100" b="0"/>
                         <a:t>External (Sinchon)</a:t>
                       </a:r>
                     </a:p>
                   </a:txBody>
                   <a:tcPr/>
                 </a:tc>
-                <a:tc vMerge="1">
-                  <a:txBody>
-                    <a:bodyPr/>
-                    <a:lstStyle/>
-                    <a:p/>
-                  </a:txBody>
-                  <a:tcPr/>
-                </a:tc>
-                <a:tc>
-                  <a:txBody>
-                    <a:bodyPr/>
-                    <a:lstStyle/>
-                    <a:p>
-                      <a:pPr>
-                        <a:defRPr sz="1100"/>
-                      </a:pPr>
-                      <a:r>
+                <a:tc>
+                  <a:txBody>
+                    <a:bodyPr/>
+                    <a:lstStyle/>
+                    <a:p>
+                      <a:r>
+                        <a:rPr sz="1100" b="0"/>
+                        <a:t/>
+                      </a:r>
+                    </a:p>
+                  </a:txBody>
+                  <a:tcPr/>
+                </a:tc>
+                <a:tc>
+                  <a:txBody>
+                    <a:bodyPr/>
+                    <a:lstStyle/>
+                    <a:p>
+                      <a:r>
+                        <a:rPr sz="1100" b="0"/>
                         <a:t>1123 (335)</a:t>
                       </a:r>
                     </a:p>
@@ -5633,86 +6113,35 @@
                     <a:bodyPr/>
                     <a:lstStyle/>
                     <a:p>
-                      <a:pPr>
-                        <a:defRPr sz="1100"/>
-                      </a:pPr>
-                      <a:r>
-                        <a:t>316.2278</a:t>
-                      </a:r>
-                    </a:p>
-                  </a:txBody>
-                  <a:tcPr/>
-                </a:tc>
-                <a:tc>
-                  <a:txBody>
-                    <a:bodyPr/>
-                    <a:lstStyle/>
-                    <a:p>
-                      <a:pPr>
-                        <a:defRPr sz="1100"/>
-                      </a:pPr>
-                      <a:r>
-                        <a:t>0.666 [0.632, 0.699]</a:t>
-                      </a:r>
-                    </a:p>
-                  </a:txBody>
-                  <a:tcPr/>
-                </a:tc>
-                <a:tc>
-                  <a:txBody>
-                    <a:bodyPr/>
-                    <a:lstStyle/>
-                    <a:p>
-                      <a:pPr>
-                        <a:defRPr sz="1100"/>
-                      </a:pPr>
-                      <a:r>
-                        <a:t>0.138</a:t>
-                      </a:r>
-                    </a:p>
-                  </a:txBody>
-                  <a:tcPr/>
-                </a:tc>
-                <a:tc>
-                  <a:txBody>
-                    <a:bodyPr/>
-                    <a:lstStyle/>
-                    <a:p>
-                      <a:pPr>
-                        <a:defRPr sz="1100"/>
-                      </a:pPr>
-                      <a:r>
-                        <a:t>0.794</a:t>
-                      </a:r>
-                    </a:p>
-                  </a:txBody>
-                  <a:tcPr/>
-                </a:tc>
-                <a:tc>
-                  <a:txBody>
-                    <a:bodyPr/>
-                    <a:lstStyle/>
-                    <a:p>
-                      <a:pPr>
-                        <a:defRPr sz="1100"/>
-                      </a:pPr>
-                      <a:r>
-                        <a:t>0.414</a:t>
-                      </a:r>
-                    </a:p>
-                  </a:txBody>
-                  <a:tcPr/>
-                </a:tc>
-                <a:tc>
-                  <a:txBody>
-                    <a:bodyPr/>
-                    <a:lstStyle/>
-                    <a:p>
-                      <a:pPr>
-                        <a:defRPr sz="1100"/>
-                      </a:pPr>
-                      <a:r>
-                        <a:t>0.527</a:t>
+                      <a:r>
+                        <a:rPr sz="1100" b="0"/>
+                        <a:t>-</a:t>
+                      </a:r>
+                    </a:p>
+                  </a:txBody>
+                  <a:tcPr/>
+                </a:tc>
+                <a:tc>
+                  <a:txBody>
+                    <a:bodyPr/>
+                    <a:lstStyle/>
+                    <a:p>
+                      <a:r>
+                        <a:rPr sz="1100" b="0"/>
+                        <a:t>-</a:t>
+                      </a:r>
+                    </a:p>
+                  </a:txBody>
+                  <a:tcPr/>
+                </a:tc>
+                <a:tc>
+                  <a:txBody>
+                    <a:bodyPr/>
+                    <a:lstStyle/>
+                    <a:p>
+                      <a:r>
+                        <a:rPr sz="1100" b="0"/>
+                        <a:t>0.647</a:t>
                       </a:r>
                     </a:p>
                   </a:txBody>
@@ -5725,124 +6154,74 @@
                     <a:bodyPr/>
                     <a:lstStyle/>
                     <a:p>
-                      <a:pPr>
-                        <a:defRPr sz="1100"/>
-                      </a:pPr>
-                      <a:r>
+                      <a:r>
+                        <a:rPr sz="1100" b="0"/>
                         <a:t>External (New10000)</a:t>
                       </a:r>
                     </a:p>
                   </a:txBody>
                   <a:tcPr/>
                 </a:tc>
-                <a:tc vMerge="1">
-                  <a:txBody>
-                    <a:bodyPr/>
-                    <a:lstStyle/>
-                    <a:p/>
-                  </a:txBody>
-                  <a:tcPr/>
-                </a:tc>
-                <a:tc>
-                  <a:txBody>
-                    <a:bodyPr/>
-                    <a:lstStyle/>
-                    <a:p>
-                      <a:pPr>
-                        <a:defRPr sz="1100"/>
-                      </a:pPr>
-                      <a:r>
-                        <a:t>10400 (1216)</a:t>
-                      </a:r>
-                    </a:p>
-                  </a:txBody>
-                  <a:tcPr/>
-                </a:tc>
-                <a:tc>
-                  <a:txBody>
-                    <a:bodyPr/>
-                    <a:lstStyle/>
-                    <a:p>
-                      <a:pPr>
-                        <a:defRPr sz="1100"/>
-                      </a:pPr>
-                      <a:r>
-                        <a:t>316.2278</a:t>
-                      </a:r>
-                    </a:p>
-                  </a:txBody>
-                  <a:tcPr/>
-                </a:tc>
-                <a:tc>
-                  <a:txBody>
-                    <a:bodyPr/>
-                    <a:lstStyle/>
-                    <a:p>
-                      <a:pPr>
-                        <a:defRPr sz="1100"/>
-                      </a:pPr>
-                      <a:r>
-                        <a:t>0.641 [0.625, 0.657]</a:t>
-                      </a:r>
-                    </a:p>
-                  </a:txBody>
-                  <a:tcPr/>
-                </a:tc>
-                <a:tc>
-                  <a:txBody>
-                    <a:bodyPr/>
-                    <a:lstStyle/>
-                    <a:p>
-                      <a:pPr>
-                        <a:defRPr sz="1100"/>
-                      </a:pPr>
-                      <a:r>
-                        <a:t>0.138</a:t>
-                      </a:r>
-                    </a:p>
-                  </a:txBody>
-                  <a:tcPr/>
-                </a:tc>
-                <a:tc>
-                  <a:txBody>
-                    <a:bodyPr/>
-                    <a:lstStyle/>
-                    <a:p>
-                      <a:pPr>
-                        <a:defRPr sz="1100"/>
-                      </a:pPr>
-                      <a:r>
-                        <a:t>0.765</a:t>
-                      </a:r>
-                    </a:p>
-                  </a:txBody>
-                  <a:tcPr/>
-                </a:tc>
-                <a:tc>
-                  <a:txBody>
-                    <a:bodyPr/>
-                    <a:lstStyle/>
-                    <a:p>
-                      <a:pPr>
-                        <a:defRPr sz="1100"/>
-                      </a:pPr>
-                      <a:r>
-                        <a:t>0.443</a:t>
-                      </a:r>
-                    </a:p>
-                  </a:txBody>
-                  <a:tcPr/>
-                </a:tc>
-                <a:tc>
-                  <a:txBody>
-                    <a:bodyPr/>
-                    <a:lstStyle/>
-                    <a:p>
-                      <a:pPr>
-                        <a:defRPr sz="1100"/>
-                      </a:pPr>
-                      <a:r>
-                        <a:t>0.481</a:t>
+                <a:tc>
+                  <a:txBody>
+                    <a:bodyPr/>
+                    <a:lstStyle/>
+                    <a:p>
+                      <a:r>
+                        <a:rPr sz="1100" b="0"/>
+                        <a:t/>
+                      </a:r>
+                    </a:p>
+                  </a:txBody>
+                  <a:tcPr/>
+                </a:tc>
+                <a:tc>
+                  <a:txBody>
+                    <a:bodyPr/>
+                    <a:lstStyle/>
+                    <a:p>
+                      <a:r>
+                        <a:rPr sz="1100" b="0"/>
+                        <a:t>10400 (1217)</a:t>
+                      </a:r>
+                    </a:p>
+                  </a:txBody>
+                  <a:tcPr/>
+                </a:tc>
+                <a:tc>
+                  <a:txBody>
+                    <a:bodyPr/>
+                    <a:lstStyle/>
+                    <a:p>
+                      <a:r>
+                        <a:rPr sz="1100" b="0"/>
+                        <a:t>-</a:t>
+                      </a:r>
+                    </a:p>
+                  </a:txBody>
+                  <a:tcPr/>
+                </a:tc>
+                <a:tc>
+                  <a:txBody>
+                    <a:bodyPr/>
+                    <a:lstStyle/>
+                    <a:p>
+                      <a:r>
+                        <a:rPr sz="1100" b="0"/>
+                        <a:t>-</a:t>
+                      </a:r>
+                    </a:p>
+                  </a:txBody>
+                  <a:tcPr/>
+                </a:tc>
+                <a:tc>
+                  <a:txBody>
+                    <a:bodyPr/>
+                    <a:lstStyle/>
+                    <a:p>
+                      <a:r>
+                        <a:rPr sz="1100" b="0"/>
+                        <a:t>0.635</a:t>
                       </a:r>
                     </a:p>
                   </a:txBody>
@@ -5855,131 +6234,74 @@
                     <a:bodyPr/>
                     <a:lstStyle/>
                     <a:p>
-                      <a:pPr>
-                        <a:defRPr sz="1100"/>
-                      </a:pPr>
-                      <a:r>
+                      <a:r>
+                        <a:rPr sz="1100" b="0"/>
                         <a:t>Internal (Gangnam)</a:t>
                       </a:r>
                     </a:p>
                   </a:txBody>
                   <a:tcPr/>
                 </a:tc>
-                <a:tc rowSpan="2">
-                  <a:txBody>
-                    <a:bodyPr/>
-                    <a:lstStyle/>
-                    <a:p>
-                      <a:pPr>
-                        <a:defRPr sz="1100"/>
-                      </a:pPr>
-                      <a:r>
+                <a:tc>
+                  <a:txBody>
+                    <a:bodyPr/>
+                    <a:lstStyle/>
+                    <a:p>
+                      <a:r>
+                        <a:rPr sz="1100" b="0"/>
                         <a:t>만성신장질환(CKD)</a:t>
                       </a:r>
                     </a:p>
                   </a:txBody>
-                  <a:tcPr anchor="ctr"/>
-                </a:tc>
-                <a:tc>
-                  <a:txBody>
-                    <a:bodyPr/>
-                    <a:lstStyle/>
-                    <a:p>
-                      <a:pPr>
-                        <a:defRPr sz="1100"/>
-                      </a:pPr>
-                      <a:r>
-                        <a:t>1260 (105)</a:t>
-                      </a:r>
-                    </a:p>
-                  </a:txBody>
-                  <a:tcPr/>
-                </a:tc>
-                <a:tc>
-                  <a:txBody>
-                    <a:bodyPr/>
-                    <a:lstStyle/>
-                    <a:p>
-                      <a:pPr>
-                        <a:defRPr sz="1100"/>
-                      </a:pPr>
-                      <a:r>
-                        <a:t>3.1623</a:t>
-                      </a:r>
-                    </a:p>
-                  </a:txBody>
-                  <a:tcPr/>
-                </a:tc>
-                <a:tc>
-                  <a:txBody>
-                    <a:bodyPr/>
-                    <a:lstStyle/>
-                    <a:p>
-                      <a:pPr>
-                        <a:defRPr sz="1100"/>
-                      </a:pPr>
-                      <a:r>
-                        <a:t>0.771 ± 0.034</a:t>
-                      </a:r>
-                    </a:p>
-                  </a:txBody>
-                  <a:tcPr/>
-                </a:tc>
-                <a:tc>
-                  <a:txBody>
-                    <a:bodyPr/>
-                    <a:lstStyle/>
-                    <a:p>
-                      <a:pPr>
-                        <a:defRPr sz="1100"/>
-                      </a:pPr>
-                      <a:r>
-                        <a:t>0.068</a:t>
-                      </a:r>
-                    </a:p>
-                  </a:txBody>
-                  <a:tcPr/>
-                </a:tc>
-                <a:tc>
-                  <a:txBody>
-                    <a:bodyPr/>
-                    <a:lstStyle/>
-                    <a:p>
-                      <a:pPr>
-                        <a:defRPr sz="1100"/>
-                      </a:pPr>
-                      <a:r>
-                        <a:t>0.81</a:t>
-                      </a:r>
-                    </a:p>
-                  </a:txBody>
-                  <a:tcPr/>
-                </a:tc>
-                <a:tc>
-                  <a:txBody>
-                    <a:bodyPr/>
-                    <a:lstStyle/>
-                    <a:p>
-                      <a:pPr>
-                        <a:defRPr sz="1100"/>
-                      </a:pPr>
-                      <a:r>
-                        <a:t>0.631</a:t>
-                      </a:r>
-                    </a:p>
-                  </a:txBody>
-                  <a:tcPr/>
-                </a:tc>
-                <a:tc>
-                  <a:txBody>
-                    <a:bodyPr/>
-                    <a:lstStyle/>
-                    <a:p>
-                      <a:pPr>
-                        <a:defRPr sz="1100"/>
-                      </a:pPr>
-                      <a:r>
-                        <a:t>0.646</a:t>
+                  <a:tcPr/>
+                </a:tc>
+                <a:tc>
+                  <a:txBody>
+                    <a:bodyPr/>
+                    <a:lstStyle/>
+                    <a:p>
+                      <a:r>
+                        <a:rPr sz="1100" b="0"/>
+                        <a:t>252 (21)</a:t>
+                      </a:r>
+                    </a:p>
+                  </a:txBody>
+                  <a:tcPr/>
+                </a:tc>
+                <a:tc>
+                  <a:txBody>
+                    <a:bodyPr/>
+                    <a:lstStyle/>
+                    <a:p>
+                      <a:r>
+                        <a:rPr sz="1100" b="0"/>
+                        <a:t>10 (l2)</a:t>
+                      </a:r>
+                    </a:p>
+                  </a:txBody>
+                  <a:tcPr/>
+                </a:tc>
+                <a:tc>
+                  <a:txBody>
+                    <a:bodyPr/>
+                    <a:lstStyle/>
+                    <a:p>
+                      <a:r>
+                        <a:rPr sz="1100" b="0"/>
+                        <a:t>0.836</a:t>
+                      </a:r>
+                    </a:p>
+                  </a:txBody>
+                  <a:tcPr/>
+                </a:tc>
+                <a:tc>
+                  <a:txBody>
+                    <a:bodyPr/>
+                    <a:lstStyle/>
+                    <a:p>
+                      <a:r>
+                        <a:rPr sz="1100" b="0"/>
+                        <a:t>0.765</a:t>
                       </a:r>
                     </a:p>
                   </a:txBody>
@@ -5992,33 +6314,34 @@
                     <a:bodyPr/>
                     <a:lstStyle/>
                     <a:p>
-                      <a:pPr>
-                        <a:defRPr sz="1100"/>
-                      </a:pPr>
-                      <a:r>
+                      <a:r>
+                        <a:rPr sz="1100" b="0"/>
                         <a:t>External (Sinchon)</a:t>
                       </a:r>
                     </a:p>
                   </a:txBody>
                   <a:tcPr/>
                 </a:tc>
-                <a:tc vMerge="1">
-                  <a:txBody>
-                    <a:bodyPr/>
-                    <a:lstStyle/>
-                    <a:p/>
-                  </a:txBody>
-                  <a:tcPr/>
-                </a:tc>
-                <a:tc>
-                  <a:txBody>
-                    <a:bodyPr/>
-                    <a:lstStyle/>
-                    <a:p>
-                      <a:pPr>
-                        <a:defRPr sz="1100"/>
-                      </a:pPr>
-                      <a:r>
+                <a:tc>
+                  <a:txBody>
+                    <a:bodyPr/>
+                    <a:lstStyle/>
+                    <a:p>
+                      <a:r>
+                        <a:rPr sz="1100" b="0"/>
+                        <a:t/>
+                      </a:r>
+                    </a:p>
+                  </a:txBody>
+                  <a:tcPr/>
+                </a:tc>
+                <a:tc>
+                  <a:txBody>
+                    <a:bodyPr/>
+                    <a:lstStyle/>
+                    <a:p>
+                      <a:r>
+                        <a:rPr sz="1100" b="0"/>
                         <a:t>1123 (188)</a:t>
                       </a:r>
                     </a:p>
@@ -6030,86 +6353,35 @@
                     <a:bodyPr/>
                     <a:lstStyle/>
                     <a:p>
-                      <a:pPr>
-                        <a:defRPr sz="1100"/>
-                      </a:pPr>
-                      <a:r>
-                        <a:t>3.1623</a:t>
-                      </a:r>
-                    </a:p>
-                  </a:txBody>
-                  <a:tcPr/>
-                </a:tc>
-                <a:tc>
-                  <a:txBody>
-                    <a:bodyPr/>
-                    <a:lstStyle/>
-                    <a:p>
-                      <a:pPr>
-                        <a:defRPr sz="1100"/>
-                      </a:pPr>
-                      <a:r>
-                        <a:t>0.615 [0.571, 0.661]</a:t>
-                      </a:r>
-                    </a:p>
-                  </a:txBody>
-                  <a:tcPr/>
-                </a:tc>
-                <a:tc>
-                  <a:txBody>
-                    <a:bodyPr/>
-                    <a:lstStyle/>
-                    <a:p>
-                      <a:pPr>
-                        <a:defRPr sz="1100"/>
-                      </a:pPr>
-                      <a:r>
-                        <a:t>0.068</a:t>
-                      </a:r>
-                    </a:p>
-                  </a:txBody>
-                  <a:tcPr/>
-                </a:tc>
-                <a:tc>
-                  <a:txBody>
-                    <a:bodyPr/>
-                    <a:lstStyle/>
-                    <a:p>
-                      <a:pPr>
-                        <a:defRPr sz="1100"/>
-                      </a:pPr>
-                      <a:r>
-                        <a:t>0.644</a:t>
-                      </a:r>
-                    </a:p>
-                  </a:txBody>
-                  <a:tcPr/>
-                </a:tc>
-                <a:tc>
-                  <a:txBody>
-                    <a:bodyPr/>
-                    <a:lstStyle/>
-                    <a:p>
-                      <a:pPr>
-                        <a:defRPr sz="1100"/>
-                      </a:pPr>
-                      <a:r>
-                        <a:t>0.518</a:t>
-                      </a:r>
-                    </a:p>
-                  </a:txBody>
-                  <a:tcPr/>
-                </a:tc>
-                <a:tc>
-                  <a:txBody>
-                    <a:bodyPr/>
-                    <a:lstStyle/>
-                    <a:p>
-                      <a:pPr>
-                        <a:defRPr sz="1100"/>
-                      </a:pPr>
-                      <a:r>
-                        <a:t>0.539</a:t>
+                      <a:r>
+                        <a:rPr sz="1100" b="0"/>
+                        <a:t>-</a:t>
+                      </a:r>
+                    </a:p>
+                  </a:txBody>
+                  <a:tcPr/>
+                </a:tc>
+                <a:tc>
+                  <a:txBody>
+                    <a:bodyPr/>
+                    <a:lstStyle/>
+                    <a:p>
+                      <a:r>
+                        <a:rPr sz="1100" b="0"/>
+                        <a:t>-</a:t>
+                      </a:r>
+                    </a:p>
+                  </a:txBody>
+                  <a:tcPr/>
+                </a:tc>
+                <a:tc>
+                  <a:txBody>
+                    <a:bodyPr/>
+                    <a:lstStyle/>
+                    <a:p>
+                      <a:r>
+                        <a:rPr sz="1100" b="0"/>
+                        <a:t>0.613</a:t>
                       </a:r>
                     </a:p>
                   </a:txBody>
@@ -6154,7 +6426,7 @@
           <a:lstStyle/>
           <a:p>
             <a:r>
-              <a:t>Table 2. Clinic4 Coefficient / Odds Ratio (Internal)</a:t>
+              <a:t>Table 2. Clinic4 Coefficient / Odds Ratio (Internal train+valid)</a:t>
             </a:r>
           </a:p>
         </p:txBody>
@@ -6285,7 +6557,8 @@
                         <a:defRPr sz="1100"/>
                       </a:pPr>
                       <a:r>
-                        <a:t>0.872</a:t>
+                        <a:rPr sz="1100" b="0"/>
+                        <a:t>1.086</a:t>
                       </a:r>
                     </a:p>
                   </a:txBody>
@@ -6300,7 +6573,8 @@
                         <a:defRPr sz="1100"/>
                       </a:pPr>
                       <a:r>
-                        <a:t>2.393</a:t>
+                        <a:rPr sz="1100" b="0"/>
+                        <a:t>2.962</a:t>
                       </a:r>
                     </a:p>
                   </a:txBody>
@@ -6340,7 +6614,8 @@
                         <a:defRPr sz="1100"/>
                       </a:pPr>
                       <a:r>
-                        <a:t>1.016</a:t>
+                        <a:rPr sz="1100" b="0"/>
+                        <a:t>1.041</a:t>
                       </a:r>
                     </a:p>
                   </a:txBody>
@@ -6355,7 +6630,8 @@
                         <a:defRPr sz="1100"/>
                       </a:pPr>
                       <a:r>
-                        <a:t>2.763</a:t>
+                        <a:rPr sz="1100" b="0"/>
+                        <a:t>2.832</a:t>
                       </a:r>
                     </a:p>
                   </a:txBody>
@@ -6395,7 +6671,8 @@
                         <a:defRPr sz="1100"/>
                       </a:pPr>
                       <a:r>
-                        <a:t>-0.375</a:t>
+                        <a:rPr sz="1100" b="0"/>
+                        <a:t>-0.460</a:t>
                       </a:r>
                     </a:p>
                   </a:txBody>
@@ -6410,7 +6687,8 @@
                         <a:defRPr sz="1100"/>
                       </a:pPr>
                       <a:r>
-                        <a:t>0.687</a:t>
+                        <a:rPr sz="1100" b="0"/>
+                        <a:t>0.631</a:t>
                       </a:r>
                     </a:p>
                   </a:txBody>
@@ -6450,7 +6728,8 @@
                         <a:defRPr sz="1100"/>
                       </a:pPr>
                       <a:r>
-                        <a:t>0.603</a:t>
+                        <a:rPr sz="1100" b="0"/>
+                        <a:t>0.634</a:t>
                       </a:r>
                     </a:p>
                   </a:txBody>
@@ -6465,7 +6744,8 @@
                         <a:defRPr sz="1100"/>
                       </a:pPr>
                       <a:r>
-                        <a:t>1.828</a:t>
+                        <a:rPr sz="1100" b="0"/>
+                        <a:t>1.886</a:t>
                       </a:r>
                     </a:p>
                   </a:txBody>
@@ -6512,7 +6792,8 @@
                         <a:defRPr sz="1100"/>
                       </a:pPr>
                       <a:r>
-                        <a:t>0.675</a:t>
+                        <a:rPr sz="1100" b="0"/>
+                        <a:t>0.601</a:t>
                       </a:r>
                     </a:p>
                   </a:txBody>
@@ -6527,7 +6808,8 @@
                         <a:defRPr sz="1100"/>
                       </a:pPr>
                       <a:r>
-                        <a:t>1.964</a:t>
+                        <a:rPr sz="1100" b="0"/>
+                        <a:t>1.824</a:t>
                       </a:r>
                     </a:p>
                   </a:txBody>
@@ -6567,7 +6849,8 @@
                         <a:defRPr sz="1100"/>
                       </a:pPr>
                       <a:r>
-                        <a:t>0.544</a:t>
+                        <a:rPr sz="1100" b="0"/>
+                        <a:t>0.526</a:t>
                       </a:r>
                     </a:p>
                   </a:txBody>
@@ -6582,7 +6865,8 @@
                         <a:defRPr sz="1100"/>
                       </a:pPr>
                       <a:r>
-                        <a:t>1.723</a:t>
+                        <a:rPr sz="1100" b="0"/>
+                        <a:t>1.692</a:t>
                       </a:r>
                     </a:p>
                   </a:txBody>
@@ -6622,7 +6906,8 @@
                         <a:defRPr sz="1100"/>
                       </a:pPr>
                       <a:r>
-                        <a:t>-0.434</a:t>
+                        <a:rPr sz="1100" b="0"/>
+                        <a:t>-0.346</a:t>
                       </a:r>
                     </a:p>
                   </a:txBody>
@@ -6637,7 +6922,8 @@
                         <a:defRPr sz="1100"/>
                       </a:pPr>
                       <a:r>
-                        <a:t>0.648</a:t>
+                        <a:rPr sz="1100" b="0"/>
+                        <a:t>0.707</a:t>
                       </a:r>
                     </a:p>
                   </a:txBody>
@@ -6677,7 +6963,8 @@
                         <a:defRPr sz="1100"/>
                       </a:pPr>
                       <a:r>
-                        <a:t>0.624</a:t>
+                        <a:rPr sz="1100" b="0"/>
+                        <a:t>0.693</a:t>
                       </a:r>
                     </a:p>
                   </a:txBody>
@@ -6692,7 +6979,8 @@
                         <a:defRPr sz="1100"/>
                       </a:pPr>
                       <a:r>
-                        <a:t>1.867</a:t>
+                        <a:rPr sz="1100" b="0"/>
+                        <a:t>1.999</a:t>
                       </a:r>
                     </a:p>
                   </a:txBody>
@@ -6739,7 +7027,8 @@
                         <a:defRPr sz="1100"/>
                       </a:pPr>
                       <a:r>
-                        <a:t>1.283</a:t>
+                        <a:rPr sz="1100" b="0"/>
+                        <a:t>1.653</a:t>
                       </a:r>
                     </a:p>
                   </a:txBody>
@@ -6754,7 +7043,8 @@
                         <a:defRPr sz="1100"/>
                       </a:pPr>
                       <a:r>
-                        <a:t>3.606</a:t>
+                        <a:rPr sz="1100" b="0"/>
+                        <a:t>5.221</a:t>
                       </a:r>
                     </a:p>
                   </a:txBody>
@@ -6794,7 +7084,8 @@
                         <a:defRPr sz="1100"/>
                       </a:pPr>
                       <a:r>
-                        <a:t>0.703</a:t>
+                        <a:rPr sz="1100" b="0"/>
+                        <a:t>0.579</a:t>
                       </a:r>
                     </a:p>
                   </a:txBody>
@@ -6809,7 +7100,8 @@
                         <a:defRPr sz="1100"/>
                       </a:pPr>
                       <a:r>
-                        <a:t>2.019</a:t>
+                        <a:rPr sz="1100" b="0"/>
+                        <a:t>1.785</a:t>
                       </a:r>
                     </a:p>
                   </a:txBody>
@@ -6849,7 +7141,8 @@
                         <a:defRPr sz="1100"/>
                       </a:pPr>
                       <a:r>
-                        <a:t>-0.372</a:t>
+                        <a:rPr sz="1100" b="0"/>
+                        <a:t>-0.551</a:t>
                       </a:r>
                     </a:p>
                   </a:txBody>
@@ -6864,7 +7157,8 @@
                         <a:defRPr sz="1100"/>
                       </a:pPr>
                       <a:r>
-                        <a:t>0.69</a:t>
+                        <a:rPr sz="1100" b="0"/>
+                        <a:t>0.576</a:t>
                       </a:r>
                     </a:p>
                   </a:txBody>
@@ -6904,7 +7198,8 @@
                         <a:defRPr sz="1100"/>
                       </a:pPr>
                       <a:r>
-                        <a:t>0.54</a:t>
+                        <a:rPr sz="1100" b="0"/>
+                        <a:t>0.566</a:t>
                       </a:r>
                     </a:p>
                   </a:txBody>
@@ -6919,7 +7214,8 @@
                         <a:defRPr sz="1100"/>
                       </a:pPr>
                       <a:r>
-                        <a:t>1.715</a:t>
+                        <a:rPr sz="1100" b="0"/>
+                        <a:t>1.761</a:t>
                       </a:r>
                     </a:p>
                   </a:txBody>
@@ -6964,7 +7260,7 @@
           <a:lstStyle/>
           <a:p>
             <a:r>
-              <a:t>Table 3. +AEC 성능비교 vs Baseline (DeLong paired AUC test, *q&lt;0.05)</a:t>
+              <a:t>Table 3. +AEC(FPCA+ratio) 성능비교 vs Baseline (단순 AUC 비교, 유의성 검정 미수행)</a:t>
             </a:r>
           </a:p>
         </p:txBody>
@@ -6979,7 +7275,7 @@
         </p:nvGraphicFramePr>
         <p:xfrm>
           <a:off x="508000" y="975360"/>
-          <a:ext cx="11175996" cy="5480000"/>
+          <a:ext cx="11176000" cy="5480000"/>
         </p:xfrm>
         <a:graphic>
           <a:graphicData uri="http://schemas.openxmlformats.org/drawingml/2006/table">
@@ -6988,23 +7284,20 @@
                 <a:tableStyleId>{5C22544A-7EE6-4342-B048-85BDC9FD1C3A}</a:tableStyleId>
               </a:tblPr>
               <a:tblGrid>
-                <a:gridCol w="1834865"/>
-                <a:gridCol w="2168477"/>
-                <a:gridCol w="1834865"/>
-                <a:gridCol w="2502089"/>
-                <a:gridCol w="1334447"/>
-                <a:gridCol w="1501253"/>
+                <a:gridCol w="2235200"/>
+                <a:gridCol w="2235200"/>
+                <a:gridCol w="2235200"/>
+                <a:gridCol w="2235200"/>
+                <a:gridCol w="2235200"/>
               </a:tblGrid>
-              <a:tr h="322352">
-                <a:tc>
-                  <a:txBody>
-                    <a:bodyPr/>
-                    <a:lstStyle/>
-                    <a:p>
-                      <a:pPr>
-                        <a:defRPr sz="1100" b="1"/>
-                      </a:pPr>
-                      <a:r>
+              <a:tr h="608888">
+                <a:tc>
+                  <a:txBody>
+                    <a:bodyPr/>
+                    <a:lstStyle/>
+                    <a:p>
+                      <a:r>
+                        <a:rPr sz="1100" b="1"/>
                         <a:t>Disease</a:t>
                       </a:r>
                     </a:p>
@@ -7016,25 +7309,8 @@
                     <a:bodyPr/>
                     <a:lstStyle/>
                     <a:p>
-                      <a:pPr>
-                        <a:defRPr sz="1100" b="1"/>
-                      </a:pPr>
-                      <a:r>
-                        <a:t>Model</a:t>
-                      </a:r>
-                    </a:p>
-                  </a:txBody>
-                  <a:tcPr/>
-                </a:tc>
-                <a:tc>
-                  <a:txBody>
-                    <a:bodyPr/>
-                    <a:lstStyle/>
-                    <a:p>
-                      <a:pPr>
-                        <a:defRPr sz="1100" b="1"/>
-                      </a:pPr>
-                      <a:r>
+                      <a:r>
+                        <a:rPr sz="1100" b="1"/>
                         <a:t>Cohort</a:t>
                       </a:r>
                     </a:p>
@@ -7046,87 +7322,464 @@
                     <a:bodyPr/>
                     <a:lstStyle/>
                     <a:p>
-                      <a:pPr>
-                        <a:defRPr sz="1100" b="1"/>
-                      </a:pPr>
-                      <a:r>
-                        <a:t>AUC (Baseline→+AEC, Δ)</a:t>
-                      </a:r>
-                    </a:p>
-                  </a:txBody>
-                  <a:tcPr/>
-                </a:tc>
-                <a:tc>
-                  <a:txBody>
-                    <a:bodyPr/>
-                    <a:lstStyle/>
-                    <a:p>
-                      <a:pPr>
-                        <a:defRPr sz="1100" b="1"/>
-                      </a:pPr>
-                      <a:r>
-                        <a:t>p-value</a:t>
-                      </a:r>
-                    </a:p>
-                  </a:txBody>
-                  <a:tcPr/>
-                </a:tc>
-                <a:tc>
-                  <a:txBody>
-                    <a:bodyPr/>
-                    <a:lstStyle/>
-                    <a:p>
-                      <a:pPr>
-                        <a:defRPr sz="1100" b="1"/>
-                      </a:pPr>
-                      <a:r>
-                        <a:t>q (BH-FDR)</a:t>
+                      <a:r>
+                        <a:rPr sz="1100" b="1"/>
+                        <a:t>AUC (Baseline)</a:t>
+                      </a:r>
+                    </a:p>
+                  </a:txBody>
+                  <a:tcPr/>
+                </a:tc>
+                <a:tc>
+                  <a:txBody>
+                    <a:bodyPr/>
+                    <a:lstStyle/>
+                    <a:p>
+                      <a:r>
+                        <a:rPr sz="1100" b="1"/>
+                        <a:t>AUC (+AEC)</a:t>
+                      </a:r>
+                    </a:p>
+                  </a:txBody>
+                  <a:tcPr/>
+                </a:tc>
+                <a:tc>
+                  <a:txBody>
+                    <a:bodyPr/>
+                    <a:lstStyle/>
+                    <a:p>
+                      <a:r>
+                        <a:rPr sz="1100" b="1"/>
+                        <a:t>Δ(AUC)</a:t>
                       </a:r>
                     </a:p>
                   </a:txBody>
                   <a:tcPr/>
                 </a:tc>
               </a:tr>
-              <a:tr h="322352">
-                <a:tc rowSpan="4">
-                  <a:txBody>
-                    <a:bodyPr/>
-                    <a:lstStyle/>
-                    <a:p>
-                      <a:pPr>
-                        <a:defRPr sz="1100"/>
-                      </a:pPr>
-                      <a:r>
+              <a:tr h="608888">
+                <a:tc>
+                  <a:txBody>
+                    <a:bodyPr/>
+                    <a:lstStyle/>
+                    <a:p>
+                      <a:r>
+                        <a:rPr sz="1100" b="0"/>
+                        <a:t>고혈압(HTN)</a:t>
+                      </a:r>
+                    </a:p>
+                  </a:txBody>
+                  <a:tcPr/>
+                </a:tc>
+                <a:tc>
+                  <a:txBody>
+                    <a:bodyPr/>
+                    <a:lstStyle/>
+                    <a:p>
+                      <a:r>
+                        <a:rPr sz="1100" b="0"/>
+                        <a:t>Internal (Gangnam)</a:t>
+                      </a:r>
+                    </a:p>
+                  </a:txBody>
+                  <a:tcPr/>
+                </a:tc>
+                <a:tc>
+                  <a:txBody>
+                    <a:bodyPr/>
+                    <a:lstStyle/>
+                    <a:p>
+                      <a:r>
+                        <a:rPr sz="1100" b="0"/>
+                        <a:t>0.761</a:t>
+                      </a:r>
+                    </a:p>
+                  </a:txBody>
+                  <a:tcPr/>
+                </a:tc>
+                <a:tc>
+                  <a:txBody>
+                    <a:bodyPr/>
+                    <a:lstStyle/>
+                    <a:p>
+                      <a:r>
+                        <a:rPr sz="1100" b="0"/>
+                        <a:t>0.778</a:t>
+                      </a:r>
+                    </a:p>
+                  </a:txBody>
+                  <a:tcPr/>
+                </a:tc>
+                <a:tc>
+                  <a:txBody>
+                    <a:bodyPr/>
+                    <a:lstStyle/>
+                    <a:p>
+                      <a:r>
+                        <a:rPr sz="1100" b="0"/>
+                        <a:t>+0.017</a:t>
+                      </a:r>
+                    </a:p>
+                  </a:txBody>
+                  <a:tcPr/>
+                </a:tc>
+              </a:tr>
+              <a:tr h="608888">
+                <a:tc>
+                  <a:txBody>
+                    <a:bodyPr/>
+                    <a:lstStyle/>
+                    <a:p>
+                      <a:r>
+                        <a:rPr sz="1100" b="0"/>
+                        <a:t/>
+                      </a:r>
+                    </a:p>
+                  </a:txBody>
+                  <a:tcPr/>
+                </a:tc>
+                <a:tc>
+                  <a:txBody>
+                    <a:bodyPr/>
+                    <a:lstStyle/>
+                    <a:p>
+                      <a:r>
+                        <a:rPr sz="1100" b="0"/>
+                        <a:t>External (Sinchon)</a:t>
+                      </a:r>
+                    </a:p>
+                  </a:txBody>
+                  <a:tcPr/>
+                </a:tc>
+                <a:tc>
+                  <a:txBody>
+                    <a:bodyPr/>
+                    <a:lstStyle/>
+                    <a:p>
+                      <a:r>
+                        <a:rPr sz="1100" b="0"/>
+                        <a:t>0.715</a:t>
+                      </a:r>
+                    </a:p>
+                  </a:txBody>
+                  <a:tcPr/>
+                </a:tc>
+                <a:tc>
+                  <a:txBody>
+                    <a:bodyPr/>
+                    <a:lstStyle/>
+                    <a:p>
+                      <a:r>
+                        <a:rPr sz="1100" b="0"/>
+                        <a:t>0.729</a:t>
+                      </a:r>
+                    </a:p>
+                  </a:txBody>
+                  <a:tcPr/>
+                </a:tc>
+                <a:tc>
+                  <a:txBody>
+                    <a:bodyPr/>
+                    <a:lstStyle/>
+                    <a:p>
+                      <a:r>
+                        <a:rPr sz="1100" b="0"/>
+                        <a:t>+0.014</a:t>
+                      </a:r>
+                    </a:p>
+                  </a:txBody>
+                  <a:tcPr/>
+                </a:tc>
+              </a:tr>
+              <a:tr h="608888">
+                <a:tc>
+                  <a:txBody>
+                    <a:bodyPr/>
+                    <a:lstStyle/>
+                    <a:p>
+                      <a:r>
+                        <a:rPr sz="1100" b="0"/>
+                        <a:t/>
+                      </a:r>
+                    </a:p>
+                  </a:txBody>
+                  <a:tcPr/>
+                </a:tc>
+                <a:tc>
+                  <a:txBody>
+                    <a:bodyPr/>
+                    <a:lstStyle/>
+                    <a:p>
+                      <a:r>
+                        <a:rPr sz="1100" b="0"/>
+                        <a:t>External (New10000)</a:t>
+                      </a:r>
+                    </a:p>
+                  </a:txBody>
+                  <a:tcPr/>
+                </a:tc>
+                <a:tc>
+                  <a:txBody>
+                    <a:bodyPr/>
+                    <a:lstStyle/>
+                    <a:p>
+                      <a:r>
+                        <a:rPr sz="1100" b="0"/>
+                        <a:t>0.655</a:t>
+                      </a:r>
+                    </a:p>
+                  </a:txBody>
+                  <a:tcPr/>
+                </a:tc>
+                <a:tc>
+                  <a:txBody>
+                    <a:bodyPr/>
+                    <a:lstStyle/>
+                    <a:p>
+                      <a:r>
+                        <a:rPr sz="1100" b="0"/>
+                        <a:t>0.658</a:t>
+                      </a:r>
+                    </a:p>
+                  </a:txBody>
+                  <a:tcPr/>
+                </a:tc>
+                <a:tc>
+                  <a:txBody>
+                    <a:bodyPr/>
+                    <a:lstStyle/>
+                    <a:p>
+                      <a:r>
+                        <a:rPr sz="1100" b="0"/>
+                        <a:t>+0.003</a:t>
+                      </a:r>
+                    </a:p>
+                  </a:txBody>
+                  <a:tcPr/>
+                </a:tc>
+              </a:tr>
+              <a:tr h="608888">
+                <a:tc>
+                  <a:txBody>
+                    <a:bodyPr/>
+                    <a:lstStyle/>
+                    <a:p>
+                      <a:r>
+                        <a:rPr sz="1100" b="0"/>
+                        <a:t>당뇨병(DM)</a:t>
+                      </a:r>
+                    </a:p>
+                  </a:txBody>
+                  <a:tcPr/>
+                </a:tc>
+                <a:tc>
+                  <a:txBody>
+                    <a:bodyPr/>
+                    <a:lstStyle/>
+                    <a:p>
+                      <a:r>
+                        <a:rPr sz="1100" b="0"/>
+                        <a:t>Internal (Gangnam)</a:t>
+                      </a:r>
+                    </a:p>
+                  </a:txBody>
+                  <a:tcPr/>
+                </a:tc>
+                <a:tc>
+                  <a:txBody>
+                    <a:bodyPr/>
+                    <a:lstStyle/>
+                    <a:p>
+                      <a:r>
+                        <a:rPr sz="1100" b="0"/>
+                        <a:t>0.653</a:t>
+                      </a:r>
+                    </a:p>
+                  </a:txBody>
+                  <a:tcPr/>
+                </a:tc>
+                <a:tc>
+                  <a:txBody>
+                    <a:bodyPr/>
+                    <a:lstStyle/>
+                    <a:p>
+                      <a:r>
+                        <a:rPr sz="1100" b="0"/>
+                        <a:t>0.679</a:t>
+                      </a:r>
+                    </a:p>
+                  </a:txBody>
+                  <a:tcPr/>
+                </a:tc>
+                <a:tc>
+                  <a:txBody>
+                    <a:bodyPr/>
+                    <a:lstStyle/>
+                    <a:p>
+                      <a:r>
+                        <a:rPr sz="1100" b="0"/>
+                        <a:t>+0.026</a:t>
+                      </a:r>
+                    </a:p>
+                  </a:txBody>
+                  <a:tcPr/>
+                </a:tc>
+              </a:tr>
+              <a:tr h="608888">
+                <a:tc>
+                  <a:txBody>
+                    <a:bodyPr/>
+                    <a:lstStyle/>
+                    <a:p>
+                      <a:r>
+                        <a:rPr sz="1100" b="0"/>
+                        <a:t/>
+                      </a:r>
+                    </a:p>
+                  </a:txBody>
+                  <a:tcPr/>
+                </a:tc>
+                <a:tc>
+                  <a:txBody>
+                    <a:bodyPr/>
+                    <a:lstStyle/>
+                    <a:p>
+                      <a:r>
+                        <a:rPr sz="1100" b="0"/>
+                        <a:t>External (Sinchon)</a:t>
+                      </a:r>
+                    </a:p>
+                  </a:txBody>
+                  <a:tcPr/>
+                </a:tc>
+                <a:tc>
+                  <a:txBody>
+                    <a:bodyPr/>
+                    <a:lstStyle/>
+                    <a:p>
+                      <a:r>
+                        <a:rPr sz="1100" b="0"/>
+                        <a:t>0.647</a:t>
+                      </a:r>
+                    </a:p>
+                  </a:txBody>
+                  <a:tcPr/>
+                </a:tc>
+                <a:tc>
+                  <a:txBody>
+                    <a:bodyPr/>
+                    <a:lstStyle/>
+                    <a:p>
+                      <a:r>
+                        <a:rPr sz="1100" b="0"/>
+                        <a:t>0.671</a:t>
+                      </a:r>
+                    </a:p>
+                  </a:txBody>
+                  <a:tcPr/>
+                </a:tc>
+                <a:tc>
+                  <a:txBody>
+                    <a:bodyPr/>
+                    <a:lstStyle/>
+                    <a:p>
+                      <a:r>
+                        <a:rPr sz="1100" b="0"/>
+                        <a:t>+0.024</a:t>
+                      </a:r>
+                    </a:p>
+                  </a:txBody>
+                  <a:tcPr/>
+                </a:tc>
+              </a:tr>
+              <a:tr h="608888">
+                <a:tc>
+                  <a:txBody>
+                    <a:bodyPr/>
+                    <a:lstStyle/>
+                    <a:p>
+                      <a:r>
+                        <a:rPr sz="1100" b="0"/>
+                        <a:t/>
+                      </a:r>
+                    </a:p>
+                  </a:txBody>
+                  <a:tcPr/>
+                </a:tc>
+                <a:tc>
+                  <a:txBody>
+                    <a:bodyPr/>
+                    <a:lstStyle/>
+                    <a:p>
+                      <a:r>
+                        <a:rPr sz="1100" b="0"/>
+                        <a:t>External (New10000)</a:t>
+                      </a:r>
+                    </a:p>
+                  </a:txBody>
+                  <a:tcPr/>
+                </a:tc>
+                <a:tc>
+                  <a:txBody>
+                    <a:bodyPr/>
+                    <a:lstStyle/>
+                    <a:p>
+                      <a:r>
+                        <a:rPr sz="1100" b="0"/>
+                        <a:t>0.635</a:t>
+                      </a:r>
+                    </a:p>
+                  </a:txBody>
+                  <a:tcPr/>
+                </a:tc>
+                <a:tc>
+                  <a:txBody>
+                    <a:bodyPr/>
+                    <a:lstStyle/>
+                    <a:p>
+                      <a:r>
+                        <a:rPr sz="1100" b="0"/>
+                        <a:t>0.636</a:t>
+                      </a:r>
+                    </a:p>
+                  </a:txBody>
+                  <a:tcPr/>
+                </a:tc>
+                <a:tc>
+                  <a:txBody>
+                    <a:bodyPr/>
+                    <a:lstStyle/>
+                    <a:p>
+                      <a:r>
+                        <a:rPr sz="1100" b="0"/>
+                        <a:t>+0.001</a:t>
+                      </a:r>
+                    </a:p>
+                  </a:txBody>
+                  <a:tcPr/>
+                </a:tc>
+              </a:tr>
+              <a:tr h="608888">
+                <a:tc>
+                  <a:txBody>
+                    <a:bodyPr/>
+                    <a:lstStyle/>
+                    <a:p>
+                      <a:r>
+                        <a:rPr sz="1100" b="0"/>
                         <a:t>만성신장질환(CKD)</a:t>
                       </a:r>
                     </a:p>
                   </a:txBody>
-                  <a:tcPr anchor="ctr"/>
-                </a:tc>
-                <a:tc rowSpan="2">
-                  <a:txBody>
-                    <a:bodyPr/>
-                    <a:lstStyle/>
-                    <a:p>
-                      <a:pPr>
-                        <a:defRPr sz="1100"/>
-                      </a:pPr>
-                      <a:r>
-                        <a:t>+AEC FPCA(n=3)</a:t>
-                      </a:r>
-                    </a:p>
-                  </a:txBody>
-                  <a:tcPr anchor="ctr"/>
-                </a:tc>
-                <a:tc>
-                  <a:txBody>
-                    <a:bodyPr/>
-                    <a:lstStyle/>
-                    <a:p>
-                      <a:pPr>
-                        <a:defRPr sz="1100"/>
-                      </a:pPr>
-                      <a:r>
+                  <a:tcPr/>
+                </a:tc>
+                <a:tc>
+                  <a:txBody>
+                    <a:bodyPr/>
+                    <a:lstStyle/>
+                    <a:p>
+                      <a:r>
+                        <a:rPr sz="1100" b="0"/>
                         <a:t>Internal (Gangnam)</a:t>
                       </a:r>
                     </a:p>
@@ -7138,73 +7791,62 @@
                     <a:bodyPr/>
                     <a:lstStyle/>
                     <a:p>
-                      <a:pPr>
-                        <a:defRPr sz="1100"/>
-                      </a:pPr>
-                      <a:r>
-                        <a:t>0.769 → 0.771 (+0.002)</a:t>
-                      </a:r>
-                    </a:p>
-                  </a:txBody>
-                  <a:tcPr/>
-                </a:tc>
-                <a:tc>
-                  <a:txBody>
-                    <a:bodyPr/>
-                    <a:lstStyle/>
-                    <a:p>
-                      <a:pPr>
-                        <a:defRPr sz="1100"/>
-                      </a:pPr>
-                      <a:r>
-                        <a:t>0.788</a:t>
-                      </a:r>
-                    </a:p>
-                  </a:txBody>
-                  <a:tcPr/>
-                </a:tc>
-                <a:tc>
-                  <a:txBody>
-                    <a:bodyPr/>
-                    <a:lstStyle/>
-                    <a:p>
-                      <a:pPr>
-                        <a:defRPr sz="1100"/>
-                      </a:pPr>
-                      <a:r>
-                        <a:t>0.857</a:t>
+                      <a:r>
+                        <a:rPr sz="1100" b="0"/>
+                        <a:t>0.765</a:t>
+                      </a:r>
+                    </a:p>
+                  </a:txBody>
+                  <a:tcPr/>
+                </a:tc>
+                <a:tc>
+                  <a:txBody>
+                    <a:bodyPr/>
+                    <a:lstStyle/>
+                    <a:p>
+                      <a:r>
+                        <a:rPr sz="1100" b="0"/>
+                        <a:t>0.755</a:t>
+                      </a:r>
+                    </a:p>
+                  </a:txBody>
+                  <a:tcPr/>
+                </a:tc>
+                <a:tc>
+                  <a:txBody>
+                    <a:bodyPr/>
+                    <a:lstStyle/>
+                    <a:p>
+                      <a:r>
+                        <a:rPr sz="1100" b="0"/>
+                        <a:t>-0.010</a:t>
                       </a:r>
                     </a:p>
                   </a:txBody>
                   <a:tcPr/>
                 </a:tc>
               </a:tr>
-              <a:tr h="322352">
-                <a:tc vMerge="1">
-                  <a:txBody>
-                    <a:bodyPr/>
-                    <a:lstStyle/>
-                    <a:p/>
-                  </a:txBody>
-                  <a:tcPr/>
-                </a:tc>
-                <a:tc vMerge="1">
-                  <a:txBody>
-                    <a:bodyPr/>
-                    <a:lstStyle/>
-                    <a:p/>
-                  </a:txBody>
-                  <a:tcPr/>
-                </a:tc>
-                <a:tc>
-                  <a:txBody>
-                    <a:bodyPr/>
-                    <a:lstStyle/>
-                    <a:p>
-                      <a:pPr>
-                        <a:defRPr sz="1100"/>
-                      </a:pPr>
-                      <a:r>
+              <a:tr h="608896">
+                <a:tc>
+                  <a:txBody>
+                    <a:bodyPr/>
+                    <a:lstStyle/>
+                    <a:p>
+                      <a:r>
+                        <a:rPr sz="1100" b="0"/>
+                        <a:t/>
+                      </a:r>
+                    </a:p>
+                  </a:txBody>
+                  <a:tcPr/>
+                </a:tc>
+                <a:tc>
+                  <a:txBody>
+                    <a:bodyPr/>
+                    <a:lstStyle/>
+                    <a:p>
+                      <a:r>
+                        <a:rPr sz="1100" b="0"/>
                         <a:t>External (Sinchon)</a:t>
                       </a:r>
                     </a:p>
@@ -7216,1182 +7858,35 @@
                     <a:bodyPr/>
                     <a:lstStyle/>
                     <a:p>
-                      <a:pPr>
-                        <a:defRPr sz="1100"/>
-                      </a:pPr>
-                      <a:r>
-                        <a:t>0.615 → 0.629 (+0.014)</a:t>
-                      </a:r>
-                    </a:p>
-                  </a:txBody>
-                  <a:tcPr/>
-                </a:tc>
-                <a:tc>
-                  <a:txBody>
-                    <a:bodyPr/>
-                    <a:lstStyle/>
-                    <a:p>
-                      <a:pPr>
-                        <a:defRPr sz="1100"/>
-                      </a:pPr>
-                      <a:r>
-                        <a:t>0.014</a:t>
-                      </a:r>
-                    </a:p>
-                  </a:txBody>
-                  <a:tcPr/>
-                </a:tc>
-                <a:tc>
-                  <a:txBody>
-                    <a:bodyPr/>
-                    <a:lstStyle/>
-                    <a:p>
-                      <a:pPr>
-                        <a:defRPr sz="1100"/>
-                      </a:pPr>
-                      <a:r>
-                        <a:t>0.080</a:t>
-                      </a:r>
-                    </a:p>
-                  </a:txBody>
-                  <a:tcPr/>
-                </a:tc>
-              </a:tr>
-              <a:tr h="322352">
-                <a:tc vMerge="1">
-                  <a:txBody>
-                    <a:bodyPr/>
-                    <a:lstStyle/>
-                    <a:p/>
-                  </a:txBody>
-                  <a:tcPr/>
-                </a:tc>
-                <a:tc rowSpan="2">
-                  <a:txBody>
-                    <a:bodyPr/>
-                    <a:lstStyle/>
-                    <a:p>
-                      <a:pPr>
-                        <a:defRPr sz="1100"/>
-                      </a:pPr>
-                      <a:r>
-                        <a:t>+AEC Upper/Lower ratio</a:t>
-                      </a:r>
-                    </a:p>
-                  </a:txBody>
-                  <a:tcPr anchor="ctr"/>
-                </a:tc>
-                <a:tc>
-                  <a:txBody>
-                    <a:bodyPr/>
-                    <a:lstStyle/>
-                    <a:p>
-                      <a:pPr>
-                        <a:defRPr sz="1100"/>
-                      </a:pPr>
-                      <a:r>
-                        <a:t>Internal (Gangnam)</a:t>
-                      </a:r>
-                    </a:p>
-                  </a:txBody>
-                  <a:tcPr/>
-                </a:tc>
-                <a:tc>
-                  <a:txBody>
-                    <a:bodyPr/>
-                    <a:lstStyle/>
-                    <a:p>
-                      <a:pPr>
-                        <a:defRPr sz="1100"/>
-                      </a:pPr>
-                      <a:r>
-                        <a:t>0.769 → 0.774 (+0.004)</a:t>
-                      </a:r>
-                    </a:p>
-                  </a:txBody>
-                  <a:tcPr/>
-                </a:tc>
-                <a:tc>
-                  <a:txBody>
-                    <a:bodyPr/>
-                    <a:lstStyle/>
-                    <a:p>
-                      <a:pPr>
-                        <a:defRPr sz="1100"/>
-                      </a:pPr>
-                      <a:r>
-                        <a:t>0.419</a:t>
-                      </a:r>
-                    </a:p>
-                  </a:txBody>
-                  <a:tcPr/>
-                </a:tc>
-                <a:tc>
-                  <a:txBody>
-                    <a:bodyPr/>
-                    <a:lstStyle/>
-                    <a:p>
-                      <a:pPr>
-                        <a:defRPr sz="1100"/>
-                      </a:pPr>
-                      <a:r>
-                        <a:t>0.575</a:t>
-                      </a:r>
-                    </a:p>
-                  </a:txBody>
-                  <a:tcPr/>
-                </a:tc>
-              </a:tr>
-              <a:tr h="322352">
-                <a:tc vMerge="1">
-                  <a:txBody>
-                    <a:bodyPr/>
-                    <a:lstStyle/>
-                    <a:p/>
-                  </a:txBody>
-                  <a:tcPr/>
-                </a:tc>
-                <a:tc vMerge="1">
-                  <a:txBody>
-                    <a:bodyPr/>
-                    <a:lstStyle/>
-                    <a:p/>
-                  </a:txBody>
-                  <a:tcPr/>
-                </a:tc>
-                <a:tc>
-                  <a:txBody>
-                    <a:bodyPr/>
-                    <a:lstStyle/>
-                    <a:p>
-                      <a:pPr>
-                        <a:defRPr sz="1100"/>
-                      </a:pPr>
-                      <a:r>
-                        <a:t>External (Sinchon)</a:t>
-                      </a:r>
-                    </a:p>
-                  </a:txBody>
-                  <a:tcPr/>
-                </a:tc>
-                <a:tc>
-                  <a:txBody>
-                    <a:bodyPr/>
-                    <a:lstStyle/>
-                    <a:p>
-                      <a:pPr>
-                        <a:defRPr sz="1100"/>
-                      </a:pPr>
-                      <a:r>
-                        <a:t>0.615 → 0.633 (+0.018)</a:t>
-                      </a:r>
-                    </a:p>
-                  </a:txBody>
-                  <a:tcPr/>
-                </a:tc>
-                <a:tc>
-                  <a:txBody>
-                    <a:bodyPr/>
-                    <a:lstStyle/>
-                    <a:p>
-                      <a:pPr>
-                        <a:defRPr sz="1100"/>
-                      </a:pPr>
-                      <a:r>
-                        <a:t>0.004</a:t>
-                      </a:r>
-                    </a:p>
-                  </a:txBody>
-                  <a:tcPr/>
-                </a:tc>
-                <a:tc>
-                  <a:txBody>
-                    <a:bodyPr/>
-                    <a:lstStyle/>
-                    <a:p>
-                      <a:pPr>
-                        <a:defRPr sz="1100"/>
-                      </a:pPr>
-                      <a:r>
-                        <a:t>0.065</a:t>
-                      </a:r>
-                    </a:p>
-                  </a:txBody>
-                  <a:tcPr/>
-                </a:tc>
-              </a:tr>
-              <a:tr h="322352">
-                <a:tc rowSpan="6">
-                  <a:txBody>
-                    <a:bodyPr/>
-                    <a:lstStyle/>
-                    <a:p>
-                      <a:pPr>
-                        <a:defRPr sz="1100"/>
-                      </a:pPr>
-                      <a:r>
-                        <a:t>당뇨병(DM)</a:t>
-                      </a:r>
-                    </a:p>
-                  </a:txBody>
-                  <a:tcPr anchor="ctr"/>
-                </a:tc>
-                <a:tc rowSpan="3">
-                  <a:txBody>
-                    <a:bodyPr/>
-                    <a:lstStyle/>
-                    <a:p>
-                      <a:pPr>
-                        <a:defRPr sz="1100"/>
-                      </a:pPr>
-                      <a:r>
-                        <a:t>+AEC FPCA(n=3)</a:t>
-                      </a:r>
-                    </a:p>
-                  </a:txBody>
-                  <a:tcPr anchor="ctr"/>
-                </a:tc>
-                <a:tc>
-                  <a:txBody>
-                    <a:bodyPr/>
-                    <a:lstStyle/>
-                    <a:p>
-                      <a:pPr>
-                        <a:defRPr sz="1100"/>
-                      </a:pPr>
-                      <a:r>
-                        <a:t>Internal (Gangnam)</a:t>
-                      </a:r>
-                    </a:p>
-                  </a:txBody>
-                  <a:tcPr/>
-                </a:tc>
-                <a:tc>
-                  <a:txBody>
-                    <a:bodyPr/>
-                    <a:lstStyle/>
-                    <a:p>
-                      <a:pPr>
-                        <a:defRPr sz="1100"/>
-                      </a:pPr>
-                      <a:r>
-                        <a:t>0.72 → 0.735 (+0.016)</a:t>
-                      </a:r>
-                    </a:p>
-                  </a:txBody>
-                  <a:tcPr/>
-                </a:tc>
-                <a:tc>
-                  <a:txBody>
-                    <a:bodyPr/>
-                    <a:lstStyle/>
-                    <a:p>
-                      <a:pPr>
-                        <a:defRPr sz="1100"/>
-                      </a:pPr>
-                      <a:r>
-                        <a:t>0.067</a:t>
-                      </a:r>
-                    </a:p>
-                  </a:txBody>
-                  <a:tcPr/>
-                </a:tc>
-                <a:tc>
-                  <a:txBody>
-                    <a:bodyPr/>
-                    <a:lstStyle/>
-                    <a:p>
-                      <a:pPr>
-                        <a:defRPr sz="1100"/>
-                      </a:pPr>
-                      <a:r>
-                        <a:t>0.210</a:t>
-                      </a:r>
-                    </a:p>
-                  </a:txBody>
-                  <a:tcPr/>
-                </a:tc>
-              </a:tr>
-              <a:tr h="322352">
-                <a:tc vMerge="1">
-                  <a:txBody>
-                    <a:bodyPr/>
-                    <a:lstStyle/>
-                    <a:p/>
-                  </a:txBody>
-                  <a:tcPr/>
-                </a:tc>
-                <a:tc vMerge="1">
-                  <a:txBody>
-                    <a:bodyPr/>
-                    <a:lstStyle/>
-                    <a:p/>
-                  </a:txBody>
-                  <a:tcPr/>
-                </a:tc>
-                <a:tc>
-                  <a:txBody>
-                    <a:bodyPr/>
-                    <a:lstStyle/>
-                    <a:p>
-                      <a:pPr>
-                        <a:defRPr sz="1100"/>
-                      </a:pPr>
-                      <a:r>
-                        <a:t>External (Sinchon)</a:t>
-                      </a:r>
-                    </a:p>
-                  </a:txBody>
-                  <a:tcPr/>
-                </a:tc>
-                <a:tc>
-                  <a:txBody>
-                    <a:bodyPr/>
-                    <a:lstStyle/>
-                    <a:p>
-                      <a:pPr>
-                        <a:defRPr sz="1100"/>
-                      </a:pPr>
-                      <a:r>
-                        <a:t>0.666 → 0.68 (+0.014)</a:t>
-                      </a:r>
-                    </a:p>
-                  </a:txBody>
-                  <a:tcPr/>
-                </a:tc>
-                <a:tc>
-                  <a:txBody>
-                    <a:bodyPr/>
-                    <a:lstStyle/>
-                    <a:p>
-                      <a:pPr>
-                        <a:defRPr sz="1100"/>
-                      </a:pPr>
-                      <a:r>
-                        <a:t>0.125</a:t>
-                      </a:r>
-                    </a:p>
-                  </a:txBody>
-                  <a:tcPr/>
-                </a:tc>
-                <a:tc>
-                  <a:txBody>
-                    <a:bodyPr/>
-                    <a:lstStyle/>
-                    <a:p>
-                      <a:pPr>
-                        <a:defRPr sz="1100"/>
-                      </a:pPr>
-                      <a:r>
-                        <a:t>0.292</a:t>
-                      </a:r>
-                    </a:p>
-                  </a:txBody>
-                  <a:tcPr/>
-                </a:tc>
-              </a:tr>
-              <a:tr h="322352">
-                <a:tc vMerge="1">
-                  <a:txBody>
-                    <a:bodyPr/>
-                    <a:lstStyle/>
-                    <a:p/>
-                  </a:txBody>
-                  <a:tcPr/>
-                </a:tc>
-                <a:tc vMerge="1">
-                  <a:txBody>
-                    <a:bodyPr/>
-                    <a:lstStyle/>
-                    <a:p/>
-                  </a:txBody>
-                  <a:tcPr/>
-                </a:tc>
-                <a:tc>
-                  <a:txBody>
-                    <a:bodyPr/>
-                    <a:lstStyle/>
-                    <a:p>
-                      <a:pPr>
-                        <a:defRPr sz="1100"/>
-                      </a:pPr>
-                      <a:r>
-                        <a:t>External (New10000)</a:t>
-                      </a:r>
-                    </a:p>
-                  </a:txBody>
-                  <a:tcPr/>
-                </a:tc>
-                <a:tc>
-                  <a:txBody>
-                    <a:bodyPr/>
-                    <a:lstStyle/>
-                    <a:p>
-                      <a:pPr>
-                        <a:defRPr sz="1100"/>
-                      </a:pPr>
-                      <a:r>
-                        <a:t>0.646 → 0.643 (-0.003)</a:t>
-                      </a:r>
-                    </a:p>
-                  </a:txBody>
-                  <a:tcPr/>
-                </a:tc>
-                <a:tc>
-                  <a:txBody>
-                    <a:bodyPr/>
-                    <a:lstStyle/>
-                    <a:p>
-                      <a:pPr>
-                        <a:defRPr sz="1100"/>
-                      </a:pPr>
-                      <a:r>
-                        <a:t>0.643</a:t>
-                      </a:r>
-                    </a:p>
-                  </a:txBody>
-                  <a:tcPr/>
-                </a:tc>
-                <a:tc>
-                  <a:txBody>
-                    <a:bodyPr/>
-                    <a:lstStyle/>
-                    <a:p>
-                      <a:pPr>
-                        <a:defRPr sz="1100"/>
-                      </a:pPr>
-                      <a:r>
-                        <a:t>0.801</a:t>
-                      </a:r>
-                    </a:p>
-                  </a:txBody>
-                  <a:tcPr/>
-                </a:tc>
-              </a:tr>
-              <a:tr h="322352">
-                <a:tc vMerge="1">
-                  <a:txBody>
-                    <a:bodyPr/>
-                    <a:lstStyle/>
-                    <a:p/>
-                  </a:txBody>
-                  <a:tcPr/>
-                </a:tc>
-                <a:tc rowSpan="3">
-                  <a:txBody>
-                    <a:bodyPr/>
-                    <a:lstStyle/>
-                    <a:p>
-                      <a:pPr>
-                        <a:defRPr sz="1100"/>
-                      </a:pPr>
-                      <a:r>
-                        <a:t>+AEC Upper/Lower ratio</a:t>
-                      </a:r>
-                    </a:p>
-                  </a:txBody>
-                  <a:tcPr anchor="ctr"/>
-                </a:tc>
-                <a:tc>
-                  <a:txBody>
-                    <a:bodyPr/>
-                    <a:lstStyle/>
-                    <a:p>
-                      <a:pPr>
-                        <a:defRPr sz="1100"/>
-                      </a:pPr>
-                      <a:r>
-                        <a:t>Internal (Gangnam)</a:t>
-                      </a:r>
-                    </a:p>
-                  </a:txBody>
-                  <a:tcPr/>
-                </a:tc>
-                <a:tc>
-                  <a:txBody>
-                    <a:bodyPr/>
-                    <a:lstStyle/>
-                    <a:p>
-                      <a:pPr>
-                        <a:defRPr sz="1100"/>
-                      </a:pPr>
-                      <a:r>
-                        <a:t>0.72 → 0.734 (+0.014)</a:t>
-                      </a:r>
-                    </a:p>
-                  </a:txBody>
-                  <a:tcPr/>
-                </a:tc>
-                <a:tc>
-                  <a:txBody>
-                    <a:bodyPr/>
-                    <a:lstStyle/>
-                    <a:p>
-                      <a:pPr>
-                        <a:defRPr sz="1100"/>
-                      </a:pPr>
-                      <a:r>
-                        <a:t>0.048</a:t>
-                      </a:r>
-                    </a:p>
-                  </a:txBody>
-                  <a:tcPr/>
-                </a:tc>
-                <a:tc>
-                  <a:txBody>
-                    <a:bodyPr/>
-                    <a:lstStyle/>
-                    <a:p>
-                      <a:pPr>
-                        <a:defRPr sz="1100"/>
-                      </a:pPr>
-                      <a:r>
-                        <a:t>0.175</a:t>
-                      </a:r>
-                    </a:p>
-                  </a:txBody>
-                  <a:tcPr/>
-                </a:tc>
-              </a:tr>
-              <a:tr h="322352">
-                <a:tc vMerge="1">
-                  <a:txBody>
-                    <a:bodyPr/>
-                    <a:lstStyle/>
-                    <a:p/>
-                  </a:txBody>
-                  <a:tcPr/>
-                </a:tc>
-                <a:tc vMerge="1">
-                  <a:txBody>
-                    <a:bodyPr/>
-                    <a:lstStyle/>
-                    <a:p/>
-                  </a:txBody>
-                  <a:tcPr/>
-                </a:tc>
-                <a:tc>
-                  <a:txBody>
-                    <a:bodyPr/>
-                    <a:lstStyle/>
-                    <a:p>
-                      <a:pPr>
-                        <a:defRPr sz="1100"/>
-                      </a:pPr>
-                      <a:r>
-                        <a:t>External (Sinchon)</a:t>
-                      </a:r>
-                    </a:p>
-                  </a:txBody>
-                  <a:tcPr/>
-                </a:tc>
-                <a:tc>
-                  <a:txBody>
-                    <a:bodyPr/>
-                    <a:lstStyle/>
-                    <a:p>
-                      <a:pPr>
-                        <a:defRPr sz="1100"/>
-                      </a:pPr>
-                      <a:r>
-                        <a:t>0.666 → 0.675 (+0.010)</a:t>
-                      </a:r>
-                    </a:p>
-                  </a:txBody>
-                  <a:tcPr/>
-                </a:tc>
-                <a:tc>
-                  <a:txBody>
-                    <a:bodyPr/>
-                    <a:lstStyle/>
-                    <a:p>
-                      <a:pPr>
-                        <a:defRPr sz="1100"/>
-                      </a:pPr>
-                      <a:r>
-                        <a:t>0.336</a:t>
-                      </a:r>
-                    </a:p>
-                  </a:txBody>
-                  <a:tcPr/>
-                </a:tc>
-                <a:tc>
-                  <a:txBody>
-                    <a:bodyPr/>
-                    <a:lstStyle/>
-                    <a:p>
-                      <a:pPr>
-                        <a:defRPr sz="1100"/>
-                      </a:pPr>
-                      <a:r>
-                        <a:t>0.523</a:t>
-                      </a:r>
-                    </a:p>
-                  </a:txBody>
-                  <a:tcPr/>
-                </a:tc>
-              </a:tr>
-              <a:tr h="322352">
-                <a:tc vMerge="1">
-                  <a:txBody>
-                    <a:bodyPr/>
-                    <a:lstStyle/>
-                    <a:p/>
-                  </a:txBody>
-                  <a:tcPr/>
-                </a:tc>
-                <a:tc vMerge="1">
-                  <a:txBody>
-                    <a:bodyPr/>
-                    <a:lstStyle/>
-                    <a:p/>
-                  </a:txBody>
-                  <a:tcPr/>
-                </a:tc>
-                <a:tc>
-                  <a:txBody>
-                    <a:bodyPr/>
-                    <a:lstStyle/>
-                    <a:p>
-                      <a:pPr>
-                        <a:defRPr sz="1100"/>
-                      </a:pPr>
-                      <a:r>
-                        <a:t>External (New10000)</a:t>
-                      </a:r>
-                    </a:p>
-                  </a:txBody>
-                  <a:tcPr/>
-                </a:tc>
-                <a:tc>
-                  <a:txBody>
-                    <a:bodyPr/>
-                    <a:lstStyle/>
-                    <a:p>
-                      <a:pPr>
-                        <a:defRPr sz="1100"/>
-                      </a:pPr>
-                      <a:r>
-                        <a:t>0.646 → 0.642 (-0.005)</a:t>
-                      </a:r>
-                    </a:p>
-                  </a:txBody>
-                  <a:tcPr/>
-                </a:tc>
-                <a:tc>
-                  <a:txBody>
-                    <a:bodyPr/>
-                    <a:lstStyle/>
-                    <a:p>
-                      <a:pPr>
-                        <a:defRPr sz="1100"/>
-                      </a:pPr>
-                      <a:r>
-                        <a:t>0.466</a:t>
-                      </a:r>
-                    </a:p>
-                  </a:txBody>
-                  <a:tcPr/>
-                </a:tc>
-                <a:tc>
-                  <a:txBody>
-                    <a:bodyPr/>
-                    <a:lstStyle/>
-                    <a:p>
-                      <a:pPr>
-                        <a:defRPr sz="1100"/>
-                      </a:pPr>
-                      <a:r>
-                        <a:t>0.621</a:t>
-                      </a:r>
-                    </a:p>
-                  </a:txBody>
-                  <a:tcPr/>
-                </a:tc>
-              </a:tr>
-              <a:tr h="322352">
-                <a:tc rowSpan="6">
-                  <a:txBody>
-                    <a:bodyPr/>
-                    <a:lstStyle/>
-                    <a:p>
-                      <a:pPr>
-                        <a:defRPr sz="1100"/>
-                      </a:pPr>
-                      <a:r>
-                        <a:t>고혈압(HTN)</a:t>
-                      </a:r>
-                    </a:p>
-                  </a:txBody>
-                  <a:tcPr anchor="ctr"/>
-                </a:tc>
-                <a:tc rowSpan="3">
-                  <a:txBody>
-                    <a:bodyPr/>
-                    <a:lstStyle/>
-                    <a:p>
-                      <a:pPr>
-                        <a:defRPr sz="1100"/>
-                      </a:pPr>
-                      <a:r>
-                        <a:t>+AEC FPCA(n=3)</a:t>
-                      </a:r>
-                    </a:p>
-                  </a:txBody>
-                  <a:tcPr anchor="ctr"/>
-                </a:tc>
-                <a:tc>
-                  <a:txBody>
-                    <a:bodyPr/>
-                    <a:lstStyle/>
-                    <a:p>
-                      <a:pPr>
-                        <a:defRPr sz="1100"/>
-                      </a:pPr>
-                      <a:r>
-                        <a:t>Internal (Gangnam)</a:t>
-                      </a:r>
-                    </a:p>
-                  </a:txBody>
-                  <a:tcPr/>
-                </a:tc>
-                <a:tc>
-                  <a:txBody>
-                    <a:bodyPr/>
-                    <a:lstStyle/>
-                    <a:p>
-                      <a:pPr>
-                        <a:defRPr sz="1100"/>
-                      </a:pPr>
-                      <a:r>
-                        <a:t>0.795 → 0.805 (+0.011)</a:t>
-                      </a:r>
-                    </a:p>
-                  </a:txBody>
-                  <a:tcPr/>
-                </a:tc>
-                <a:tc>
-                  <a:txBody>
-                    <a:bodyPr/>
-                    <a:lstStyle/>
-                    <a:p>
-                      <a:pPr>
-                        <a:defRPr sz="1100"/>
-                      </a:pPr>
-                      <a:r>
-                        <a:t>0.048</a:t>
-                      </a:r>
-                    </a:p>
-                  </a:txBody>
-                  <a:tcPr/>
-                </a:tc>
-                <a:tc>
-                  <a:txBody>
-                    <a:bodyPr/>
-                    <a:lstStyle/>
-                    <a:p>
-                      <a:pPr>
-                        <a:defRPr sz="1100"/>
-                      </a:pPr>
-                      <a:r>
-                        <a:t>0.175</a:t>
-                      </a:r>
-                    </a:p>
-                  </a:txBody>
-                  <a:tcPr/>
-                </a:tc>
-              </a:tr>
-              <a:tr h="322352">
-                <a:tc vMerge="1">
-                  <a:txBody>
-                    <a:bodyPr/>
-                    <a:lstStyle/>
-                    <a:p/>
-                  </a:txBody>
-                  <a:tcPr/>
-                </a:tc>
-                <a:tc vMerge="1">
-                  <a:txBody>
-                    <a:bodyPr/>
-                    <a:lstStyle/>
-                    <a:p/>
-                  </a:txBody>
-                  <a:tcPr/>
-                </a:tc>
-                <a:tc>
-                  <a:txBody>
-                    <a:bodyPr/>
-                    <a:lstStyle/>
-                    <a:p>
-                      <a:pPr>
-                        <a:defRPr sz="1100"/>
-                      </a:pPr>
-                      <a:r>
-                        <a:t>External (Sinchon)</a:t>
-                      </a:r>
-                    </a:p>
-                  </a:txBody>
-                  <a:tcPr/>
-                </a:tc>
-                <a:tc>
-                  <a:txBody>
-                    <a:bodyPr/>
-                    <a:lstStyle/>
-                    <a:p>
-                      <a:pPr>
-                        <a:defRPr sz="1100"/>
-                      </a:pPr>
-                      <a:r>
-                        <a:t>0.72 → 0.73 (+0.010)</a:t>
-                      </a:r>
-                    </a:p>
-                  </a:txBody>
-                  <a:tcPr/>
-                </a:tc>
-                <a:tc>
-                  <a:txBody>
-                    <a:bodyPr/>
-                    <a:lstStyle/>
-                    <a:p>
-                      <a:pPr>
-                        <a:defRPr sz="1100"/>
-                      </a:pPr>
-                      <a:r>
-                        <a:t>0.088</a:t>
-                      </a:r>
-                    </a:p>
-                  </a:txBody>
-                  <a:tcPr/>
-                </a:tc>
-                <a:tc>
-                  <a:txBody>
-                    <a:bodyPr/>
-                    <a:lstStyle/>
-                    <a:p>
-                      <a:pPr>
-                        <a:defRPr sz="1100"/>
-                      </a:pPr>
-                      <a:r>
-                        <a:t>0.235</a:t>
-                      </a:r>
-                    </a:p>
-                  </a:txBody>
-                  <a:tcPr/>
-                </a:tc>
-              </a:tr>
-              <a:tr h="322352">
-                <a:tc vMerge="1">
-                  <a:txBody>
-                    <a:bodyPr/>
-                    <a:lstStyle/>
-                    <a:p/>
-                  </a:txBody>
-                  <a:tcPr/>
-                </a:tc>
-                <a:tc vMerge="1">
-                  <a:txBody>
-                    <a:bodyPr/>
-                    <a:lstStyle/>
-                    <a:p/>
-                  </a:txBody>
-                  <a:tcPr/>
-                </a:tc>
-                <a:tc>
-                  <a:txBody>
-                    <a:bodyPr/>
-                    <a:lstStyle/>
-                    <a:p>
-                      <a:pPr>
-                        <a:defRPr sz="1100"/>
-                      </a:pPr>
-                      <a:r>
-                        <a:t>External (New10000)</a:t>
-                      </a:r>
-                    </a:p>
-                  </a:txBody>
-                  <a:tcPr/>
-                </a:tc>
-                <a:tc>
-                  <a:txBody>
-                    <a:bodyPr/>
-                    <a:lstStyle/>
-                    <a:p>
-                      <a:pPr>
-                        <a:defRPr sz="1100"/>
-                      </a:pPr>
-                      <a:r>
-                        <a:t>0.666 → 0.657 (-0.009)</a:t>
-                      </a:r>
-                    </a:p>
-                  </a:txBody>
-                  <a:tcPr/>
-                </a:tc>
-                <a:tc>
-                  <a:txBody>
-                    <a:bodyPr/>
-                    <a:lstStyle/>
-                    <a:p>
-                      <a:pPr>
-                        <a:defRPr sz="1100"/>
-                      </a:pPr>
-                      <a:r>
-                        <a:t>0.016</a:t>
-                      </a:r>
-                    </a:p>
-                  </a:txBody>
-                  <a:tcPr/>
-                </a:tc>
-                <a:tc>
-                  <a:txBody>
-                    <a:bodyPr/>
-                    <a:lstStyle/>
-                    <a:p>
-                      <a:pPr>
-                        <a:defRPr sz="1100"/>
-                      </a:pPr>
-                      <a:r>
-                        <a:t>0.080</a:t>
-                      </a:r>
-                    </a:p>
-                  </a:txBody>
-                  <a:tcPr/>
-                </a:tc>
-              </a:tr>
-              <a:tr h="322352">
-                <a:tc vMerge="1">
-                  <a:txBody>
-                    <a:bodyPr/>
-                    <a:lstStyle/>
-                    <a:p/>
-                  </a:txBody>
-                  <a:tcPr/>
-                </a:tc>
-                <a:tc rowSpan="3">
-                  <a:txBody>
-                    <a:bodyPr/>
-                    <a:lstStyle/>
-                    <a:p>
-                      <a:pPr>
-                        <a:defRPr sz="1100"/>
-                      </a:pPr>
-                      <a:r>
-                        <a:t>+AEC Upper/Lower ratio</a:t>
-                      </a:r>
-                    </a:p>
-                  </a:txBody>
-                  <a:tcPr anchor="ctr"/>
-                </a:tc>
-                <a:tc>
-                  <a:txBody>
-                    <a:bodyPr/>
-                    <a:lstStyle/>
-                    <a:p>
-                      <a:pPr>
-                        <a:defRPr sz="1100"/>
-                      </a:pPr>
-                      <a:r>
-                        <a:t>Internal (Gangnam)</a:t>
-                      </a:r>
-                    </a:p>
-                  </a:txBody>
-                  <a:tcPr/>
-                </a:tc>
-                <a:tc>
-                  <a:txBody>
-                    <a:bodyPr/>
-                    <a:lstStyle/>
-                    <a:p>
-                      <a:pPr>
-                        <a:defRPr sz="1100"/>
-                      </a:pPr>
-                      <a:r>
-                        <a:t>0.795 → 0.801 (+0.006)</a:t>
-                      </a:r>
-                    </a:p>
-                  </a:txBody>
-                  <a:tcPr/>
-                </a:tc>
-                <a:tc>
-                  <a:txBody>
-                    <a:bodyPr/>
-                    <a:lstStyle/>
-                    <a:p>
-                      <a:pPr>
-                        <a:defRPr sz="1100"/>
-                      </a:pPr>
-                      <a:r>
-                        <a:t>0.167</a:t>
-                      </a:r>
-                    </a:p>
-                  </a:txBody>
-                  <a:tcPr/>
-                </a:tc>
-                <a:tc>
-                  <a:txBody>
-                    <a:bodyPr/>
-                    <a:lstStyle/>
-                    <a:p>
-                      <a:pPr>
-                        <a:defRPr sz="1100"/>
-                      </a:pPr>
-                      <a:r>
-                        <a:t>0.328</a:t>
-                      </a:r>
-                    </a:p>
-                  </a:txBody>
-                  <a:tcPr/>
-                </a:tc>
-              </a:tr>
-              <a:tr h="322352">
-                <a:tc vMerge="1">
-                  <a:txBody>
-                    <a:bodyPr/>
-                    <a:lstStyle/>
-                    <a:p/>
-                  </a:txBody>
-                  <a:tcPr/>
-                </a:tc>
-                <a:tc vMerge="1">
-                  <a:txBody>
-                    <a:bodyPr/>
-                    <a:lstStyle/>
-                    <a:p/>
-                  </a:txBody>
-                  <a:tcPr/>
-                </a:tc>
-                <a:tc>
-                  <a:txBody>
-                    <a:bodyPr/>
-                    <a:lstStyle/>
-                    <a:p>
-                      <a:pPr>
-                        <a:defRPr sz="1100"/>
-                      </a:pPr>
-                      <a:r>
-                        <a:t>External (Sinchon)</a:t>
-                      </a:r>
-                    </a:p>
-                  </a:txBody>
-                  <a:tcPr/>
-                </a:tc>
-                <a:tc>
-                  <a:txBody>
-                    <a:bodyPr/>
-                    <a:lstStyle/>
-                    <a:p>
-                      <a:pPr>
-                        <a:defRPr sz="1100"/>
-                      </a:pPr>
-                      <a:r>
-                        <a:t>0.72 → 0.727 (+0.007)</a:t>
-                      </a:r>
-                    </a:p>
-                  </a:txBody>
-                  <a:tcPr/>
-                </a:tc>
-                <a:tc>
-                  <a:txBody>
-                    <a:bodyPr/>
-                    <a:lstStyle/>
-                    <a:p>
-                      <a:pPr>
-                        <a:defRPr sz="1100"/>
-                      </a:pPr>
-                      <a:r>
-                        <a:t>0.283</a:t>
-                      </a:r>
-                    </a:p>
-                  </a:txBody>
-                  <a:tcPr/>
-                </a:tc>
-                <a:tc>
-                  <a:txBody>
-                    <a:bodyPr/>
-                    <a:lstStyle/>
-                    <a:p>
-                      <a:pPr>
-                        <a:defRPr sz="1100"/>
-                      </a:pPr>
-                      <a:r>
-                        <a:t>0.466</a:t>
-                      </a:r>
-                    </a:p>
-                  </a:txBody>
-                  <a:tcPr/>
-                </a:tc>
-              </a:tr>
-              <a:tr h="322368">
-                <a:tc vMerge="1">
-                  <a:txBody>
-                    <a:bodyPr/>
-                    <a:lstStyle/>
-                    <a:p/>
-                  </a:txBody>
-                  <a:tcPr/>
-                </a:tc>
-                <a:tc vMerge="1">
-                  <a:txBody>
-                    <a:bodyPr/>
-                    <a:lstStyle/>
-                    <a:p/>
-                  </a:txBody>
-                  <a:tcPr/>
-                </a:tc>
-                <a:tc>
-                  <a:txBody>
-                    <a:bodyPr/>
-                    <a:lstStyle/>
-                    <a:p>
-                      <a:pPr>
-                        <a:defRPr sz="1100"/>
-                      </a:pPr>
-                      <a:r>
-                        <a:t>External (New10000)</a:t>
-                      </a:r>
-                    </a:p>
-                  </a:txBody>
-                  <a:tcPr/>
-                </a:tc>
-                <a:tc>
-                  <a:txBody>
-                    <a:bodyPr/>
-                    <a:lstStyle/>
-                    <a:p>
-                      <a:pPr>
-                        <a:defRPr sz="1100"/>
-                      </a:pPr>
-                      <a:r>
-                        <a:t>0.666 → 0.656 (-0.010)</a:t>
-                      </a:r>
-                    </a:p>
-                  </a:txBody>
-                  <a:tcPr/>
-                </a:tc>
-                <a:tc>
-                  <a:txBody>
-                    <a:bodyPr/>
-                    <a:lstStyle/>
-                    <a:p>
-                      <a:pPr>
-                        <a:defRPr sz="1100"/>
-                      </a:pPr>
-                      <a:r>
-                        <a:t>0.005</a:t>
-                      </a:r>
-                    </a:p>
-                  </a:txBody>
-                  <a:tcPr/>
-                </a:tc>
-                <a:tc>
-                  <a:txBody>
-                    <a:bodyPr/>
-                    <a:lstStyle/>
-                    <a:p>
-                      <a:pPr>
-                        <a:defRPr sz="1100"/>
-                      </a:pPr>
-                      <a:r>
-                        <a:t>0.072</a:t>
+                      <a:r>
+                        <a:rPr sz="1100" b="0"/>
+                        <a:t>0.613</a:t>
+                      </a:r>
+                    </a:p>
+                  </a:txBody>
+                  <a:tcPr/>
+                </a:tc>
+                <a:tc>
+                  <a:txBody>
+                    <a:bodyPr/>
+                    <a:lstStyle/>
+                    <a:p>
+                      <a:r>
+                        <a:rPr sz="1100" b="0"/>
+                        <a:t>0.630</a:t>
+                      </a:r>
+                    </a:p>
+                  </a:txBody>
+                  <a:tcPr/>
+                </a:tc>
+                <a:tc>
+                  <a:txBody>
+                    <a:bodyPr/>
+                    <a:lstStyle/>
+                    <a:p>
+                      <a:r>
+                        <a:rPr sz="1100" b="0"/>
+                        <a:t>+0.017</a:t>
                       </a:r>
                     </a:p>
                   </a:txBody>
@@ -8443,14 +7938,14 @@
       </p:sp>
       <p:pic>
         <p:nvPicPr>
-          <p:cNvPr id="3" name="Picture 2" descr="roc_curve_all.png"/>
+          <p:cNvPr id="3" name="Picture 2" descr="roc_curve.png"/>
           <p:cNvPicPr>
             <a:picLocks noChangeAspect="1"/>
           </p:cNvPicPr>
           <p:nvPr/>
         </p:nvPicPr>
         <p:blipFill>
-          <a:blip r:embed="rId2"/>
+          <a:blip r:embed="rId3"/>
           <a:stretch>
             <a:fillRect/>
           </a:stretch>
@@ -8506,14 +8001,14 @@
       </p:sp>
       <p:pic>
         <p:nvPicPr>
-          <p:cNvPr id="3" name="Picture 2" descr="roc_curve_model_comparison.png"/>
+          <p:cNvPr id="3" name="Picture 2" descr="roc_curve_baseline_vs_aec.png"/>
           <p:cNvPicPr>
             <a:picLocks noChangeAspect="1"/>
           </p:cNvPicPr>
           <p:nvPr/>
         </p:nvPicPr>
         <p:blipFill>
-          <a:blip r:embed="rId2"/>
+          <a:blip r:embed="rId3"/>
           <a:stretch>
             <a:fillRect/>
           </a:stretch>
@@ -8528,6 +8023,1415 @@
           </a:prstGeom>
         </p:spPr>
       </p:pic>
+    </p:spTree>
+  </p:cSld>
+  <p:clrMapOvr>
+    <a:masterClrMapping/>
+  </p:clrMapOvr>
+</p:sld>
+</file>
+
+<file path=ppt/slides/slide8.xml><?xml version="1.0" encoding="utf-8"?>
+<p:sld xmlns:a="http://schemas.openxmlformats.org/drawingml/2006/main" xmlns:p="http://schemas.openxmlformats.org/presentationml/2006/main" xmlns:r="http://schemas.openxmlformats.org/officeDocument/2006/relationships">
+  <p:cSld>
+    <p:spTree>
+      <p:nvGrpSpPr>
+        <p:cNvPr id="1" name=""/>
+        <p:cNvGrpSpPr/>
+        <p:nvPr/>
+      </p:nvGrpSpPr>
+      <p:grpSpPr/>
+      <p:sp>
+        <p:nvSpPr>
+          <p:cNvPr id="2" name="Title 1"/>
+          <p:cNvSpPr>
+            <a:spLocks noGrp="1"/>
+          </p:cNvSpPr>
+          <p:nvPr>
+            <p:ph type="title"/>
+          </p:nvPr>
+        </p:nvSpPr>
+        <p:spPr/>
+        <p:txBody>
+          <a:bodyPr/>
+          <a:lstStyle/>
+          <a:p>
+            <a:r>
+              <a:t>Table 4. AEC 변형 비교 - FPCA+ratio vs FPCA-only vs ratio-only (VIF 다중공선성 확인)</a:t>
+            </a:r>
+          </a:p>
+        </p:txBody>
+      </p:sp>
+      <p:graphicFrame>
+        <p:nvGraphicFramePr>
+          <p:cNvPr id="3" name="Table 2"/>
+          <p:cNvGraphicFramePr>
+            <a:graphicFrameLocks noGrp="1"/>
+          </p:cNvGraphicFramePr>
+          <p:nvPr/>
+        </p:nvGraphicFramePr>
+        <p:xfrm>
+          <a:off x="508000" y="975360"/>
+          <a:ext cx="11176000" cy="5480000"/>
+        </p:xfrm>
+        <a:graphic>
+          <a:graphicData uri="http://schemas.openxmlformats.org/drawingml/2006/table">
+            <a:tbl>
+              <a:tblPr firstRow="1" bandRow="1">
+                <a:tableStyleId>{5C22544A-7EE6-4342-B048-85BDC9FD1C3A}</a:tableStyleId>
+              </a:tblPr>
+              <a:tblGrid>
+                <a:gridCol w="2235200"/>
+                <a:gridCol w="2235200"/>
+                <a:gridCol w="2235200"/>
+                <a:gridCol w="2235200"/>
+                <a:gridCol w="2235200"/>
+              </a:tblGrid>
+              <a:tr h="608888">
+                <a:tc>
+                  <a:txBody>
+                    <a:bodyPr/>
+                    <a:lstStyle/>
+                    <a:p>
+                      <a:r>
+                        <a:rPr sz="1100" b="1"/>
+                        <a:t>Disease</a:t>
+                      </a:r>
+                    </a:p>
+                  </a:txBody>
+                  <a:tcPr/>
+                </a:tc>
+                <a:tc>
+                  <a:txBody>
+                    <a:bodyPr/>
+                    <a:lstStyle/>
+                    <a:p>
+                      <a:r>
+                        <a:rPr sz="1100" b="1"/>
+                        <a:t>Cohort</a:t>
+                      </a:r>
+                    </a:p>
+                  </a:txBody>
+                  <a:tcPr/>
+                </a:tc>
+                <a:tc>
+                  <a:txBody>
+                    <a:bodyPr/>
+                    <a:lstStyle/>
+                    <a:p>
+                      <a:r>
+                        <a:rPr sz="1100" b="1"/>
+                        <a:t>AUC (FPCA+ratio)</a:t>
+                      </a:r>
+                    </a:p>
+                  </a:txBody>
+                  <a:tcPr/>
+                </a:tc>
+                <a:tc>
+                  <a:txBody>
+                    <a:bodyPr/>
+                    <a:lstStyle/>
+                    <a:p>
+                      <a:r>
+                        <a:rPr sz="1100" b="1"/>
+                        <a:t>AUC (FPCA-only)</a:t>
+                      </a:r>
+                    </a:p>
+                  </a:txBody>
+                  <a:tcPr/>
+                </a:tc>
+                <a:tc>
+                  <a:txBody>
+                    <a:bodyPr/>
+                    <a:lstStyle/>
+                    <a:p>
+                      <a:r>
+                        <a:rPr sz="1100" b="1"/>
+                        <a:t>AUC (ratio-only)</a:t>
+                      </a:r>
+                    </a:p>
+                  </a:txBody>
+                  <a:tcPr/>
+                </a:tc>
+              </a:tr>
+              <a:tr h="608888">
+                <a:tc>
+                  <a:txBody>
+                    <a:bodyPr/>
+                    <a:lstStyle/>
+                    <a:p>
+                      <a:r>
+                        <a:rPr sz="1100" b="0"/>
+                        <a:t>고혈압(HTN)</a:t>
+                      </a:r>
+                    </a:p>
+                  </a:txBody>
+                  <a:tcPr/>
+                </a:tc>
+                <a:tc>
+                  <a:txBody>
+                    <a:bodyPr/>
+                    <a:lstStyle/>
+                    <a:p>
+                      <a:r>
+                        <a:rPr sz="1100" b="0"/>
+                        <a:t>Internal (Gangnam)</a:t>
+                      </a:r>
+                    </a:p>
+                  </a:txBody>
+                  <a:tcPr/>
+                </a:tc>
+                <a:tc>
+                  <a:txBody>
+                    <a:bodyPr/>
+                    <a:lstStyle/>
+                    <a:p>
+                      <a:r>
+                        <a:rPr sz="1100" b="0"/>
+                        <a:t>0.778</a:t>
+                      </a:r>
+                    </a:p>
+                  </a:txBody>
+                  <a:tcPr/>
+                </a:tc>
+                <a:tc>
+                  <a:txBody>
+                    <a:bodyPr/>
+                    <a:lstStyle/>
+                    <a:p>
+                      <a:r>
+                        <a:rPr sz="1100" b="0"/>
+                        <a:t>0.775</a:t>
+                      </a:r>
+                    </a:p>
+                  </a:txBody>
+                  <a:tcPr/>
+                </a:tc>
+                <a:tc>
+                  <a:txBody>
+                    <a:bodyPr/>
+                    <a:lstStyle/>
+                    <a:p>
+                      <a:r>
+                        <a:rPr sz="1100" b="0"/>
+                        <a:t>0.767</a:t>
+                      </a:r>
+                    </a:p>
+                  </a:txBody>
+                  <a:tcPr/>
+                </a:tc>
+              </a:tr>
+              <a:tr h="608888">
+                <a:tc>
+                  <a:txBody>
+                    <a:bodyPr/>
+                    <a:lstStyle/>
+                    <a:p>
+                      <a:r>
+                        <a:rPr sz="1100" b="0"/>
+                        <a:t/>
+                      </a:r>
+                    </a:p>
+                  </a:txBody>
+                  <a:tcPr/>
+                </a:tc>
+                <a:tc>
+                  <a:txBody>
+                    <a:bodyPr/>
+                    <a:lstStyle/>
+                    <a:p>
+                      <a:r>
+                        <a:rPr sz="1100" b="0"/>
+                        <a:t>External (Sinchon)</a:t>
+                      </a:r>
+                    </a:p>
+                  </a:txBody>
+                  <a:tcPr/>
+                </a:tc>
+                <a:tc>
+                  <a:txBody>
+                    <a:bodyPr/>
+                    <a:lstStyle/>
+                    <a:p>
+                      <a:r>
+                        <a:rPr sz="1100" b="0"/>
+                        <a:t>0.729</a:t>
+                      </a:r>
+                    </a:p>
+                  </a:txBody>
+                  <a:tcPr/>
+                </a:tc>
+                <a:tc>
+                  <a:txBody>
+                    <a:bodyPr/>
+                    <a:lstStyle/>
+                    <a:p>
+                      <a:r>
+                        <a:rPr sz="1100" b="0"/>
+                        <a:t>0.728</a:t>
+                      </a:r>
+                    </a:p>
+                  </a:txBody>
+                  <a:tcPr/>
+                </a:tc>
+                <a:tc>
+                  <a:txBody>
+                    <a:bodyPr/>
+                    <a:lstStyle/>
+                    <a:p>
+                      <a:r>
+                        <a:rPr sz="1100" b="0"/>
+                        <a:t>0.727</a:t>
+                      </a:r>
+                    </a:p>
+                  </a:txBody>
+                  <a:tcPr/>
+                </a:tc>
+              </a:tr>
+              <a:tr h="608888">
+                <a:tc>
+                  <a:txBody>
+                    <a:bodyPr/>
+                    <a:lstStyle/>
+                    <a:p>
+                      <a:r>
+                        <a:rPr sz="1100" b="0"/>
+                        <a:t/>
+                      </a:r>
+                    </a:p>
+                  </a:txBody>
+                  <a:tcPr/>
+                </a:tc>
+                <a:tc>
+                  <a:txBody>
+                    <a:bodyPr/>
+                    <a:lstStyle/>
+                    <a:p>
+                      <a:r>
+                        <a:rPr sz="1100" b="0"/>
+                        <a:t>External (New10000)</a:t>
+                      </a:r>
+                    </a:p>
+                  </a:txBody>
+                  <a:tcPr/>
+                </a:tc>
+                <a:tc>
+                  <a:txBody>
+                    <a:bodyPr/>
+                    <a:lstStyle/>
+                    <a:p>
+                      <a:r>
+                        <a:rPr sz="1100" b="0"/>
+                        <a:t>0.658</a:t>
+                      </a:r>
+                    </a:p>
+                  </a:txBody>
+                  <a:tcPr/>
+                </a:tc>
+                <a:tc>
+                  <a:txBody>
+                    <a:bodyPr/>
+                    <a:lstStyle/>
+                    <a:p>
+                      <a:r>
+                        <a:rPr sz="1100" b="0"/>
+                        <a:t>0.659</a:t>
+                      </a:r>
+                    </a:p>
+                  </a:txBody>
+                  <a:tcPr/>
+                </a:tc>
+                <a:tc>
+                  <a:txBody>
+                    <a:bodyPr/>
+                    <a:lstStyle/>
+                    <a:p>
+                      <a:r>
+                        <a:rPr sz="1100" b="0"/>
+                        <a:t>0.658</a:t>
+                      </a:r>
+                    </a:p>
+                  </a:txBody>
+                  <a:tcPr/>
+                </a:tc>
+              </a:tr>
+              <a:tr h="608888">
+                <a:tc>
+                  <a:txBody>
+                    <a:bodyPr/>
+                    <a:lstStyle/>
+                    <a:p>
+                      <a:r>
+                        <a:rPr sz="1100" b="0"/>
+                        <a:t>당뇨병(DM)</a:t>
+                      </a:r>
+                    </a:p>
+                  </a:txBody>
+                  <a:tcPr/>
+                </a:tc>
+                <a:tc>
+                  <a:txBody>
+                    <a:bodyPr/>
+                    <a:lstStyle/>
+                    <a:p>
+                      <a:r>
+                        <a:rPr sz="1100" b="0"/>
+                        <a:t>Internal (Gangnam)</a:t>
+                      </a:r>
+                    </a:p>
+                  </a:txBody>
+                  <a:tcPr/>
+                </a:tc>
+                <a:tc>
+                  <a:txBody>
+                    <a:bodyPr/>
+                    <a:lstStyle/>
+                    <a:p>
+                      <a:r>
+                        <a:rPr sz="1100" b="0"/>
+                        <a:t>0.679</a:t>
+                      </a:r>
+                    </a:p>
+                  </a:txBody>
+                  <a:tcPr/>
+                </a:tc>
+                <a:tc>
+                  <a:txBody>
+                    <a:bodyPr/>
+                    <a:lstStyle/>
+                    <a:p>
+                      <a:r>
+                        <a:rPr sz="1100" b="0"/>
+                        <a:t>0.675</a:t>
+                      </a:r>
+                    </a:p>
+                  </a:txBody>
+                  <a:tcPr/>
+                </a:tc>
+                <a:tc>
+                  <a:txBody>
+                    <a:bodyPr/>
+                    <a:lstStyle/>
+                    <a:p>
+                      <a:r>
+                        <a:rPr sz="1100" b="0"/>
+                        <a:t>0.656</a:t>
+                      </a:r>
+                    </a:p>
+                  </a:txBody>
+                  <a:tcPr/>
+                </a:tc>
+              </a:tr>
+              <a:tr h="608888">
+                <a:tc>
+                  <a:txBody>
+                    <a:bodyPr/>
+                    <a:lstStyle/>
+                    <a:p>
+                      <a:r>
+                        <a:rPr sz="1100" b="0"/>
+                        <a:t/>
+                      </a:r>
+                    </a:p>
+                  </a:txBody>
+                  <a:tcPr/>
+                </a:tc>
+                <a:tc>
+                  <a:txBody>
+                    <a:bodyPr/>
+                    <a:lstStyle/>
+                    <a:p>
+                      <a:r>
+                        <a:rPr sz="1100" b="0"/>
+                        <a:t>External (Sinchon)</a:t>
+                      </a:r>
+                    </a:p>
+                  </a:txBody>
+                  <a:tcPr/>
+                </a:tc>
+                <a:tc>
+                  <a:txBody>
+                    <a:bodyPr/>
+                    <a:lstStyle/>
+                    <a:p>
+                      <a:r>
+                        <a:rPr sz="1100" b="0"/>
+                        <a:t>0.671</a:t>
+                      </a:r>
+                    </a:p>
+                  </a:txBody>
+                  <a:tcPr/>
+                </a:tc>
+                <a:tc>
+                  <a:txBody>
+                    <a:bodyPr/>
+                    <a:lstStyle/>
+                    <a:p>
+                      <a:r>
+                        <a:rPr sz="1100" b="0"/>
+                        <a:t>0.661</a:t>
+                      </a:r>
+                    </a:p>
+                  </a:txBody>
+                  <a:tcPr/>
+                </a:tc>
+                <a:tc>
+                  <a:txBody>
+                    <a:bodyPr/>
+                    <a:lstStyle/>
+                    <a:p>
+                      <a:r>
+                        <a:rPr sz="1100" b="0"/>
+                        <a:t>0.650</a:t>
+                      </a:r>
+                    </a:p>
+                  </a:txBody>
+                  <a:tcPr/>
+                </a:tc>
+              </a:tr>
+              <a:tr h="608888">
+                <a:tc>
+                  <a:txBody>
+                    <a:bodyPr/>
+                    <a:lstStyle/>
+                    <a:p>
+                      <a:r>
+                        <a:rPr sz="1100" b="0"/>
+                        <a:t/>
+                      </a:r>
+                    </a:p>
+                  </a:txBody>
+                  <a:tcPr/>
+                </a:tc>
+                <a:tc>
+                  <a:txBody>
+                    <a:bodyPr/>
+                    <a:lstStyle/>
+                    <a:p>
+                      <a:r>
+                        <a:rPr sz="1100" b="0"/>
+                        <a:t>External (New10000)</a:t>
+                      </a:r>
+                    </a:p>
+                  </a:txBody>
+                  <a:tcPr/>
+                </a:tc>
+                <a:tc>
+                  <a:txBody>
+                    <a:bodyPr/>
+                    <a:lstStyle/>
+                    <a:p>
+                      <a:r>
+                        <a:rPr sz="1100" b="0"/>
+                        <a:t>0.636</a:t>
+                      </a:r>
+                    </a:p>
+                  </a:txBody>
+                  <a:tcPr/>
+                </a:tc>
+                <a:tc>
+                  <a:txBody>
+                    <a:bodyPr/>
+                    <a:lstStyle/>
+                    <a:p>
+                      <a:r>
+                        <a:rPr sz="1100" b="0"/>
+                        <a:t>0.635</a:t>
+                      </a:r>
+                    </a:p>
+                  </a:txBody>
+                  <a:tcPr/>
+                </a:tc>
+                <a:tc>
+                  <a:txBody>
+                    <a:bodyPr/>
+                    <a:lstStyle/>
+                    <a:p>
+                      <a:r>
+                        <a:rPr sz="1100" b="0"/>
+                        <a:t>0.628</a:t>
+                      </a:r>
+                    </a:p>
+                  </a:txBody>
+                  <a:tcPr/>
+                </a:tc>
+              </a:tr>
+              <a:tr h="608888">
+                <a:tc>
+                  <a:txBody>
+                    <a:bodyPr/>
+                    <a:lstStyle/>
+                    <a:p>
+                      <a:r>
+                        <a:rPr sz="1100" b="0"/>
+                        <a:t>만성신장질환(CKD)</a:t>
+                      </a:r>
+                    </a:p>
+                  </a:txBody>
+                  <a:tcPr/>
+                </a:tc>
+                <a:tc>
+                  <a:txBody>
+                    <a:bodyPr/>
+                    <a:lstStyle/>
+                    <a:p>
+                      <a:r>
+                        <a:rPr sz="1100" b="0"/>
+                        <a:t>Internal (Gangnam)</a:t>
+                      </a:r>
+                    </a:p>
+                  </a:txBody>
+                  <a:tcPr/>
+                </a:tc>
+                <a:tc>
+                  <a:txBody>
+                    <a:bodyPr/>
+                    <a:lstStyle/>
+                    <a:p>
+                      <a:r>
+                        <a:rPr sz="1100" b="0"/>
+                        <a:t>0.755</a:t>
+                      </a:r>
+                    </a:p>
+                  </a:txBody>
+                  <a:tcPr/>
+                </a:tc>
+                <a:tc>
+                  <a:txBody>
+                    <a:bodyPr/>
+                    <a:lstStyle/>
+                    <a:p>
+                      <a:r>
+                        <a:rPr sz="1100" b="0"/>
+                        <a:t>0.763</a:t>
+                      </a:r>
+                    </a:p>
+                  </a:txBody>
+                  <a:tcPr/>
+                </a:tc>
+                <a:tc>
+                  <a:txBody>
+                    <a:bodyPr/>
+                    <a:lstStyle/>
+                    <a:p>
+                      <a:r>
+                        <a:rPr sz="1100" b="0"/>
+                        <a:t>0.750</a:t>
+                      </a:r>
+                    </a:p>
+                  </a:txBody>
+                  <a:tcPr/>
+                </a:tc>
+              </a:tr>
+              <a:tr h="608896">
+                <a:tc>
+                  <a:txBody>
+                    <a:bodyPr/>
+                    <a:lstStyle/>
+                    <a:p>
+                      <a:r>
+                        <a:rPr sz="1100" b="0"/>
+                        <a:t/>
+                      </a:r>
+                    </a:p>
+                  </a:txBody>
+                  <a:tcPr/>
+                </a:tc>
+                <a:tc>
+                  <a:txBody>
+                    <a:bodyPr/>
+                    <a:lstStyle/>
+                    <a:p>
+                      <a:r>
+                        <a:rPr sz="1100" b="0"/>
+                        <a:t>External (Sinchon)</a:t>
+                      </a:r>
+                    </a:p>
+                  </a:txBody>
+                  <a:tcPr/>
+                </a:tc>
+                <a:tc>
+                  <a:txBody>
+                    <a:bodyPr/>
+                    <a:lstStyle/>
+                    <a:p>
+                      <a:r>
+                        <a:rPr sz="1100" b="0"/>
+                        <a:t>0.630</a:t>
+                      </a:r>
+                    </a:p>
+                  </a:txBody>
+                  <a:tcPr/>
+                </a:tc>
+                <a:tc>
+                  <a:txBody>
+                    <a:bodyPr/>
+                    <a:lstStyle/>
+                    <a:p>
+                      <a:r>
+                        <a:rPr sz="1100" b="0"/>
+                        <a:t>0.630</a:t>
+                      </a:r>
+                    </a:p>
+                  </a:txBody>
+                  <a:tcPr/>
+                </a:tc>
+                <a:tc>
+                  <a:txBody>
+                    <a:bodyPr/>
+                    <a:lstStyle/>
+                    <a:p>
+                      <a:r>
+                        <a:rPr sz="1100" b="0"/>
+                        <a:t>0.635</a:t>
+                      </a:r>
+                    </a:p>
+                  </a:txBody>
+                  <a:tcPr/>
+                </a:tc>
+              </a:tr>
+            </a:tbl>
+          </a:graphicData>
+        </a:graphic>
+      </p:graphicFrame>
+    </p:spTree>
+  </p:cSld>
+  <p:clrMapOvr>
+    <a:masterClrMapping/>
+  </p:clrMapOvr>
+</p:sld>
+</file>
+
+<file path=ppt/slides/slide9.xml><?xml version="1.0" encoding="utf-8"?>
+<p:sld xmlns:a="http://schemas.openxmlformats.org/drawingml/2006/main" xmlns:p="http://schemas.openxmlformats.org/presentationml/2006/main" xmlns:r="http://schemas.openxmlformats.org/officeDocument/2006/relationships">
+  <p:cSld>
+    <p:spTree>
+      <p:nvGrpSpPr>
+        <p:cNvPr id="1" name=""/>
+        <p:cNvGrpSpPr/>
+        <p:nvPr/>
+      </p:nvGrpSpPr>
+      <p:grpSpPr/>
+      <p:sp>
+        <p:nvSpPr>
+          <p:cNvPr id="2" name="Title 1"/>
+          <p:cNvSpPr>
+            <a:spLocks noGrp="1"/>
+          </p:cNvSpPr>
+          <p:nvPr>
+            <p:ph type="title"/>
+          </p:nvPr>
+        </p:nvSpPr>
+        <p:spPr/>
+        <p:txBody>
+          <a:bodyPr/>
+          <a:lstStyle/>
+          <a:p>
+            <a:r>
+              <a:t>Table 5. +AEC FPCA-only Coefficient (Internal, * p&lt;0.05, 보정 전)</a:t>
+            </a:r>
+          </a:p>
+        </p:txBody>
+      </p:sp>
+      <p:graphicFrame>
+        <p:nvGraphicFramePr>
+          <p:cNvPr id="3" name="Table 2"/>
+          <p:cNvGraphicFramePr>
+            <a:graphicFrameLocks noGrp="1"/>
+          </p:cNvGraphicFramePr>
+          <p:nvPr/>
+        </p:nvGraphicFramePr>
+        <p:xfrm>
+          <a:off x="508000" y="975360"/>
+          <a:ext cx="11176000" cy="5480000"/>
+        </p:xfrm>
+        <a:graphic>
+          <a:graphicData uri="http://schemas.openxmlformats.org/drawingml/2006/table">
+            <a:tbl>
+              <a:tblPr firstRow="1" bandRow="1">
+                <a:tableStyleId>{5C22544A-7EE6-4342-B048-85BDC9FD1C3A}</a:tableStyleId>
+              </a:tblPr>
+              <a:tblGrid>
+                <a:gridCol w="2235200"/>
+                <a:gridCol w="2235200"/>
+                <a:gridCol w="2235200"/>
+                <a:gridCol w="2235200"/>
+                <a:gridCol w="2235200"/>
+              </a:tblGrid>
+              <a:tr h="548000">
+                <a:tc>
+                  <a:txBody>
+                    <a:bodyPr/>
+                    <a:lstStyle/>
+                    <a:p>
+                      <a:r>
+                        <a:rPr sz="1100" b="1"/>
+                        <a:t>Disease</a:t>
+                      </a:r>
+                    </a:p>
+                  </a:txBody>
+                  <a:tcPr/>
+                </a:tc>
+                <a:tc>
+                  <a:txBody>
+                    <a:bodyPr/>
+                    <a:lstStyle/>
+                    <a:p>
+                      <a:r>
+                        <a:rPr sz="1100" b="1"/>
+                        <a:t>Term</a:t>
+                      </a:r>
+                    </a:p>
+                  </a:txBody>
+                  <a:tcPr/>
+                </a:tc>
+                <a:tc>
+                  <a:txBody>
+                    <a:bodyPr/>
+                    <a:lstStyle/>
+                    <a:p>
+                      <a:r>
+                        <a:rPr sz="1100" b="1"/>
+                        <a:t>Coefficient</a:t>
+                      </a:r>
+                    </a:p>
+                  </a:txBody>
+                  <a:tcPr/>
+                </a:tc>
+                <a:tc>
+                  <a:txBody>
+                    <a:bodyPr/>
+                    <a:lstStyle/>
+                    <a:p>
+                      <a:r>
+                        <a:rPr sz="1100" b="1"/>
+                        <a:t>Odds Ratio</a:t>
+                      </a:r>
+                    </a:p>
+                  </a:txBody>
+                  <a:tcPr/>
+                </a:tc>
+                <a:tc>
+                  <a:txBody>
+                    <a:bodyPr/>
+                    <a:lstStyle/>
+                    <a:p>
+                      <a:r>
+                        <a:rPr sz="1100" b="1"/>
+                        <a:t>p-value</a:t>
+                      </a:r>
+                    </a:p>
+                  </a:txBody>
+                  <a:tcPr/>
+                </a:tc>
+              </a:tr>
+              <a:tr h="548000">
+                <a:tc>
+                  <a:txBody>
+                    <a:bodyPr/>
+                    <a:lstStyle/>
+                    <a:p>
+                      <a:r>
+                        <a:rPr sz="1100" b="0"/>
+                        <a:t>고혈압(HTN)</a:t>
+                      </a:r>
+                    </a:p>
+                  </a:txBody>
+                  <a:tcPr/>
+                </a:tc>
+                <a:tc>
+                  <a:txBody>
+                    <a:bodyPr/>
+                    <a:lstStyle/>
+                    <a:p>
+                      <a:r>
+                        <a:rPr sz="1100" b="0"/>
+                        <a:t>aec_fpca_pc1</a:t>
+                      </a:r>
+                    </a:p>
+                  </a:txBody>
+                  <a:tcPr/>
+                </a:tc>
+                <a:tc>
+                  <a:txBody>
+                    <a:bodyPr/>
+                    <a:lstStyle/>
+                    <a:p>
+                      <a:r>
+                        <a:rPr sz="1100" b="0"/>
+                        <a:t>0.337</a:t>
+                      </a:r>
+                    </a:p>
+                  </a:txBody>
+                  <a:tcPr/>
+                </a:tc>
+                <a:tc>
+                  <a:txBody>
+                    <a:bodyPr/>
+                    <a:lstStyle/>
+                    <a:p>
+                      <a:r>
+                        <a:rPr sz="1100" b="0"/>
+                        <a:t>1.400</a:t>
+                      </a:r>
+                    </a:p>
+                  </a:txBody>
+                  <a:tcPr/>
+                </a:tc>
+                <a:tc>
+                  <a:txBody>
+                    <a:bodyPr/>
+                    <a:lstStyle/>
+                    <a:p>
+                      <a:r>
+                        <a:rPr sz="1100" b="0"/>
+                        <a:t>6.31e-04 *</a:t>
+                      </a:r>
+                    </a:p>
+                  </a:txBody>
+                  <a:tcPr/>
+                </a:tc>
+              </a:tr>
+              <a:tr h="548000">
+                <a:tc>
+                  <a:txBody>
+                    <a:bodyPr/>
+                    <a:lstStyle/>
+                    <a:p>
+                      <a:r>
+                        <a:rPr sz="1100" b="0"/>
+                        <a:t/>
+                      </a:r>
+                    </a:p>
+                  </a:txBody>
+                  <a:tcPr/>
+                </a:tc>
+                <a:tc>
+                  <a:txBody>
+                    <a:bodyPr/>
+                    <a:lstStyle/>
+                    <a:p>
+                      <a:r>
+                        <a:rPr sz="1100" b="0"/>
+                        <a:t>aec_fpca_pc2</a:t>
+                      </a:r>
+                    </a:p>
+                  </a:txBody>
+                  <a:tcPr/>
+                </a:tc>
+                <a:tc>
+                  <a:txBody>
+                    <a:bodyPr/>
+                    <a:lstStyle/>
+                    <a:p>
+                      <a:r>
+                        <a:rPr sz="1100" b="0"/>
+                        <a:t>-0.493</a:t>
+                      </a:r>
+                    </a:p>
+                  </a:txBody>
+                  <a:tcPr/>
+                </a:tc>
+                <a:tc>
+                  <a:txBody>
+                    <a:bodyPr/>
+                    <a:lstStyle/>
+                    <a:p>
+                      <a:r>
+                        <a:rPr sz="1100" b="0"/>
+                        <a:t>0.611</a:t>
+                      </a:r>
+                    </a:p>
+                  </a:txBody>
+                  <a:tcPr/>
+                </a:tc>
+                <a:tc>
+                  <a:txBody>
+                    <a:bodyPr/>
+                    <a:lstStyle/>
+                    <a:p>
+                      <a:r>
+                        <a:rPr sz="1100" b="0"/>
+                        <a:t>4.51e-06 *</a:t>
+                      </a:r>
+                    </a:p>
+                  </a:txBody>
+                  <a:tcPr/>
+                </a:tc>
+              </a:tr>
+              <a:tr h="548000">
+                <a:tc>
+                  <a:txBody>
+                    <a:bodyPr/>
+                    <a:lstStyle/>
+                    <a:p>
+                      <a:r>
+                        <a:rPr sz="1100" b="0"/>
+                        <a:t/>
+                      </a:r>
+                    </a:p>
+                  </a:txBody>
+                  <a:tcPr/>
+                </a:tc>
+                <a:tc>
+                  <a:txBody>
+                    <a:bodyPr/>
+                    <a:lstStyle/>
+                    <a:p>
+                      <a:r>
+                        <a:rPr sz="1100" b="0"/>
+                        <a:t>aec_fpca_pc3</a:t>
+                      </a:r>
+                    </a:p>
+                  </a:txBody>
+                  <a:tcPr/>
+                </a:tc>
+                <a:tc>
+                  <a:txBody>
+                    <a:bodyPr/>
+                    <a:lstStyle/>
+                    <a:p>
+                      <a:r>
+                        <a:rPr sz="1100" b="0"/>
+                        <a:t>0.084</a:t>
+                      </a:r>
+                    </a:p>
+                  </a:txBody>
+                  <a:tcPr/>
+                </a:tc>
+                <a:tc>
+                  <a:txBody>
+                    <a:bodyPr/>
+                    <a:lstStyle/>
+                    <a:p>
+                      <a:r>
+                        <a:rPr sz="1100" b="0"/>
+                        <a:t>1.088</a:t>
+                      </a:r>
+                    </a:p>
+                  </a:txBody>
+                  <a:tcPr/>
+                </a:tc>
+                <a:tc>
+                  <a:txBody>
+                    <a:bodyPr/>
+                    <a:lstStyle/>
+                    <a:p>
+                      <a:r>
+                        <a:rPr sz="1100" b="0"/>
+                        <a:t>0.337</a:t>
+                      </a:r>
+                    </a:p>
+                  </a:txBody>
+                  <a:tcPr/>
+                </a:tc>
+              </a:tr>
+              <a:tr h="548000">
+                <a:tc>
+                  <a:txBody>
+                    <a:bodyPr/>
+                    <a:lstStyle/>
+                    <a:p>
+                      <a:r>
+                        <a:rPr sz="1100" b="0"/>
+                        <a:t>당뇨병(DM)</a:t>
+                      </a:r>
+                    </a:p>
+                  </a:txBody>
+                  <a:tcPr/>
+                </a:tc>
+                <a:tc>
+                  <a:txBody>
+                    <a:bodyPr/>
+                    <a:lstStyle/>
+                    <a:p>
+                      <a:r>
+                        <a:rPr sz="1100" b="0"/>
+                        <a:t>aec_fpca_pc1</a:t>
+                      </a:r>
+                    </a:p>
+                  </a:txBody>
+                  <a:tcPr/>
+                </a:tc>
+                <a:tc>
+                  <a:txBody>
+                    <a:bodyPr/>
+                    <a:lstStyle/>
+                    <a:p>
+                      <a:r>
+                        <a:rPr sz="1100" b="0"/>
+                        <a:t>0.121</a:t>
+                      </a:r>
+                    </a:p>
+                  </a:txBody>
+                  <a:tcPr/>
+                </a:tc>
+                <a:tc>
+                  <a:txBody>
+                    <a:bodyPr/>
+                    <a:lstStyle/>
+                    <a:p>
+                      <a:r>
+                        <a:rPr sz="1100" b="0"/>
+                        <a:t>1.129</a:t>
+                      </a:r>
+                    </a:p>
+                  </a:txBody>
+                  <a:tcPr/>
+                </a:tc>
+                <a:tc>
+                  <a:txBody>
+                    <a:bodyPr/>
+                    <a:lstStyle/>
+                    <a:p>
+                      <a:r>
+                        <a:rPr sz="1100" b="0"/>
+                        <a:t>0.216</a:t>
+                      </a:r>
+                    </a:p>
+                  </a:txBody>
+                  <a:tcPr/>
+                </a:tc>
+              </a:tr>
+              <a:tr h="548000">
+                <a:tc>
+                  <a:txBody>
+                    <a:bodyPr/>
+                    <a:lstStyle/>
+                    <a:p>
+                      <a:r>
+                        <a:rPr sz="1100" b="0"/>
+                        <a:t/>
+                      </a:r>
+                    </a:p>
+                  </a:txBody>
+                  <a:tcPr/>
+                </a:tc>
+                <a:tc>
+                  <a:txBody>
+                    <a:bodyPr/>
+                    <a:lstStyle/>
+                    <a:p>
+                      <a:r>
+                        <a:rPr sz="1100" b="0"/>
+                        <a:t>aec_fpca_pc2</a:t>
+                      </a:r>
+                    </a:p>
+                  </a:txBody>
+                  <a:tcPr/>
+                </a:tc>
+                <a:tc>
+                  <a:txBody>
+                    <a:bodyPr/>
+                    <a:lstStyle/>
+                    <a:p>
+                      <a:r>
+                        <a:rPr sz="1100" b="0"/>
+                        <a:t>-0.520</a:t>
+                      </a:r>
+                    </a:p>
+                  </a:txBody>
+                  <a:tcPr/>
+                </a:tc>
+                <a:tc>
+                  <a:txBody>
+                    <a:bodyPr/>
+                    <a:lstStyle/>
+                    <a:p>
+                      <a:r>
+                        <a:rPr sz="1100" b="0"/>
+                        <a:t>0.595</a:t>
+                      </a:r>
+                    </a:p>
+                  </a:txBody>
+                  <a:tcPr/>
+                </a:tc>
+                <a:tc>
+                  <a:txBody>
+                    <a:bodyPr/>
+                    <a:lstStyle/>
+                    <a:p>
+                      <a:r>
+                        <a:rPr sz="1100" b="0"/>
+                        <a:t>9.23e-06 *</a:t>
+                      </a:r>
+                    </a:p>
+                  </a:txBody>
+                  <a:tcPr/>
+                </a:tc>
+              </a:tr>
+              <a:tr h="548000">
+                <a:tc>
+                  <a:txBody>
+                    <a:bodyPr/>
+                    <a:lstStyle/>
+                    <a:p>
+                      <a:r>
+                        <a:rPr sz="1100" b="0"/>
+                        <a:t/>
+                      </a:r>
+                    </a:p>
+                  </a:txBody>
+                  <a:tcPr/>
+                </a:tc>
+                <a:tc>
+                  <a:txBody>
+                    <a:bodyPr/>
+                    <a:lstStyle/>
+                    <a:p>
+                      <a:r>
+                        <a:rPr sz="1100" b="0"/>
+                        <a:t>aec_fpca_pc3</a:t>
+                      </a:r>
+                    </a:p>
+                  </a:txBody>
+                  <a:tcPr/>
+                </a:tc>
+                <a:tc>
+                  <a:txBody>
+                    <a:bodyPr/>
+                    <a:lstStyle/>
+                    <a:p>
+                      <a:r>
+                        <a:rPr sz="1100" b="0"/>
+                        <a:t>0.127</a:t>
+                      </a:r>
+                    </a:p>
+                  </a:txBody>
+                  <a:tcPr/>
+                </a:tc>
+                <a:tc>
+                  <a:txBody>
+                    <a:bodyPr/>
+                    <a:lstStyle/>
+                    <a:p>
+                      <a:r>
+                        <a:rPr sz="1100" b="0"/>
+                        <a:t>1.136</a:t>
+                      </a:r>
+                    </a:p>
+                  </a:txBody>
+                  <a:tcPr/>
+                </a:tc>
+                <a:tc>
+                  <a:txBody>
+                    <a:bodyPr/>
+                    <a:lstStyle/>
+                    <a:p>
+                      <a:r>
+                        <a:rPr sz="1100" b="0"/>
+                        <a:t>0.173</a:t>
+                      </a:r>
+                    </a:p>
+                  </a:txBody>
+                  <a:tcPr/>
+                </a:tc>
+              </a:tr>
+              <a:tr h="548000">
+                <a:tc>
+                  <a:txBody>
+                    <a:bodyPr/>
+                    <a:lstStyle/>
+                    <a:p>
+                      <a:r>
+                        <a:rPr sz="1100" b="0"/>
+                        <a:t>만성신장질환(CKD)</a:t>
+                      </a:r>
+                    </a:p>
+                  </a:txBody>
+                  <a:tcPr/>
+                </a:tc>
+                <a:tc>
+                  <a:txBody>
+                    <a:bodyPr/>
+                    <a:lstStyle/>
+                    <a:p>
+                      <a:r>
+                        <a:rPr sz="1100" b="0"/>
+                        <a:t>aec_fpca_pc1</a:t>
+                      </a:r>
+                    </a:p>
+                  </a:txBody>
+                  <a:tcPr/>
+                </a:tc>
+                <a:tc>
+                  <a:txBody>
+                    <a:bodyPr/>
+                    <a:lstStyle/>
+                    <a:p>
+                      <a:r>
+                        <a:rPr sz="1100" b="0"/>
+                        <a:t>0.101</a:t>
+                      </a:r>
+                    </a:p>
+                  </a:txBody>
+                  <a:tcPr/>
+                </a:tc>
+                <a:tc>
+                  <a:txBody>
+                    <a:bodyPr/>
+                    <a:lstStyle/>
+                    <a:p>
+                      <a:r>
+                        <a:rPr sz="1100" b="0"/>
+                        <a:t>1.106</a:t>
+                      </a:r>
+                    </a:p>
+                  </a:txBody>
+                  <a:tcPr/>
+                </a:tc>
+                <a:tc>
+                  <a:txBody>
+                    <a:bodyPr/>
+                    <a:lstStyle/>
+                    <a:p>
+                      <a:r>
+                        <a:rPr sz="1100" b="0"/>
+                        <a:t>0.450</a:t>
+                      </a:r>
+                    </a:p>
+                  </a:txBody>
+                  <a:tcPr/>
+                </a:tc>
+              </a:tr>
+              <a:tr h="548000">
+                <a:tc>
+                  <a:txBody>
+                    <a:bodyPr/>
+                    <a:lstStyle/>
+                    <a:p>
+                      <a:r>
+                        <a:rPr sz="1100" b="0"/>
+                        <a:t/>
+                      </a:r>
+                    </a:p>
+                  </a:txBody>
+                  <a:tcPr/>
+                </a:tc>
+                <a:tc>
+                  <a:txBody>
+                    <a:bodyPr/>
+                    <a:lstStyle/>
+                    <a:p>
+                      <a:r>
+                        <a:rPr sz="1100" b="0"/>
+                        <a:t>aec_fpca_pc2</a:t>
+                      </a:r>
+                    </a:p>
+                  </a:txBody>
+                  <a:tcPr/>
+                </a:tc>
+                <a:tc>
+                  <a:txBody>
+                    <a:bodyPr/>
+                    <a:lstStyle/>
+                    <a:p>
+                      <a:r>
+                        <a:rPr sz="1100" b="0"/>
+                        <a:t>-0.371</a:t>
+                      </a:r>
+                    </a:p>
+                  </a:txBody>
+                  <a:tcPr/>
+                </a:tc>
+                <a:tc>
+                  <a:txBody>
+                    <a:bodyPr/>
+                    <a:lstStyle/>
+                    <a:p>
+                      <a:r>
+                        <a:rPr sz="1100" b="0"/>
+                        <a:t>0.690</a:t>
+                      </a:r>
+                    </a:p>
+                  </a:txBody>
+                  <a:tcPr/>
+                </a:tc>
+                <a:tc>
+                  <a:txBody>
+                    <a:bodyPr/>
+                    <a:lstStyle/>
+                    <a:p>
+                      <a:r>
+                        <a:rPr sz="1100" b="0"/>
+                        <a:t>0.018 *</a:t>
+                      </a:r>
+                    </a:p>
+                  </a:txBody>
+                  <a:tcPr/>
+                </a:tc>
+              </a:tr>
+              <a:tr h="548000">
+                <a:tc>
+                  <a:txBody>
+                    <a:bodyPr/>
+                    <a:lstStyle/>
+                    <a:p>
+                      <a:r>
+                        <a:rPr sz="1100" b="0"/>
+                        <a:t/>
+                      </a:r>
+                    </a:p>
+                  </a:txBody>
+                  <a:tcPr/>
+                </a:tc>
+                <a:tc>
+                  <a:txBody>
+                    <a:bodyPr/>
+                    <a:lstStyle/>
+                    <a:p>
+                      <a:r>
+                        <a:rPr sz="1100" b="0"/>
+                        <a:t>aec_fpca_pc3</a:t>
+                      </a:r>
+                    </a:p>
+                  </a:txBody>
+                  <a:tcPr/>
+                </a:tc>
+                <a:tc>
+                  <a:txBody>
+                    <a:bodyPr/>
+                    <a:lstStyle/>
+                    <a:p>
+                      <a:r>
+                        <a:rPr sz="1100" b="0"/>
+                        <a:t>-0.077</a:t>
+                      </a:r>
+                    </a:p>
+                  </a:txBody>
+                  <a:tcPr/>
+                </a:tc>
+                <a:tc>
+                  <a:txBody>
+                    <a:bodyPr/>
+                    <a:lstStyle/>
+                    <a:p>
+                      <a:r>
+                        <a:rPr sz="1100" b="0"/>
+                        <a:t>0.926</a:t>
+                      </a:r>
+                    </a:p>
+                  </a:txBody>
+                  <a:tcPr/>
+                </a:tc>
+                <a:tc>
+                  <a:txBody>
+                    <a:bodyPr/>
+                    <a:lstStyle/>
+                    <a:p>
+                      <a:r>
+                        <a:rPr sz="1100" b="0"/>
+                        <a:t>0.540</a:t>
+                      </a:r>
+                    </a:p>
+                  </a:txBody>
+                  <a:tcPr/>
+                </a:tc>
+              </a:tr>
+            </a:tbl>
+          </a:graphicData>
+        </a:graphic>
+      </p:graphicFrame>
     </p:spTree>
   </p:cSld>
   <p:clrMapOvr>

--- a/docs/261002.pptx
+++ b/docs/261002.pptx
@@ -9,16 +9,22 @@
   </p:notesMasterIdLst>
   <p:sldIdLst>
     <p:sldId id="256" r:id="rId2"/>
+    <p:sldId id="269" r:id="rId24"/>
     <p:sldId id="257" r:id="rId12"/>
     <p:sldId id="258" r:id="rId13"/>
-    <p:sldId id="266" r:id="rId40"/>
-    <p:sldId id="259" r:id="rId14"/>
     <p:sldId id="260" r:id="rId15"/>
     <p:sldId id="261" r:id="rId16"/>
     <p:sldId id="262" r:id="rId17"/>
+    <p:sldId id="265" r:id="rId20"/>
+    <p:sldId id="270" r:id="rId25"/>
+    <p:sldId id="271" r:id="rId26"/>
+    <p:sldId id="268" r:id="rId23"/>
+    <p:sldId id="267" r:id="rId22"/>
+    <p:sldId id="266" r:id="rId40"/>
+    <p:sldId id="259" r:id="rId14"/>
     <p:sldId id="263" r:id="rId18"/>
     <p:sldId id="264" r:id="rId19"/>
-    <p:sldId id="265" r:id="rId20"/>
+    <p:sldId id="272" r:id="rId27"/>
   </p:sldIdLst>
   <p:sldSz cx="12192000" cy="6858000"/>
   <p:notesSz cx="6858000" cy="9144000"/>
@@ -4558,7 +4564,7 @@
                   <a:schemeClr val="bg1"/>
                 </a:solidFill>
               </a:rPr>
-              <a:t>Clinic4 Baseline Logistic Regression (Gangnam)</a:t>
+              <a:t>AEC·체성분 곡선의 추가 기여와 한계 — Landmark 기반 체성분 연구로</a:t>
             </a:r>
           </a:p>
         </p:txBody>
@@ -4731,41 +4737,73 @@
             <p:ph type="title"/>
           </p:nvPr>
         </p:nvSpPr>
-        <p:spPr/>
+        <p:spPr>
+          <a:xfrm>
+            <a:off x="508000" y="365126"/>
+            <a:ext cx="11176000" cy="532342"/>
+          </a:xfrm>
+        </p:spPr>
         <p:txBody>
           <a:bodyPr/>
           <a:lstStyle/>
           <a:p>
             <a:r>
-              <a:t>Figure 3. FPCA 계수 역변환 - Slice별 logit 기여도 (FPCA-only)</a:t>
+              <a:t>Future Work — Landmark별 Body Composition</a:t>
             </a:r>
           </a:p>
         </p:txBody>
       </p:sp>
-      <p:pic>
-        <p:nvPicPr>
-          <p:cNvPr id="3" name="Picture 2" descr="fpca_recovered_curve.png"/>
-          <p:cNvPicPr>
-            <a:picLocks noChangeAspect="1"/>
-          </p:cNvPicPr>
-          <p:nvPr/>
-        </p:nvPicPr>
-        <p:blipFill>
-          <a:blip r:embed="rId2"/>
-          <a:stretch>
-            <a:fillRect/>
-          </a:stretch>
-        </p:blipFill>
+      <p:sp>
+        <p:nvSpPr>
+          <p:cNvPr id="3" name="Content Placeholder 2"/>
+          <p:cNvSpPr>
+            <a:spLocks noGrp="1"/>
+          </p:cNvSpPr>
+          <p:nvPr>
+            <p:ph idx="1"/>
+          </p:nvPr>
+        </p:nvSpPr>
         <p:spPr>
           <a:xfrm>
-            <a:off x="508000" y="1812276"/>
-            <a:ext cx="11176000" cy="3806168"/>
+            <a:off x="508000" y="897468"/>
+            <a:ext cx="11176000" cy="5063066"/>
           </a:xfrm>
-          <a:prstGeom prst="rect">
-            <a:avLst/>
-          </a:prstGeom>
         </p:spPr>
-      </p:pic>
+        <p:txBody>
+          <a:bodyPr wrap="square"/>
+          <a:lstStyle/>
+          <a:p>
+            <a:r>
+              <a:rPr sz="1800"/>
+              <a:t>목표: Sinchon에서 확인된 체성분의 기여를 Gangnam에서도 재현되는, 코호트 간 일관된 개선으로 만든다</a:t>
+            </a:r>
+          </a:p>
+          <a:p>
+            <a:r>
+              <a:rPr sz="1800"/>
+              <a:t>환자별 해부학적 landmark를 기준으로 슬라이스를 정렬해, 같은 landmark에서 체성분(VAT·SAT·근육·근내지방)을 추출한다</a:t>
+            </a:r>
+          </a:p>
+          <a:p>
+            <a:r>
+              <a:rPr sz="1800"/>
+              <a:t>곡선 전체(128구간) 대신 landmark 단면 값을 입력으로 써서 crop range 의존성을 제거한다</a:t>
+            </a:r>
+          </a:p>
+          <a:p>
+            <a:r>
+              <a:rPr sz="1800"/>
+              <a:t>동일 평가 프레임(Gangnam 개발 / Sinchon 외부, Youden cutoff, paired DeLong)으로 Baseline·본 연구 결과와 직접 비교한다</a:t>
+            </a:r>
+          </a:p>
+          <a:p>
+            <a:r>
+              <a:rPr sz="1800"/>
+              <a:t>검증: 개선 크기가 커지고 코호트 간 편차가 줄어드는지로 range 불일치 가설을 확인한다 (New10000은 longitudinal이라 별도 설계로 분리)</a:t>
+            </a:r>
+          </a:p>
+        </p:txBody>
+      </p:sp>
     </p:spTree>
   </p:cSld>
   <p:clrMapOvr>
@@ -4794,13 +4832,147 @@
             <p:ph type="title"/>
           </p:nvPr>
         </p:nvSpPr>
+        <p:spPr>
+          <a:xfrm>
+            <a:off x="508000" y="365126"/>
+            <a:ext cx="11176000" cy="532342"/>
+          </a:xfrm>
+        </p:spPr>
+        <p:txBody>
+          <a:bodyPr/>
+          <a:lstStyle/>
+          <a:p>
+            <a:r>
+              <a:t>Conclusion</a:t>
+            </a:r>
+          </a:p>
+        </p:txBody>
+      </p:sp>
+      <p:sp>
+        <p:nvSpPr>
+          <p:cNvPr id="3" name="Content Placeholder 2"/>
+          <p:cNvSpPr>
+            <a:spLocks noGrp="1"/>
+          </p:cNvSpPr>
+          <p:nvPr>
+            <p:ph idx="1"/>
+          </p:nvPr>
+        </p:nvSpPr>
+        <p:spPr>
+          <a:xfrm>
+            <a:off x="508000" y="897468"/>
+            <a:ext cx="11176000" cy="5063066"/>
+          </a:xfrm>
+        </p:spPr>
+        <p:txBody>
+          <a:bodyPr wrap="square"/>
+          <a:lstStyle/>
+          <a:p>
+            <a:r>
+              <a:rPr sz="1800"/>
+              <a:t>Clinic4(성별·나이·신장·체중)만으로 AUC Gangnam 0.66~0.77, Sinchon 0.61~0.71 수준의 판별력을 보인다</a:t>
+            </a:r>
+          </a:p>
+          <a:p>
+            <a:r>
+              <a:rPr sz="1800"/>
+              <a:t>AEC 곡선(FPCA)만 추가하면 ΔAUC -0.034~+0.039로 미미하거나 오히려 하락한다 (CKD Gangnam -0.034)</a:t>
+            </a:r>
+          </a:p>
+          <a:p>
+            <a:r>
+              <a:rPr sz="1800"/>
+              <a:t>체성분을 더하면 개선된다 — AEC+체성분 ΔAUC +0.024~+0.071, Sinchon 3/3 질환에서 유의. 다만 Gangnam은 1/3 질환뿐이고 부위·질환에 따라 편차가 커 코호트 간 일관되지 않다</a:t>
+            </a:r>
+          </a:p>
+          <a:p>
+            <a:r>
+              <a:rPr sz="1800"/>
+              <a:t>해석(가설): 환자마다 crop을 했더라도 range가 일정하지 않아 같은 slice index가 서로 다른 해부학적 위치를 가리킨다</a:t>
+            </a:r>
+          </a:p>
+          <a:p>
+            <a:r>
+              <a:rPr sz="1800"/>
+              <a:t>후속 연구: 해부학적 landmark별 body composition으로 range 의존성을 제거해 개선의 크기와 일관성을 다시 평가한다</a:t>
+            </a:r>
+          </a:p>
+        </p:txBody>
+      </p:sp>
+    </p:spTree>
+  </p:cSld>
+  <p:clrMapOvr>
+    <a:masterClrMapping/>
+  </p:clrMapOvr>
+</p:sld>
+</file>
+
+<file path=ppt/slides/slide12.xml><?xml version="1.0" encoding="utf-8"?>
+<p:sld xmlns:a="http://schemas.openxmlformats.org/drawingml/2006/main" xmlns:p="http://schemas.openxmlformats.org/presentationml/2006/main" xmlns:r="http://schemas.openxmlformats.org/officeDocument/2006/relationships">
+  <p:cSld>
+    <p:spTree>
+      <p:nvGrpSpPr>
+        <p:cNvPr id="1" name=""/>
+        <p:cNvGrpSpPr/>
+        <p:nvPr/>
+      </p:nvGrpSpPr>
+      <p:grpSpPr/>
+      <p:sp>
+        <p:nvSpPr>
+          <p:cNvPr id="2" name="Title 1"/>
+          <p:cNvSpPr>
+            <a:spLocks noGrp="1"/>
+          </p:cNvSpPr>
+          <p:nvPr>
+            <p:ph type="title"/>
+          </p:nvPr>
+        </p:nvSpPr>
         <p:spPr/>
         <p:txBody>
           <a:bodyPr/>
           <a:lstStyle/>
           <a:p>
             <a:r>
-              <a:t>Table 1-1. Undersampling 적용 근거 — AUC는 유지, Sensitivity는 회복</a:t>
+              <a:t>Supplementary</a:t>
+            </a:r>
+          </a:p>
+        </p:txBody>
+      </p:sp>
+    </p:spTree>
+  </p:cSld>
+  <p:clrMapOvr>
+    <a:masterClrMapping/>
+  </p:clrMapOvr>
+</p:sld>
+</file>
+
+<file path=ppt/slides/slide13.xml><?xml version="1.0" encoding="utf-8"?>
+<p:sld xmlns:a="http://schemas.openxmlformats.org/drawingml/2006/main" xmlns:p="http://schemas.openxmlformats.org/presentationml/2006/main" xmlns:r="http://schemas.openxmlformats.org/officeDocument/2006/relationships">
+  <p:cSld>
+    <p:spTree>
+      <p:nvGrpSpPr>
+        <p:cNvPr id="1" name=""/>
+        <p:cNvGrpSpPr/>
+        <p:nvPr/>
+      </p:nvGrpSpPr>
+      <p:grpSpPr/>
+      <p:sp>
+        <p:nvSpPr>
+          <p:cNvPr id="2" name="Title 1"/>
+          <p:cNvSpPr>
+            <a:spLocks noGrp="1"/>
+          </p:cNvSpPr>
+          <p:nvPr>
+            <p:ph type="title"/>
+          </p:nvPr>
+        </p:nvSpPr>
+        <p:spPr/>
+        <p:txBody>
+          <a:bodyPr/>
+          <a:lstStyle/>
+          <a:p>
+            <a:r>
+              <a:t>Table S1. Undersampling 전후 비교 — AUC는 대체로 유지, Youden cutoff에서 Sens/Spec 균형</a:t>
             </a:r>
           </a:p>
         </p:txBody>
@@ -4834,7 +5006,7 @@
             </a:pPr>
             <a:r>
               <a:rPr sz="1300"/>
-              <a:t>Original prevalence(HTN 19~31%, DM 11~19%, CKD 8~17%)에서 0.5 cutoff 기준 Sensitivity 0.01~0.05로 붕괴(Specificity만 0.8~1.0)</a:t>
+              <a:t>Cutoff을 valid ROC의 Youden index 최대점으로 잡으면 원본 유병률에서도 Sensitivity가 붕괴하지 않음 (Sens 0.53~0.77). 0.5 고정 cutoff에서는 Sens 0.01~0.05로 붕괴해 사용하지 않음</a:t>
             </a:r>
           </a:p>
           <a:p>
@@ -4844,7 +5016,7 @@
             </a:pPr>
             <a:r>
               <a:rPr sz="1300"/>
-              <a:t>AUC는 순위 기반 지표라 prevalence에 둔감 → 언더샘플링해도 discrimination(AUC)은 거의 유지</a:t>
+              <a:t>AUC는 순위 기반 지표라 prevalence에 둔감 → 언더샘플링 전후 AUC 변화 -0.013~+0.100 (balanced test는 n=42~155로 작아 DM Gangnam 등 변동이 큼)</a:t>
             </a:r>
           </a:p>
           <a:p>
@@ -4854,7 +5026,660 @@
             </a:pPr>
             <a:r>
               <a:rPr sz="1300"/>
-              <a:t>음성군을 양성군 수만큼 1:1 랜덤 언더샘플링(balanced_idx, code/clinic4_logistic_regression.py) 후 재학습 → AUC는 거의 그대로, Sensitivity는 0.5~0.8대로 회복</a:t>
+              <a:t>음성군을 양성군 수만큼 1:1 랜덤 언더샘플링(balanced_idx, code/clinic4_logistic_regression.py) 후 재학습·재평가 — 평가 부분집합이 달라 두 설정의 AUC는 동일 표본 비교가 아님</a:t>
+            </a:r>
+          </a:p>
+        </p:txBody>
+      </p:sp>
+      <p:graphicFrame>
+        <p:nvGraphicFramePr>
+          <p:cNvPr id="5" name="Table 4"/>
+          <p:cNvGraphicFramePr>
+            <a:graphicFrameLocks noGrp="1"/>
+          </p:cNvGraphicFramePr>
+          <p:nvPr/>
+        </p:nvGraphicFramePr>
+        <p:xfrm>
+          <a:off x="512064" y="3000000"/>
+          <a:ext cx="11173968" cy="3419997"/>
+        </p:xfrm>
+        <a:graphic>
+          <a:graphicData uri="http://schemas.openxmlformats.org/drawingml/2006/table">
+            <a:tbl>
+              <a:tblPr firstRow="1" bandRow="1">
+                <a:tableStyleId>{C083E6E3-FA7D-4D7B-A595-EF9225AFEA82}</a:tableStyleId>
+              </a:tblPr>
+              <a:tblGrid>
+                <a:gridCol w="1862328"/>
+                <a:gridCol w="1862328"/>
+                <a:gridCol w="1862328"/>
+                <a:gridCol w="1862328"/>
+                <a:gridCol w="1862328"/>
+                <a:gridCol w="1862328"/>
+              </a:tblGrid>
+              <a:tr h="488571">
+                <a:tc>
+                  <a:txBody>
+                    <a:bodyPr/>
+                    <a:lstStyle/>
+                    <a:p>
+                      <a:pPr algn="ctr"/>
+                      <a:r>
+                        <a:rPr sz="1200" b="1"/>
+                        <a:t>Disease</a:t>
+                      </a:r>
+                    </a:p>
+                  </a:txBody>
+                  <a:tcPr anchor="ctr"/>
+                </a:tc>
+                <a:tc>
+                  <a:txBody>
+                    <a:bodyPr/>
+                    <a:lstStyle/>
+                    <a:p>
+                      <a:pPr algn="ctr"/>
+                      <a:r>
+                        <a:rPr sz="1200" b="1"/>
+                        <a:t>Cohort</a:t>
+                      </a:r>
+                    </a:p>
+                  </a:txBody>
+                  <a:tcPr anchor="ctr"/>
+                </a:tc>
+                <a:tc>
+                  <a:txBody>
+                    <a:bodyPr/>
+                    <a:lstStyle/>
+                    <a:p>
+                      <a:pPr algn="ctr"/>
+                      <a:r>
+                        <a:rPr sz="1200" b="1"/>
+                        <a:t>Cutoff (orig→balanced)</a:t>
+                      </a:r>
+                    </a:p>
+                  </a:txBody>
+                  <a:tcPr anchor="ctr"/>
+                </a:tc>
+                <a:tc>
+                  <a:txBody>
+                    <a:bodyPr/>
+                    <a:lstStyle/>
+                    <a:p>
+                      <a:pPr algn="ctr"/>
+                      <a:r>
+                        <a:rPr sz="1200" b="1"/>
+                        <a:t>AUC (orig→balanced)</a:t>
+                      </a:r>
+                    </a:p>
+                  </a:txBody>
+                  <a:tcPr anchor="ctr"/>
+                </a:tc>
+                <a:tc>
+                  <a:txBody>
+                    <a:bodyPr/>
+                    <a:lstStyle/>
+                    <a:p>
+                      <a:pPr algn="ctr"/>
+                      <a:r>
+                        <a:rPr sz="1200" b="1"/>
+                        <a:t>Sensitivity (orig→balanced)</a:t>
+                      </a:r>
+                    </a:p>
+                  </a:txBody>
+                  <a:tcPr anchor="ctr"/>
+                </a:tc>
+                <a:tc>
+                  <a:txBody>
+                    <a:bodyPr/>
+                    <a:lstStyle/>
+                    <a:p>
+                      <a:pPr algn="ctr"/>
+                      <a:r>
+                        <a:rPr sz="1200" b="1"/>
+                        <a:t>Specificity (orig→balanced)</a:t>
+                      </a:r>
+                    </a:p>
+                  </a:txBody>
+                  <a:tcPr anchor="ctr"/>
+                </a:tc>
+              </a:tr>
+              <a:tr h="488571">
+                <a:tc rowSpan="2">
+                  <a:txBody>
+                    <a:bodyPr/>
+                    <a:lstStyle/>
+                    <a:p>
+                      <a:pPr algn="ctr"/>
+                      <a:r>
+                        <a:rPr sz="1200" b="0"/>
+                        <a:t>고혈압(HTN)</a:t>
+                      </a:r>
+                    </a:p>
+                  </a:txBody>
+                  <a:tcPr anchor="ctr"/>
+                </a:tc>
+                <a:tc>
+                  <a:txBody>
+                    <a:bodyPr/>
+                    <a:lstStyle/>
+                    <a:p>
+                      <a:pPr algn="ctr"/>
+                      <a:r>
+                        <a:rPr sz="1200" b="0"/>
+                        <a:t>Internal (Gangnam)</a:t>
+                      </a:r>
+                    </a:p>
+                  </a:txBody>
+                  <a:tcPr anchor="ctr"/>
+                </a:tc>
+                <a:tc>
+                  <a:txBody>
+                    <a:bodyPr/>
+                    <a:lstStyle/>
+                    <a:p>
+                      <a:pPr algn="ctr"/>
+                      <a:r>
+                        <a:rPr sz="1200" b="0"/>
+                        <a:t>0.303→0.498</a:t>
+                      </a:r>
+                    </a:p>
+                  </a:txBody>
+                  <a:tcPr anchor="ctr"/>
+                </a:tc>
+                <a:tc>
+                  <a:txBody>
+                    <a:bodyPr/>
+                    <a:lstStyle/>
+                    <a:p>
+                      <a:pPr algn="ctr"/>
+                      <a:r>
+                        <a:rPr sz="1200" b="0"/>
+                        <a:t>0.761→0.780</a:t>
+                      </a:r>
+                    </a:p>
+                  </a:txBody>
+                  <a:tcPr anchor="ctr"/>
+                </a:tc>
+                <a:tc>
+                  <a:txBody>
+                    <a:bodyPr/>
+                    <a:lstStyle/>
+                    <a:p>
+                      <a:pPr algn="ctr"/>
+                      <a:r>
+                        <a:rPr sz="1200" b="0"/>
+                        <a:t>0.740→0.792</a:t>
+                      </a:r>
+                    </a:p>
+                  </a:txBody>
+                  <a:tcPr anchor="ctr"/>
+                </a:tc>
+                <a:tc>
+                  <a:txBody>
+                    <a:bodyPr/>
+                    <a:lstStyle/>
+                    <a:p>
+                      <a:pPr algn="ctr"/>
+                      <a:r>
+                        <a:rPr sz="1200" b="0"/>
+                        <a:t>0.623→0.654</a:t>
+                      </a:r>
+                    </a:p>
+                  </a:txBody>
+                  <a:tcPr anchor="ctr"/>
+                </a:tc>
+              </a:tr>
+              <a:tr h="488571">
+                <a:tc vMerge="1">
+                  <a:txBody>
+                    <a:bodyPr/>
+                    <a:lstStyle/>
+                    <a:p/>
+                  </a:txBody>
+                  <a:tcPr/>
+                </a:tc>
+                <a:tc>
+                  <a:txBody>
+                    <a:bodyPr/>
+                    <a:lstStyle/>
+                    <a:p>
+                      <a:pPr algn="ctr"/>
+                      <a:r>
+                        <a:rPr sz="1200" b="0"/>
+                        <a:t>External (Sinchon)</a:t>
+                      </a:r>
+                    </a:p>
+                  </a:txBody>
+                  <a:tcPr anchor="ctr"/>
+                </a:tc>
+                <a:tc>
+                  <a:txBody>
+                    <a:bodyPr/>
+                    <a:lstStyle/>
+                    <a:p>
+                      <a:pPr algn="ctr"/>
+                      <a:r>
+                        <a:rPr sz="1200" b="0"/>
+                        <a:t>0.279→0.466</a:t>
+                      </a:r>
+                    </a:p>
+                  </a:txBody>
+                  <a:tcPr anchor="ctr"/>
+                </a:tc>
+                <a:tc>
+                  <a:txBody>
+                    <a:bodyPr/>
+                    <a:lstStyle/>
+                    <a:p>
+                      <a:pPr algn="ctr"/>
+                      <a:r>
+                        <a:rPr sz="1200" b="0"/>
+                        <a:t>0.715→0.722</a:t>
+                      </a:r>
+                    </a:p>
+                  </a:txBody>
+                  <a:tcPr anchor="ctr"/>
+                </a:tc>
+                <a:tc>
+                  <a:txBody>
+                    <a:bodyPr/>
+                    <a:lstStyle/>
+                    <a:p>
+                      <a:pPr algn="ctr"/>
+                      <a:r>
+                        <a:rPr sz="1200" b="0"/>
+                        <a:t>0.771→0.787</a:t>
+                      </a:r>
+                    </a:p>
+                  </a:txBody>
+                  <a:tcPr anchor="ctr"/>
+                </a:tc>
+                <a:tc>
+                  <a:txBody>
+                    <a:bodyPr/>
+                    <a:lstStyle/>
+                    <a:p>
+                      <a:pPr algn="ctr"/>
+                      <a:r>
+                        <a:rPr sz="1200" b="0"/>
+                        <a:t>0.578→0.538</a:t>
+                      </a:r>
+                    </a:p>
+                  </a:txBody>
+                  <a:tcPr anchor="ctr"/>
+                </a:tc>
+              </a:tr>
+              <a:tr h="488571">
+                <a:tc rowSpan="2">
+                  <a:txBody>
+                    <a:bodyPr/>
+                    <a:lstStyle/>
+                    <a:p>
+                      <a:pPr algn="ctr"/>
+                      <a:r>
+                        <a:rPr sz="1200" b="0"/>
+                        <a:t>당뇨병(DM)</a:t>
+                      </a:r>
+                    </a:p>
+                  </a:txBody>
+                  <a:tcPr anchor="ctr"/>
+                </a:tc>
+                <a:tc>
+                  <a:txBody>
+                    <a:bodyPr/>
+                    <a:lstStyle/>
+                    <a:p>
+                      <a:pPr algn="ctr"/>
+                      <a:r>
+                        <a:rPr sz="1200" b="0"/>
+                        <a:t>Internal (Gangnam)</a:t>
+                      </a:r>
+                    </a:p>
+                  </a:txBody>
+                  <a:tcPr anchor="ctr"/>
+                </a:tc>
+                <a:tc>
+                  <a:txBody>
+                    <a:bodyPr/>
+                    <a:lstStyle/>
+                    <a:p>
+                      <a:pPr algn="ctr"/>
+                      <a:r>
+                        <a:rPr sz="1200" b="0"/>
+                        <a:t>0.545→0.395</a:t>
+                      </a:r>
+                    </a:p>
+                  </a:txBody>
+                  <a:tcPr anchor="ctr"/>
+                </a:tc>
+                <a:tc>
+                  <a:txBody>
+                    <a:bodyPr/>
+                    <a:lstStyle/>
+                    <a:p>
+                      <a:pPr algn="ctr"/>
+                      <a:r>
+                        <a:rPr sz="1200" b="0"/>
+                        <a:t>0.661→0.761</a:t>
+                      </a:r>
+                    </a:p>
+                  </a:txBody>
+                  <a:tcPr anchor="ctr"/>
+                </a:tc>
+                <a:tc>
+                  <a:txBody>
+                    <a:bodyPr/>
+                    <a:lstStyle/>
+                    <a:p>
+                      <a:pPr algn="ctr"/>
+                      <a:r>
+                        <a:rPr sz="1200" b="0"/>
+                        <a:t>0.532→0.915</a:t>
+                      </a:r>
+                    </a:p>
+                  </a:txBody>
+                  <a:tcPr anchor="ctr"/>
+                </a:tc>
+                <a:tc>
+                  <a:txBody>
+                    <a:bodyPr/>
+                    <a:lstStyle/>
+                    <a:p>
+                      <a:pPr algn="ctr"/>
+                      <a:r>
+                        <a:rPr sz="1200" b="0"/>
+                        <a:t>0.698→0.447</a:t>
+                      </a:r>
+                    </a:p>
+                  </a:txBody>
+                  <a:tcPr anchor="ctr"/>
+                </a:tc>
+              </a:tr>
+              <a:tr h="488571">
+                <a:tc vMerge="1">
+                  <a:txBody>
+                    <a:bodyPr/>
+                    <a:lstStyle/>
+                    <a:p/>
+                  </a:txBody>
+                  <a:tcPr/>
+                </a:tc>
+                <a:tc>
+                  <a:txBody>
+                    <a:bodyPr/>
+                    <a:lstStyle/>
+                    <a:p>
+                      <a:pPr algn="ctr"/>
+                      <a:r>
+                        <a:rPr sz="1200" b="0"/>
+                        <a:t>External (Sinchon)</a:t>
+                      </a:r>
+                    </a:p>
+                  </a:txBody>
+                  <a:tcPr anchor="ctr"/>
+                </a:tc>
+                <a:tc>
+                  <a:txBody>
+                    <a:bodyPr/>
+                    <a:lstStyle/>
+                    <a:p>
+                      <a:pPr algn="ctr"/>
+                      <a:r>
+                        <a:rPr sz="1200" b="0"/>
+                        <a:t>0.527→0.445</a:t>
+                      </a:r>
+                    </a:p>
+                  </a:txBody>
+                  <a:tcPr anchor="ctr"/>
+                </a:tc>
+                <a:tc>
+                  <a:txBody>
+                    <a:bodyPr/>
+                    <a:lstStyle/>
+                    <a:p>
+                      <a:pPr algn="ctr"/>
+                      <a:r>
+                        <a:rPr sz="1200" b="0"/>
+                        <a:t>0.649→0.682</a:t>
+                      </a:r>
+                    </a:p>
+                  </a:txBody>
+                  <a:tcPr anchor="ctr"/>
+                </a:tc>
+                <a:tc>
+                  <a:txBody>
+                    <a:bodyPr/>
+                    <a:lstStyle/>
+                    <a:p>
+                      <a:pPr algn="ctr"/>
+                      <a:r>
+                        <a:rPr sz="1200" b="0"/>
+                        <a:t>0.609→0.773</a:t>
+                      </a:r>
+                    </a:p>
+                  </a:txBody>
+                  <a:tcPr anchor="ctr"/>
+                </a:tc>
+                <a:tc>
+                  <a:txBody>
+                    <a:bodyPr/>
+                    <a:lstStyle/>
+                    <a:p>
+                      <a:pPr algn="ctr"/>
+                      <a:r>
+                        <a:rPr sz="1200" b="0"/>
+                        <a:t>0.615→0.478</a:t>
+                      </a:r>
+                    </a:p>
+                  </a:txBody>
+                  <a:tcPr anchor="ctr"/>
+                </a:tc>
+              </a:tr>
+              <a:tr h="488571">
+                <a:tc rowSpan="2">
+                  <a:txBody>
+                    <a:bodyPr/>
+                    <a:lstStyle/>
+                    <a:p>
+                      <a:pPr algn="ctr"/>
+                      <a:r>
+                        <a:rPr sz="1200" b="0"/>
+                        <a:t>만성신장질환(CKD)</a:t>
+                      </a:r>
+                    </a:p>
+                  </a:txBody>
+                  <a:tcPr anchor="ctr"/>
+                </a:tc>
+                <a:tc>
+                  <a:txBody>
+                    <a:bodyPr/>
+                    <a:lstStyle/>
+                    <a:p>
+                      <a:pPr algn="ctr"/>
+                      <a:r>
+                        <a:rPr sz="1200" b="0"/>
+                        <a:t>Internal (Gangnam)</a:t>
+                      </a:r>
+                    </a:p>
+                  </a:txBody>
+                  <a:tcPr anchor="ctr"/>
+                </a:tc>
+                <a:tc>
+                  <a:txBody>
+                    <a:bodyPr/>
+                    <a:lstStyle/>
+                    <a:p>
+                      <a:pPr algn="ctr"/>
+                      <a:r>
+                        <a:rPr sz="1200" b="0"/>
+                        <a:t>0.087→0.545</a:t>
+                      </a:r>
+                    </a:p>
+                  </a:txBody>
+                  <a:tcPr anchor="ctr"/>
+                </a:tc>
+                <a:tc>
+                  <a:txBody>
+                    <a:bodyPr/>
+                    <a:lstStyle/>
+                    <a:p>
+                      <a:pPr algn="ctr"/>
+                      <a:r>
+                        <a:rPr sz="1200" b="0"/>
+                        <a:t>0.765→0.794</a:t>
+                      </a:r>
+                    </a:p>
+                  </a:txBody>
+                  <a:tcPr anchor="ctr"/>
+                </a:tc>
+                <a:tc>
+                  <a:txBody>
+                    <a:bodyPr/>
+                    <a:lstStyle/>
+                    <a:p>
+                      <a:pPr algn="ctr"/>
+                      <a:r>
+                        <a:rPr sz="1200" b="0"/>
+                        <a:t>0.667→0.429</a:t>
+                      </a:r>
+                    </a:p>
+                  </a:txBody>
+                  <a:tcPr anchor="ctr"/>
+                </a:tc>
+                <a:tc>
+                  <a:txBody>
+                    <a:bodyPr/>
+                    <a:lstStyle/>
+                    <a:p>
+                      <a:pPr algn="ctr"/>
+                      <a:r>
+                        <a:rPr sz="1200" b="0"/>
+                        <a:t>0.641→0.857</a:t>
+                      </a:r>
+                    </a:p>
+                  </a:txBody>
+                  <a:tcPr anchor="ctr"/>
+                </a:tc>
+              </a:tr>
+              <a:tr h="488571">
+                <a:tc vMerge="1">
+                  <a:txBody>
+                    <a:bodyPr/>
+                    <a:lstStyle/>
+                    <a:p/>
+                  </a:txBody>
+                  <a:tcPr/>
+                </a:tc>
+                <a:tc>
+                  <a:txBody>
+                    <a:bodyPr/>
+                    <a:lstStyle/>
+                    <a:p>
+                      <a:pPr algn="ctr"/>
+                      <a:r>
+                        <a:rPr sz="1200" b="0"/>
+                        <a:t>External (Sinchon)</a:t>
+                      </a:r>
+                    </a:p>
+                  </a:txBody>
+                  <a:tcPr anchor="ctr"/>
+                </a:tc>
+                <a:tc>
+                  <a:txBody>
+                    <a:bodyPr/>
+                    <a:lstStyle/>
+                    <a:p>
+                      <a:pPr algn="ctr"/>
+                      <a:r>
+                        <a:rPr sz="1200" b="0"/>
+                        <a:t>0.071→0.529</a:t>
+                      </a:r>
+                    </a:p>
+                  </a:txBody>
+                  <a:tcPr anchor="ctr"/>
+                </a:tc>
+                <a:tc>
+                  <a:txBody>
+                    <a:bodyPr/>
+                    <a:lstStyle/>
+                    <a:p>
+                      <a:pPr algn="ctr"/>
+                      <a:r>
+                        <a:rPr sz="1200" b="0"/>
+                        <a:t>0.613→0.600</a:t>
+                      </a:r>
+                    </a:p>
+                  </a:txBody>
+                  <a:tcPr anchor="ctr"/>
+                </a:tc>
+                <a:tc>
+                  <a:txBody>
+                    <a:bodyPr/>
+                    <a:lstStyle/>
+                    <a:p>
+                      <a:pPr algn="ctr"/>
+                      <a:r>
+                        <a:rPr sz="1200" b="0"/>
+                        <a:t>0.638→0.473</a:t>
+                      </a:r>
+                    </a:p>
+                  </a:txBody>
+                  <a:tcPr anchor="ctr"/>
+                </a:tc>
+                <a:tc>
+                  <a:txBody>
+                    <a:bodyPr/>
+                    <a:lstStyle/>
+                    <a:p>
+                      <a:pPr algn="ctr"/>
+                      <a:r>
+                        <a:rPr sz="1200" b="0"/>
+                        <a:t>0.528→0.649</a:t>
+                      </a:r>
+                    </a:p>
+                  </a:txBody>
+                  <a:tcPr anchor="ctr"/>
+                </a:tc>
+              </a:tr>
+            </a:tbl>
+          </a:graphicData>
+        </a:graphic>
+      </p:graphicFrame>
+    </p:spTree>
+  </p:cSld>
+  <p:clrMapOvr>
+    <a:masterClrMapping/>
+  </p:clrMapOvr>
+</p:sld>
+</file>
+
+<file path=ppt/slides/slide14.xml><?xml version="1.0" encoding="utf-8"?>
+<p:sld xmlns:a="http://schemas.openxmlformats.org/drawingml/2006/main" xmlns:p="http://schemas.openxmlformats.org/presentationml/2006/main" xmlns:r="http://schemas.openxmlformats.org/officeDocument/2006/relationships">
+  <p:cSld>
+    <p:spTree>
+      <p:nvGrpSpPr>
+        <p:cNvPr id="1" name=""/>
+        <p:cNvGrpSpPr/>
+        <p:nvPr/>
+      </p:nvGrpSpPr>
+      <p:grpSpPr/>
+      <p:sp>
+        <p:nvSpPr>
+          <p:cNvPr id="2" name="Title 1"/>
+          <p:cNvSpPr>
+            <a:spLocks noGrp="1"/>
+          </p:cNvSpPr>
+          <p:nvPr>
+            <p:ph type="title"/>
+          </p:nvPr>
+        </p:nvSpPr>
+        <p:spPr/>
+        <p:txBody>
+          <a:bodyPr/>
+          <a:lstStyle/>
+          <a:p>
+            <a:r>
+              <a:t>Table S2. Clinic4 Coefficient / Odds Ratio (Internal train+valid)</a:t>
             </a:r>
           </a:p>
         </p:txBody>
@@ -4868,8 +5693,1396 @@
           <p:nvPr/>
         </p:nvGraphicFramePr>
         <p:xfrm>
-          <a:off x="508000" y="3000000"/>
-          <a:ext cx="11176000" cy="3420000"/>
+          <a:off x="508000" y="975360"/>
+          <a:ext cx="11175997" cy="5480000"/>
+        </p:xfrm>
+        <a:graphic>
+          <a:graphicData uri="http://schemas.openxmlformats.org/drawingml/2006/table">
+            <a:tbl>
+              <a:tblPr firstRow="1" bandRow="1">
+                <a:tableStyleId>{5C22544A-7EE6-4342-B048-85BDC9FD1C3A}</a:tableStyleId>
+              </a:tblPr>
+              <a:tblGrid>
+                <a:gridCol w="3378790"/>
+                <a:gridCol w="2599069"/>
+                <a:gridCol w="2599069"/>
+                <a:gridCol w="2599069"/>
+              </a:tblGrid>
+              <a:tr h="421538">
+                <a:tc>
+                  <a:txBody>
+                    <a:bodyPr/>
+                    <a:lstStyle/>
+                    <a:p>
+                      <a:pPr>
+                        <a:defRPr sz="1100" b="1"/>
+                      </a:pPr>
+                      <a:r>
+                        <a:t>Disease</a:t>
+                      </a:r>
+                    </a:p>
+                  </a:txBody>
+                  <a:tcPr/>
+                </a:tc>
+                <a:tc>
+                  <a:txBody>
+                    <a:bodyPr/>
+                    <a:lstStyle/>
+                    <a:p>
+                      <a:pPr>
+                        <a:defRPr sz="1100" b="1"/>
+                      </a:pPr>
+                      <a:r>
+                        <a:t>Term</a:t>
+                      </a:r>
+                    </a:p>
+                  </a:txBody>
+                  <a:tcPr/>
+                </a:tc>
+                <a:tc>
+                  <a:txBody>
+                    <a:bodyPr/>
+                    <a:lstStyle/>
+                    <a:p>
+                      <a:pPr>
+                        <a:defRPr sz="1100" b="1"/>
+                      </a:pPr>
+                      <a:r>
+                        <a:t>Coefficient</a:t>
+                      </a:r>
+                    </a:p>
+                  </a:txBody>
+                  <a:tcPr/>
+                </a:tc>
+                <a:tc>
+                  <a:txBody>
+                    <a:bodyPr/>
+                    <a:lstStyle/>
+                    <a:p>
+                      <a:pPr>
+                        <a:defRPr sz="1100" b="1"/>
+                      </a:pPr>
+                      <a:r>
+                        <a:t>Odds Ratio</a:t>
+                      </a:r>
+                    </a:p>
+                  </a:txBody>
+                  <a:tcPr/>
+                </a:tc>
+              </a:tr>
+              <a:tr h="421538">
+                <a:tc rowSpan="4">
+                  <a:txBody>
+                    <a:bodyPr/>
+                    <a:lstStyle/>
+                    <a:p>
+                      <a:pPr>
+                        <a:defRPr sz="1100"/>
+                      </a:pPr>
+                      <a:r>
+                        <a:t>고혈압(HTN)</a:t>
+                      </a:r>
+                    </a:p>
+                  </a:txBody>
+                  <a:tcPr anchor="ctr"/>
+                </a:tc>
+                <a:tc>
+                  <a:txBody>
+                    <a:bodyPr/>
+                    <a:lstStyle/>
+                    <a:p>
+                      <a:pPr>
+                        <a:defRPr sz="1100"/>
+                      </a:pPr>
+                      <a:r>
+                        <a:t>Sex(M)</a:t>
+                      </a:r>
+                    </a:p>
+                  </a:txBody>
+                  <a:tcPr/>
+                </a:tc>
+                <a:tc>
+                  <a:txBody>
+                    <a:bodyPr/>
+                    <a:lstStyle/>
+                    <a:p>
+                      <a:pPr>
+                        <a:defRPr sz="1100"/>
+                      </a:pPr>
+                      <a:r>
+                        <a:rPr sz="1100" b="0"/>
+                        <a:t>1.086</a:t>
+                      </a:r>
+                    </a:p>
+                  </a:txBody>
+                  <a:tcPr/>
+                </a:tc>
+                <a:tc>
+                  <a:txBody>
+                    <a:bodyPr/>
+                    <a:lstStyle/>
+                    <a:p>
+                      <a:pPr>
+                        <a:defRPr sz="1100"/>
+                      </a:pPr>
+                      <a:r>
+                        <a:rPr sz="1100" b="0"/>
+                        <a:t>2.962</a:t>
+                      </a:r>
+                    </a:p>
+                  </a:txBody>
+                  <a:tcPr/>
+                </a:tc>
+              </a:tr>
+              <a:tr h="421538">
+                <a:tc vMerge="1">
+                  <a:txBody>
+                    <a:bodyPr/>
+                    <a:lstStyle/>
+                    <a:p/>
+                  </a:txBody>
+                  <a:tcPr/>
+                </a:tc>
+                <a:tc>
+                  <a:txBody>
+                    <a:bodyPr/>
+                    <a:lstStyle/>
+                    <a:p>
+                      <a:pPr>
+                        <a:defRPr sz="1100"/>
+                      </a:pPr>
+                      <a:r>
+                        <a:t>Age</a:t>
+                      </a:r>
+                    </a:p>
+                  </a:txBody>
+                  <a:tcPr/>
+                </a:tc>
+                <a:tc>
+                  <a:txBody>
+                    <a:bodyPr/>
+                    <a:lstStyle/>
+                    <a:p>
+                      <a:pPr>
+                        <a:defRPr sz="1100"/>
+                      </a:pPr>
+                      <a:r>
+                        <a:rPr sz="1100" b="0"/>
+                        <a:t>1.041</a:t>
+                      </a:r>
+                    </a:p>
+                  </a:txBody>
+                  <a:tcPr/>
+                </a:tc>
+                <a:tc>
+                  <a:txBody>
+                    <a:bodyPr/>
+                    <a:lstStyle/>
+                    <a:p>
+                      <a:pPr>
+                        <a:defRPr sz="1100"/>
+                      </a:pPr>
+                      <a:r>
+                        <a:rPr sz="1100" b="0"/>
+                        <a:t>2.832</a:t>
+                      </a:r>
+                    </a:p>
+                  </a:txBody>
+                  <a:tcPr/>
+                </a:tc>
+              </a:tr>
+              <a:tr h="421538">
+                <a:tc vMerge="1">
+                  <a:txBody>
+                    <a:bodyPr/>
+                    <a:lstStyle/>
+                    <a:p/>
+                  </a:txBody>
+                  <a:tcPr/>
+                </a:tc>
+                <a:tc>
+                  <a:txBody>
+                    <a:bodyPr/>
+                    <a:lstStyle/>
+                    <a:p>
+                      <a:pPr>
+                        <a:defRPr sz="1100"/>
+                      </a:pPr>
+                      <a:r>
+                        <a:t>Height</a:t>
+                      </a:r>
+                    </a:p>
+                  </a:txBody>
+                  <a:tcPr/>
+                </a:tc>
+                <a:tc>
+                  <a:txBody>
+                    <a:bodyPr/>
+                    <a:lstStyle/>
+                    <a:p>
+                      <a:pPr>
+                        <a:defRPr sz="1100"/>
+                      </a:pPr>
+                      <a:r>
+                        <a:rPr sz="1100" b="0"/>
+                        <a:t>-0.460</a:t>
+                      </a:r>
+                    </a:p>
+                  </a:txBody>
+                  <a:tcPr/>
+                </a:tc>
+                <a:tc>
+                  <a:txBody>
+                    <a:bodyPr/>
+                    <a:lstStyle/>
+                    <a:p>
+                      <a:pPr>
+                        <a:defRPr sz="1100"/>
+                      </a:pPr>
+                      <a:r>
+                        <a:rPr sz="1100" b="0"/>
+                        <a:t>0.631</a:t>
+                      </a:r>
+                    </a:p>
+                  </a:txBody>
+                  <a:tcPr/>
+                </a:tc>
+              </a:tr>
+              <a:tr h="421538">
+                <a:tc vMerge="1">
+                  <a:txBody>
+                    <a:bodyPr/>
+                    <a:lstStyle/>
+                    <a:p/>
+                  </a:txBody>
+                  <a:tcPr/>
+                </a:tc>
+                <a:tc>
+                  <a:txBody>
+                    <a:bodyPr/>
+                    <a:lstStyle/>
+                    <a:p>
+                      <a:pPr>
+                        <a:defRPr sz="1100"/>
+                      </a:pPr>
+                      <a:r>
+                        <a:t>Weight</a:t>
+                      </a:r>
+                    </a:p>
+                  </a:txBody>
+                  <a:tcPr/>
+                </a:tc>
+                <a:tc>
+                  <a:txBody>
+                    <a:bodyPr/>
+                    <a:lstStyle/>
+                    <a:p>
+                      <a:pPr>
+                        <a:defRPr sz="1100"/>
+                      </a:pPr>
+                      <a:r>
+                        <a:rPr sz="1100" b="0"/>
+                        <a:t>0.634</a:t>
+                      </a:r>
+                    </a:p>
+                  </a:txBody>
+                  <a:tcPr/>
+                </a:tc>
+                <a:tc>
+                  <a:txBody>
+                    <a:bodyPr/>
+                    <a:lstStyle/>
+                    <a:p>
+                      <a:pPr>
+                        <a:defRPr sz="1100"/>
+                      </a:pPr>
+                      <a:r>
+                        <a:rPr sz="1100" b="0"/>
+                        <a:t>1.886</a:t>
+                      </a:r>
+                    </a:p>
+                  </a:txBody>
+                  <a:tcPr/>
+                </a:tc>
+              </a:tr>
+              <a:tr h="421538">
+                <a:tc rowSpan="4">
+                  <a:txBody>
+                    <a:bodyPr/>
+                    <a:lstStyle/>
+                    <a:p>
+                      <a:pPr>
+                        <a:defRPr sz="1100"/>
+                      </a:pPr>
+                      <a:r>
+                        <a:t>당뇨병(DM)</a:t>
+                      </a:r>
+                    </a:p>
+                  </a:txBody>
+                  <a:tcPr anchor="ctr"/>
+                </a:tc>
+                <a:tc>
+                  <a:txBody>
+                    <a:bodyPr/>
+                    <a:lstStyle/>
+                    <a:p>
+                      <a:pPr>
+                        <a:defRPr sz="1100"/>
+                      </a:pPr>
+                      <a:r>
+                        <a:t>Sex(M)</a:t>
+                      </a:r>
+                    </a:p>
+                  </a:txBody>
+                  <a:tcPr/>
+                </a:tc>
+                <a:tc>
+                  <a:txBody>
+                    <a:bodyPr/>
+                    <a:lstStyle/>
+                    <a:p>
+                      <a:pPr>
+                        <a:defRPr sz="1100"/>
+                      </a:pPr>
+                      <a:r>
+                        <a:rPr sz="1100" b="0"/>
+                        <a:t>0.601</a:t>
+                      </a:r>
+                    </a:p>
+                  </a:txBody>
+                  <a:tcPr/>
+                </a:tc>
+                <a:tc>
+                  <a:txBody>
+                    <a:bodyPr/>
+                    <a:lstStyle/>
+                    <a:p>
+                      <a:pPr>
+                        <a:defRPr sz="1100"/>
+                      </a:pPr>
+                      <a:r>
+                        <a:rPr sz="1100" b="0"/>
+                        <a:t>1.824</a:t>
+                      </a:r>
+                    </a:p>
+                  </a:txBody>
+                  <a:tcPr/>
+                </a:tc>
+              </a:tr>
+              <a:tr h="421538">
+                <a:tc vMerge="1">
+                  <a:txBody>
+                    <a:bodyPr/>
+                    <a:lstStyle/>
+                    <a:p/>
+                  </a:txBody>
+                  <a:tcPr/>
+                </a:tc>
+                <a:tc>
+                  <a:txBody>
+                    <a:bodyPr/>
+                    <a:lstStyle/>
+                    <a:p>
+                      <a:pPr>
+                        <a:defRPr sz="1100"/>
+                      </a:pPr>
+                      <a:r>
+                        <a:t>Age</a:t>
+                      </a:r>
+                    </a:p>
+                  </a:txBody>
+                  <a:tcPr/>
+                </a:tc>
+                <a:tc>
+                  <a:txBody>
+                    <a:bodyPr/>
+                    <a:lstStyle/>
+                    <a:p>
+                      <a:pPr>
+                        <a:defRPr sz="1100"/>
+                      </a:pPr>
+                      <a:r>
+                        <a:rPr sz="1100" b="0"/>
+                        <a:t>0.526</a:t>
+                      </a:r>
+                    </a:p>
+                  </a:txBody>
+                  <a:tcPr/>
+                </a:tc>
+                <a:tc>
+                  <a:txBody>
+                    <a:bodyPr/>
+                    <a:lstStyle/>
+                    <a:p>
+                      <a:pPr>
+                        <a:defRPr sz="1100"/>
+                      </a:pPr>
+                      <a:r>
+                        <a:rPr sz="1100" b="0"/>
+                        <a:t>1.692</a:t>
+                      </a:r>
+                    </a:p>
+                  </a:txBody>
+                  <a:tcPr/>
+                </a:tc>
+              </a:tr>
+              <a:tr h="421538">
+                <a:tc vMerge="1">
+                  <a:txBody>
+                    <a:bodyPr/>
+                    <a:lstStyle/>
+                    <a:p/>
+                  </a:txBody>
+                  <a:tcPr/>
+                </a:tc>
+                <a:tc>
+                  <a:txBody>
+                    <a:bodyPr/>
+                    <a:lstStyle/>
+                    <a:p>
+                      <a:pPr>
+                        <a:defRPr sz="1100"/>
+                      </a:pPr>
+                      <a:r>
+                        <a:t>Height</a:t>
+                      </a:r>
+                    </a:p>
+                  </a:txBody>
+                  <a:tcPr/>
+                </a:tc>
+                <a:tc>
+                  <a:txBody>
+                    <a:bodyPr/>
+                    <a:lstStyle/>
+                    <a:p>
+                      <a:pPr>
+                        <a:defRPr sz="1100"/>
+                      </a:pPr>
+                      <a:r>
+                        <a:rPr sz="1100" b="0"/>
+                        <a:t>-0.346</a:t>
+                      </a:r>
+                    </a:p>
+                  </a:txBody>
+                  <a:tcPr/>
+                </a:tc>
+                <a:tc>
+                  <a:txBody>
+                    <a:bodyPr/>
+                    <a:lstStyle/>
+                    <a:p>
+                      <a:pPr>
+                        <a:defRPr sz="1100"/>
+                      </a:pPr>
+                      <a:r>
+                        <a:rPr sz="1100" b="0"/>
+                        <a:t>0.707</a:t>
+                      </a:r>
+                    </a:p>
+                  </a:txBody>
+                  <a:tcPr/>
+                </a:tc>
+              </a:tr>
+              <a:tr h="421538">
+                <a:tc vMerge="1">
+                  <a:txBody>
+                    <a:bodyPr/>
+                    <a:lstStyle/>
+                    <a:p/>
+                  </a:txBody>
+                  <a:tcPr/>
+                </a:tc>
+                <a:tc>
+                  <a:txBody>
+                    <a:bodyPr/>
+                    <a:lstStyle/>
+                    <a:p>
+                      <a:pPr>
+                        <a:defRPr sz="1100"/>
+                      </a:pPr>
+                      <a:r>
+                        <a:t>Weight</a:t>
+                      </a:r>
+                    </a:p>
+                  </a:txBody>
+                  <a:tcPr/>
+                </a:tc>
+                <a:tc>
+                  <a:txBody>
+                    <a:bodyPr/>
+                    <a:lstStyle/>
+                    <a:p>
+                      <a:pPr>
+                        <a:defRPr sz="1100"/>
+                      </a:pPr>
+                      <a:r>
+                        <a:rPr sz="1100" b="0"/>
+                        <a:t>0.693</a:t>
+                      </a:r>
+                    </a:p>
+                  </a:txBody>
+                  <a:tcPr/>
+                </a:tc>
+                <a:tc>
+                  <a:txBody>
+                    <a:bodyPr/>
+                    <a:lstStyle/>
+                    <a:p>
+                      <a:pPr>
+                        <a:defRPr sz="1100"/>
+                      </a:pPr>
+                      <a:r>
+                        <a:rPr sz="1100" b="0"/>
+                        <a:t>1.999</a:t>
+                      </a:r>
+                    </a:p>
+                  </a:txBody>
+                  <a:tcPr/>
+                </a:tc>
+              </a:tr>
+              <a:tr h="421538">
+                <a:tc rowSpan="4">
+                  <a:txBody>
+                    <a:bodyPr/>
+                    <a:lstStyle/>
+                    <a:p>
+                      <a:pPr>
+                        <a:defRPr sz="1100"/>
+                      </a:pPr>
+                      <a:r>
+                        <a:t>만성신장질환(CKD)</a:t>
+                      </a:r>
+                    </a:p>
+                  </a:txBody>
+                  <a:tcPr anchor="ctr"/>
+                </a:tc>
+                <a:tc>
+                  <a:txBody>
+                    <a:bodyPr/>
+                    <a:lstStyle/>
+                    <a:p>
+                      <a:pPr>
+                        <a:defRPr sz="1100"/>
+                      </a:pPr>
+                      <a:r>
+                        <a:t>Sex(M)</a:t>
+                      </a:r>
+                    </a:p>
+                  </a:txBody>
+                  <a:tcPr/>
+                </a:tc>
+                <a:tc>
+                  <a:txBody>
+                    <a:bodyPr/>
+                    <a:lstStyle/>
+                    <a:p>
+                      <a:pPr>
+                        <a:defRPr sz="1100"/>
+                      </a:pPr>
+                      <a:r>
+                        <a:rPr sz="1100" b="0"/>
+                        <a:t>1.653</a:t>
+                      </a:r>
+                    </a:p>
+                  </a:txBody>
+                  <a:tcPr/>
+                </a:tc>
+                <a:tc>
+                  <a:txBody>
+                    <a:bodyPr/>
+                    <a:lstStyle/>
+                    <a:p>
+                      <a:pPr>
+                        <a:defRPr sz="1100"/>
+                      </a:pPr>
+                      <a:r>
+                        <a:rPr sz="1100" b="0"/>
+                        <a:t>5.221</a:t>
+                      </a:r>
+                    </a:p>
+                  </a:txBody>
+                  <a:tcPr/>
+                </a:tc>
+              </a:tr>
+              <a:tr h="421538">
+                <a:tc vMerge="1">
+                  <a:txBody>
+                    <a:bodyPr/>
+                    <a:lstStyle/>
+                    <a:p/>
+                  </a:txBody>
+                  <a:tcPr/>
+                </a:tc>
+                <a:tc>
+                  <a:txBody>
+                    <a:bodyPr/>
+                    <a:lstStyle/>
+                    <a:p>
+                      <a:pPr>
+                        <a:defRPr sz="1100"/>
+                      </a:pPr>
+                      <a:r>
+                        <a:t>Age</a:t>
+                      </a:r>
+                    </a:p>
+                  </a:txBody>
+                  <a:tcPr/>
+                </a:tc>
+                <a:tc>
+                  <a:txBody>
+                    <a:bodyPr/>
+                    <a:lstStyle/>
+                    <a:p>
+                      <a:pPr>
+                        <a:defRPr sz="1100"/>
+                      </a:pPr>
+                      <a:r>
+                        <a:rPr sz="1100" b="0"/>
+                        <a:t>0.579</a:t>
+                      </a:r>
+                    </a:p>
+                  </a:txBody>
+                  <a:tcPr/>
+                </a:tc>
+                <a:tc>
+                  <a:txBody>
+                    <a:bodyPr/>
+                    <a:lstStyle/>
+                    <a:p>
+                      <a:pPr>
+                        <a:defRPr sz="1100"/>
+                      </a:pPr>
+                      <a:r>
+                        <a:rPr sz="1100" b="0"/>
+                        <a:t>1.785</a:t>
+                      </a:r>
+                    </a:p>
+                  </a:txBody>
+                  <a:tcPr/>
+                </a:tc>
+              </a:tr>
+              <a:tr h="421538">
+                <a:tc vMerge="1">
+                  <a:txBody>
+                    <a:bodyPr/>
+                    <a:lstStyle/>
+                    <a:p/>
+                  </a:txBody>
+                  <a:tcPr/>
+                </a:tc>
+                <a:tc>
+                  <a:txBody>
+                    <a:bodyPr/>
+                    <a:lstStyle/>
+                    <a:p>
+                      <a:pPr>
+                        <a:defRPr sz="1100"/>
+                      </a:pPr>
+                      <a:r>
+                        <a:t>Height</a:t>
+                      </a:r>
+                    </a:p>
+                  </a:txBody>
+                  <a:tcPr/>
+                </a:tc>
+                <a:tc>
+                  <a:txBody>
+                    <a:bodyPr/>
+                    <a:lstStyle/>
+                    <a:p>
+                      <a:pPr>
+                        <a:defRPr sz="1100"/>
+                      </a:pPr>
+                      <a:r>
+                        <a:rPr sz="1100" b="0"/>
+                        <a:t>-0.551</a:t>
+                      </a:r>
+                    </a:p>
+                  </a:txBody>
+                  <a:tcPr/>
+                </a:tc>
+                <a:tc>
+                  <a:txBody>
+                    <a:bodyPr/>
+                    <a:lstStyle/>
+                    <a:p>
+                      <a:pPr>
+                        <a:defRPr sz="1100"/>
+                      </a:pPr>
+                      <a:r>
+                        <a:rPr sz="1100" b="0"/>
+                        <a:t>0.576</a:t>
+                      </a:r>
+                    </a:p>
+                  </a:txBody>
+                  <a:tcPr/>
+                </a:tc>
+              </a:tr>
+              <a:tr h="421544">
+                <a:tc vMerge="1">
+                  <a:txBody>
+                    <a:bodyPr/>
+                    <a:lstStyle/>
+                    <a:p/>
+                  </a:txBody>
+                  <a:tcPr/>
+                </a:tc>
+                <a:tc>
+                  <a:txBody>
+                    <a:bodyPr/>
+                    <a:lstStyle/>
+                    <a:p>
+                      <a:pPr>
+                        <a:defRPr sz="1100"/>
+                      </a:pPr>
+                      <a:r>
+                        <a:t>Weight</a:t>
+                      </a:r>
+                    </a:p>
+                  </a:txBody>
+                  <a:tcPr/>
+                </a:tc>
+                <a:tc>
+                  <a:txBody>
+                    <a:bodyPr/>
+                    <a:lstStyle/>
+                    <a:p>
+                      <a:pPr>
+                        <a:defRPr sz="1100"/>
+                      </a:pPr>
+                      <a:r>
+                        <a:rPr sz="1100" b="0"/>
+                        <a:t>0.566</a:t>
+                      </a:r>
+                    </a:p>
+                  </a:txBody>
+                  <a:tcPr/>
+                </a:tc>
+                <a:tc>
+                  <a:txBody>
+                    <a:bodyPr/>
+                    <a:lstStyle/>
+                    <a:p>
+                      <a:pPr>
+                        <a:defRPr sz="1100"/>
+                      </a:pPr>
+                      <a:r>
+                        <a:rPr sz="1100" b="0"/>
+                        <a:t>1.761</a:t>
+                      </a:r>
+                    </a:p>
+                  </a:txBody>
+                  <a:tcPr/>
+                </a:tc>
+              </a:tr>
+            </a:tbl>
+          </a:graphicData>
+        </a:graphic>
+      </p:graphicFrame>
+    </p:spTree>
+  </p:cSld>
+  <p:clrMapOvr>
+    <a:masterClrMapping/>
+  </p:clrMapOvr>
+</p:sld>
+</file>
+
+<file path=ppt/slides/slide15.xml><?xml version="1.0" encoding="utf-8"?>
+<p:sld xmlns:a="http://schemas.openxmlformats.org/drawingml/2006/main" xmlns:p="http://schemas.openxmlformats.org/presentationml/2006/main" xmlns:r="http://schemas.openxmlformats.org/officeDocument/2006/relationships">
+  <p:cSld>
+    <p:spTree>
+      <p:nvGrpSpPr>
+        <p:cNvPr id="1" name=""/>
+        <p:cNvGrpSpPr/>
+        <p:nvPr/>
+      </p:nvGrpSpPr>
+      <p:grpSpPr/>
+      <p:sp>
+        <p:nvSpPr>
+          <p:cNvPr id="2" name="Title 1"/>
+          <p:cNvSpPr>
+            <a:spLocks noGrp="1"/>
+          </p:cNvSpPr>
+          <p:nvPr>
+            <p:ph type="title"/>
+          </p:nvPr>
+        </p:nvSpPr>
+        <p:spPr/>
+        <p:txBody>
+          <a:bodyPr/>
+          <a:lstStyle/>
+          <a:p>
+            <a:r>
+              <a:t>Table S3. AEC 변형 비교 - FPCA+ratio vs FPCA-only vs ratio-only (VIF 다중공선성 확인)</a:t>
+            </a:r>
+          </a:p>
+        </p:txBody>
+      </p:sp>
+      <p:graphicFrame>
+        <p:nvGraphicFramePr>
+          <p:cNvPr id="3" name="Table 2"/>
+          <p:cNvGraphicFramePr>
+            <a:graphicFrameLocks noGrp="1"/>
+          </p:cNvGraphicFramePr>
+          <p:nvPr/>
+        </p:nvGraphicFramePr>
+        <p:xfrm>
+          <a:off x="512064" y="978408"/>
+          <a:ext cx="11173965" cy="5124630"/>
+        </p:xfrm>
+        <a:graphic>
+          <a:graphicData uri="http://schemas.openxmlformats.org/drawingml/2006/table">
+            <a:tbl>
+              <a:tblPr firstRow="1" bandRow="1">
+                <a:tableStyleId>{C083E6E3-FA7D-4D7B-A595-EF9225AFEA82}</a:tableStyleId>
+              </a:tblPr>
+              <a:tblGrid>
+                <a:gridCol w="2234793"/>
+                <a:gridCol w="2234793"/>
+                <a:gridCol w="2234793"/>
+                <a:gridCol w="2234793"/>
+                <a:gridCol w="2234793"/>
+              </a:tblGrid>
+              <a:tr h="732090">
+                <a:tc>
+                  <a:txBody>
+                    <a:bodyPr/>
+                    <a:lstStyle/>
+                    <a:p>
+                      <a:pPr algn="ctr"/>
+                      <a:r>
+                        <a:rPr sz="1200" b="1"/>
+                        <a:t>Disease</a:t>
+                      </a:r>
+                    </a:p>
+                  </a:txBody>
+                  <a:tcPr anchor="ctr"/>
+                </a:tc>
+                <a:tc>
+                  <a:txBody>
+                    <a:bodyPr/>
+                    <a:lstStyle/>
+                    <a:p>
+                      <a:pPr algn="ctr"/>
+                      <a:r>
+                        <a:rPr sz="1200" b="1"/>
+                        <a:t>Cohort</a:t>
+                      </a:r>
+                    </a:p>
+                  </a:txBody>
+                  <a:tcPr anchor="ctr"/>
+                </a:tc>
+                <a:tc>
+                  <a:txBody>
+                    <a:bodyPr/>
+                    <a:lstStyle/>
+                    <a:p>
+                      <a:pPr algn="ctr"/>
+                      <a:r>
+                        <a:rPr sz="1200" b="1"/>
+                        <a:t>AUC (FPCA+ratio)</a:t>
+                      </a:r>
+                    </a:p>
+                  </a:txBody>
+                  <a:tcPr anchor="ctr"/>
+                </a:tc>
+                <a:tc>
+                  <a:txBody>
+                    <a:bodyPr/>
+                    <a:lstStyle/>
+                    <a:p>
+                      <a:pPr algn="ctr"/>
+                      <a:r>
+                        <a:rPr sz="1200" b="1"/>
+                        <a:t>AUC (FPCA-only)</a:t>
+                      </a:r>
+                    </a:p>
+                  </a:txBody>
+                  <a:tcPr anchor="ctr"/>
+                </a:tc>
+                <a:tc>
+                  <a:txBody>
+                    <a:bodyPr/>
+                    <a:lstStyle/>
+                    <a:p>
+                      <a:pPr algn="ctr"/>
+                      <a:r>
+                        <a:rPr sz="1200" b="1"/>
+                        <a:t>AUC (ratio-only)</a:t>
+                      </a:r>
+                    </a:p>
+                  </a:txBody>
+                  <a:tcPr anchor="ctr"/>
+                </a:tc>
+              </a:tr>
+              <a:tr h="732090">
+                <a:tc rowSpan="2">
+                  <a:txBody>
+                    <a:bodyPr/>
+                    <a:lstStyle/>
+                    <a:p>
+                      <a:pPr algn="ctr"/>
+                      <a:r>
+                        <a:rPr sz="1200" b="0"/>
+                        <a:t>고혈압(HTN)</a:t>
+                      </a:r>
+                    </a:p>
+                  </a:txBody>
+                  <a:tcPr anchor="ctr"/>
+                </a:tc>
+                <a:tc>
+                  <a:txBody>
+                    <a:bodyPr/>
+                    <a:lstStyle/>
+                    <a:p>
+                      <a:pPr algn="ctr"/>
+                      <a:r>
+                        <a:rPr sz="1200" b="0"/>
+                        <a:t>Internal (Gangnam)</a:t>
+                      </a:r>
+                    </a:p>
+                  </a:txBody>
+                  <a:tcPr anchor="ctr"/>
+                </a:tc>
+                <a:tc>
+                  <a:txBody>
+                    <a:bodyPr/>
+                    <a:lstStyle/>
+                    <a:p>
+                      <a:pPr algn="ctr"/>
+                      <a:r>
+                        <a:rPr sz="1200" b="0"/>
+                        <a:t>0.778</a:t>
+                      </a:r>
+                    </a:p>
+                  </a:txBody>
+                  <a:tcPr anchor="ctr"/>
+                </a:tc>
+                <a:tc>
+                  <a:txBody>
+                    <a:bodyPr/>
+                    <a:lstStyle/>
+                    <a:p>
+                      <a:pPr algn="ctr"/>
+                      <a:r>
+                        <a:rPr sz="1200" b="0"/>
+                        <a:t>0.775</a:t>
+                      </a:r>
+                    </a:p>
+                  </a:txBody>
+                  <a:tcPr anchor="ctr"/>
+                </a:tc>
+                <a:tc>
+                  <a:txBody>
+                    <a:bodyPr/>
+                    <a:lstStyle/>
+                    <a:p>
+                      <a:pPr algn="ctr"/>
+                      <a:r>
+                        <a:rPr sz="1200" b="0"/>
+                        <a:t>0.767</a:t>
+                      </a:r>
+                    </a:p>
+                  </a:txBody>
+                  <a:tcPr anchor="ctr"/>
+                </a:tc>
+              </a:tr>
+              <a:tr h="732090">
+                <a:tc vMerge="1">
+                  <a:txBody>
+                    <a:bodyPr/>
+                    <a:lstStyle/>
+                    <a:p/>
+                  </a:txBody>
+                  <a:tcPr/>
+                </a:tc>
+                <a:tc>
+                  <a:txBody>
+                    <a:bodyPr/>
+                    <a:lstStyle/>
+                    <a:p>
+                      <a:pPr algn="ctr"/>
+                      <a:r>
+                        <a:rPr sz="1200" b="0"/>
+                        <a:t>External (Sinchon)</a:t>
+                      </a:r>
+                    </a:p>
+                  </a:txBody>
+                  <a:tcPr anchor="ctr"/>
+                </a:tc>
+                <a:tc>
+                  <a:txBody>
+                    <a:bodyPr/>
+                    <a:lstStyle/>
+                    <a:p>
+                      <a:pPr algn="ctr"/>
+                      <a:r>
+                        <a:rPr sz="1200" b="0"/>
+                        <a:t>0.729</a:t>
+                      </a:r>
+                    </a:p>
+                  </a:txBody>
+                  <a:tcPr anchor="ctr"/>
+                </a:tc>
+                <a:tc>
+                  <a:txBody>
+                    <a:bodyPr/>
+                    <a:lstStyle/>
+                    <a:p>
+                      <a:pPr algn="ctr"/>
+                      <a:r>
+                        <a:rPr sz="1200" b="0"/>
+                        <a:t>0.728</a:t>
+                      </a:r>
+                    </a:p>
+                  </a:txBody>
+                  <a:tcPr anchor="ctr"/>
+                </a:tc>
+                <a:tc>
+                  <a:txBody>
+                    <a:bodyPr/>
+                    <a:lstStyle/>
+                    <a:p>
+                      <a:pPr algn="ctr"/>
+                      <a:r>
+                        <a:rPr sz="1200" b="0"/>
+                        <a:t>0.726</a:t>
+                      </a:r>
+                    </a:p>
+                  </a:txBody>
+                  <a:tcPr anchor="ctr"/>
+                </a:tc>
+              </a:tr>
+              <a:tr h="732090">
+                <a:tc rowSpan="2">
+                  <a:txBody>
+                    <a:bodyPr/>
+                    <a:lstStyle/>
+                    <a:p>
+                      <a:pPr algn="ctr"/>
+                      <a:r>
+                        <a:rPr sz="1200" b="0"/>
+                        <a:t>당뇨병(DM)</a:t>
+                      </a:r>
+                    </a:p>
+                  </a:txBody>
+                  <a:tcPr anchor="ctr"/>
+                </a:tc>
+                <a:tc>
+                  <a:txBody>
+                    <a:bodyPr/>
+                    <a:lstStyle/>
+                    <a:p>
+                      <a:pPr algn="ctr"/>
+                      <a:r>
+                        <a:rPr sz="1200" b="0"/>
+                        <a:t>Internal (Gangnam)</a:t>
+                      </a:r>
+                    </a:p>
+                  </a:txBody>
+                  <a:tcPr anchor="ctr"/>
+                </a:tc>
+                <a:tc>
+                  <a:txBody>
+                    <a:bodyPr/>
+                    <a:lstStyle/>
+                    <a:p>
+                      <a:pPr algn="ctr"/>
+                      <a:r>
+                        <a:rPr sz="1200" b="0"/>
+                        <a:t>0.679</a:t>
+                      </a:r>
+                    </a:p>
+                  </a:txBody>
+                  <a:tcPr anchor="ctr"/>
+                </a:tc>
+                <a:tc>
+                  <a:txBody>
+                    <a:bodyPr/>
+                    <a:lstStyle/>
+                    <a:p>
+                      <a:pPr algn="ctr"/>
+                      <a:r>
+                        <a:rPr sz="1200" b="0"/>
+                        <a:t>0.675</a:t>
+                      </a:r>
+                    </a:p>
+                  </a:txBody>
+                  <a:tcPr anchor="ctr"/>
+                </a:tc>
+                <a:tc>
+                  <a:txBody>
+                    <a:bodyPr/>
+                    <a:lstStyle/>
+                    <a:p>
+                      <a:pPr algn="ctr"/>
+                      <a:r>
+                        <a:rPr sz="1200" b="0"/>
+                        <a:t>0.656</a:t>
+                      </a:r>
+                    </a:p>
+                  </a:txBody>
+                  <a:tcPr anchor="ctr"/>
+                </a:tc>
+              </a:tr>
+              <a:tr h="732090">
+                <a:tc vMerge="1">
+                  <a:txBody>
+                    <a:bodyPr/>
+                    <a:lstStyle/>
+                    <a:p/>
+                  </a:txBody>
+                  <a:tcPr/>
+                </a:tc>
+                <a:tc>
+                  <a:txBody>
+                    <a:bodyPr/>
+                    <a:lstStyle/>
+                    <a:p>
+                      <a:pPr algn="ctr"/>
+                      <a:r>
+                        <a:rPr sz="1200" b="0"/>
+                        <a:t>External (Sinchon)</a:t>
+                      </a:r>
+                    </a:p>
+                  </a:txBody>
+                  <a:tcPr anchor="ctr"/>
+                </a:tc>
+                <a:tc>
+                  <a:txBody>
+                    <a:bodyPr/>
+                    <a:lstStyle/>
+                    <a:p>
+                      <a:pPr algn="ctr"/>
+                      <a:r>
+                        <a:rPr sz="1200" b="0"/>
+                        <a:t>0.671</a:t>
+                      </a:r>
+                    </a:p>
+                  </a:txBody>
+                  <a:tcPr anchor="ctr"/>
+                </a:tc>
+                <a:tc>
+                  <a:txBody>
+                    <a:bodyPr/>
+                    <a:lstStyle/>
+                    <a:p>
+                      <a:pPr algn="ctr"/>
+                      <a:r>
+                        <a:rPr sz="1200" b="0"/>
+                        <a:t>0.661</a:t>
+                      </a:r>
+                    </a:p>
+                  </a:txBody>
+                  <a:tcPr anchor="ctr"/>
+                </a:tc>
+                <a:tc>
+                  <a:txBody>
+                    <a:bodyPr/>
+                    <a:lstStyle/>
+                    <a:p>
+                      <a:pPr algn="ctr"/>
+                      <a:r>
+                        <a:rPr sz="1200" b="0"/>
+                        <a:t>0.650</a:t>
+                      </a:r>
+                    </a:p>
+                  </a:txBody>
+                  <a:tcPr anchor="ctr"/>
+                </a:tc>
+              </a:tr>
+              <a:tr h="732090">
+                <a:tc rowSpan="2">
+                  <a:txBody>
+                    <a:bodyPr/>
+                    <a:lstStyle/>
+                    <a:p>
+                      <a:pPr algn="ctr"/>
+                      <a:r>
+                        <a:rPr sz="1200" b="0"/>
+                        <a:t>만성신장질환(CKD)</a:t>
+                      </a:r>
+                    </a:p>
+                  </a:txBody>
+                  <a:tcPr anchor="ctr"/>
+                </a:tc>
+                <a:tc>
+                  <a:txBody>
+                    <a:bodyPr/>
+                    <a:lstStyle/>
+                    <a:p>
+                      <a:pPr algn="ctr"/>
+                      <a:r>
+                        <a:rPr sz="1200" b="0"/>
+                        <a:t>Internal (Gangnam)</a:t>
+                      </a:r>
+                    </a:p>
+                  </a:txBody>
+                  <a:tcPr anchor="ctr"/>
+                </a:tc>
+                <a:tc>
+                  <a:txBody>
+                    <a:bodyPr/>
+                    <a:lstStyle/>
+                    <a:p>
+                      <a:pPr algn="ctr"/>
+                      <a:r>
+                        <a:rPr sz="1200" b="0"/>
+                        <a:t>0.755</a:t>
+                      </a:r>
+                    </a:p>
+                  </a:txBody>
+                  <a:tcPr anchor="ctr"/>
+                </a:tc>
+                <a:tc>
+                  <a:txBody>
+                    <a:bodyPr/>
+                    <a:lstStyle/>
+                    <a:p>
+                      <a:pPr algn="ctr"/>
+                      <a:r>
+                        <a:rPr sz="1200" b="0"/>
+                        <a:t>0.731</a:t>
+                      </a:r>
+                    </a:p>
+                  </a:txBody>
+                  <a:tcPr anchor="ctr"/>
+                </a:tc>
+                <a:tc>
+                  <a:txBody>
+                    <a:bodyPr/>
+                    <a:lstStyle/>
+                    <a:p>
+                      <a:pPr algn="ctr"/>
+                      <a:r>
+                        <a:rPr sz="1200" b="0"/>
+                        <a:t>0.750</a:t>
+                      </a:r>
+                    </a:p>
+                  </a:txBody>
+                  <a:tcPr anchor="ctr"/>
+                </a:tc>
+              </a:tr>
+              <a:tr h="732090">
+                <a:tc vMerge="1">
+                  <a:txBody>
+                    <a:bodyPr/>
+                    <a:lstStyle/>
+                    <a:p/>
+                  </a:txBody>
+                  <a:tcPr/>
+                </a:tc>
+                <a:tc>
+                  <a:txBody>
+                    <a:bodyPr/>
+                    <a:lstStyle/>
+                    <a:p>
+                      <a:pPr algn="ctr"/>
+                      <a:r>
+                        <a:rPr sz="1200" b="0"/>
+                        <a:t>External (Sinchon)</a:t>
+                      </a:r>
+                    </a:p>
+                  </a:txBody>
+                  <a:tcPr anchor="ctr"/>
+                </a:tc>
+                <a:tc>
+                  <a:txBody>
+                    <a:bodyPr/>
+                    <a:lstStyle/>
+                    <a:p>
+                      <a:pPr algn="ctr"/>
+                      <a:r>
+                        <a:rPr sz="1200" b="0"/>
+                        <a:t>0.630</a:t>
+                      </a:r>
+                    </a:p>
+                  </a:txBody>
+                  <a:tcPr anchor="ctr"/>
+                </a:tc>
+                <a:tc>
+                  <a:txBody>
+                    <a:bodyPr/>
+                    <a:lstStyle/>
+                    <a:p>
+                      <a:pPr algn="ctr"/>
+                      <a:r>
+                        <a:rPr sz="1200" b="0"/>
+                        <a:t>0.652</a:t>
+                      </a:r>
+                    </a:p>
+                  </a:txBody>
+                  <a:tcPr anchor="ctr"/>
+                </a:tc>
+                <a:tc>
+                  <a:txBody>
+                    <a:bodyPr/>
+                    <a:lstStyle/>
+                    <a:p>
+                      <a:pPr algn="ctr"/>
+                      <a:r>
+                        <a:rPr sz="1200" b="0"/>
+                        <a:t>0.635</a:t>
+                      </a:r>
+                    </a:p>
+                  </a:txBody>
+                  <a:tcPr anchor="ctr"/>
+                </a:tc>
+              </a:tr>
+            </a:tbl>
+          </a:graphicData>
+        </a:graphic>
+      </p:graphicFrame>
+    </p:spTree>
+  </p:cSld>
+  <p:clrMapOvr>
+    <a:masterClrMapping/>
+  </p:clrMapOvr>
+</p:sld>
+</file>
+
+<file path=ppt/slides/slide16.xml><?xml version="1.0" encoding="utf-8"?>
+<p:sld xmlns:a="http://schemas.openxmlformats.org/drawingml/2006/main" xmlns:p="http://schemas.openxmlformats.org/presentationml/2006/main" xmlns:r="http://schemas.openxmlformats.org/officeDocument/2006/relationships">
+  <p:cSld>
+    <p:spTree>
+      <p:nvGrpSpPr>
+        <p:cNvPr id="1" name=""/>
+        <p:cNvGrpSpPr/>
+        <p:nvPr/>
+      </p:nvGrpSpPr>
+      <p:grpSpPr/>
+      <p:sp>
+        <p:nvSpPr>
+          <p:cNvPr id="2" name="Title 1"/>
+          <p:cNvSpPr>
+            <a:spLocks noGrp="1"/>
+          </p:cNvSpPr>
+          <p:nvPr>
+            <p:ph type="title"/>
+          </p:nvPr>
+        </p:nvSpPr>
+        <p:spPr/>
+        <p:txBody>
+          <a:bodyPr/>
+          <a:lstStyle/>
+          <a:p>
+            <a:r>
+              <a:t>Table S4. +AEC FPCA-only Coefficient (Internal, * p&lt;0.05, 보정 전)</a:t>
+            </a:r>
+          </a:p>
+        </p:txBody>
+      </p:sp>
+      <p:graphicFrame>
+        <p:nvGraphicFramePr>
+          <p:cNvPr id="3" name="Table 2"/>
+          <p:cNvGraphicFramePr>
+            <a:graphicFrameLocks noGrp="1"/>
+          </p:cNvGraphicFramePr>
+          <p:nvPr/>
+        </p:nvGraphicFramePr>
+        <p:xfrm>
+          <a:off x="508000" y="975360"/>
+          <a:ext cx="11176000" cy="5480000"/>
         </p:xfrm>
         <a:graphic>
           <a:graphicData uri="http://schemas.openxmlformats.org/drawingml/2006/table">
@@ -4884,7 +7097,7 @@
                 <a:gridCol w="2235200"/>
                 <a:gridCol w="2235200"/>
               </a:tblGrid>
-              <a:tr h="380000">
+              <a:tr h="548000">
                 <a:tc>
                   <a:txBody>
                     <a:bodyPr/>
@@ -4905,7 +7118,7 @@
                     <a:p>
                       <a:r>
                         <a:rPr sz="1100" b="1"/>
-                        <a:t>Cohort</a:t>
+                        <a:t>Term</a:t>
                       </a:r>
                     </a:p>
                   </a:txBody>
@@ -4918,7 +7131,7 @@
                     <a:p>
                       <a:r>
                         <a:rPr sz="1100" b="1"/>
-                        <a:t>AUC (orig→balanced)</a:t>
+                        <a:t>Coefficient</a:t>
                       </a:r>
                     </a:p>
                   </a:txBody>
@@ -4931,7 +7144,7 @@
                     <a:p>
                       <a:r>
                         <a:rPr sz="1100" b="1"/>
-                        <a:t>Sensitivity (orig→balanced)</a:t>
+                        <a:t>Odds Ratio</a:t>
                       </a:r>
                     </a:p>
                   </a:txBody>
@@ -4944,14 +7157,14 @@
                     <a:p>
                       <a:r>
                         <a:rPr sz="1100" b="1"/>
-                        <a:t>Specificity (orig→balanced)</a:t>
+                        <a:t>p-value</a:t>
                       </a:r>
                     </a:p>
                   </a:txBody>
                   <a:tcPr/>
                 </a:tc>
               </a:tr>
-              <a:tr h="380000">
+              <a:tr h="548000">
                 <a:tc>
                   <a:txBody>
                     <a:bodyPr/>
@@ -4972,7 +7185,7 @@
                     <a:p>
                       <a:r>
                         <a:rPr sz="1100" b="0"/>
-                        <a:t>Internal (Gangnam)</a:t>
+                        <a:t>aec_fpca_pc1</a:t>
                       </a:r>
                     </a:p>
                   </a:txBody>
@@ -4985,7 +7198,7 @@
                     <a:p>
                       <a:r>
                         <a:rPr sz="1100" b="0"/>
-                        <a:t>0.761→0.780</a:t>
+                        <a:t>0.337</a:t>
                       </a:r>
                     </a:p>
                   </a:txBody>
@@ -4998,7 +7211,7 @@
                     <a:p>
                       <a:r>
                         <a:rPr sz="1100" b="0"/>
-                        <a:t>0.481→0.766</a:t>
+                        <a:t>1.400</a:t>
                       </a:r>
                     </a:p>
                   </a:txBody>
@@ -5011,14 +7224,14 @@
                     <a:p>
                       <a:r>
                         <a:rPr sz="1100" b="0"/>
-                        <a:t>0.817→0.654</a:t>
+                        <a:t>6.31e-04 *</a:t>
                       </a:r>
                     </a:p>
                   </a:txBody>
                   <a:tcPr/>
                 </a:tc>
               </a:tr>
-              <a:tr h="380000">
+              <a:tr h="548000">
                 <a:tc>
                   <a:txBody>
                     <a:bodyPr/>
@@ -5039,7 +7252,7 @@
                     <a:p>
                       <a:r>
                         <a:rPr sz="1100" b="0"/>
-                        <a:t>External (Sinchon)</a:t>
+                        <a:t>aec_fpca_pc2</a:t>
                       </a:r>
                     </a:p>
                   </a:txBody>
@@ -5052,7 +7265,7 @@
                     <a:p>
                       <a:r>
                         <a:rPr sz="1100" b="0"/>
-                        <a:t>0.715→0.722</a:t>
+                        <a:t>-0.493</a:t>
                       </a:r>
                     </a:p>
                   </a:txBody>
@@ -5065,7 +7278,7 @@
                     <a:p>
                       <a:r>
                         <a:rPr sz="1100" b="0"/>
-                        <a:t>0.450→0.750</a:t>
+                        <a:t>0.611</a:t>
                       </a:r>
                     </a:p>
                   </a:txBody>
@@ -5078,14 +7291,14 @@
                     <a:p>
                       <a:r>
                         <a:rPr sz="1100" b="0"/>
-                        <a:t>0.813→0.576</a:t>
+                        <a:t>4.51e-06 *</a:t>
                       </a:r>
                     </a:p>
                   </a:txBody>
                   <a:tcPr/>
                 </a:tc>
               </a:tr>
-              <a:tr h="380000">
+              <a:tr h="548000">
                 <a:tc>
                   <a:txBody>
                     <a:bodyPr/>
@@ -5106,7 +7319,7 @@
                     <a:p>
                       <a:r>
                         <a:rPr sz="1100" b="0"/>
-                        <a:t>External (New10000)</a:t>
+                        <a:t>aec_fpca_pc3</a:t>
                       </a:r>
                     </a:p>
                   </a:txBody>
@@ -5119,7 +7332,7 @@
                     <a:p>
                       <a:r>
                         <a:rPr sz="1100" b="0"/>
-                        <a:t>0.664→0.658</a:t>
+                        <a:t>0.084</a:t>
                       </a:r>
                     </a:p>
                   </a:txBody>
@@ -5132,7 +7345,7 @@
                     <a:p>
                       <a:r>
                         <a:rPr sz="1100" b="0"/>
-                        <a:t>0.283→0.593</a:t>
+                        <a:t>1.088</a:t>
                       </a:r>
                     </a:p>
                   </a:txBody>
@@ -5145,14 +7358,14 @@
                     <a:p>
                       <a:r>
                         <a:rPr sz="1100" b="0"/>
-                        <a:t>0.844→0.618</a:t>
+                        <a:t>0.337</a:t>
                       </a:r>
                     </a:p>
                   </a:txBody>
                   <a:tcPr/>
                 </a:tc>
               </a:tr>
-              <a:tr h="380000">
+              <a:tr h="548000">
                 <a:tc>
                   <a:txBody>
                     <a:bodyPr/>
@@ -5173,7 +7386,7 @@
                     <a:p>
                       <a:r>
                         <a:rPr sz="1100" b="0"/>
-                        <a:t>Internal (Gangnam)</a:t>
+                        <a:t>aec_fpca_pc1</a:t>
                       </a:r>
                     </a:p>
                   </a:txBody>
@@ -5186,7 +7399,7 @@
                     <a:p>
                       <a:r>
                         <a:rPr sz="1100" b="0"/>
-                        <a:t>0.653→0.761</a:t>
+                        <a:t>0.121</a:t>
                       </a:r>
                     </a:p>
                   </a:txBody>
@@ -5199,7 +7412,7 @@
                     <a:p>
                       <a:r>
                         <a:rPr sz="1100" b="0"/>
-                        <a:t>0.021→0.809</a:t>
+                        <a:t>1.129</a:t>
                       </a:r>
                     </a:p>
                   </a:txBody>
@@ -5212,14 +7425,14 @@
                     <a:p>
                       <a:r>
                         <a:rPr sz="1100" b="0"/>
-                        <a:t>0.990→0.638</a:t>
+                        <a:t>0.216</a:t>
                       </a:r>
                     </a:p>
                   </a:txBody>
                   <a:tcPr/>
                 </a:tc>
               </a:tr>
-              <a:tr h="380000">
+              <a:tr h="548000">
                 <a:tc>
                   <a:txBody>
                     <a:bodyPr/>
@@ -5240,7 +7453,7 @@
                     <a:p>
                       <a:r>
                         <a:rPr sz="1100" b="0"/>
-                        <a:t>External (Sinchon)</a:t>
+                        <a:t>aec_fpca_pc2</a:t>
                       </a:r>
                     </a:p>
                   </a:txBody>
@@ -5253,7 +7466,7 @@
                     <a:p>
                       <a:r>
                         <a:rPr sz="1100" b="0"/>
-                        <a:t>0.647→0.682</a:t>
+                        <a:t>-0.520</a:t>
                       </a:r>
                     </a:p>
                   </a:txBody>
@@ -5266,7 +7479,7 @@
                     <a:p>
                       <a:r>
                         <a:rPr sz="1100" b="0"/>
-                        <a:t>0.018→0.690</a:t>
+                        <a:t>0.595</a:t>
                       </a:r>
                     </a:p>
                   </a:txBody>
@@ -5279,14 +7492,14 @@
                     <a:p>
                       <a:r>
                         <a:rPr sz="1100" b="0"/>
-                        <a:t>0.991→0.582</a:t>
+                        <a:t>9.23e-06 *</a:t>
                       </a:r>
                     </a:p>
                   </a:txBody>
                   <a:tcPr/>
                 </a:tc>
               </a:tr>
-              <a:tr h="380000">
+              <a:tr h="548000">
                 <a:tc>
                   <a:txBody>
                     <a:bodyPr/>
@@ -5307,7 +7520,7 @@
                     <a:p>
                       <a:r>
                         <a:rPr sz="1100" b="0"/>
-                        <a:t>External (New10000)</a:t>
+                        <a:t>aec_fpca_pc3</a:t>
                       </a:r>
                     </a:p>
                   </a:txBody>
@@ -5320,7 +7533,7 @@
                     <a:p>
                       <a:r>
                         <a:rPr sz="1100" b="0"/>
-                        <a:t>0.633→0.646</a:t>
+                        <a:t>0.127</a:t>
                       </a:r>
                     </a:p>
                   </a:txBody>
@@ -5333,7 +7546,7 @@
                     <a:p>
                       <a:r>
                         <a:rPr sz="1100" b="0"/>
-                        <a:t>0.013→0.595</a:t>
+                        <a:t>1.136</a:t>
                       </a:r>
                     </a:p>
                   </a:txBody>
@@ -5346,14 +7559,14 @@
                     <a:p>
                       <a:r>
                         <a:rPr sz="1100" b="0"/>
-                        <a:t>0.994→0.611</a:t>
+                        <a:t>0.173</a:t>
                       </a:r>
                     </a:p>
                   </a:txBody>
                   <a:tcPr/>
                 </a:tc>
               </a:tr>
-              <a:tr h="380000">
+              <a:tr h="548000">
                 <a:tc>
                   <a:txBody>
                     <a:bodyPr/>
@@ -5374,7 +7587,7 @@
                     <a:p>
                       <a:r>
                         <a:rPr sz="1100" b="0"/>
-                        <a:t>Internal (Gangnam)</a:t>
+                        <a:t>aec_fpca_pc1</a:t>
                       </a:r>
                     </a:p>
                   </a:txBody>
@@ -5387,7 +7600,7 @@
                     <a:p>
                       <a:r>
                         <a:rPr sz="1100" b="0"/>
-                        <a:t>0.765→0.794</a:t>
+                        <a:t>0.101</a:t>
                       </a:r>
                     </a:p>
                   </a:txBody>
@@ -5400,7 +7613,7 @@
                     <a:p>
                       <a:r>
                         <a:rPr sz="1100" b="0"/>
-                        <a:t>0.048→0.571</a:t>
+                        <a:t>1.106</a:t>
                       </a:r>
                     </a:p>
                   </a:txBody>
@@ -5413,14 +7626,14 @@
                     <a:p>
                       <a:r>
                         <a:rPr sz="1100" b="0"/>
-                        <a:t>1.000→0.810</a:t>
+                        <a:t>0.450</a:t>
                       </a:r>
                     </a:p>
                   </a:txBody>
                   <a:tcPr/>
                 </a:tc>
               </a:tr>
-              <a:tr h="380000">
+              <a:tr h="548000">
                 <a:tc>
                   <a:txBody>
                     <a:bodyPr/>
@@ -5441,50 +7654,775 @@
                     <a:p>
                       <a:r>
                         <a:rPr sz="1100" b="0"/>
+                        <a:t>aec_fpca_pc2</a:t>
+                      </a:r>
+                    </a:p>
+                  </a:txBody>
+                  <a:tcPr/>
+                </a:tc>
+                <a:tc>
+                  <a:txBody>
+                    <a:bodyPr/>
+                    <a:lstStyle/>
+                    <a:p>
+                      <a:r>
+                        <a:rPr sz="1100" b="0"/>
+                        <a:t>-0.371</a:t>
+                      </a:r>
+                    </a:p>
+                  </a:txBody>
+                  <a:tcPr/>
+                </a:tc>
+                <a:tc>
+                  <a:txBody>
+                    <a:bodyPr/>
+                    <a:lstStyle/>
+                    <a:p>
+                      <a:r>
+                        <a:rPr sz="1100" b="0"/>
+                        <a:t>0.690</a:t>
+                      </a:r>
+                    </a:p>
+                  </a:txBody>
+                  <a:tcPr/>
+                </a:tc>
+                <a:tc>
+                  <a:txBody>
+                    <a:bodyPr/>
+                    <a:lstStyle/>
+                    <a:p>
+                      <a:r>
+                        <a:rPr sz="1100" b="0"/>
+                        <a:t>0.018 *</a:t>
+                      </a:r>
+                    </a:p>
+                  </a:txBody>
+                  <a:tcPr/>
+                </a:tc>
+              </a:tr>
+              <a:tr h="548000">
+                <a:tc>
+                  <a:txBody>
+                    <a:bodyPr/>
+                    <a:lstStyle/>
+                    <a:p>
+                      <a:r>
+                        <a:rPr sz="1100" b="0"/>
+                        <a:t/>
+                      </a:r>
+                    </a:p>
+                  </a:txBody>
+                  <a:tcPr/>
+                </a:tc>
+                <a:tc>
+                  <a:txBody>
+                    <a:bodyPr/>
+                    <a:lstStyle/>
+                    <a:p>
+                      <a:r>
+                        <a:rPr sz="1100" b="0"/>
+                        <a:t>aec_fpca_pc3</a:t>
+                      </a:r>
+                    </a:p>
+                  </a:txBody>
+                  <a:tcPr/>
+                </a:tc>
+                <a:tc>
+                  <a:txBody>
+                    <a:bodyPr/>
+                    <a:lstStyle/>
+                    <a:p>
+                      <a:r>
+                        <a:rPr sz="1100" b="0"/>
+                        <a:t>-0.077</a:t>
+                      </a:r>
+                    </a:p>
+                  </a:txBody>
+                  <a:tcPr/>
+                </a:tc>
+                <a:tc>
+                  <a:txBody>
+                    <a:bodyPr/>
+                    <a:lstStyle/>
+                    <a:p>
+                      <a:r>
+                        <a:rPr sz="1100" b="0"/>
+                        <a:t>0.926</a:t>
+                      </a:r>
+                    </a:p>
+                  </a:txBody>
+                  <a:tcPr/>
+                </a:tc>
+                <a:tc>
+                  <a:txBody>
+                    <a:bodyPr/>
+                    <a:lstStyle/>
+                    <a:p>
+                      <a:r>
+                        <a:rPr sz="1100" b="0"/>
+                        <a:t>0.540</a:t>
+                      </a:r>
+                    </a:p>
+                  </a:txBody>
+                  <a:tcPr/>
+                </a:tc>
+              </a:tr>
+            </a:tbl>
+          </a:graphicData>
+        </a:graphic>
+      </p:graphicFrame>
+    </p:spTree>
+  </p:cSld>
+  <p:clrMapOvr>
+    <a:masterClrMapping/>
+  </p:clrMapOvr>
+</p:sld>
+</file>
+
+<file path=ppt/slides/slide17.xml><?xml version="1.0" encoding="utf-8"?>
+<p:sld xmlns:a="http://schemas.openxmlformats.org/drawingml/2006/main" xmlns:p="http://schemas.openxmlformats.org/presentationml/2006/main" xmlns:r="http://schemas.openxmlformats.org/officeDocument/2006/relationships">
+  <p:cSld>
+    <p:spTree>
+      <p:nvGrpSpPr>
+        <p:cNvPr id="1" name=""/>
+        <p:cNvGrpSpPr/>
+        <p:nvPr/>
+      </p:nvGrpSpPr>
+      <p:grpSpPr/>
+      <p:sp>
+        <p:nvSpPr>
+          <p:cNvPr id="2" name="Title 1"/>
+          <p:cNvSpPr>
+            <a:spLocks noGrp="1"/>
+          </p:cNvSpPr>
+          <p:nvPr>
+            <p:ph type="title"/>
+          </p:nvPr>
+        </p:nvSpPr>
+        <p:spPr>
+          <a:xfrm>
+            <a:off x="508000" y="365126"/>
+            <a:ext cx="11176000" cy="532342"/>
+          </a:xfrm>
+        </p:spPr>
+        <p:txBody>
+          <a:bodyPr/>
+          <a:lstStyle/>
+          <a:p>
+            <a:r>
+              <a:t>Table S5. Baseline 대비 확장모델 AUC (1:1 Balanced, * paired DeLong p&lt;0.05 vs Baseline)</a:t>
+            </a:r>
+          </a:p>
+        </p:txBody>
+      </p:sp>
+      <p:graphicFrame>
+        <p:nvGraphicFramePr>
+          <p:cNvPr id="3" name="Table 2"/>
+          <p:cNvGraphicFramePr>
+            <a:graphicFrameLocks noGrp="1"/>
+          </p:cNvGraphicFramePr>
+          <p:nvPr/>
+        </p:nvGraphicFramePr>
+        <p:xfrm>
+          <a:off x="512064" y="978408"/>
+          <a:ext cx="11173968" cy="5124630"/>
+        </p:xfrm>
+        <a:graphic>
+          <a:graphicData uri="http://schemas.openxmlformats.org/drawingml/2006/table">
+            <a:tbl>
+              <a:tblPr firstRow="1" bandRow="1">
+                <a:tableStyleId>{C083E6E3-FA7D-4D7B-A595-EF9225AFEA82}</a:tableStyleId>
+              </a:tblPr>
+              <a:tblGrid>
+                <a:gridCol w="1862328"/>
+                <a:gridCol w="1862328"/>
+                <a:gridCol w="1862328"/>
+                <a:gridCol w="1862328"/>
+                <a:gridCol w="1862328"/>
+                <a:gridCol w="1862328"/>
+              </a:tblGrid>
+              <a:tr h="732090">
+                <a:tc>
+                  <a:txBody>
+                    <a:bodyPr/>
+                    <a:lstStyle/>
+                    <a:p>
+                      <a:pPr algn="ctr"/>
+                      <a:r>
+                        <a:rPr sz="1200" b="1"/>
+                        <a:t>Disease</a:t>
+                      </a:r>
+                    </a:p>
+                  </a:txBody>
+                  <a:tcPr anchor="ctr"/>
+                </a:tc>
+                <a:tc>
+                  <a:txBody>
+                    <a:bodyPr/>
+                    <a:lstStyle/>
+                    <a:p>
+                      <a:pPr algn="ctr"/>
+                      <a:r>
+                        <a:rPr sz="1200" b="1"/>
+                        <a:t>Cohort</a:t>
+                      </a:r>
+                    </a:p>
+                  </a:txBody>
+                  <a:tcPr anchor="ctr"/>
+                </a:tc>
+                <a:tc>
+                  <a:txBody>
+                    <a:bodyPr/>
+                    <a:lstStyle/>
+                    <a:p>
+                      <a:pPr algn="ctr"/>
+                      <a:r>
+                        <a:rPr sz="1200" b="1"/>
+                        <a:t>Baseline</a:t>
+                      </a:r>
+                    </a:p>
+                  </a:txBody>
+                  <a:tcPr anchor="ctr"/>
+                </a:tc>
+                <a:tc>
+                  <a:txBody>
+                    <a:bodyPr/>
+                    <a:lstStyle/>
+                    <a:p>
+                      <a:pPr algn="ctr"/>
+                      <a:r>
+                        <a:rPr sz="1200" b="1"/>
+                        <a:t>+AEC (FPCA)</a:t>
+                      </a:r>
+                    </a:p>
+                  </a:txBody>
+                  <a:tcPr anchor="ctr"/>
+                </a:tc>
+                <a:tc>
+                  <a:txBody>
+                    <a:bodyPr/>
+                    <a:lstStyle/>
+                    <a:p>
+                      <a:pPr algn="ctr"/>
+                      <a:r>
+                        <a:rPr sz="1200" b="1"/>
+                        <a:t>+AEC+체성분</a:t>
+                      </a:r>
+                    </a:p>
+                  </a:txBody>
+                  <a:tcPr anchor="ctr"/>
+                </a:tc>
+                <a:tc>
+                  <a:txBody>
+                    <a:bodyPr/>
+                    <a:lstStyle/>
+                    <a:p>
+                      <a:pPr algn="ctr"/>
+                      <a:r>
+                        <a:rPr sz="1200" b="1"/>
+                        <a:t>체성분만</a:t>
+                      </a:r>
+                    </a:p>
+                  </a:txBody>
+                  <a:tcPr anchor="ctr"/>
+                </a:tc>
+              </a:tr>
+              <a:tr h="732090">
+                <a:tc rowSpan="2">
+                  <a:txBody>
+                    <a:bodyPr/>
+                    <a:lstStyle/>
+                    <a:p>
+                      <a:pPr algn="ctr"/>
+                      <a:r>
+                        <a:rPr sz="1200" b="0"/>
+                        <a:t>고혈압(HTN)</a:t>
+                      </a:r>
+                    </a:p>
+                  </a:txBody>
+                  <a:tcPr anchor="ctr"/>
+                </a:tc>
+                <a:tc>
+                  <a:txBody>
+                    <a:bodyPr/>
+                    <a:lstStyle/>
+                    <a:p>
+                      <a:pPr algn="ctr"/>
+                      <a:r>
+                        <a:rPr sz="1200" b="0"/>
+                        <a:t>Internal (Gangnam)</a:t>
+                      </a:r>
+                    </a:p>
+                  </a:txBody>
+                  <a:tcPr anchor="ctr"/>
+                </a:tc>
+                <a:tc>
+                  <a:txBody>
+                    <a:bodyPr/>
+                    <a:lstStyle/>
+                    <a:p>
+                      <a:pPr algn="ctr"/>
+                      <a:r>
+                        <a:rPr sz="1200" b="0"/>
+                        <a:t>0.780</a:t>
+                      </a:r>
+                    </a:p>
+                  </a:txBody>
+                  <a:tcPr anchor="ctr"/>
+                </a:tc>
+                <a:tc>
+                  <a:txBody>
+                    <a:bodyPr/>
+                    <a:lstStyle/>
+                    <a:p>
+                      <a:pPr algn="ctr"/>
+                      <a:r>
+                        <a:rPr sz="1200" b="0"/>
+                        <a:t>0.821*</a:t>
+                      </a:r>
+                    </a:p>
+                  </a:txBody>
+                  <a:tcPr anchor="ctr"/>
+                </a:tc>
+                <a:tc>
+                  <a:txBody>
+                    <a:bodyPr/>
+                    <a:lstStyle/>
+                    <a:p>
+                      <a:pPr algn="ctr"/>
+                      <a:r>
+                        <a:rPr sz="1200" b="0"/>
+                        <a:t>0.827*</a:t>
+                      </a:r>
+                    </a:p>
+                  </a:txBody>
+                  <a:tcPr anchor="ctr"/>
+                </a:tc>
+                <a:tc>
+                  <a:txBody>
+                    <a:bodyPr/>
+                    <a:lstStyle/>
+                    <a:p>
+                      <a:pPr algn="ctr"/>
+                      <a:r>
+                        <a:rPr sz="1200" b="0"/>
+                        <a:t>0.817*</a:t>
+                      </a:r>
+                    </a:p>
+                  </a:txBody>
+                  <a:tcPr anchor="ctr"/>
+                </a:tc>
+              </a:tr>
+              <a:tr h="732090">
+                <a:tc vMerge="1">
+                  <a:txBody>
+                    <a:bodyPr/>
+                    <a:lstStyle/>
+                    <a:p/>
+                  </a:txBody>
+                  <a:tcPr/>
+                </a:tc>
+                <a:tc>
+                  <a:txBody>
+                    <a:bodyPr/>
+                    <a:lstStyle/>
+                    <a:p>
+                      <a:pPr algn="ctr"/>
+                      <a:r>
+                        <a:rPr sz="1200" b="0"/>
                         <a:t>External (Sinchon)</a:t>
                       </a:r>
                     </a:p>
                   </a:txBody>
-                  <a:tcPr/>
-                </a:tc>
-                <a:tc>
-                  <a:txBody>
-                    <a:bodyPr/>
-                    <a:lstStyle/>
-                    <a:p>
-                      <a:r>
-                        <a:rPr sz="1100" b="0"/>
-                        <a:t>0.613→0.600</a:t>
-                      </a:r>
-                    </a:p>
-                  </a:txBody>
-                  <a:tcPr/>
-                </a:tc>
-                <a:tc>
-                  <a:txBody>
-                    <a:bodyPr/>
-                    <a:lstStyle/>
-                    <a:p>
-                      <a:r>
-                        <a:rPr sz="1100" b="0"/>
-                        <a:t>0.005→0.516</a:t>
-                      </a:r>
-                    </a:p>
-                  </a:txBody>
-                  <a:tcPr/>
-                </a:tc>
-                <a:tc>
-                  <a:txBody>
-                    <a:bodyPr/>
-                    <a:lstStyle/>
-                    <a:p>
-                      <a:r>
-                        <a:rPr sz="1100" b="0"/>
-                        <a:t>1.000→0.606</a:t>
-                      </a:r>
-                    </a:p>
-                  </a:txBody>
-                  <a:tcPr/>
+                  <a:tcPr anchor="ctr"/>
+                </a:tc>
+                <a:tc>
+                  <a:txBody>
+                    <a:bodyPr/>
+                    <a:lstStyle/>
+                    <a:p>
+                      <a:pPr algn="ctr"/>
+                      <a:r>
+                        <a:rPr sz="1200" b="0"/>
+                        <a:t>0.722</a:t>
+                      </a:r>
+                    </a:p>
+                  </a:txBody>
+                  <a:tcPr anchor="ctr"/>
+                </a:tc>
+                <a:tc>
+                  <a:txBody>
+                    <a:bodyPr/>
+                    <a:lstStyle/>
+                    <a:p>
+                      <a:pPr algn="ctr"/>
+                      <a:r>
+                        <a:rPr sz="1200" b="0"/>
+                        <a:t>0.729</a:t>
+                      </a:r>
+                    </a:p>
+                  </a:txBody>
+                  <a:tcPr anchor="ctr"/>
+                </a:tc>
+                <a:tc>
+                  <a:txBody>
+                    <a:bodyPr/>
+                    <a:lstStyle/>
+                    <a:p>
+                      <a:pPr algn="ctr"/>
+                      <a:r>
+                        <a:rPr sz="1200" b="0"/>
+                        <a:t>0.739*</a:t>
+                      </a:r>
+                    </a:p>
+                  </a:txBody>
+                  <a:tcPr anchor="ctr"/>
+                </a:tc>
+                <a:tc>
+                  <a:txBody>
+                    <a:bodyPr/>
+                    <a:lstStyle/>
+                    <a:p>
+                      <a:pPr algn="ctr"/>
+                      <a:r>
+                        <a:rPr sz="1200" b="0"/>
+                        <a:t>0.736</a:t>
+                      </a:r>
+                    </a:p>
+                  </a:txBody>
+                  <a:tcPr anchor="ctr"/>
+                </a:tc>
+              </a:tr>
+              <a:tr h="732090">
+                <a:tc rowSpan="2">
+                  <a:txBody>
+                    <a:bodyPr/>
+                    <a:lstStyle/>
+                    <a:p>
+                      <a:pPr algn="ctr"/>
+                      <a:r>
+                        <a:rPr sz="1200" b="0"/>
+                        <a:t>당뇨병(DM)</a:t>
+                      </a:r>
+                    </a:p>
+                  </a:txBody>
+                  <a:tcPr anchor="ctr"/>
+                </a:tc>
+                <a:tc>
+                  <a:txBody>
+                    <a:bodyPr/>
+                    <a:lstStyle/>
+                    <a:p>
+                      <a:pPr algn="ctr"/>
+                      <a:r>
+                        <a:rPr sz="1200" b="0"/>
+                        <a:t>Internal (Gangnam)</a:t>
+                      </a:r>
+                    </a:p>
+                  </a:txBody>
+                  <a:tcPr anchor="ctr"/>
+                </a:tc>
+                <a:tc>
+                  <a:txBody>
+                    <a:bodyPr/>
+                    <a:lstStyle/>
+                    <a:p>
+                      <a:pPr algn="ctr"/>
+                      <a:r>
+                        <a:rPr sz="1200" b="0"/>
+                        <a:t>0.761</a:t>
+                      </a:r>
+                    </a:p>
+                  </a:txBody>
+                  <a:tcPr anchor="ctr"/>
+                </a:tc>
+                <a:tc>
+                  <a:txBody>
+                    <a:bodyPr/>
+                    <a:lstStyle/>
+                    <a:p>
+                      <a:pPr algn="ctr"/>
+                      <a:r>
+                        <a:rPr sz="1200" b="0"/>
+                        <a:t>0.777</a:t>
+                      </a:r>
+                    </a:p>
+                  </a:txBody>
+                  <a:tcPr anchor="ctr"/>
+                </a:tc>
+                <a:tc>
+                  <a:txBody>
+                    <a:bodyPr/>
+                    <a:lstStyle/>
+                    <a:p>
+                      <a:pPr algn="ctr"/>
+                      <a:r>
+                        <a:rPr sz="1200" b="0"/>
+                        <a:t>0.764</a:t>
+                      </a:r>
+                    </a:p>
+                  </a:txBody>
+                  <a:tcPr anchor="ctr"/>
+                </a:tc>
+                <a:tc>
+                  <a:txBody>
+                    <a:bodyPr/>
+                    <a:lstStyle/>
+                    <a:p>
+                      <a:pPr algn="ctr"/>
+                      <a:r>
+                        <a:rPr sz="1200" b="0"/>
+                        <a:t>0.755</a:t>
+                      </a:r>
+                    </a:p>
+                  </a:txBody>
+                  <a:tcPr anchor="ctr"/>
+                </a:tc>
+              </a:tr>
+              <a:tr h="732090">
+                <a:tc vMerge="1">
+                  <a:txBody>
+                    <a:bodyPr/>
+                    <a:lstStyle/>
+                    <a:p/>
+                  </a:txBody>
+                  <a:tcPr/>
+                </a:tc>
+                <a:tc>
+                  <a:txBody>
+                    <a:bodyPr/>
+                    <a:lstStyle/>
+                    <a:p>
+                      <a:pPr algn="ctr"/>
+                      <a:r>
+                        <a:rPr sz="1200" b="0"/>
+                        <a:t>External (Sinchon)</a:t>
+                      </a:r>
+                    </a:p>
+                  </a:txBody>
+                  <a:tcPr anchor="ctr"/>
+                </a:tc>
+                <a:tc>
+                  <a:txBody>
+                    <a:bodyPr/>
+                    <a:lstStyle/>
+                    <a:p>
+                      <a:pPr algn="ctr"/>
+                      <a:r>
+                        <a:rPr sz="1200" b="0"/>
+                        <a:t>0.682</a:t>
+                      </a:r>
+                    </a:p>
+                  </a:txBody>
+                  <a:tcPr anchor="ctr"/>
+                </a:tc>
+                <a:tc>
+                  <a:txBody>
+                    <a:bodyPr/>
+                    <a:lstStyle/>
+                    <a:p>
+                      <a:pPr algn="ctr"/>
+                      <a:r>
+                        <a:rPr sz="1200" b="0"/>
+                        <a:t>0.682</a:t>
+                      </a:r>
+                    </a:p>
+                  </a:txBody>
+                  <a:tcPr anchor="ctr"/>
+                </a:tc>
+                <a:tc>
+                  <a:txBody>
+                    <a:bodyPr/>
+                    <a:lstStyle/>
+                    <a:p>
+                      <a:pPr algn="ctr"/>
+                      <a:r>
+                        <a:rPr sz="1200" b="0"/>
+                        <a:t>0.690</a:t>
+                      </a:r>
+                    </a:p>
+                  </a:txBody>
+                  <a:tcPr anchor="ctr"/>
+                </a:tc>
+                <a:tc>
+                  <a:txBody>
+                    <a:bodyPr/>
+                    <a:lstStyle/>
+                    <a:p>
+                      <a:pPr algn="ctr"/>
+                      <a:r>
+                        <a:rPr sz="1200" b="0"/>
+                        <a:t>0.687</a:t>
+                      </a:r>
+                    </a:p>
+                  </a:txBody>
+                  <a:tcPr anchor="ctr"/>
+                </a:tc>
+              </a:tr>
+              <a:tr h="732090">
+                <a:tc rowSpan="2">
+                  <a:txBody>
+                    <a:bodyPr/>
+                    <a:lstStyle/>
+                    <a:p>
+                      <a:pPr algn="ctr"/>
+                      <a:r>
+                        <a:rPr sz="1200" b="0"/>
+                        <a:t>만성신장질환(CKD)</a:t>
+                      </a:r>
+                    </a:p>
+                  </a:txBody>
+                  <a:tcPr anchor="ctr"/>
+                </a:tc>
+                <a:tc>
+                  <a:txBody>
+                    <a:bodyPr/>
+                    <a:lstStyle/>
+                    <a:p>
+                      <a:pPr algn="ctr"/>
+                      <a:r>
+                        <a:rPr sz="1200" b="0"/>
+                        <a:t>Internal (Gangnam)</a:t>
+                      </a:r>
+                    </a:p>
+                  </a:txBody>
+                  <a:tcPr anchor="ctr"/>
+                </a:tc>
+                <a:tc>
+                  <a:txBody>
+                    <a:bodyPr/>
+                    <a:lstStyle/>
+                    <a:p>
+                      <a:pPr algn="ctr"/>
+                      <a:r>
+                        <a:rPr sz="1200" b="0"/>
+                        <a:t>0.794</a:t>
+                      </a:r>
+                    </a:p>
+                  </a:txBody>
+                  <a:tcPr anchor="ctr"/>
+                </a:tc>
+                <a:tc>
+                  <a:txBody>
+                    <a:bodyPr/>
+                    <a:lstStyle/>
+                    <a:p>
+                      <a:pPr algn="ctr"/>
+                      <a:r>
+                        <a:rPr sz="1200" b="0"/>
+                        <a:t>0.791</a:t>
+                      </a:r>
+                    </a:p>
+                  </a:txBody>
+                  <a:tcPr anchor="ctr"/>
+                </a:tc>
+                <a:tc>
+                  <a:txBody>
+                    <a:bodyPr/>
+                    <a:lstStyle/>
+                    <a:p>
+                      <a:pPr algn="ctr"/>
+                      <a:r>
+                        <a:rPr sz="1200" b="0"/>
+                        <a:t>0.771</a:t>
+                      </a:r>
+                    </a:p>
+                  </a:txBody>
+                  <a:tcPr anchor="ctr"/>
+                </a:tc>
+                <a:tc>
+                  <a:txBody>
+                    <a:bodyPr/>
+                    <a:lstStyle/>
+                    <a:p>
+                      <a:pPr algn="ctr"/>
+                      <a:r>
+                        <a:rPr sz="1200" b="0"/>
+                        <a:t>0.785</a:t>
+                      </a:r>
+                    </a:p>
+                  </a:txBody>
+                  <a:tcPr anchor="ctr"/>
+                </a:tc>
+              </a:tr>
+              <a:tr h="732090">
+                <a:tc vMerge="1">
+                  <a:txBody>
+                    <a:bodyPr/>
+                    <a:lstStyle/>
+                    <a:p/>
+                  </a:txBody>
+                  <a:tcPr/>
+                </a:tc>
+                <a:tc>
+                  <a:txBody>
+                    <a:bodyPr/>
+                    <a:lstStyle/>
+                    <a:p>
+                      <a:pPr algn="ctr"/>
+                      <a:r>
+                        <a:rPr sz="1200" b="0"/>
+                        <a:t>External (Sinchon)</a:t>
+                      </a:r>
+                    </a:p>
+                  </a:txBody>
+                  <a:tcPr anchor="ctr"/>
+                </a:tc>
+                <a:tc>
+                  <a:txBody>
+                    <a:bodyPr/>
+                    <a:lstStyle/>
+                    <a:p>
+                      <a:pPr algn="ctr"/>
+                      <a:r>
+                        <a:rPr sz="1200" b="0"/>
+                        <a:t>0.600</a:t>
+                      </a:r>
+                    </a:p>
+                  </a:txBody>
+                  <a:tcPr anchor="ctr"/>
+                </a:tc>
+                <a:tc>
+                  <a:txBody>
+                    <a:bodyPr/>
+                    <a:lstStyle/>
+                    <a:p>
+                      <a:pPr algn="ctr"/>
+                      <a:r>
+                        <a:rPr sz="1200" b="0"/>
+                        <a:t>0.603</a:t>
+                      </a:r>
+                    </a:p>
+                  </a:txBody>
+                  <a:tcPr anchor="ctr"/>
+                </a:tc>
+                <a:tc>
+                  <a:txBody>
+                    <a:bodyPr/>
+                    <a:lstStyle/>
+                    <a:p>
+                      <a:pPr algn="ctr"/>
+                      <a:r>
+                        <a:rPr sz="1200" b="0"/>
+                        <a:t>0.667*</a:t>
+                      </a:r>
+                    </a:p>
+                  </a:txBody>
+                  <a:tcPr anchor="ctr"/>
+                </a:tc>
+                <a:tc>
+                  <a:txBody>
+                    <a:bodyPr/>
+                    <a:lstStyle/>
+                    <a:p>
+                      <a:pPr algn="ctr"/>
+                      <a:r>
+                        <a:rPr sz="1200" b="0"/>
+                        <a:t>0.664*</a:t>
+                      </a:r>
+                    </a:p>
+                  </a:txBody>
+                  <a:tcPr anchor="ctr"/>
                 </a:tc>
               </a:tr>
             </a:tbl>
@@ -5519,13 +8457,18 @@
             <p:ph type="title"/>
           </p:nvPr>
         </p:nvSpPr>
-        <p:spPr/>
+        <p:spPr>
+          <a:xfrm>
+            <a:off x="508000" y="365126"/>
+            <a:ext cx="11176000" cy="532342"/>
+          </a:xfrm>
+        </p:spPr>
         <p:txBody>
           <a:bodyPr/>
           <a:lstStyle/>
           <a:p>
             <a:r>
-              <a:t>Methods</a:t>
+              <a:t>Background &amp; Objective</a:t>
             </a:r>
           </a:p>
         </p:txBody>
@@ -5540,65 +8483,43 @@
             <p:ph idx="1"/>
           </p:nvPr>
         </p:nvSpPr>
-        <p:spPr/>
+        <p:spPr>
+          <a:xfrm>
+            <a:off x="508000" y="897468"/>
+            <a:ext cx="11176000" cy="5063066"/>
+          </a:xfrm>
+        </p:spPr>
         <p:txBody>
-          <a:bodyPr/>
+          <a:bodyPr wrap="square"/>
           <a:lstStyle/>
           <a:p>
-            <a:pPr>
-              <a:defRPr sz="2000"/>
-            </a:pPr>
-            <a:r>
-              <a:rPr sz="2000"/>
-              <a:t>Dataset: Internal(Gangnam, n=1,260), External ①(Sinchon, n=1,123), External ②(New10000, n=10,400; CKD 컬럼 없어 HTN/DM만 검증)</a:t>
-            </a:r>
-          </a:p>
-          <a:p>
-            <a:r>
-              <a:rPr sz="2000"/>
-              <a:t>Input: Clinic4 = Sex(M/F) + Age + Height + Weight (age/height/weight는 internal 기준 StandardScaler로 표준화)</a:t>
-            </a:r>
-          </a:p>
-          <a:p>
-            <a:r>
-              <a:rPr sz="2000"/>
-              <a:t>Outcome: HTN / DM / CKD 각각 독립적인 logistic regression</a:t>
-            </a:r>
-          </a:p>
-          <a:p>
-            <a:r>
-              <a:rPr sz="2000"/>
-              <a:t>Split: 질병 라벨로 stratify한 patient-level train:valid:test = 7:1:2 (질병마다 별도 split)</a:t>
-            </a:r>
-          </a:p>
-          <a:p>
-            <a:r>
-              <a:rPr sz="2000"/>
-              <a:t>하이퍼파라미터 튜닝: GridSearchCV(C×penalty grid, scoring=roc_auc), valid를 단일 predefined fold로 사용해 train에서 탐색</a:t>
-            </a:r>
-          </a:p>
-          <a:p>
-            <a:r>
-              <a:rPr sz="2000"/>
-              <a:t>성능: 선택된 하이퍼파라미터로 train 재학습 → held-out test(20%) AUC 1회 산출 (fold 평균/CI 아님)</a:t>
-            </a:r>
-          </a:p>
-          <a:p>
-            <a:r>
-              <a:rPr sz="2000"/>
-              <a:t>외부검증: train+valid로 재학습한 frozen 모델(scaler 포함)을 external에 그대로 적용(재학습 없음)</a:t>
-            </a:r>
-          </a:p>
-          <a:p>
-            <a:r>
-              <a:rPr sz="2000"/>
-              <a:t>Coefficient/p-value: 정규화 없는 statsmodels Logit(MLE)을 train+valid에 별도 적합 (Wald test)</a:t>
-            </a:r>
-          </a:p>
-          <a:p>
-            <a:r>
-              <a:rPr sz="2000"/>
-              <a:t>+AEC: aec_128 원본 곡선(전처리 없음) → FPCA(elbow n=3, internal 1회 fit·frozen) + Upper/Lower ratio를 추가 input으로 결합(fpca_ratio) 및 개별 ablation(fpca_only/ratio_only)으로 비교. baseline vs +AEC는 현재 AUC만 비교(유의성 검정 미수행)</a:t>
+            <a:r>
+              <a:rPr sz="1800"/>
+              <a:t>Clinic4(성별·나이·신장·체중)만으로 만성질환(HTN·DM·CKD)을 어느 정도 판별할 수 있는지 기준선을 만든다</a:t>
+            </a:r>
+          </a:p>
+          <a:p>
+            <a:r>
+              <a:rPr sz="1800"/>
+              <a:t>CT에서 얻는 AEC 곡선과 체성분(VAT/SAT/근육/근내지방) 곡선이 이 기준선을 넘어서는 추가 정보를 주는지 평가한다</a:t>
+            </a:r>
+          </a:p>
+          <a:p>
+            <a:r>
+              <a:rPr sz="1800"/>
+              <a:t>곡선은 liver→pubis로 crop한 128구간으로 표현하고, 전처리·FPCA·부위 조합을 바꿔가며 개선을 시도했다</a:t>
+            </a:r>
+          </a:p>
+          <a:p>
+            <a:r>
+              <a:rPr sz="1800"/>
+              <a:t>개발은 Gangnam, 외부검증은 Sinchon(둘 다 단면 데이터)에서 같은 프레임(Youden cutoff·DeLong)으로 평가한다</a:t>
+            </a:r>
+          </a:p>
+          <a:p>
+            <a:r>
+              <a:rPr sz="1800"/>
+              <a:t>목적: 곡선 기반 확장이 Baseline 대비 얼마나, 그리고 코호트 간 일관되게 성능을 올리는지 확인하고, 일관되지 않다면 원인과 다음 단계를 제시한다</a:t>
             </a:r>
           </a:p>
         </p:txBody>
@@ -5637,761 +8558,84 @@
           <a:lstStyle/>
           <a:p>
             <a:r>
-              <a:t>Table 1. Clinic4 Baseline 성능 (Internal held-out test 20% / External 전체 코호트 frozen)</a:t>
+              <a:t>Methods</a:t>
             </a:r>
           </a:p>
         </p:txBody>
       </p:sp>
-      <p:graphicFrame>
-        <p:nvGraphicFramePr>
-          <p:cNvPr id="3" name="Table 2"/>
-          <p:cNvGraphicFramePr>
-            <a:graphicFrameLocks noGrp="1"/>
-          </p:cNvGraphicFramePr>
-          <p:nvPr/>
-        </p:nvGraphicFramePr>
-        <p:xfrm>
-          <a:off x="508000" y="975360"/>
-          <a:ext cx="11176000" cy="5480000"/>
-        </p:xfrm>
-        <a:graphic>
-          <a:graphicData uri="http://schemas.openxmlformats.org/drawingml/2006/table">
-            <a:tbl>
-              <a:tblPr firstRow="1" bandRow="1">
-                <a:tableStyleId>{5C22544A-7EE6-4342-B048-85BDC9FD1C3A}</a:tableStyleId>
-              </a:tblPr>
-              <a:tblGrid>
-                <a:gridCol w="1862666"/>
-                <a:gridCol w="1862666"/>
-                <a:gridCol w="1862666"/>
-                <a:gridCol w="1862666"/>
-                <a:gridCol w="1862666"/>
-                <a:gridCol w="1862670"/>
-              </a:tblGrid>
-              <a:tr h="608888">
-                <a:tc>
-                  <a:txBody>
-                    <a:bodyPr/>
-                    <a:lstStyle/>
-                    <a:p>
-                      <a:r>
-                        <a:rPr sz="1100" b="1"/>
-                        <a:t>Cohort</a:t>
-                      </a:r>
-                    </a:p>
-                  </a:txBody>
-                  <a:tcPr/>
-                </a:tc>
-                <a:tc>
-                  <a:txBody>
-                    <a:bodyPr/>
-                    <a:lstStyle/>
-                    <a:p>
-                      <a:r>
-                        <a:rPr sz="1100" b="1"/>
-                        <a:t>Disease</a:t>
-                      </a:r>
-                    </a:p>
-                  </a:txBody>
-                  <a:tcPr/>
-                </a:tc>
-                <a:tc>
-                  <a:txBody>
-                    <a:bodyPr/>
-                    <a:lstStyle/>
-                    <a:p>
-                      <a:r>
-                        <a:rPr sz="1100" b="1"/>
-                        <a:t>n (pos)</a:t>
-                      </a:r>
-                    </a:p>
-                  </a:txBody>
-                  <a:tcPr/>
-                </a:tc>
-                <a:tc>
-                  <a:txBody>
-                    <a:bodyPr/>
-                    <a:lstStyle/>
-                    <a:p>
-                      <a:r>
-                        <a:rPr sz="1100" b="1"/>
-                        <a:t>Best C (penalty)</a:t>
-                      </a:r>
-                    </a:p>
-                  </a:txBody>
-                  <a:tcPr/>
-                </a:tc>
-                <a:tc>
-                  <a:txBody>
-                    <a:bodyPr/>
-                    <a:lstStyle/>
-                    <a:p>
-                      <a:r>
-                        <a:rPr sz="1100" b="1"/>
-                        <a:t>Valid AUC</a:t>
-                      </a:r>
-                    </a:p>
-                  </a:txBody>
-                  <a:tcPr/>
-                </a:tc>
-                <a:tc>
-                  <a:txBody>
-                    <a:bodyPr/>
-                    <a:lstStyle/>
-                    <a:p>
-                      <a:r>
-                        <a:rPr sz="1100" b="1"/>
-                        <a:t>AUC</a:t>
-                      </a:r>
-                    </a:p>
-                  </a:txBody>
-                  <a:tcPr/>
-                </a:tc>
-              </a:tr>
-              <a:tr h="608888">
-                <a:tc>
-                  <a:txBody>
-                    <a:bodyPr/>
-                    <a:lstStyle/>
-                    <a:p>
-                      <a:r>
-                        <a:rPr sz="1100" b="0"/>
-                        <a:t>Internal (Gangnam)</a:t>
-                      </a:r>
-                    </a:p>
-                  </a:txBody>
-                  <a:tcPr/>
-                </a:tc>
-                <a:tc>
-                  <a:txBody>
-                    <a:bodyPr/>
-                    <a:lstStyle/>
-                    <a:p>
-                      <a:r>
-                        <a:rPr sz="1100" b="0"/>
-                        <a:t>고혈압(HTN)</a:t>
-                      </a:r>
-                    </a:p>
-                  </a:txBody>
-                  <a:tcPr/>
-                </a:tc>
-                <a:tc>
-                  <a:txBody>
-                    <a:bodyPr/>
-                    <a:lstStyle/>
-                    <a:p>
-                      <a:r>
-                        <a:rPr sz="1100" b="0"/>
-                        <a:t>252 (77)</a:t>
-                      </a:r>
-                    </a:p>
-                  </a:txBody>
-                  <a:tcPr/>
-                </a:tc>
-                <a:tc>
-                  <a:txBody>
-                    <a:bodyPr/>
-                    <a:lstStyle/>
-                    <a:p>
-                      <a:r>
-                        <a:rPr sz="1100" b="0"/>
-                        <a:t>100 (l2)</a:t>
-                      </a:r>
-                    </a:p>
-                  </a:txBody>
-                  <a:tcPr/>
-                </a:tc>
-                <a:tc>
-                  <a:txBody>
-                    <a:bodyPr/>
-                    <a:lstStyle/>
-                    <a:p>
-                      <a:r>
-                        <a:rPr sz="1100" b="0"/>
-                        <a:t>0.805</a:t>
-                      </a:r>
-                    </a:p>
-                  </a:txBody>
-                  <a:tcPr/>
-                </a:tc>
-                <a:tc>
-                  <a:txBody>
-                    <a:bodyPr/>
-                    <a:lstStyle/>
-                    <a:p>
-                      <a:r>
-                        <a:rPr sz="1100" b="0"/>
-                        <a:t>0.761</a:t>
-                      </a:r>
-                    </a:p>
-                  </a:txBody>
-                  <a:tcPr/>
-                </a:tc>
-              </a:tr>
-              <a:tr h="608888">
-                <a:tc>
-                  <a:txBody>
-                    <a:bodyPr/>
-                    <a:lstStyle/>
-                    <a:p>
-                      <a:r>
-                        <a:rPr sz="1100" b="0"/>
-                        <a:t>External (Sinchon)</a:t>
-                      </a:r>
-                    </a:p>
-                  </a:txBody>
-                  <a:tcPr/>
-                </a:tc>
-                <a:tc>
-                  <a:txBody>
-                    <a:bodyPr/>
-                    <a:lstStyle/>
-                    <a:p>
-                      <a:r>
-                        <a:rPr sz="1100" b="0"/>
-                        <a:t/>
-                      </a:r>
-                    </a:p>
-                  </a:txBody>
-                  <a:tcPr/>
-                </a:tc>
-                <a:tc>
-                  <a:txBody>
-                    <a:bodyPr/>
-                    <a:lstStyle/>
-                    <a:p>
-                      <a:r>
-                        <a:rPr sz="1100" b="0"/>
-                        <a:t>1123 (506)</a:t>
-                      </a:r>
-                    </a:p>
-                  </a:txBody>
-                  <a:tcPr/>
-                </a:tc>
-                <a:tc>
-                  <a:txBody>
-                    <a:bodyPr/>
-                    <a:lstStyle/>
-                    <a:p>
-                      <a:r>
-                        <a:rPr sz="1100" b="0"/>
-                        <a:t>-</a:t>
-                      </a:r>
-                    </a:p>
-                  </a:txBody>
-                  <a:tcPr/>
-                </a:tc>
-                <a:tc>
-                  <a:txBody>
-                    <a:bodyPr/>
-                    <a:lstStyle/>
-                    <a:p>
-                      <a:r>
-                        <a:rPr sz="1100" b="0"/>
-                        <a:t>-</a:t>
-                      </a:r>
-                    </a:p>
-                  </a:txBody>
-                  <a:tcPr/>
-                </a:tc>
-                <a:tc>
-                  <a:txBody>
-                    <a:bodyPr/>
-                    <a:lstStyle/>
-                    <a:p>
-                      <a:r>
-                        <a:rPr sz="1100" b="0"/>
-                        <a:t>0.715</a:t>
-                      </a:r>
-                    </a:p>
-                  </a:txBody>
-                  <a:tcPr/>
-                </a:tc>
-              </a:tr>
-              <a:tr h="608888">
-                <a:tc>
-                  <a:txBody>
-                    <a:bodyPr/>
-                    <a:lstStyle/>
-                    <a:p>
-                      <a:r>
-                        <a:rPr sz="1100" b="0"/>
-                        <a:t>External (New10000)</a:t>
-                      </a:r>
-                    </a:p>
-                  </a:txBody>
-                  <a:tcPr/>
-                </a:tc>
-                <a:tc>
-                  <a:txBody>
-                    <a:bodyPr/>
-                    <a:lstStyle/>
-                    <a:p>
-                      <a:r>
-                        <a:rPr sz="1100" b="0"/>
-                        <a:t/>
-                      </a:r>
-                    </a:p>
-                  </a:txBody>
-                  <a:tcPr/>
-                </a:tc>
-                <a:tc>
-                  <a:txBody>
-                    <a:bodyPr/>
-                    <a:lstStyle/>
-                    <a:p>
-                      <a:r>
-                        <a:rPr sz="1100" b="0"/>
-                        <a:t>10400 (2101)</a:t>
-                      </a:r>
-                    </a:p>
-                  </a:txBody>
-                  <a:tcPr/>
-                </a:tc>
-                <a:tc>
-                  <a:txBody>
-                    <a:bodyPr/>
-                    <a:lstStyle/>
-                    <a:p>
-                      <a:r>
-                        <a:rPr sz="1100" b="0"/>
-                        <a:t>-</a:t>
-                      </a:r>
-                    </a:p>
-                  </a:txBody>
-                  <a:tcPr/>
-                </a:tc>
-                <a:tc>
-                  <a:txBody>
-                    <a:bodyPr/>
-                    <a:lstStyle/>
-                    <a:p>
-                      <a:r>
-                        <a:rPr sz="1100" b="0"/>
-                        <a:t>-</a:t>
-                      </a:r>
-                    </a:p>
-                  </a:txBody>
-                  <a:tcPr/>
-                </a:tc>
-                <a:tc>
-                  <a:txBody>
-                    <a:bodyPr/>
-                    <a:lstStyle/>
-                    <a:p>
-                      <a:r>
-                        <a:rPr sz="1100" b="0"/>
-                        <a:t>0.655</a:t>
-                      </a:r>
-                    </a:p>
-                  </a:txBody>
-                  <a:tcPr/>
-                </a:tc>
-              </a:tr>
-              <a:tr h="608888">
-                <a:tc>
-                  <a:txBody>
-                    <a:bodyPr/>
-                    <a:lstStyle/>
-                    <a:p>
-                      <a:r>
-                        <a:rPr sz="1100" b="0"/>
-                        <a:t>Internal (Gangnam)</a:t>
-                      </a:r>
-                    </a:p>
-                  </a:txBody>
-                  <a:tcPr/>
-                </a:tc>
-                <a:tc>
-                  <a:txBody>
-                    <a:bodyPr/>
-                    <a:lstStyle/>
-                    <a:p>
-                      <a:r>
-                        <a:rPr sz="1100" b="0"/>
-                        <a:t>당뇨병(DM)</a:t>
-                      </a:r>
-                    </a:p>
-                  </a:txBody>
-                  <a:tcPr/>
-                </a:tc>
-                <a:tc>
-                  <a:txBody>
-                    <a:bodyPr/>
-                    <a:lstStyle/>
-                    <a:p>
-                      <a:r>
-                        <a:rPr sz="1100" b="0"/>
-                        <a:t>252 (47)</a:t>
-                      </a:r>
-                    </a:p>
-                  </a:txBody>
-                  <a:tcPr/>
-                </a:tc>
-                <a:tc>
-                  <a:txBody>
-                    <a:bodyPr/>
-                    <a:lstStyle/>
-                    <a:p>
-                      <a:r>
-                        <a:rPr sz="1100" b="0"/>
-                        <a:t>0.1 (l1)</a:t>
-                      </a:r>
-                    </a:p>
-                  </a:txBody>
-                  <a:tcPr/>
-                </a:tc>
-                <a:tc>
-                  <a:txBody>
-                    <a:bodyPr/>
-                    <a:lstStyle/>
-                    <a:p>
-                      <a:r>
-                        <a:rPr sz="1100" b="0"/>
-                        <a:t>0.712</a:t>
-                      </a:r>
-                    </a:p>
-                  </a:txBody>
-                  <a:tcPr/>
-                </a:tc>
-                <a:tc>
-                  <a:txBody>
-                    <a:bodyPr/>
-                    <a:lstStyle/>
-                    <a:p>
-                      <a:r>
-                        <a:rPr sz="1100" b="0"/>
-                        <a:t>0.653</a:t>
-                      </a:r>
-                    </a:p>
-                  </a:txBody>
-                  <a:tcPr/>
-                </a:tc>
-              </a:tr>
-              <a:tr h="608888">
-                <a:tc>
-                  <a:txBody>
-                    <a:bodyPr/>
-                    <a:lstStyle/>
-                    <a:p>
-                      <a:r>
-                        <a:rPr sz="1100" b="0"/>
-                        <a:t>External (Sinchon)</a:t>
-                      </a:r>
-                    </a:p>
-                  </a:txBody>
-                  <a:tcPr/>
-                </a:tc>
-                <a:tc>
-                  <a:txBody>
-                    <a:bodyPr/>
-                    <a:lstStyle/>
-                    <a:p>
-                      <a:r>
-                        <a:rPr sz="1100" b="0"/>
-                        <a:t/>
-                      </a:r>
-                    </a:p>
-                  </a:txBody>
-                  <a:tcPr/>
-                </a:tc>
-                <a:tc>
-                  <a:txBody>
-                    <a:bodyPr/>
-                    <a:lstStyle/>
-                    <a:p>
-                      <a:r>
-                        <a:rPr sz="1100" b="0"/>
-                        <a:t>1123 (335)</a:t>
-                      </a:r>
-                    </a:p>
-                  </a:txBody>
-                  <a:tcPr/>
-                </a:tc>
-                <a:tc>
-                  <a:txBody>
-                    <a:bodyPr/>
-                    <a:lstStyle/>
-                    <a:p>
-                      <a:r>
-                        <a:rPr sz="1100" b="0"/>
-                        <a:t>-</a:t>
-                      </a:r>
-                    </a:p>
-                  </a:txBody>
-                  <a:tcPr/>
-                </a:tc>
-                <a:tc>
-                  <a:txBody>
-                    <a:bodyPr/>
-                    <a:lstStyle/>
-                    <a:p>
-                      <a:r>
-                        <a:rPr sz="1100" b="0"/>
-                        <a:t>-</a:t>
-                      </a:r>
-                    </a:p>
-                  </a:txBody>
-                  <a:tcPr/>
-                </a:tc>
-                <a:tc>
-                  <a:txBody>
-                    <a:bodyPr/>
-                    <a:lstStyle/>
-                    <a:p>
-                      <a:r>
-                        <a:rPr sz="1100" b="0"/>
-                        <a:t>0.647</a:t>
-                      </a:r>
-                    </a:p>
-                  </a:txBody>
-                  <a:tcPr/>
-                </a:tc>
-              </a:tr>
-              <a:tr h="608888">
-                <a:tc>
-                  <a:txBody>
-                    <a:bodyPr/>
-                    <a:lstStyle/>
-                    <a:p>
-                      <a:r>
-                        <a:rPr sz="1100" b="0"/>
-                        <a:t>External (New10000)</a:t>
-                      </a:r>
-                    </a:p>
-                  </a:txBody>
-                  <a:tcPr/>
-                </a:tc>
-                <a:tc>
-                  <a:txBody>
-                    <a:bodyPr/>
-                    <a:lstStyle/>
-                    <a:p>
-                      <a:r>
-                        <a:rPr sz="1100" b="0"/>
-                        <a:t/>
-                      </a:r>
-                    </a:p>
-                  </a:txBody>
-                  <a:tcPr/>
-                </a:tc>
-                <a:tc>
-                  <a:txBody>
-                    <a:bodyPr/>
-                    <a:lstStyle/>
-                    <a:p>
-                      <a:r>
-                        <a:rPr sz="1100" b="0"/>
-                        <a:t>10400 (1217)</a:t>
-                      </a:r>
-                    </a:p>
-                  </a:txBody>
-                  <a:tcPr/>
-                </a:tc>
-                <a:tc>
-                  <a:txBody>
-                    <a:bodyPr/>
-                    <a:lstStyle/>
-                    <a:p>
-                      <a:r>
-                        <a:rPr sz="1100" b="0"/>
-                        <a:t>-</a:t>
-                      </a:r>
-                    </a:p>
-                  </a:txBody>
-                  <a:tcPr/>
-                </a:tc>
-                <a:tc>
-                  <a:txBody>
-                    <a:bodyPr/>
-                    <a:lstStyle/>
-                    <a:p>
-                      <a:r>
-                        <a:rPr sz="1100" b="0"/>
-                        <a:t>-</a:t>
-                      </a:r>
-                    </a:p>
-                  </a:txBody>
-                  <a:tcPr/>
-                </a:tc>
-                <a:tc>
-                  <a:txBody>
-                    <a:bodyPr/>
-                    <a:lstStyle/>
-                    <a:p>
-                      <a:r>
-                        <a:rPr sz="1100" b="0"/>
-                        <a:t>0.635</a:t>
-                      </a:r>
-                    </a:p>
-                  </a:txBody>
-                  <a:tcPr/>
-                </a:tc>
-              </a:tr>
-              <a:tr h="608888">
-                <a:tc>
-                  <a:txBody>
-                    <a:bodyPr/>
-                    <a:lstStyle/>
-                    <a:p>
-                      <a:r>
-                        <a:rPr sz="1100" b="0"/>
-                        <a:t>Internal (Gangnam)</a:t>
-                      </a:r>
-                    </a:p>
-                  </a:txBody>
-                  <a:tcPr/>
-                </a:tc>
-                <a:tc>
-                  <a:txBody>
-                    <a:bodyPr/>
-                    <a:lstStyle/>
-                    <a:p>
-                      <a:r>
-                        <a:rPr sz="1100" b="0"/>
-                        <a:t>만성신장질환(CKD)</a:t>
-                      </a:r>
-                    </a:p>
-                  </a:txBody>
-                  <a:tcPr/>
-                </a:tc>
-                <a:tc>
-                  <a:txBody>
-                    <a:bodyPr/>
-                    <a:lstStyle/>
-                    <a:p>
-                      <a:r>
-                        <a:rPr sz="1100" b="0"/>
-                        <a:t>252 (21)</a:t>
-                      </a:r>
-                    </a:p>
-                  </a:txBody>
-                  <a:tcPr/>
-                </a:tc>
-                <a:tc>
-                  <a:txBody>
-                    <a:bodyPr/>
-                    <a:lstStyle/>
-                    <a:p>
-                      <a:r>
-                        <a:rPr sz="1100" b="0"/>
-                        <a:t>10 (l2)</a:t>
-                      </a:r>
-                    </a:p>
-                  </a:txBody>
-                  <a:tcPr/>
-                </a:tc>
-                <a:tc>
-                  <a:txBody>
-                    <a:bodyPr/>
-                    <a:lstStyle/>
-                    <a:p>
-                      <a:r>
-                        <a:rPr sz="1100" b="0"/>
-                        <a:t>0.836</a:t>
-                      </a:r>
-                    </a:p>
-                  </a:txBody>
-                  <a:tcPr/>
-                </a:tc>
-                <a:tc>
-                  <a:txBody>
-                    <a:bodyPr/>
-                    <a:lstStyle/>
-                    <a:p>
-                      <a:r>
-                        <a:rPr sz="1100" b="0"/>
-                        <a:t>0.765</a:t>
-                      </a:r>
-                    </a:p>
-                  </a:txBody>
-                  <a:tcPr/>
-                </a:tc>
-              </a:tr>
-              <a:tr h="608896">
-                <a:tc>
-                  <a:txBody>
-                    <a:bodyPr/>
-                    <a:lstStyle/>
-                    <a:p>
-                      <a:r>
-                        <a:rPr sz="1100" b="0"/>
-                        <a:t>External (Sinchon)</a:t>
-                      </a:r>
-                    </a:p>
-                  </a:txBody>
-                  <a:tcPr/>
-                </a:tc>
-                <a:tc>
-                  <a:txBody>
-                    <a:bodyPr/>
-                    <a:lstStyle/>
-                    <a:p>
-                      <a:r>
-                        <a:rPr sz="1100" b="0"/>
-                        <a:t/>
-                      </a:r>
-                    </a:p>
-                  </a:txBody>
-                  <a:tcPr/>
-                </a:tc>
-                <a:tc>
-                  <a:txBody>
-                    <a:bodyPr/>
-                    <a:lstStyle/>
-                    <a:p>
-                      <a:r>
-                        <a:rPr sz="1100" b="0"/>
-                        <a:t>1123 (188)</a:t>
-                      </a:r>
-                    </a:p>
-                  </a:txBody>
-                  <a:tcPr/>
-                </a:tc>
-                <a:tc>
-                  <a:txBody>
-                    <a:bodyPr/>
-                    <a:lstStyle/>
-                    <a:p>
-                      <a:r>
-                        <a:rPr sz="1100" b="0"/>
-                        <a:t>-</a:t>
-                      </a:r>
-                    </a:p>
-                  </a:txBody>
-                  <a:tcPr/>
-                </a:tc>
-                <a:tc>
-                  <a:txBody>
-                    <a:bodyPr/>
-                    <a:lstStyle/>
-                    <a:p>
-                      <a:r>
-                        <a:rPr sz="1100" b="0"/>
-                        <a:t>-</a:t>
-                      </a:r>
-                    </a:p>
-                  </a:txBody>
-                  <a:tcPr/>
-                </a:tc>
-                <a:tc>
-                  <a:txBody>
-                    <a:bodyPr/>
-                    <a:lstStyle/>
-                    <a:p>
-                      <a:r>
-                        <a:rPr sz="1100" b="0"/>
-                        <a:t>0.613</a:t>
-                      </a:r>
-                    </a:p>
-                  </a:txBody>
-                  <a:tcPr/>
-                </a:tc>
-              </a:tr>
-            </a:tbl>
-          </a:graphicData>
-        </a:graphic>
-      </p:graphicFrame>
+      <p:sp>
+        <p:nvSpPr>
+          <p:cNvPr id="3" name="Content Placeholder 2"/>
+          <p:cNvSpPr>
+            <a:spLocks noGrp="1"/>
+          </p:cNvSpPr>
+          <p:nvPr>
+            <p:ph idx="1"/>
+          </p:nvPr>
+        </p:nvSpPr>
+        <p:spPr/>
+        <p:txBody>
+          <a:bodyPr/>
+          <a:lstStyle/>
+          <a:p>
+            <a:pPr>
+              <a:defRPr sz="2000"/>
+            </a:pPr>
+            <a:r>
+              <a:rPr sz="2000"/>
+              <a:t>Cohort: Internal(Gangnam, n=1,260) 개발·내부검증, External(Sinchon, n=1,123) 외부검증 — 둘 다 단면(cross-sectional). longitudinal인 New10000은 설계가 달라 제외</a:t>
+            </a:r>
+          </a:p>
+          <a:p>
+            <a:r>
+              <a:rPr sz="2000"/>
+              <a:t>Input: Clinic4 = Sex + Age + Height + Weight (age/height/weight는 Gangnam 기준 StandardScaler로 표준화)</a:t>
+            </a:r>
+          </a:p>
+          <a:p>
+            <a:r>
+              <a:rPr sz="2000"/>
+              <a:t>Outcome: HTN / DM / CKD 각각 독립적인 logistic regression (질병마다 별도 split)</a:t>
+            </a:r>
+          </a:p>
+          <a:p>
+            <a:r>
+              <a:rPr sz="2000"/>
+              <a:t>Split: 질병 라벨로 stratify한 patient-level train:valid:test = 7:1:2</a:t>
+            </a:r>
+          </a:p>
+          <a:p>
+            <a:r>
+              <a:rPr sz="2000"/>
+              <a:t>튜닝: GridSearchCV(C×penalty(l1/l2)×class_weight, solver=liblinear, scoring=roc_auc), valid를 단일 predefined fold로 사용</a:t>
+            </a:r>
+          </a:p>
+          <a:p>
+            <a:r>
+              <a:rPr sz="2000"/>
+              <a:t>성능: held-out test(20%) AUC 1회 산출. Cutoff은 valid ROC의 Youden index 최대점, 외부는 Gangnam에서 고정한 값을 그대로 적용</a:t>
+            </a:r>
+          </a:p>
+          <a:p>
+            <a:r>
+              <a:rPr sz="2000"/>
+              <a:t>외부검증: train+valid로 재학습한 frozen 모델(scaler 포함)을 Sinchon에 그대로 적용(재학습 없음)</a:t>
+            </a:r>
+          </a:p>
+          <a:p>
+            <a:r>
+              <a:rPr sz="2000"/>
+              <a:t>확장 입력: AEC(aec_128)와 체성분(VAT/SAT/LAMA/NAMA/IMATA) 128구간 곡선(liver→pubis crop, 전처리 없음)을 FPCA로 압축해 Clinic4에 추가</a:t>
+            </a:r>
+          </a:p>
+          <a:p>
+            <a:r>
+              <a:rPr sz="2000"/>
+              <a:t>비교: Baseline 대비 AUC 차이를 patient_id로 짝지은 paired DeLong test로 검정 (* p&lt;0.05). 계수 p-value는 보정 전</a:t>
+            </a:r>
+          </a:p>
+        </p:txBody>
+      </p:sp>
     </p:spTree>
   </p:cSld>
   <p:clrMapOvr>
@@ -6426,7 +8670,7 @@
           <a:lstStyle/>
           <a:p>
             <a:r>
-              <a:t>Table 2. Clinic4 Coefficient / Odds Ratio (Internal train+valid)</a:t>
+              <a:t>Table 1. Clinic4 Baseline 성능 (원본 유병률; Cutoff = Youden 최대점, Gangnam은 valid·Sinchon은 Gangnam train+valid 기준)</a:t>
             </a:r>
           </a:p>
         </p:txBody>
@@ -6440,93 +8684,163 @@
           <p:nvPr/>
         </p:nvGraphicFramePr>
         <p:xfrm>
-          <a:off x="508000" y="975360"/>
-          <a:ext cx="11175997" cy="5480000"/>
+          <a:off x="512064" y="978408"/>
+          <a:ext cx="11173968" cy="5124630"/>
         </p:xfrm>
         <a:graphic>
           <a:graphicData uri="http://schemas.openxmlformats.org/drawingml/2006/table">
             <a:tbl>
               <a:tblPr firstRow="1" bandRow="1">
-                <a:tableStyleId>{5C22544A-7EE6-4342-B048-85BDC9FD1C3A}</a:tableStyleId>
+                <a:tableStyleId>{C083E6E3-FA7D-4D7B-A595-EF9225AFEA82}</a:tableStyleId>
               </a:tblPr>
               <a:tblGrid>
-                <a:gridCol w="3378790"/>
-                <a:gridCol w="2599069"/>
-                <a:gridCol w="2599069"/>
-                <a:gridCol w="2599069"/>
+                <a:gridCol w="1241552"/>
+                <a:gridCol w="1241552"/>
+                <a:gridCol w="1241552"/>
+                <a:gridCol w="1241552"/>
+                <a:gridCol w="1241552"/>
+                <a:gridCol w="1241552"/>
+                <a:gridCol w="1241552"/>
+                <a:gridCol w="1241552"/>
+                <a:gridCol w="1241552"/>
               </a:tblGrid>
-              <a:tr h="421538">
-                <a:tc>
-                  <a:txBody>
-                    <a:bodyPr/>
-                    <a:lstStyle/>
-                    <a:p>
-                      <a:pPr>
-                        <a:defRPr sz="1100" b="1"/>
-                      </a:pPr>
-                      <a:r>
+              <a:tr h="732090">
+                <a:tc>
+                  <a:txBody>
+                    <a:bodyPr/>
+                    <a:lstStyle/>
+                    <a:p>
+                      <a:pPr algn="ctr"/>
+                      <a:r>
+                        <a:rPr sz="1200" b="1"/>
                         <a:t>Disease</a:t>
                       </a:r>
                     </a:p>
                   </a:txBody>
-                  <a:tcPr/>
-                </a:tc>
-                <a:tc>
-                  <a:txBody>
-                    <a:bodyPr/>
-                    <a:lstStyle/>
-                    <a:p>
-                      <a:pPr>
-                        <a:defRPr sz="1100" b="1"/>
-                      </a:pPr>
-                      <a:r>
-                        <a:t>Term</a:t>
-                      </a:r>
-                    </a:p>
-                  </a:txBody>
-                  <a:tcPr/>
-                </a:tc>
-                <a:tc>
-                  <a:txBody>
-                    <a:bodyPr/>
-                    <a:lstStyle/>
-                    <a:p>
-                      <a:pPr>
-                        <a:defRPr sz="1100" b="1"/>
-                      </a:pPr>
-                      <a:r>
-                        <a:t>Coefficient</a:t>
-                      </a:r>
-                    </a:p>
-                  </a:txBody>
-                  <a:tcPr/>
-                </a:tc>
-                <a:tc>
-                  <a:txBody>
-                    <a:bodyPr/>
-                    <a:lstStyle/>
-                    <a:p>
-                      <a:pPr>
-                        <a:defRPr sz="1100" b="1"/>
-                      </a:pPr>
-                      <a:r>
-                        <a:t>Odds Ratio</a:t>
-                      </a:r>
-                    </a:p>
-                  </a:txBody>
-                  <a:tcPr/>
+                  <a:tcPr anchor="ctr"/>
+                </a:tc>
+                <a:tc>
+                  <a:txBody>
+                    <a:bodyPr/>
+                    <a:lstStyle/>
+                    <a:p>
+                      <a:pPr algn="ctr"/>
+                      <a:r>
+                        <a:rPr sz="1200" b="1"/>
+                        <a:t>Cohort</a:t>
+                      </a:r>
+                    </a:p>
+                  </a:txBody>
+                  <a:tcPr anchor="ctr"/>
+                </a:tc>
+                <a:tc>
+                  <a:txBody>
+                    <a:bodyPr/>
+                    <a:lstStyle/>
+                    <a:p>
+                      <a:pPr algn="ctr"/>
+                      <a:r>
+                        <a:rPr sz="1200" b="1"/>
+                        <a:t>n (pos)</a:t>
+                      </a:r>
+                    </a:p>
+                  </a:txBody>
+                  <a:tcPr anchor="ctr"/>
+                </a:tc>
+                <a:tc>
+                  <a:txBody>
+                    <a:bodyPr/>
+                    <a:lstStyle/>
+                    <a:p>
+                      <a:pPr algn="ctr"/>
+                      <a:r>
+                        <a:rPr sz="1200" b="1"/>
+                        <a:t>Best C (penalty, class_weight)</a:t>
+                      </a:r>
+                    </a:p>
+                  </a:txBody>
+                  <a:tcPr anchor="ctr"/>
+                </a:tc>
+                <a:tc>
+                  <a:txBody>
+                    <a:bodyPr/>
+                    <a:lstStyle/>
+                    <a:p>
+                      <a:pPr algn="ctr"/>
+                      <a:r>
+                        <a:rPr sz="1200" b="1"/>
+                        <a:t>Valid AUC</a:t>
+                      </a:r>
+                    </a:p>
+                  </a:txBody>
+                  <a:tcPr anchor="ctr"/>
+                </a:tc>
+                <a:tc>
+                  <a:txBody>
+                    <a:bodyPr/>
+                    <a:lstStyle/>
+                    <a:p>
+                      <a:pPr algn="ctr"/>
+                      <a:r>
+                        <a:rPr sz="1200" b="1"/>
+                        <a:t>Cutoff</a:t>
+                      </a:r>
+                    </a:p>
+                  </a:txBody>
+                  <a:tcPr anchor="ctr"/>
+                </a:tc>
+                <a:tc>
+                  <a:txBody>
+                    <a:bodyPr/>
+                    <a:lstStyle/>
+                    <a:p>
+                      <a:pPr algn="ctr"/>
+                      <a:r>
+                        <a:rPr sz="1200" b="1"/>
+                        <a:t>AUC</a:t>
+                      </a:r>
+                    </a:p>
+                  </a:txBody>
+                  <a:tcPr anchor="ctr"/>
+                </a:tc>
+                <a:tc>
+                  <a:txBody>
+                    <a:bodyPr/>
+                    <a:lstStyle/>
+                    <a:p>
+                      <a:pPr algn="ctr"/>
+                      <a:r>
+                        <a:rPr sz="1200" b="1"/>
+                        <a:t>Sensitivity</a:t>
+                      </a:r>
+                    </a:p>
+                  </a:txBody>
+                  <a:tcPr anchor="ctr"/>
+                </a:tc>
+                <a:tc>
+                  <a:txBody>
+                    <a:bodyPr/>
+                    <a:lstStyle/>
+                    <a:p>
+                      <a:pPr algn="ctr"/>
+                      <a:r>
+                        <a:rPr sz="1200" b="1"/>
+                        <a:t>Specificity</a:t>
+                      </a:r>
+                    </a:p>
+                  </a:txBody>
+                  <a:tcPr anchor="ctr"/>
                 </a:tc>
               </a:tr>
-              <a:tr h="421538">
-                <a:tc rowSpan="4">
-                  <a:txBody>
-                    <a:bodyPr/>
-                    <a:lstStyle/>
-                    <a:p>
-                      <a:pPr>
-                        <a:defRPr sz="1100"/>
-                      </a:pPr>
-                      <a:r>
+              <a:tr h="732090">
+                <a:tc rowSpan="2">
+                  <a:txBody>
+                    <a:bodyPr/>
+                    <a:lstStyle/>
+                    <a:p>
+                      <a:pPr algn="ctr"/>
+                      <a:r>
+                        <a:rPr sz="1200" b="0"/>
                         <a:t>고혈압(HTN)</a:t>
                       </a:r>
                     </a:p>
@@ -6538,50 +8852,115 @@
                     <a:bodyPr/>
                     <a:lstStyle/>
                     <a:p>
-                      <a:pPr>
-                        <a:defRPr sz="1100"/>
-                      </a:pPr>
-                      <a:r>
-                        <a:t>Sex(M)</a:t>
-                      </a:r>
-                    </a:p>
-                  </a:txBody>
-                  <a:tcPr/>
-                </a:tc>
-                <a:tc>
-                  <a:txBody>
-                    <a:bodyPr/>
-                    <a:lstStyle/>
-                    <a:p>
-                      <a:pPr>
-                        <a:defRPr sz="1100"/>
-                      </a:pPr>
-                      <a:r>
-                        <a:rPr sz="1100" b="0"/>
-                        <a:t>1.086</a:t>
-                      </a:r>
-                    </a:p>
-                  </a:txBody>
-                  <a:tcPr/>
-                </a:tc>
-                <a:tc>
-                  <a:txBody>
-                    <a:bodyPr/>
-                    <a:lstStyle/>
-                    <a:p>
-                      <a:pPr>
-                        <a:defRPr sz="1100"/>
-                      </a:pPr>
-                      <a:r>
-                        <a:rPr sz="1100" b="0"/>
-                        <a:t>2.962</a:t>
-                      </a:r>
-                    </a:p>
-                  </a:txBody>
-                  <a:tcPr/>
+                      <a:pPr algn="ctr"/>
+                      <a:r>
+                        <a:rPr sz="1200" b="0"/>
+                        <a:t>Internal (Gangnam)</a:t>
+                      </a:r>
+                    </a:p>
+                  </a:txBody>
+                  <a:tcPr anchor="ctr"/>
+                </a:tc>
+                <a:tc>
+                  <a:txBody>
+                    <a:bodyPr/>
+                    <a:lstStyle/>
+                    <a:p>
+                      <a:pPr algn="ctr"/>
+                      <a:r>
+                        <a:rPr sz="1200" b="0"/>
+                        <a:t>252 (77)</a:t>
+                      </a:r>
+                    </a:p>
+                  </a:txBody>
+                  <a:tcPr anchor="ctr"/>
+                </a:tc>
+                <a:tc>
+                  <a:txBody>
+                    <a:bodyPr/>
+                    <a:lstStyle/>
+                    <a:p>
+                      <a:pPr algn="ctr"/>
+                      <a:r>
+                        <a:rPr sz="1200" b="0"/>
+                        <a:t>100 (l2, None)</a:t>
+                      </a:r>
+                    </a:p>
+                  </a:txBody>
+                  <a:tcPr anchor="ctr"/>
+                </a:tc>
+                <a:tc>
+                  <a:txBody>
+                    <a:bodyPr/>
+                    <a:lstStyle/>
+                    <a:p>
+                      <a:pPr algn="ctr"/>
+                      <a:r>
+                        <a:rPr sz="1200" b="0"/>
+                        <a:t>0.805</a:t>
+                      </a:r>
+                    </a:p>
+                  </a:txBody>
+                  <a:tcPr anchor="ctr"/>
+                </a:tc>
+                <a:tc>
+                  <a:txBody>
+                    <a:bodyPr/>
+                    <a:lstStyle/>
+                    <a:p>
+                      <a:pPr algn="ctr"/>
+                      <a:r>
+                        <a:rPr sz="1200" b="0"/>
+                        <a:t>0.303</a:t>
+                      </a:r>
+                    </a:p>
+                  </a:txBody>
+                  <a:tcPr anchor="ctr"/>
+                </a:tc>
+                <a:tc>
+                  <a:txBody>
+                    <a:bodyPr/>
+                    <a:lstStyle/>
+                    <a:p>
+                      <a:pPr algn="ctr"/>
+                      <a:r>
+                        <a:rPr sz="1200" b="0"/>
+                        <a:t>0.761</a:t>
+                      </a:r>
+                    </a:p>
+                  </a:txBody>
+                  <a:tcPr anchor="ctr"/>
+                </a:tc>
+                <a:tc>
+                  <a:txBody>
+                    <a:bodyPr/>
+                    <a:lstStyle/>
+                    <a:p>
+                      <a:pPr algn="ctr"/>
+                      <a:r>
+                        <a:rPr sz="1200" b="0"/>
+                        <a:t>0.740</a:t>
+                      </a:r>
+                    </a:p>
+                  </a:txBody>
+                  <a:tcPr anchor="ctr"/>
+                </a:tc>
+                <a:tc>
+                  <a:txBody>
+                    <a:bodyPr/>
+                    <a:lstStyle/>
+                    <a:p>
+                      <a:pPr algn="ctr"/>
+                      <a:r>
+                        <a:rPr sz="1200" b="0"/>
+                        <a:t>0.623</a:t>
+                      </a:r>
+                    </a:p>
+                  </a:txBody>
+                  <a:tcPr anchor="ctr"/>
                 </a:tc>
               </a:tr>
-              <a:tr h="421538">
+              <a:tr h="732090">
                 <a:tc vMerge="1">
                   <a:txBody>
                     <a:bodyPr/>
@@ -6595,50 +8974,243 @@
                     <a:bodyPr/>
                     <a:lstStyle/>
                     <a:p>
-                      <a:pPr>
-                        <a:defRPr sz="1100"/>
-                      </a:pPr>
-                      <a:r>
-                        <a:t>Age</a:t>
-                      </a:r>
-                    </a:p>
-                  </a:txBody>
-                  <a:tcPr/>
-                </a:tc>
-                <a:tc>
-                  <a:txBody>
-                    <a:bodyPr/>
-                    <a:lstStyle/>
-                    <a:p>
-                      <a:pPr>
-                        <a:defRPr sz="1100"/>
-                      </a:pPr>
-                      <a:r>
-                        <a:rPr sz="1100" b="0"/>
-                        <a:t>1.041</a:t>
-                      </a:r>
-                    </a:p>
-                  </a:txBody>
-                  <a:tcPr/>
-                </a:tc>
-                <a:tc>
-                  <a:txBody>
-                    <a:bodyPr/>
-                    <a:lstStyle/>
-                    <a:p>
-                      <a:pPr>
-                        <a:defRPr sz="1100"/>
-                      </a:pPr>
-                      <a:r>
-                        <a:rPr sz="1100" b="0"/>
-                        <a:t>2.832</a:t>
-                      </a:r>
-                    </a:p>
-                  </a:txBody>
-                  <a:tcPr/>
+                      <a:pPr algn="ctr"/>
+                      <a:r>
+                        <a:rPr sz="1200" b="0"/>
+                        <a:t>External (Sinchon)</a:t>
+                      </a:r>
+                    </a:p>
+                  </a:txBody>
+                  <a:tcPr anchor="ctr"/>
+                </a:tc>
+                <a:tc>
+                  <a:txBody>
+                    <a:bodyPr/>
+                    <a:lstStyle/>
+                    <a:p>
+                      <a:pPr algn="ctr"/>
+                      <a:r>
+                        <a:rPr sz="1200" b="0"/>
+                        <a:t>1123 (506)</a:t>
+                      </a:r>
+                    </a:p>
+                  </a:txBody>
+                  <a:tcPr anchor="ctr"/>
+                </a:tc>
+                <a:tc>
+                  <a:txBody>
+                    <a:bodyPr/>
+                    <a:lstStyle/>
+                    <a:p>
+                      <a:pPr algn="ctr"/>
+                      <a:r>
+                        <a:rPr sz="1200" b="0"/>
+                        <a:t>-</a:t>
+                      </a:r>
+                    </a:p>
+                  </a:txBody>
+                  <a:tcPr anchor="ctr"/>
+                </a:tc>
+                <a:tc>
+                  <a:txBody>
+                    <a:bodyPr/>
+                    <a:lstStyle/>
+                    <a:p>
+                      <a:pPr algn="ctr"/>
+                      <a:r>
+                        <a:rPr sz="1200" b="0"/>
+                        <a:t>-</a:t>
+                      </a:r>
+                    </a:p>
+                  </a:txBody>
+                  <a:tcPr anchor="ctr"/>
+                </a:tc>
+                <a:tc>
+                  <a:txBody>
+                    <a:bodyPr/>
+                    <a:lstStyle/>
+                    <a:p>
+                      <a:pPr algn="ctr"/>
+                      <a:r>
+                        <a:rPr sz="1200" b="0"/>
+                        <a:t>0.279</a:t>
+                      </a:r>
+                    </a:p>
+                  </a:txBody>
+                  <a:tcPr anchor="ctr"/>
+                </a:tc>
+                <a:tc>
+                  <a:txBody>
+                    <a:bodyPr/>
+                    <a:lstStyle/>
+                    <a:p>
+                      <a:pPr algn="ctr"/>
+                      <a:r>
+                        <a:rPr sz="1200" b="0"/>
+                        <a:t>0.715</a:t>
+                      </a:r>
+                    </a:p>
+                  </a:txBody>
+                  <a:tcPr anchor="ctr"/>
+                </a:tc>
+                <a:tc>
+                  <a:txBody>
+                    <a:bodyPr/>
+                    <a:lstStyle/>
+                    <a:p>
+                      <a:pPr algn="ctr"/>
+                      <a:r>
+                        <a:rPr sz="1200" b="0"/>
+                        <a:t>0.771</a:t>
+                      </a:r>
+                    </a:p>
+                  </a:txBody>
+                  <a:tcPr anchor="ctr"/>
+                </a:tc>
+                <a:tc>
+                  <a:txBody>
+                    <a:bodyPr/>
+                    <a:lstStyle/>
+                    <a:p>
+                      <a:pPr algn="ctr"/>
+                      <a:r>
+                        <a:rPr sz="1200" b="0"/>
+                        <a:t>0.578</a:t>
+                      </a:r>
+                    </a:p>
+                  </a:txBody>
+                  <a:tcPr anchor="ctr"/>
                 </a:tc>
               </a:tr>
-              <a:tr h="421538">
+              <a:tr h="732090">
+                <a:tc rowSpan="2">
+                  <a:txBody>
+                    <a:bodyPr/>
+                    <a:lstStyle/>
+                    <a:p>
+                      <a:pPr algn="ctr"/>
+                      <a:r>
+                        <a:rPr sz="1200" b="0"/>
+                        <a:t>당뇨병(DM)</a:t>
+                      </a:r>
+                    </a:p>
+                  </a:txBody>
+                  <a:tcPr anchor="ctr"/>
+                </a:tc>
+                <a:tc>
+                  <a:txBody>
+                    <a:bodyPr/>
+                    <a:lstStyle/>
+                    <a:p>
+                      <a:pPr algn="ctr"/>
+                      <a:r>
+                        <a:rPr sz="1200" b="0"/>
+                        <a:t>Internal (Gangnam)</a:t>
+                      </a:r>
+                    </a:p>
+                  </a:txBody>
+                  <a:tcPr anchor="ctr"/>
+                </a:tc>
+                <a:tc>
+                  <a:txBody>
+                    <a:bodyPr/>
+                    <a:lstStyle/>
+                    <a:p>
+                      <a:pPr algn="ctr"/>
+                      <a:r>
+                        <a:rPr sz="1200" b="0"/>
+                        <a:t>252 (47)</a:t>
+                      </a:r>
+                    </a:p>
+                  </a:txBody>
+                  <a:tcPr anchor="ctr"/>
+                </a:tc>
+                <a:tc>
+                  <a:txBody>
+                    <a:bodyPr/>
+                    <a:lstStyle/>
+                    <a:p>
+                      <a:pPr algn="ctr"/>
+                      <a:r>
+                        <a:rPr sz="1200" b="0"/>
+                        <a:t>0.01 (l2, balanced)</a:t>
+                      </a:r>
+                    </a:p>
+                  </a:txBody>
+                  <a:tcPr anchor="ctr"/>
+                </a:tc>
+                <a:tc>
+                  <a:txBody>
+                    <a:bodyPr/>
+                    <a:lstStyle/>
+                    <a:p>
+                      <a:pPr algn="ctr"/>
+                      <a:r>
+                        <a:rPr sz="1200" b="0"/>
+                        <a:t>0.715</a:t>
+                      </a:r>
+                    </a:p>
+                  </a:txBody>
+                  <a:tcPr anchor="ctr"/>
+                </a:tc>
+                <a:tc>
+                  <a:txBody>
+                    <a:bodyPr/>
+                    <a:lstStyle/>
+                    <a:p>
+                      <a:pPr algn="ctr"/>
+                      <a:r>
+                        <a:rPr sz="1200" b="0"/>
+                        <a:t>0.545</a:t>
+                      </a:r>
+                    </a:p>
+                  </a:txBody>
+                  <a:tcPr anchor="ctr"/>
+                </a:tc>
+                <a:tc>
+                  <a:txBody>
+                    <a:bodyPr/>
+                    <a:lstStyle/>
+                    <a:p>
+                      <a:pPr algn="ctr"/>
+                      <a:r>
+                        <a:rPr sz="1200" b="0"/>
+                        <a:t>0.661</a:t>
+                      </a:r>
+                    </a:p>
+                  </a:txBody>
+                  <a:tcPr anchor="ctr"/>
+                </a:tc>
+                <a:tc>
+                  <a:txBody>
+                    <a:bodyPr/>
+                    <a:lstStyle/>
+                    <a:p>
+                      <a:pPr algn="ctr"/>
+                      <a:r>
+                        <a:rPr sz="1200" b="0"/>
+                        <a:t>0.532</a:t>
+                      </a:r>
+                    </a:p>
+                  </a:txBody>
+                  <a:tcPr anchor="ctr"/>
+                </a:tc>
+                <a:tc>
+                  <a:txBody>
+                    <a:bodyPr/>
+                    <a:lstStyle/>
+                    <a:p>
+                      <a:pPr algn="ctr"/>
+                      <a:r>
+                        <a:rPr sz="1200" b="0"/>
+                        <a:t>0.698</a:t>
+                      </a:r>
+                    </a:p>
+                  </a:txBody>
+                  <a:tcPr anchor="ctr"/>
+                </a:tc>
+              </a:tr>
+              <a:tr h="732090">
                 <a:tc vMerge="1">
                   <a:txBody>
                     <a:bodyPr/>
@@ -6652,50 +9224,243 @@
                     <a:bodyPr/>
                     <a:lstStyle/>
                     <a:p>
-                      <a:pPr>
-                        <a:defRPr sz="1100"/>
-                      </a:pPr>
-                      <a:r>
-                        <a:t>Height</a:t>
-                      </a:r>
-                    </a:p>
-                  </a:txBody>
-                  <a:tcPr/>
-                </a:tc>
-                <a:tc>
-                  <a:txBody>
-                    <a:bodyPr/>
-                    <a:lstStyle/>
-                    <a:p>
-                      <a:pPr>
-                        <a:defRPr sz="1100"/>
-                      </a:pPr>
-                      <a:r>
-                        <a:rPr sz="1100" b="0"/>
-                        <a:t>-0.460</a:t>
-                      </a:r>
-                    </a:p>
-                  </a:txBody>
-                  <a:tcPr/>
-                </a:tc>
-                <a:tc>
-                  <a:txBody>
-                    <a:bodyPr/>
-                    <a:lstStyle/>
-                    <a:p>
-                      <a:pPr>
-                        <a:defRPr sz="1100"/>
-                      </a:pPr>
-                      <a:r>
-                        <a:rPr sz="1100" b="0"/>
-                        <a:t>0.631</a:t>
-                      </a:r>
-                    </a:p>
-                  </a:txBody>
-                  <a:tcPr/>
+                      <a:pPr algn="ctr"/>
+                      <a:r>
+                        <a:rPr sz="1200" b="0"/>
+                        <a:t>External (Sinchon)</a:t>
+                      </a:r>
+                    </a:p>
+                  </a:txBody>
+                  <a:tcPr anchor="ctr"/>
+                </a:tc>
+                <a:tc>
+                  <a:txBody>
+                    <a:bodyPr/>
+                    <a:lstStyle/>
+                    <a:p>
+                      <a:pPr algn="ctr"/>
+                      <a:r>
+                        <a:rPr sz="1200" b="0"/>
+                        <a:t>1123 (335)</a:t>
+                      </a:r>
+                    </a:p>
+                  </a:txBody>
+                  <a:tcPr anchor="ctr"/>
+                </a:tc>
+                <a:tc>
+                  <a:txBody>
+                    <a:bodyPr/>
+                    <a:lstStyle/>
+                    <a:p>
+                      <a:pPr algn="ctr"/>
+                      <a:r>
+                        <a:rPr sz="1200" b="0"/>
+                        <a:t>-</a:t>
+                      </a:r>
+                    </a:p>
+                  </a:txBody>
+                  <a:tcPr anchor="ctr"/>
+                </a:tc>
+                <a:tc>
+                  <a:txBody>
+                    <a:bodyPr/>
+                    <a:lstStyle/>
+                    <a:p>
+                      <a:pPr algn="ctr"/>
+                      <a:r>
+                        <a:rPr sz="1200" b="0"/>
+                        <a:t>-</a:t>
+                      </a:r>
+                    </a:p>
+                  </a:txBody>
+                  <a:tcPr anchor="ctr"/>
+                </a:tc>
+                <a:tc>
+                  <a:txBody>
+                    <a:bodyPr/>
+                    <a:lstStyle/>
+                    <a:p>
+                      <a:pPr algn="ctr"/>
+                      <a:r>
+                        <a:rPr sz="1200" b="0"/>
+                        <a:t>0.527</a:t>
+                      </a:r>
+                    </a:p>
+                  </a:txBody>
+                  <a:tcPr anchor="ctr"/>
+                </a:tc>
+                <a:tc>
+                  <a:txBody>
+                    <a:bodyPr/>
+                    <a:lstStyle/>
+                    <a:p>
+                      <a:pPr algn="ctr"/>
+                      <a:r>
+                        <a:rPr sz="1200" b="0"/>
+                        <a:t>0.649</a:t>
+                      </a:r>
+                    </a:p>
+                  </a:txBody>
+                  <a:tcPr anchor="ctr"/>
+                </a:tc>
+                <a:tc>
+                  <a:txBody>
+                    <a:bodyPr/>
+                    <a:lstStyle/>
+                    <a:p>
+                      <a:pPr algn="ctr"/>
+                      <a:r>
+                        <a:rPr sz="1200" b="0"/>
+                        <a:t>0.609</a:t>
+                      </a:r>
+                    </a:p>
+                  </a:txBody>
+                  <a:tcPr anchor="ctr"/>
+                </a:tc>
+                <a:tc>
+                  <a:txBody>
+                    <a:bodyPr/>
+                    <a:lstStyle/>
+                    <a:p>
+                      <a:pPr algn="ctr"/>
+                      <a:r>
+                        <a:rPr sz="1200" b="0"/>
+                        <a:t>0.615</a:t>
+                      </a:r>
+                    </a:p>
+                  </a:txBody>
+                  <a:tcPr anchor="ctr"/>
                 </a:tc>
               </a:tr>
-              <a:tr h="421538">
+              <a:tr h="732090">
+                <a:tc rowSpan="2">
+                  <a:txBody>
+                    <a:bodyPr/>
+                    <a:lstStyle/>
+                    <a:p>
+                      <a:pPr algn="ctr"/>
+                      <a:r>
+                        <a:rPr sz="1200" b="0"/>
+                        <a:t>만성신장질환(CKD)</a:t>
+                      </a:r>
+                    </a:p>
+                  </a:txBody>
+                  <a:tcPr anchor="ctr"/>
+                </a:tc>
+                <a:tc>
+                  <a:txBody>
+                    <a:bodyPr/>
+                    <a:lstStyle/>
+                    <a:p>
+                      <a:pPr algn="ctr"/>
+                      <a:r>
+                        <a:rPr sz="1200" b="0"/>
+                        <a:t>Internal (Gangnam)</a:t>
+                      </a:r>
+                    </a:p>
+                  </a:txBody>
+                  <a:tcPr anchor="ctr"/>
+                </a:tc>
+                <a:tc>
+                  <a:txBody>
+                    <a:bodyPr/>
+                    <a:lstStyle/>
+                    <a:p>
+                      <a:pPr algn="ctr"/>
+                      <a:r>
+                        <a:rPr sz="1200" b="0"/>
+                        <a:t>252 (21)</a:t>
+                      </a:r>
+                    </a:p>
+                  </a:txBody>
+                  <a:tcPr anchor="ctr"/>
+                </a:tc>
+                <a:tc>
+                  <a:txBody>
+                    <a:bodyPr/>
+                    <a:lstStyle/>
+                    <a:p>
+                      <a:pPr algn="ctr"/>
+                      <a:r>
+                        <a:rPr sz="1200" b="0"/>
+                        <a:t>10 (l2, None)</a:t>
+                      </a:r>
+                    </a:p>
+                  </a:txBody>
+                  <a:tcPr anchor="ctr"/>
+                </a:tc>
+                <a:tc>
+                  <a:txBody>
+                    <a:bodyPr/>
+                    <a:lstStyle/>
+                    <a:p>
+                      <a:pPr algn="ctr"/>
+                      <a:r>
+                        <a:rPr sz="1200" b="0"/>
+                        <a:t>0.836</a:t>
+                      </a:r>
+                    </a:p>
+                  </a:txBody>
+                  <a:tcPr anchor="ctr"/>
+                </a:tc>
+                <a:tc>
+                  <a:txBody>
+                    <a:bodyPr/>
+                    <a:lstStyle/>
+                    <a:p>
+                      <a:pPr algn="ctr"/>
+                      <a:r>
+                        <a:rPr sz="1200" b="0"/>
+                        <a:t>0.087</a:t>
+                      </a:r>
+                    </a:p>
+                  </a:txBody>
+                  <a:tcPr anchor="ctr"/>
+                </a:tc>
+                <a:tc>
+                  <a:txBody>
+                    <a:bodyPr/>
+                    <a:lstStyle/>
+                    <a:p>
+                      <a:pPr algn="ctr"/>
+                      <a:r>
+                        <a:rPr sz="1200" b="0"/>
+                        <a:t>0.765</a:t>
+                      </a:r>
+                    </a:p>
+                  </a:txBody>
+                  <a:tcPr anchor="ctr"/>
+                </a:tc>
+                <a:tc>
+                  <a:txBody>
+                    <a:bodyPr/>
+                    <a:lstStyle/>
+                    <a:p>
+                      <a:pPr algn="ctr"/>
+                      <a:r>
+                        <a:rPr sz="1200" b="0"/>
+                        <a:t>0.667</a:t>
+                      </a:r>
+                    </a:p>
+                  </a:txBody>
+                  <a:tcPr anchor="ctr"/>
+                </a:tc>
+                <a:tc>
+                  <a:txBody>
+                    <a:bodyPr/>
+                    <a:lstStyle/>
+                    <a:p>
+                      <a:pPr algn="ctr"/>
+                      <a:r>
+                        <a:rPr sz="1200" b="0"/>
+                        <a:t>0.641</a:t>
+                      </a:r>
+                    </a:p>
+                  </a:txBody>
+                  <a:tcPr anchor="ctr"/>
+                </a:tc>
+              </a:tr>
+              <a:tr h="732090">
                 <a:tc vMerge="1">
                   <a:txBody>
                     <a:bodyPr/>
@@ -6709,517 +9474,112 @@
                     <a:bodyPr/>
                     <a:lstStyle/>
                     <a:p>
-                      <a:pPr>
-                        <a:defRPr sz="1100"/>
-                      </a:pPr>
-                      <a:r>
-                        <a:t>Weight</a:t>
-                      </a:r>
-                    </a:p>
-                  </a:txBody>
-                  <a:tcPr/>
-                </a:tc>
-                <a:tc>
-                  <a:txBody>
-                    <a:bodyPr/>
-                    <a:lstStyle/>
-                    <a:p>
-                      <a:pPr>
-                        <a:defRPr sz="1100"/>
-                      </a:pPr>
-                      <a:r>
-                        <a:rPr sz="1100" b="0"/>
-                        <a:t>0.634</a:t>
-                      </a:r>
-                    </a:p>
-                  </a:txBody>
-                  <a:tcPr/>
-                </a:tc>
-                <a:tc>
-                  <a:txBody>
-                    <a:bodyPr/>
-                    <a:lstStyle/>
-                    <a:p>
-                      <a:pPr>
-                        <a:defRPr sz="1100"/>
-                      </a:pPr>
-                      <a:r>
-                        <a:rPr sz="1100" b="0"/>
-                        <a:t>1.886</a:t>
-                      </a:r>
-                    </a:p>
-                  </a:txBody>
-                  <a:tcPr/>
-                </a:tc>
-              </a:tr>
-              <a:tr h="421538">
-                <a:tc rowSpan="4">
-                  <a:txBody>
-                    <a:bodyPr/>
-                    <a:lstStyle/>
-                    <a:p>
-                      <a:pPr>
-                        <a:defRPr sz="1100"/>
-                      </a:pPr>
-                      <a:r>
-                        <a:t>당뇨병(DM)</a:t>
-                      </a:r>
-                    </a:p>
-                  </a:txBody>
-                  <a:tcPr anchor="ctr"/>
-                </a:tc>
-                <a:tc>
-                  <a:txBody>
-                    <a:bodyPr/>
-                    <a:lstStyle/>
-                    <a:p>
-                      <a:pPr>
-                        <a:defRPr sz="1100"/>
-                      </a:pPr>
-                      <a:r>
-                        <a:t>Sex(M)</a:t>
-                      </a:r>
-                    </a:p>
-                  </a:txBody>
-                  <a:tcPr/>
-                </a:tc>
-                <a:tc>
-                  <a:txBody>
-                    <a:bodyPr/>
-                    <a:lstStyle/>
-                    <a:p>
-                      <a:pPr>
-                        <a:defRPr sz="1100"/>
-                      </a:pPr>
-                      <a:r>
-                        <a:rPr sz="1100" b="0"/>
-                        <a:t>0.601</a:t>
-                      </a:r>
-                    </a:p>
-                  </a:txBody>
-                  <a:tcPr/>
-                </a:tc>
-                <a:tc>
-                  <a:txBody>
-                    <a:bodyPr/>
-                    <a:lstStyle/>
-                    <a:p>
-                      <a:pPr>
-                        <a:defRPr sz="1100"/>
-                      </a:pPr>
-                      <a:r>
-                        <a:rPr sz="1100" b="0"/>
-                        <a:t>1.824</a:t>
-                      </a:r>
-                    </a:p>
-                  </a:txBody>
-                  <a:tcPr/>
-                </a:tc>
-              </a:tr>
-              <a:tr h="421538">
-                <a:tc vMerge="1">
-                  <a:txBody>
-                    <a:bodyPr/>
-                    <a:lstStyle/>
-                    <a:p/>
-                  </a:txBody>
-                  <a:tcPr/>
-                </a:tc>
-                <a:tc>
-                  <a:txBody>
-                    <a:bodyPr/>
-                    <a:lstStyle/>
-                    <a:p>
-                      <a:pPr>
-                        <a:defRPr sz="1100"/>
-                      </a:pPr>
-                      <a:r>
-                        <a:t>Age</a:t>
-                      </a:r>
-                    </a:p>
-                  </a:txBody>
-                  <a:tcPr/>
-                </a:tc>
-                <a:tc>
-                  <a:txBody>
-                    <a:bodyPr/>
-                    <a:lstStyle/>
-                    <a:p>
-                      <a:pPr>
-                        <a:defRPr sz="1100"/>
-                      </a:pPr>
-                      <a:r>
-                        <a:rPr sz="1100" b="0"/>
-                        <a:t>0.526</a:t>
-                      </a:r>
-                    </a:p>
-                  </a:txBody>
-                  <a:tcPr/>
-                </a:tc>
-                <a:tc>
-                  <a:txBody>
-                    <a:bodyPr/>
-                    <a:lstStyle/>
-                    <a:p>
-                      <a:pPr>
-                        <a:defRPr sz="1100"/>
-                      </a:pPr>
-                      <a:r>
-                        <a:rPr sz="1100" b="0"/>
-                        <a:t>1.692</a:t>
-                      </a:r>
-                    </a:p>
-                  </a:txBody>
-                  <a:tcPr/>
-                </a:tc>
-              </a:tr>
-              <a:tr h="421538">
-                <a:tc vMerge="1">
-                  <a:txBody>
-                    <a:bodyPr/>
-                    <a:lstStyle/>
-                    <a:p/>
-                  </a:txBody>
-                  <a:tcPr/>
-                </a:tc>
-                <a:tc>
-                  <a:txBody>
-                    <a:bodyPr/>
-                    <a:lstStyle/>
-                    <a:p>
-                      <a:pPr>
-                        <a:defRPr sz="1100"/>
-                      </a:pPr>
-                      <a:r>
-                        <a:t>Height</a:t>
-                      </a:r>
-                    </a:p>
-                  </a:txBody>
-                  <a:tcPr/>
-                </a:tc>
-                <a:tc>
-                  <a:txBody>
-                    <a:bodyPr/>
-                    <a:lstStyle/>
-                    <a:p>
-                      <a:pPr>
-                        <a:defRPr sz="1100"/>
-                      </a:pPr>
-                      <a:r>
-                        <a:rPr sz="1100" b="0"/>
-                        <a:t>-0.346</a:t>
-                      </a:r>
-                    </a:p>
-                  </a:txBody>
-                  <a:tcPr/>
-                </a:tc>
-                <a:tc>
-                  <a:txBody>
-                    <a:bodyPr/>
-                    <a:lstStyle/>
-                    <a:p>
-                      <a:pPr>
-                        <a:defRPr sz="1100"/>
-                      </a:pPr>
-                      <a:r>
-                        <a:rPr sz="1100" b="0"/>
-                        <a:t>0.707</a:t>
-                      </a:r>
-                    </a:p>
-                  </a:txBody>
-                  <a:tcPr/>
-                </a:tc>
-              </a:tr>
-              <a:tr h="421538">
-                <a:tc vMerge="1">
-                  <a:txBody>
-                    <a:bodyPr/>
-                    <a:lstStyle/>
-                    <a:p/>
-                  </a:txBody>
-                  <a:tcPr/>
-                </a:tc>
-                <a:tc>
-                  <a:txBody>
-                    <a:bodyPr/>
-                    <a:lstStyle/>
-                    <a:p>
-                      <a:pPr>
-                        <a:defRPr sz="1100"/>
-                      </a:pPr>
-                      <a:r>
-                        <a:t>Weight</a:t>
-                      </a:r>
-                    </a:p>
-                  </a:txBody>
-                  <a:tcPr/>
-                </a:tc>
-                <a:tc>
-                  <a:txBody>
-                    <a:bodyPr/>
-                    <a:lstStyle/>
-                    <a:p>
-                      <a:pPr>
-                        <a:defRPr sz="1100"/>
-                      </a:pPr>
-                      <a:r>
-                        <a:rPr sz="1100" b="0"/>
-                        <a:t>0.693</a:t>
-                      </a:r>
-                    </a:p>
-                  </a:txBody>
-                  <a:tcPr/>
-                </a:tc>
-                <a:tc>
-                  <a:txBody>
-                    <a:bodyPr/>
-                    <a:lstStyle/>
-                    <a:p>
-                      <a:pPr>
-                        <a:defRPr sz="1100"/>
-                      </a:pPr>
-                      <a:r>
-                        <a:rPr sz="1100" b="0"/>
-                        <a:t>1.999</a:t>
-                      </a:r>
-                    </a:p>
-                  </a:txBody>
-                  <a:tcPr/>
-                </a:tc>
-              </a:tr>
-              <a:tr h="421538">
-                <a:tc rowSpan="4">
-                  <a:txBody>
-                    <a:bodyPr/>
-                    <a:lstStyle/>
-                    <a:p>
-                      <a:pPr>
-                        <a:defRPr sz="1100"/>
-                      </a:pPr>
-                      <a:r>
-                        <a:t>만성신장질환(CKD)</a:t>
-                      </a:r>
-                    </a:p>
-                  </a:txBody>
-                  <a:tcPr anchor="ctr"/>
-                </a:tc>
-                <a:tc>
-                  <a:txBody>
-                    <a:bodyPr/>
-                    <a:lstStyle/>
-                    <a:p>
-                      <a:pPr>
-                        <a:defRPr sz="1100"/>
-                      </a:pPr>
-                      <a:r>
-                        <a:t>Sex(M)</a:t>
-                      </a:r>
-                    </a:p>
-                  </a:txBody>
-                  <a:tcPr/>
-                </a:tc>
-                <a:tc>
-                  <a:txBody>
-                    <a:bodyPr/>
-                    <a:lstStyle/>
-                    <a:p>
-                      <a:pPr>
-                        <a:defRPr sz="1100"/>
-                      </a:pPr>
-                      <a:r>
-                        <a:rPr sz="1100" b="0"/>
-                        <a:t>1.653</a:t>
-                      </a:r>
-                    </a:p>
-                  </a:txBody>
-                  <a:tcPr/>
-                </a:tc>
-                <a:tc>
-                  <a:txBody>
-                    <a:bodyPr/>
-                    <a:lstStyle/>
-                    <a:p>
-                      <a:pPr>
-                        <a:defRPr sz="1100"/>
-                      </a:pPr>
-                      <a:r>
-                        <a:rPr sz="1100" b="0"/>
-                        <a:t>5.221</a:t>
-                      </a:r>
-                    </a:p>
-                  </a:txBody>
-                  <a:tcPr/>
-                </a:tc>
-              </a:tr>
-              <a:tr h="421538">
-                <a:tc vMerge="1">
-                  <a:txBody>
-                    <a:bodyPr/>
-                    <a:lstStyle/>
-                    <a:p/>
-                  </a:txBody>
-                  <a:tcPr/>
-                </a:tc>
-                <a:tc>
-                  <a:txBody>
-                    <a:bodyPr/>
-                    <a:lstStyle/>
-                    <a:p>
-                      <a:pPr>
-                        <a:defRPr sz="1100"/>
-                      </a:pPr>
-                      <a:r>
-                        <a:t>Age</a:t>
-                      </a:r>
-                    </a:p>
-                  </a:txBody>
-                  <a:tcPr/>
-                </a:tc>
-                <a:tc>
-                  <a:txBody>
-                    <a:bodyPr/>
-                    <a:lstStyle/>
-                    <a:p>
-                      <a:pPr>
-                        <a:defRPr sz="1100"/>
-                      </a:pPr>
-                      <a:r>
-                        <a:rPr sz="1100" b="0"/>
-                        <a:t>0.579</a:t>
-                      </a:r>
-                    </a:p>
-                  </a:txBody>
-                  <a:tcPr/>
-                </a:tc>
-                <a:tc>
-                  <a:txBody>
-                    <a:bodyPr/>
-                    <a:lstStyle/>
-                    <a:p>
-                      <a:pPr>
-                        <a:defRPr sz="1100"/>
-                      </a:pPr>
-                      <a:r>
-                        <a:rPr sz="1100" b="0"/>
-                        <a:t>1.785</a:t>
-                      </a:r>
-                    </a:p>
-                  </a:txBody>
-                  <a:tcPr/>
-                </a:tc>
-              </a:tr>
-              <a:tr h="421538">
-                <a:tc vMerge="1">
-                  <a:txBody>
-                    <a:bodyPr/>
-                    <a:lstStyle/>
-                    <a:p/>
-                  </a:txBody>
-                  <a:tcPr/>
-                </a:tc>
-                <a:tc>
-                  <a:txBody>
-                    <a:bodyPr/>
-                    <a:lstStyle/>
-                    <a:p>
-                      <a:pPr>
-                        <a:defRPr sz="1100"/>
-                      </a:pPr>
-                      <a:r>
-                        <a:t>Height</a:t>
-                      </a:r>
-                    </a:p>
-                  </a:txBody>
-                  <a:tcPr/>
-                </a:tc>
-                <a:tc>
-                  <a:txBody>
-                    <a:bodyPr/>
-                    <a:lstStyle/>
-                    <a:p>
-                      <a:pPr>
-                        <a:defRPr sz="1100"/>
-                      </a:pPr>
-                      <a:r>
-                        <a:rPr sz="1100" b="0"/>
-                        <a:t>-0.551</a:t>
-                      </a:r>
-                    </a:p>
-                  </a:txBody>
-                  <a:tcPr/>
-                </a:tc>
-                <a:tc>
-                  <a:txBody>
-                    <a:bodyPr/>
-                    <a:lstStyle/>
-                    <a:p>
-                      <a:pPr>
-                        <a:defRPr sz="1100"/>
-                      </a:pPr>
-                      <a:r>
-                        <a:rPr sz="1100" b="0"/>
-                        <a:t>0.576</a:t>
-                      </a:r>
-                    </a:p>
-                  </a:txBody>
-                  <a:tcPr/>
-                </a:tc>
-              </a:tr>
-              <a:tr h="421544">
-                <a:tc vMerge="1">
-                  <a:txBody>
-                    <a:bodyPr/>
-                    <a:lstStyle/>
-                    <a:p/>
-                  </a:txBody>
-                  <a:tcPr/>
-                </a:tc>
-                <a:tc>
-                  <a:txBody>
-                    <a:bodyPr/>
-                    <a:lstStyle/>
-                    <a:p>
-                      <a:pPr>
-                        <a:defRPr sz="1100"/>
-                      </a:pPr>
-                      <a:r>
-                        <a:t>Weight</a:t>
-                      </a:r>
-                    </a:p>
-                  </a:txBody>
-                  <a:tcPr/>
-                </a:tc>
-                <a:tc>
-                  <a:txBody>
-                    <a:bodyPr/>
-                    <a:lstStyle/>
-                    <a:p>
-                      <a:pPr>
-                        <a:defRPr sz="1100"/>
-                      </a:pPr>
-                      <a:r>
-                        <a:rPr sz="1100" b="0"/>
-                        <a:t>0.566</a:t>
-                      </a:r>
-                    </a:p>
-                  </a:txBody>
-                  <a:tcPr/>
-                </a:tc>
-                <a:tc>
-                  <a:txBody>
-                    <a:bodyPr/>
-                    <a:lstStyle/>
-                    <a:p>
-                      <a:pPr>
-                        <a:defRPr sz="1100"/>
-                      </a:pPr>
-                      <a:r>
-                        <a:rPr sz="1100" b="0"/>
-                        <a:t>1.761</a:t>
-                      </a:r>
-                    </a:p>
-                  </a:txBody>
-                  <a:tcPr/>
+                      <a:pPr algn="ctr"/>
+                      <a:r>
+                        <a:rPr sz="1200" b="0"/>
+                        <a:t>External (Sinchon)</a:t>
+                      </a:r>
+                    </a:p>
+                  </a:txBody>
+                  <a:tcPr anchor="ctr"/>
+                </a:tc>
+                <a:tc>
+                  <a:txBody>
+                    <a:bodyPr/>
+                    <a:lstStyle/>
+                    <a:p>
+                      <a:pPr algn="ctr"/>
+                      <a:r>
+                        <a:rPr sz="1200" b="0"/>
+                        <a:t>1123 (188)</a:t>
+                      </a:r>
+                    </a:p>
+                  </a:txBody>
+                  <a:tcPr anchor="ctr"/>
+                </a:tc>
+                <a:tc>
+                  <a:txBody>
+                    <a:bodyPr/>
+                    <a:lstStyle/>
+                    <a:p>
+                      <a:pPr algn="ctr"/>
+                      <a:r>
+                        <a:rPr sz="1200" b="0"/>
+                        <a:t>-</a:t>
+                      </a:r>
+                    </a:p>
+                  </a:txBody>
+                  <a:tcPr anchor="ctr"/>
+                </a:tc>
+                <a:tc>
+                  <a:txBody>
+                    <a:bodyPr/>
+                    <a:lstStyle/>
+                    <a:p>
+                      <a:pPr algn="ctr"/>
+                      <a:r>
+                        <a:rPr sz="1200" b="0"/>
+                        <a:t>-</a:t>
+                      </a:r>
+                    </a:p>
+                  </a:txBody>
+                  <a:tcPr anchor="ctr"/>
+                </a:tc>
+                <a:tc>
+                  <a:txBody>
+                    <a:bodyPr/>
+                    <a:lstStyle/>
+                    <a:p>
+                      <a:pPr algn="ctr"/>
+                      <a:r>
+                        <a:rPr sz="1200" b="0"/>
+                        <a:t>0.071</a:t>
+                      </a:r>
+                    </a:p>
+                  </a:txBody>
+                  <a:tcPr anchor="ctr"/>
+                </a:tc>
+                <a:tc>
+                  <a:txBody>
+                    <a:bodyPr/>
+                    <a:lstStyle/>
+                    <a:p>
+                      <a:pPr algn="ctr"/>
+                      <a:r>
+                        <a:rPr sz="1200" b="0"/>
+                        <a:t>0.613</a:t>
+                      </a:r>
+                    </a:p>
+                  </a:txBody>
+                  <a:tcPr anchor="ctr"/>
+                </a:tc>
+                <a:tc>
+                  <a:txBody>
+                    <a:bodyPr/>
+                    <a:lstStyle/>
+                    <a:p>
+                      <a:pPr algn="ctr"/>
+                      <a:r>
+                        <a:rPr sz="1200" b="0"/>
+                        <a:t>0.638</a:t>
+                      </a:r>
+                    </a:p>
+                  </a:txBody>
+                  <a:tcPr anchor="ctr"/>
+                </a:tc>
+                <a:tc>
+                  <a:txBody>
+                    <a:bodyPr/>
+                    <a:lstStyle/>
+                    <a:p>
+                      <a:pPr algn="ctr"/>
+                      <a:r>
+                        <a:rPr sz="1200" b="0"/>
+                        <a:t>0.528</a:t>
+                      </a:r>
+                    </a:p>
+                  </a:txBody>
+                  <a:tcPr anchor="ctr"/>
                 </a:tc>
               </a:tr>
             </a:tbl>
@@ -7260,7 +9620,7 @@
           <a:lstStyle/>
           <a:p>
             <a:r>
-              <a:t>Table 3. +AEC(FPCA+ratio) 성능비교 vs Baseline (단순 AUC 비교, 유의성 검정 미수행)</a:t>
+              <a:t>Table 2. Baseline 대비 확장모델 AUC (원본 유병률, * paired DeLong p&lt;0.05 vs Baseline)</a:t>
             </a:r>
           </a:p>
         </p:txBody>
@@ -7274,623 +9634,605 @@
           <p:nvPr/>
         </p:nvGraphicFramePr>
         <p:xfrm>
-          <a:off x="508000" y="975360"/>
-          <a:ext cx="11176000" cy="5480000"/>
+          <a:off x="512064" y="978408"/>
+          <a:ext cx="11173968" cy="5124630"/>
         </p:xfrm>
         <a:graphic>
           <a:graphicData uri="http://schemas.openxmlformats.org/drawingml/2006/table">
             <a:tbl>
               <a:tblPr firstRow="1" bandRow="1">
-                <a:tableStyleId>{5C22544A-7EE6-4342-B048-85BDC9FD1C3A}</a:tableStyleId>
+                <a:tableStyleId>{C083E6E3-FA7D-4D7B-A595-EF9225AFEA82}</a:tableStyleId>
               </a:tblPr>
               <a:tblGrid>
-                <a:gridCol w="2235200"/>
-                <a:gridCol w="2235200"/>
-                <a:gridCol w="2235200"/>
-                <a:gridCol w="2235200"/>
-                <a:gridCol w="2235200"/>
+                <a:gridCol w="1862328"/>
+                <a:gridCol w="1862328"/>
+                <a:gridCol w="1862328"/>
+                <a:gridCol w="1862328"/>
+                <a:gridCol w="1862328"/>
+                <a:gridCol w="1862328"/>
               </a:tblGrid>
-              <a:tr h="608888">
-                <a:tc>
-                  <a:txBody>
-                    <a:bodyPr/>
-                    <a:lstStyle/>
-                    <a:p>
-                      <a:r>
-                        <a:rPr sz="1100" b="1"/>
+              <a:tr h="732090">
+                <a:tc>
+                  <a:txBody>
+                    <a:bodyPr/>
+                    <a:lstStyle/>
+                    <a:p>
+                      <a:pPr algn="ctr"/>
+                      <a:r>
+                        <a:rPr sz="1200" b="1"/>
                         <a:t>Disease</a:t>
                       </a:r>
                     </a:p>
                   </a:txBody>
-                  <a:tcPr/>
-                </a:tc>
-                <a:tc>
-                  <a:txBody>
-                    <a:bodyPr/>
-                    <a:lstStyle/>
-                    <a:p>
-                      <a:r>
-                        <a:rPr sz="1100" b="1"/>
+                  <a:tcPr anchor="ctr"/>
+                </a:tc>
+                <a:tc>
+                  <a:txBody>
+                    <a:bodyPr/>
+                    <a:lstStyle/>
+                    <a:p>
+                      <a:pPr algn="ctr"/>
+                      <a:r>
+                        <a:rPr sz="1200" b="1"/>
                         <a:t>Cohort</a:t>
                       </a:r>
                     </a:p>
                   </a:txBody>
-                  <a:tcPr/>
-                </a:tc>
-                <a:tc>
-                  <a:txBody>
-                    <a:bodyPr/>
-                    <a:lstStyle/>
-                    <a:p>
-                      <a:r>
-                        <a:rPr sz="1100" b="1"/>
-                        <a:t>AUC (Baseline)</a:t>
-                      </a:r>
-                    </a:p>
-                  </a:txBody>
-                  <a:tcPr/>
-                </a:tc>
-                <a:tc>
-                  <a:txBody>
-                    <a:bodyPr/>
-                    <a:lstStyle/>
-                    <a:p>
-                      <a:r>
-                        <a:rPr sz="1100" b="1"/>
-                        <a:t>AUC (+AEC)</a:t>
-                      </a:r>
-                    </a:p>
-                  </a:txBody>
-                  <a:tcPr/>
-                </a:tc>
-                <a:tc>
-                  <a:txBody>
-                    <a:bodyPr/>
-                    <a:lstStyle/>
-                    <a:p>
-                      <a:r>
-                        <a:rPr sz="1100" b="1"/>
-                        <a:t>Δ(AUC)</a:t>
-                      </a:r>
-                    </a:p>
-                  </a:txBody>
-                  <a:tcPr/>
+                  <a:tcPr anchor="ctr"/>
+                </a:tc>
+                <a:tc>
+                  <a:txBody>
+                    <a:bodyPr/>
+                    <a:lstStyle/>
+                    <a:p>
+                      <a:pPr algn="ctr"/>
+                      <a:r>
+                        <a:rPr sz="1200" b="1"/>
+                        <a:t>Baseline</a:t>
+                      </a:r>
+                    </a:p>
+                  </a:txBody>
+                  <a:tcPr anchor="ctr"/>
+                </a:tc>
+                <a:tc>
+                  <a:txBody>
+                    <a:bodyPr/>
+                    <a:lstStyle/>
+                    <a:p>
+                      <a:pPr algn="ctr"/>
+                      <a:r>
+                        <a:rPr sz="1200" b="1"/>
+                        <a:t>+AEC (FPCA)</a:t>
+                      </a:r>
+                    </a:p>
+                  </a:txBody>
+                  <a:tcPr anchor="ctr"/>
+                </a:tc>
+                <a:tc>
+                  <a:txBody>
+                    <a:bodyPr/>
+                    <a:lstStyle/>
+                    <a:p>
+                      <a:pPr algn="ctr"/>
+                      <a:r>
+                        <a:rPr sz="1200" b="1"/>
+                        <a:t>+AEC+체성분</a:t>
+                      </a:r>
+                    </a:p>
+                  </a:txBody>
+                  <a:tcPr anchor="ctr"/>
+                </a:tc>
+                <a:tc>
+                  <a:txBody>
+                    <a:bodyPr/>
+                    <a:lstStyle/>
+                    <a:p>
+                      <a:pPr algn="ctr"/>
+                      <a:r>
+                        <a:rPr sz="1200" b="1"/>
+                        <a:t>체성분만</a:t>
+                      </a:r>
+                    </a:p>
+                  </a:txBody>
+                  <a:tcPr anchor="ctr"/>
                 </a:tc>
               </a:tr>
-              <a:tr h="608888">
-                <a:tc>
-                  <a:txBody>
-                    <a:bodyPr/>
-                    <a:lstStyle/>
-                    <a:p>
-                      <a:r>
-                        <a:rPr sz="1100" b="0"/>
+              <a:tr h="732090">
+                <a:tc rowSpan="2">
+                  <a:txBody>
+                    <a:bodyPr/>
+                    <a:lstStyle/>
+                    <a:p>
+                      <a:pPr algn="ctr"/>
+                      <a:r>
+                        <a:rPr sz="1200" b="0"/>
                         <a:t>고혈압(HTN)</a:t>
                       </a:r>
                     </a:p>
                   </a:txBody>
-                  <a:tcPr/>
-                </a:tc>
-                <a:tc>
-                  <a:txBody>
-                    <a:bodyPr/>
-                    <a:lstStyle/>
-                    <a:p>
-                      <a:r>
-                        <a:rPr sz="1100" b="0"/>
+                  <a:tcPr anchor="ctr"/>
+                </a:tc>
+                <a:tc>
+                  <a:txBody>
+                    <a:bodyPr/>
+                    <a:lstStyle/>
+                    <a:p>
+                      <a:pPr algn="ctr"/>
+                      <a:r>
+                        <a:rPr sz="1200" b="0"/>
                         <a:t>Internal (Gangnam)</a:t>
                       </a:r>
                     </a:p>
                   </a:txBody>
-                  <a:tcPr/>
-                </a:tc>
-                <a:tc>
-                  <a:txBody>
-                    <a:bodyPr/>
-                    <a:lstStyle/>
-                    <a:p>
-                      <a:r>
-                        <a:rPr sz="1100" b="0"/>
+                  <a:tcPr anchor="ctr"/>
+                </a:tc>
+                <a:tc>
+                  <a:txBody>
+                    <a:bodyPr/>
+                    <a:lstStyle/>
+                    <a:p>
+                      <a:pPr algn="ctr"/>
+                      <a:r>
+                        <a:rPr sz="1200" b="0"/>
                         <a:t>0.761</a:t>
                       </a:r>
                     </a:p>
                   </a:txBody>
-                  <a:tcPr/>
-                </a:tc>
-                <a:tc>
-                  <a:txBody>
-                    <a:bodyPr/>
-                    <a:lstStyle/>
-                    <a:p>
-                      <a:r>
-                        <a:rPr sz="1100" b="0"/>
-                        <a:t>0.778</a:t>
-                      </a:r>
-                    </a:p>
-                  </a:txBody>
-                  <a:tcPr/>
-                </a:tc>
-                <a:tc>
-                  <a:txBody>
-                    <a:bodyPr/>
-                    <a:lstStyle/>
-                    <a:p>
-                      <a:r>
-                        <a:rPr sz="1100" b="0"/>
-                        <a:t>+0.017</a:t>
-                      </a:r>
-                    </a:p>
-                  </a:txBody>
-                  <a:tcPr/>
+                  <a:tcPr anchor="ctr"/>
+                </a:tc>
+                <a:tc>
+                  <a:txBody>
+                    <a:bodyPr/>
+                    <a:lstStyle/>
+                    <a:p>
+                      <a:pPr algn="ctr"/>
+                      <a:r>
+                        <a:rPr sz="1200" b="0"/>
+                        <a:t>0.775</a:t>
+                      </a:r>
+                    </a:p>
+                  </a:txBody>
+                  <a:tcPr anchor="ctr"/>
+                </a:tc>
+                <a:tc>
+                  <a:txBody>
+                    <a:bodyPr/>
+                    <a:lstStyle/>
+                    <a:p>
+                      <a:pPr algn="ctr"/>
+                      <a:r>
+                        <a:rPr sz="1200" b="0"/>
+                        <a:t>0.793*</a:t>
+                      </a:r>
+                    </a:p>
+                  </a:txBody>
+                  <a:tcPr anchor="ctr"/>
+                </a:tc>
+                <a:tc>
+                  <a:txBody>
+                    <a:bodyPr/>
+                    <a:lstStyle/>
+                    <a:p>
+                      <a:pPr algn="ctr"/>
+                      <a:r>
+                        <a:rPr sz="1200" b="0"/>
+                        <a:t>0.791</a:t>
+                      </a:r>
+                    </a:p>
+                  </a:txBody>
+                  <a:tcPr anchor="ctr"/>
                 </a:tc>
               </a:tr>
-              <a:tr h="608888">
-                <a:tc>
-                  <a:txBody>
-                    <a:bodyPr/>
-                    <a:lstStyle/>
-                    <a:p>
-                      <a:r>
-                        <a:rPr sz="1100" b="0"/>
-                        <a:t/>
-                      </a:r>
-                    </a:p>
-                  </a:txBody>
-                  <a:tcPr/>
-                </a:tc>
-                <a:tc>
-                  <a:txBody>
-                    <a:bodyPr/>
-                    <a:lstStyle/>
-                    <a:p>
-                      <a:r>
-                        <a:rPr sz="1100" b="0"/>
+              <a:tr h="732090">
+                <a:tc vMerge="1">
+                  <a:txBody>
+                    <a:bodyPr/>
+                    <a:lstStyle/>
+                    <a:p/>
+                  </a:txBody>
+                  <a:tcPr/>
+                </a:tc>
+                <a:tc>
+                  <a:txBody>
+                    <a:bodyPr/>
+                    <a:lstStyle/>
+                    <a:p>
+                      <a:pPr algn="ctr"/>
+                      <a:r>
+                        <a:rPr sz="1200" b="0"/>
                         <a:t>External (Sinchon)</a:t>
                       </a:r>
                     </a:p>
                   </a:txBody>
-                  <a:tcPr/>
-                </a:tc>
-                <a:tc>
-                  <a:txBody>
-                    <a:bodyPr/>
-                    <a:lstStyle/>
-                    <a:p>
-                      <a:r>
-                        <a:rPr sz="1100" b="0"/>
+                  <a:tcPr anchor="ctr"/>
+                </a:tc>
+                <a:tc>
+                  <a:txBody>
+                    <a:bodyPr/>
+                    <a:lstStyle/>
+                    <a:p>
+                      <a:pPr algn="ctr"/>
+                      <a:r>
+                        <a:rPr sz="1200" b="0"/>
                         <a:t>0.715</a:t>
                       </a:r>
                     </a:p>
                   </a:txBody>
-                  <a:tcPr/>
-                </a:tc>
-                <a:tc>
-                  <a:txBody>
-                    <a:bodyPr/>
-                    <a:lstStyle/>
-                    <a:p>
-                      <a:r>
-                        <a:rPr sz="1100" b="0"/>
-                        <a:t>0.729</a:t>
-                      </a:r>
-                    </a:p>
-                  </a:txBody>
-                  <a:tcPr/>
-                </a:tc>
-                <a:tc>
-                  <a:txBody>
-                    <a:bodyPr/>
-                    <a:lstStyle/>
-                    <a:p>
-                      <a:r>
-                        <a:rPr sz="1100" b="0"/>
-                        <a:t>+0.014</a:t>
-                      </a:r>
-                    </a:p>
-                  </a:txBody>
-                  <a:tcPr/>
+                  <a:tcPr anchor="ctr"/>
+                </a:tc>
+                <a:tc>
+                  <a:txBody>
+                    <a:bodyPr/>
+                    <a:lstStyle/>
+                    <a:p>
+                      <a:pPr algn="ctr"/>
+                      <a:r>
+                        <a:rPr sz="1200" b="0"/>
+                        <a:t>0.728*</a:t>
+                      </a:r>
+                    </a:p>
+                  </a:txBody>
+                  <a:tcPr anchor="ctr"/>
+                </a:tc>
+                <a:tc>
+                  <a:txBody>
+                    <a:bodyPr/>
+                    <a:lstStyle/>
+                    <a:p>
+                      <a:pPr algn="ctr"/>
+                      <a:r>
+                        <a:rPr sz="1200" b="0"/>
+                        <a:t>0.739*</a:t>
+                      </a:r>
+                    </a:p>
+                  </a:txBody>
+                  <a:tcPr anchor="ctr"/>
+                </a:tc>
+                <a:tc>
+                  <a:txBody>
+                    <a:bodyPr/>
+                    <a:lstStyle/>
+                    <a:p>
+                      <a:pPr algn="ctr"/>
+                      <a:r>
+                        <a:rPr sz="1200" b="0"/>
+                        <a:t>0.736*</a:t>
+                      </a:r>
+                    </a:p>
+                  </a:txBody>
+                  <a:tcPr anchor="ctr"/>
                 </a:tc>
               </a:tr>
-              <a:tr h="608888">
-                <a:tc>
-                  <a:txBody>
-                    <a:bodyPr/>
-                    <a:lstStyle/>
-                    <a:p>
-                      <a:r>
-                        <a:rPr sz="1100" b="0"/>
-                        <a:t/>
-                      </a:r>
-                    </a:p>
-                  </a:txBody>
-                  <a:tcPr/>
-                </a:tc>
-                <a:tc>
-                  <a:txBody>
-                    <a:bodyPr/>
-                    <a:lstStyle/>
-                    <a:p>
-                      <a:r>
-                        <a:rPr sz="1100" b="0"/>
-                        <a:t>External (New10000)</a:t>
-                      </a:r>
-                    </a:p>
-                  </a:txBody>
-                  <a:tcPr/>
-                </a:tc>
-                <a:tc>
-                  <a:txBody>
-                    <a:bodyPr/>
-                    <a:lstStyle/>
-                    <a:p>
-                      <a:r>
-                        <a:rPr sz="1100" b="0"/>
-                        <a:t>0.655</a:t>
-                      </a:r>
-                    </a:p>
-                  </a:txBody>
-                  <a:tcPr/>
-                </a:tc>
-                <a:tc>
-                  <a:txBody>
-                    <a:bodyPr/>
-                    <a:lstStyle/>
-                    <a:p>
-                      <a:r>
-                        <a:rPr sz="1100" b="0"/>
-                        <a:t>0.658</a:t>
-                      </a:r>
-                    </a:p>
-                  </a:txBody>
-                  <a:tcPr/>
-                </a:tc>
-                <a:tc>
-                  <a:txBody>
-                    <a:bodyPr/>
-                    <a:lstStyle/>
-                    <a:p>
-                      <a:r>
-                        <a:rPr sz="1100" b="0"/>
-                        <a:t>+0.003</a:t>
-                      </a:r>
-                    </a:p>
-                  </a:txBody>
-                  <a:tcPr/>
+              <a:tr h="732090">
+                <a:tc rowSpan="2">
+                  <a:txBody>
+                    <a:bodyPr/>
+                    <a:lstStyle/>
+                    <a:p>
+                      <a:pPr algn="ctr"/>
+                      <a:r>
+                        <a:rPr sz="1200" b="0"/>
+                        <a:t>당뇨병(DM)</a:t>
+                      </a:r>
+                    </a:p>
+                  </a:txBody>
+                  <a:tcPr anchor="ctr"/>
+                </a:tc>
+                <a:tc>
+                  <a:txBody>
+                    <a:bodyPr/>
+                    <a:lstStyle/>
+                    <a:p>
+                      <a:pPr algn="ctr"/>
+                      <a:r>
+                        <a:rPr sz="1200" b="0"/>
+                        <a:t>Internal (Gangnam)</a:t>
+                      </a:r>
+                    </a:p>
+                  </a:txBody>
+                  <a:tcPr anchor="ctr"/>
+                </a:tc>
+                <a:tc>
+                  <a:txBody>
+                    <a:bodyPr/>
+                    <a:lstStyle/>
+                    <a:p>
+                      <a:pPr algn="ctr"/>
+                      <a:r>
+                        <a:rPr sz="1200" b="0"/>
+                        <a:t>0.661</a:t>
+                      </a:r>
+                    </a:p>
+                  </a:txBody>
+                  <a:tcPr anchor="ctr"/>
+                </a:tc>
+                <a:tc>
+                  <a:txBody>
+                    <a:bodyPr/>
+                    <a:lstStyle/>
+                    <a:p>
+                      <a:pPr algn="ctr"/>
+                      <a:r>
+                        <a:rPr sz="1200" b="0"/>
+                        <a:t>0.675</a:t>
+                      </a:r>
+                    </a:p>
+                  </a:txBody>
+                  <a:tcPr anchor="ctr"/>
+                </a:tc>
+                <a:tc>
+                  <a:txBody>
+                    <a:bodyPr/>
+                    <a:lstStyle/>
+                    <a:p>
+                      <a:pPr algn="ctr"/>
+                      <a:r>
+                        <a:rPr sz="1200" b="0"/>
+                        <a:t>0.701</a:t>
+                      </a:r>
+                    </a:p>
+                  </a:txBody>
+                  <a:tcPr anchor="ctr"/>
+                </a:tc>
+                <a:tc>
+                  <a:txBody>
+                    <a:bodyPr/>
+                    <a:lstStyle/>
+                    <a:p>
+                      <a:pPr algn="ctr"/>
+                      <a:r>
+                        <a:rPr sz="1200" b="0"/>
+                        <a:t>0.698</a:t>
+                      </a:r>
+                    </a:p>
+                  </a:txBody>
+                  <a:tcPr anchor="ctr"/>
                 </a:tc>
               </a:tr>
-              <a:tr h="608888">
-                <a:tc>
-                  <a:txBody>
-                    <a:bodyPr/>
-                    <a:lstStyle/>
-                    <a:p>
-                      <a:r>
-                        <a:rPr sz="1100" b="0"/>
-                        <a:t>당뇨병(DM)</a:t>
-                      </a:r>
-                    </a:p>
-                  </a:txBody>
-                  <a:tcPr/>
-                </a:tc>
-                <a:tc>
-                  <a:txBody>
-                    <a:bodyPr/>
-                    <a:lstStyle/>
-                    <a:p>
-                      <a:r>
-                        <a:rPr sz="1100" b="0"/>
+              <a:tr h="732090">
+                <a:tc vMerge="1">
+                  <a:txBody>
+                    <a:bodyPr/>
+                    <a:lstStyle/>
+                    <a:p/>
+                  </a:txBody>
+                  <a:tcPr/>
+                </a:tc>
+                <a:tc>
+                  <a:txBody>
+                    <a:bodyPr/>
+                    <a:lstStyle/>
+                    <a:p>
+                      <a:pPr algn="ctr"/>
+                      <a:r>
+                        <a:rPr sz="1200" b="0"/>
+                        <a:t>External (Sinchon)</a:t>
+                      </a:r>
+                    </a:p>
+                  </a:txBody>
+                  <a:tcPr anchor="ctr"/>
+                </a:tc>
+                <a:tc>
+                  <a:txBody>
+                    <a:bodyPr/>
+                    <a:lstStyle/>
+                    <a:p>
+                      <a:pPr algn="ctr"/>
+                      <a:r>
+                        <a:rPr sz="1200" b="0"/>
+                        <a:t>0.649</a:t>
+                      </a:r>
+                    </a:p>
+                  </a:txBody>
+                  <a:tcPr anchor="ctr"/>
+                </a:tc>
+                <a:tc>
+                  <a:txBody>
+                    <a:bodyPr/>
+                    <a:lstStyle/>
+                    <a:p>
+                      <a:pPr algn="ctr"/>
+                      <a:r>
+                        <a:rPr sz="1200" b="0"/>
+                        <a:t>0.661</a:t>
+                      </a:r>
+                    </a:p>
+                  </a:txBody>
+                  <a:tcPr anchor="ctr"/>
+                </a:tc>
+                <a:tc>
+                  <a:txBody>
+                    <a:bodyPr/>
+                    <a:lstStyle/>
+                    <a:p>
+                      <a:pPr algn="ctr"/>
+                      <a:r>
+                        <a:rPr sz="1200" b="0"/>
+                        <a:t>0.701*</a:t>
+                      </a:r>
+                    </a:p>
+                  </a:txBody>
+                  <a:tcPr anchor="ctr"/>
+                </a:tc>
+                <a:tc>
+                  <a:txBody>
+                    <a:bodyPr/>
+                    <a:lstStyle/>
+                    <a:p>
+                      <a:pPr algn="ctr"/>
+                      <a:r>
+                        <a:rPr sz="1200" b="0"/>
+                        <a:t>0.691*</a:t>
+                      </a:r>
+                    </a:p>
+                  </a:txBody>
+                  <a:tcPr anchor="ctr"/>
+                </a:tc>
+              </a:tr>
+              <a:tr h="732090">
+                <a:tc rowSpan="2">
+                  <a:txBody>
+                    <a:bodyPr/>
+                    <a:lstStyle/>
+                    <a:p>
+                      <a:pPr algn="ctr"/>
+                      <a:r>
+                        <a:rPr sz="1200" b="0"/>
+                        <a:t>만성신장질환(CKD)</a:t>
+                      </a:r>
+                    </a:p>
+                  </a:txBody>
+                  <a:tcPr anchor="ctr"/>
+                </a:tc>
+                <a:tc>
+                  <a:txBody>
+                    <a:bodyPr/>
+                    <a:lstStyle/>
+                    <a:p>
+                      <a:pPr algn="ctr"/>
+                      <a:r>
+                        <a:rPr sz="1200" b="0"/>
                         <a:t>Internal (Gangnam)</a:t>
                       </a:r>
                     </a:p>
                   </a:txBody>
-                  <a:tcPr/>
-                </a:tc>
-                <a:tc>
-                  <a:txBody>
-                    <a:bodyPr/>
-                    <a:lstStyle/>
-                    <a:p>
-                      <a:r>
-                        <a:rPr sz="1100" b="0"/>
-                        <a:t>0.653</a:t>
-                      </a:r>
-                    </a:p>
-                  </a:txBody>
-                  <a:tcPr/>
-                </a:tc>
-                <a:tc>
-                  <a:txBody>
-                    <a:bodyPr/>
-                    <a:lstStyle/>
-                    <a:p>
-                      <a:r>
-                        <a:rPr sz="1100" b="0"/>
-                        <a:t>0.679</a:t>
-                      </a:r>
-                    </a:p>
-                  </a:txBody>
-                  <a:tcPr/>
-                </a:tc>
-                <a:tc>
-                  <a:txBody>
-                    <a:bodyPr/>
-                    <a:lstStyle/>
-                    <a:p>
-                      <a:r>
-                        <a:rPr sz="1100" b="0"/>
-                        <a:t>+0.026</a:t>
-                      </a:r>
-                    </a:p>
-                  </a:txBody>
-                  <a:tcPr/>
+                  <a:tcPr anchor="ctr"/>
+                </a:tc>
+                <a:tc>
+                  <a:txBody>
+                    <a:bodyPr/>
+                    <a:lstStyle/>
+                    <a:p>
+                      <a:pPr algn="ctr"/>
+                      <a:r>
+                        <a:rPr sz="1200" b="0"/>
+                        <a:t>0.765</a:t>
+                      </a:r>
+                    </a:p>
+                  </a:txBody>
+                  <a:tcPr anchor="ctr"/>
+                </a:tc>
+                <a:tc>
+                  <a:txBody>
+                    <a:bodyPr/>
+                    <a:lstStyle/>
+                    <a:p>
+                      <a:pPr algn="ctr"/>
+                      <a:r>
+                        <a:rPr sz="1200" b="0"/>
+                        <a:t>0.731</a:t>
+                      </a:r>
+                    </a:p>
+                  </a:txBody>
+                  <a:tcPr anchor="ctr"/>
+                </a:tc>
+                <a:tc>
+                  <a:txBody>
+                    <a:bodyPr/>
+                    <a:lstStyle/>
+                    <a:p>
+                      <a:pPr algn="ctr"/>
+                      <a:r>
+                        <a:rPr sz="1200" b="0"/>
+                        <a:t>0.811</a:t>
+                      </a:r>
+                    </a:p>
+                  </a:txBody>
+                  <a:tcPr anchor="ctr"/>
+                </a:tc>
+                <a:tc>
+                  <a:txBody>
+                    <a:bodyPr/>
+                    <a:lstStyle/>
+                    <a:p>
+                      <a:pPr algn="ctr"/>
+                      <a:r>
+                        <a:rPr sz="1200" b="0"/>
+                        <a:t>0.770</a:t>
+                      </a:r>
+                    </a:p>
+                  </a:txBody>
+                  <a:tcPr anchor="ctr"/>
                 </a:tc>
               </a:tr>
-              <a:tr h="608888">
-                <a:tc>
-                  <a:txBody>
-                    <a:bodyPr/>
-                    <a:lstStyle/>
-                    <a:p>
-                      <a:r>
-                        <a:rPr sz="1100" b="0"/>
-                        <a:t/>
-                      </a:r>
-                    </a:p>
-                  </a:txBody>
-                  <a:tcPr/>
-                </a:tc>
-                <a:tc>
-                  <a:txBody>
-                    <a:bodyPr/>
-                    <a:lstStyle/>
-                    <a:p>
-                      <a:r>
-                        <a:rPr sz="1100" b="0"/>
+              <a:tr h="732090">
+                <a:tc vMerge="1">
+                  <a:txBody>
+                    <a:bodyPr/>
+                    <a:lstStyle/>
+                    <a:p/>
+                  </a:txBody>
+                  <a:tcPr/>
+                </a:tc>
+                <a:tc>
+                  <a:txBody>
+                    <a:bodyPr/>
+                    <a:lstStyle/>
+                    <a:p>
+                      <a:pPr algn="ctr"/>
+                      <a:r>
+                        <a:rPr sz="1200" b="0"/>
                         <a:t>External (Sinchon)</a:t>
                       </a:r>
                     </a:p>
                   </a:txBody>
-                  <a:tcPr/>
-                </a:tc>
-                <a:tc>
-                  <a:txBody>
-                    <a:bodyPr/>
-                    <a:lstStyle/>
-                    <a:p>
-                      <a:r>
-                        <a:rPr sz="1100" b="0"/>
-                        <a:t>0.647</a:t>
-                      </a:r>
-                    </a:p>
-                  </a:txBody>
-                  <a:tcPr/>
-                </a:tc>
-                <a:tc>
-                  <a:txBody>
-                    <a:bodyPr/>
-                    <a:lstStyle/>
-                    <a:p>
-                      <a:r>
-                        <a:rPr sz="1100" b="0"/>
-                        <a:t>0.671</a:t>
-                      </a:r>
-                    </a:p>
-                  </a:txBody>
-                  <a:tcPr/>
-                </a:tc>
-                <a:tc>
-                  <a:txBody>
-                    <a:bodyPr/>
-                    <a:lstStyle/>
-                    <a:p>
-                      <a:r>
-                        <a:rPr sz="1100" b="0"/>
-                        <a:t>+0.024</a:t>
-                      </a:r>
-                    </a:p>
-                  </a:txBody>
-                  <a:tcPr/>
-                </a:tc>
-              </a:tr>
-              <a:tr h="608888">
-                <a:tc>
-                  <a:txBody>
-                    <a:bodyPr/>
-                    <a:lstStyle/>
-                    <a:p>
-                      <a:r>
-                        <a:rPr sz="1100" b="0"/>
-                        <a:t/>
-                      </a:r>
-                    </a:p>
-                  </a:txBody>
-                  <a:tcPr/>
-                </a:tc>
-                <a:tc>
-                  <a:txBody>
-                    <a:bodyPr/>
-                    <a:lstStyle/>
-                    <a:p>
-                      <a:r>
-                        <a:rPr sz="1100" b="0"/>
-                        <a:t>External (New10000)</a:t>
-                      </a:r>
-                    </a:p>
-                  </a:txBody>
-                  <a:tcPr/>
-                </a:tc>
-                <a:tc>
-                  <a:txBody>
-                    <a:bodyPr/>
-                    <a:lstStyle/>
-                    <a:p>
-                      <a:r>
-                        <a:rPr sz="1100" b="0"/>
-                        <a:t>0.635</a:t>
-                      </a:r>
-                    </a:p>
-                  </a:txBody>
-                  <a:tcPr/>
-                </a:tc>
-                <a:tc>
-                  <a:txBody>
-                    <a:bodyPr/>
-                    <a:lstStyle/>
-                    <a:p>
-                      <a:r>
-                        <a:rPr sz="1100" b="0"/>
-                        <a:t>0.636</a:t>
-                      </a:r>
-                    </a:p>
-                  </a:txBody>
-                  <a:tcPr/>
-                </a:tc>
-                <a:tc>
-                  <a:txBody>
-                    <a:bodyPr/>
-                    <a:lstStyle/>
-                    <a:p>
-                      <a:r>
-                        <a:rPr sz="1100" b="0"/>
-                        <a:t>+0.001</a:t>
-                      </a:r>
-                    </a:p>
-                  </a:txBody>
-                  <a:tcPr/>
-                </a:tc>
-              </a:tr>
-              <a:tr h="608888">
-                <a:tc>
-                  <a:txBody>
-                    <a:bodyPr/>
-                    <a:lstStyle/>
-                    <a:p>
-                      <a:r>
-                        <a:rPr sz="1100" b="0"/>
-                        <a:t>만성신장질환(CKD)</a:t>
-                      </a:r>
-                    </a:p>
-                  </a:txBody>
-                  <a:tcPr/>
-                </a:tc>
-                <a:tc>
-                  <a:txBody>
-                    <a:bodyPr/>
-                    <a:lstStyle/>
-                    <a:p>
-                      <a:r>
-                        <a:rPr sz="1100" b="0"/>
-                        <a:t>Internal (Gangnam)</a:t>
-                      </a:r>
-                    </a:p>
-                  </a:txBody>
-                  <a:tcPr/>
-                </a:tc>
-                <a:tc>
-                  <a:txBody>
-                    <a:bodyPr/>
-                    <a:lstStyle/>
-                    <a:p>
-                      <a:r>
-                        <a:rPr sz="1100" b="0"/>
-                        <a:t>0.765</a:t>
-                      </a:r>
-                    </a:p>
-                  </a:txBody>
-                  <a:tcPr/>
-                </a:tc>
-                <a:tc>
-                  <a:txBody>
-                    <a:bodyPr/>
-                    <a:lstStyle/>
-                    <a:p>
-                      <a:r>
-                        <a:rPr sz="1100" b="0"/>
-                        <a:t>0.755</a:t>
-                      </a:r>
-                    </a:p>
-                  </a:txBody>
-                  <a:tcPr/>
-                </a:tc>
-                <a:tc>
-                  <a:txBody>
-                    <a:bodyPr/>
-                    <a:lstStyle/>
-                    <a:p>
-                      <a:r>
-                        <a:rPr sz="1100" b="0"/>
-                        <a:t>-0.010</a:t>
-                      </a:r>
-                    </a:p>
-                  </a:txBody>
-                  <a:tcPr/>
-                </a:tc>
-              </a:tr>
-              <a:tr h="608896">
-                <a:tc>
-                  <a:txBody>
-                    <a:bodyPr/>
-                    <a:lstStyle/>
-                    <a:p>
-                      <a:r>
-                        <a:rPr sz="1100" b="0"/>
-                        <a:t/>
-                      </a:r>
-                    </a:p>
-                  </a:txBody>
-                  <a:tcPr/>
-                </a:tc>
-                <a:tc>
-                  <a:txBody>
-                    <a:bodyPr/>
-                    <a:lstStyle/>
-                    <a:p>
-                      <a:r>
-                        <a:rPr sz="1100" b="0"/>
-                        <a:t>External (Sinchon)</a:t>
-                      </a:r>
-                    </a:p>
-                  </a:txBody>
-                  <a:tcPr/>
-                </a:tc>
-                <a:tc>
-                  <a:txBody>
-                    <a:bodyPr/>
-                    <a:lstStyle/>
-                    <a:p>
-                      <a:r>
-                        <a:rPr sz="1100" b="0"/>
+                  <a:tcPr anchor="ctr"/>
+                </a:tc>
+                <a:tc>
+                  <a:txBody>
+                    <a:bodyPr/>
+                    <a:lstStyle/>
+                    <a:p>
+                      <a:pPr algn="ctr"/>
+                      <a:r>
+                        <a:rPr sz="1200" b="0"/>
                         <a:t>0.613</a:t>
                       </a:r>
                     </a:p>
                   </a:txBody>
-                  <a:tcPr/>
-                </a:tc>
-                <a:tc>
-                  <a:txBody>
-                    <a:bodyPr/>
-                    <a:lstStyle/>
-                    <a:p>
-                      <a:r>
-                        <a:rPr sz="1100" b="0"/>
-                        <a:t>0.630</a:t>
-                      </a:r>
-                    </a:p>
-                  </a:txBody>
-                  <a:tcPr/>
-                </a:tc>
-                <a:tc>
-                  <a:txBody>
-                    <a:bodyPr/>
-                    <a:lstStyle/>
-                    <a:p>
-                      <a:r>
-                        <a:rPr sz="1100" b="0"/>
-                        <a:t>+0.017</a:t>
-                      </a:r>
-                    </a:p>
-                  </a:txBody>
-                  <a:tcPr/>
+                  <a:tcPr anchor="ctr"/>
+                </a:tc>
+                <a:tc>
+                  <a:txBody>
+                    <a:bodyPr/>
+                    <a:lstStyle/>
+                    <a:p>
+                      <a:pPr algn="ctr"/>
+                      <a:r>
+                        <a:rPr sz="1200" b="0"/>
+                        <a:t>0.652*</a:t>
+                      </a:r>
+                    </a:p>
+                  </a:txBody>
+                  <a:tcPr anchor="ctr"/>
+                </a:tc>
+                <a:tc>
+                  <a:txBody>
+                    <a:bodyPr/>
+                    <a:lstStyle/>
+                    <a:p>
+                      <a:pPr algn="ctr"/>
+                      <a:r>
+                        <a:rPr sz="1200" b="0"/>
+                        <a:t>0.684*</a:t>
+                      </a:r>
+                    </a:p>
+                  </a:txBody>
+                  <a:tcPr anchor="ctr"/>
+                </a:tc>
+                <a:tc>
+                  <a:txBody>
+                    <a:bodyPr/>
+                    <a:lstStyle/>
+                    <a:p>
+                      <a:pPr algn="ctr"/>
+                      <a:r>
+                        <a:rPr sz="1200" b="0"/>
+                        <a:t>0.670*</a:t>
+                      </a:r>
+                    </a:p>
+                  </a:txBody>
+                  <a:tcPr anchor="ctr"/>
                 </a:tc>
               </a:tr>
             </a:tbl>
@@ -7931,21 +10273,21 @@
           <a:lstStyle/>
           <a:p>
             <a:r>
-              <a:t>Figure 1. ROC Curve — Internal vs External</a:t>
+              <a:t>Figure 1. ROC Curve — Internal (Gangnam) vs External (Sinchon)</a:t>
             </a:r>
           </a:p>
         </p:txBody>
       </p:sp>
       <p:pic>
         <p:nvPicPr>
-          <p:cNvPr id="3" name="Picture 2" descr="roc_curve.png"/>
+          <p:cNvPr id="3" name="Picture 2" descr="fig1_roc_gangnam_sinchon.png"/>
           <p:cNvPicPr>
             <a:picLocks noChangeAspect="1"/>
           </p:cNvPicPr>
           <p:nvPr/>
         </p:nvPicPr>
         <p:blipFill>
-          <a:blip r:embed="rId3"/>
+          <a:blip r:embed="rId4"/>
           <a:stretch>
             <a:fillRect/>
           </a:stretch>
@@ -7994,21 +10336,21 @@
           <a:lstStyle/>
           <a:p>
             <a:r>
-              <a:t>Figure 2. ROC Curve — Baseline vs +AEC (Internal)</a:t>
+              <a:t>Figure 2. Baseline 대비 AUC 변화(ΔAUC) — AEC·체성분 확장모델 (Gangnam / Sinchon)</a:t>
             </a:r>
           </a:p>
         </p:txBody>
       </p:sp>
       <p:pic>
         <p:nvPicPr>
-          <p:cNvPr id="3" name="Picture 2" descr="roc_curve_baseline_vs_aec.png"/>
+          <p:cNvPr id="3" name="Picture 2" descr="fig2_delta_auc.png"/>
           <p:cNvPicPr>
             <a:picLocks noChangeAspect="1"/>
           </p:cNvPicPr>
           <p:nvPr/>
         </p:nvPicPr>
         <p:blipFill>
-          <a:blip r:embed="rId3"/>
+          <a:blip r:embed="rId5"/>
           <a:stretch>
             <a:fillRect/>
           </a:stretch>
@@ -8057,643 +10399,35 @@
           <a:lstStyle/>
           <a:p>
             <a:r>
-              <a:t>Table 4. AEC 변형 비교 - FPCA+ratio vs FPCA-only vs ratio-only (VIF 다중공선성 확인)</a:t>
+              <a:t>Figure 3. FPCA 계수 역변환 - Slice별 logit 기여도 (FPCA-only, slice index 기준)</a:t>
             </a:r>
           </a:p>
         </p:txBody>
       </p:sp>
-      <p:graphicFrame>
-        <p:nvGraphicFramePr>
-          <p:cNvPr id="3" name="Table 2"/>
-          <p:cNvGraphicFramePr>
-            <a:graphicFrameLocks noGrp="1"/>
-          </p:cNvGraphicFramePr>
+      <p:pic>
+        <p:nvPicPr>
+          <p:cNvPr id="3" name="Picture 2" descr="fpca_recovered_curve.png"/>
+          <p:cNvPicPr>
+            <a:picLocks noChangeAspect="1"/>
+          </p:cNvPicPr>
           <p:nvPr/>
-        </p:nvGraphicFramePr>
-        <p:xfrm>
-          <a:off x="508000" y="975360"/>
-          <a:ext cx="11176000" cy="5480000"/>
-        </p:xfrm>
-        <a:graphic>
-          <a:graphicData uri="http://schemas.openxmlformats.org/drawingml/2006/table">
-            <a:tbl>
-              <a:tblPr firstRow="1" bandRow="1">
-                <a:tableStyleId>{5C22544A-7EE6-4342-B048-85BDC9FD1C3A}</a:tableStyleId>
-              </a:tblPr>
-              <a:tblGrid>
-                <a:gridCol w="2235200"/>
-                <a:gridCol w="2235200"/>
-                <a:gridCol w="2235200"/>
-                <a:gridCol w="2235200"/>
-                <a:gridCol w="2235200"/>
-              </a:tblGrid>
-              <a:tr h="608888">
-                <a:tc>
-                  <a:txBody>
-                    <a:bodyPr/>
-                    <a:lstStyle/>
-                    <a:p>
-                      <a:r>
-                        <a:rPr sz="1100" b="1"/>
-                        <a:t>Disease</a:t>
-                      </a:r>
-                    </a:p>
-                  </a:txBody>
-                  <a:tcPr/>
-                </a:tc>
-                <a:tc>
-                  <a:txBody>
-                    <a:bodyPr/>
-                    <a:lstStyle/>
-                    <a:p>
-                      <a:r>
-                        <a:rPr sz="1100" b="1"/>
-                        <a:t>Cohort</a:t>
-                      </a:r>
-                    </a:p>
-                  </a:txBody>
-                  <a:tcPr/>
-                </a:tc>
-                <a:tc>
-                  <a:txBody>
-                    <a:bodyPr/>
-                    <a:lstStyle/>
-                    <a:p>
-                      <a:r>
-                        <a:rPr sz="1100" b="1"/>
-                        <a:t>AUC (FPCA+ratio)</a:t>
-                      </a:r>
-                    </a:p>
-                  </a:txBody>
-                  <a:tcPr/>
-                </a:tc>
-                <a:tc>
-                  <a:txBody>
-                    <a:bodyPr/>
-                    <a:lstStyle/>
-                    <a:p>
-                      <a:r>
-                        <a:rPr sz="1100" b="1"/>
-                        <a:t>AUC (FPCA-only)</a:t>
-                      </a:r>
-                    </a:p>
-                  </a:txBody>
-                  <a:tcPr/>
-                </a:tc>
-                <a:tc>
-                  <a:txBody>
-                    <a:bodyPr/>
-                    <a:lstStyle/>
-                    <a:p>
-                      <a:r>
-                        <a:rPr sz="1100" b="1"/>
-                        <a:t>AUC (ratio-only)</a:t>
-                      </a:r>
-                    </a:p>
-                  </a:txBody>
-                  <a:tcPr/>
-                </a:tc>
-              </a:tr>
-              <a:tr h="608888">
-                <a:tc>
-                  <a:txBody>
-                    <a:bodyPr/>
-                    <a:lstStyle/>
-                    <a:p>
-                      <a:r>
-                        <a:rPr sz="1100" b="0"/>
-                        <a:t>고혈압(HTN)</a:t>
-                      </a:r>
-                    </a:p>
-                  </a:txBody>
-                  <a:tcPr/>
-                </a:tc>
-                <a:tc>
-                  <a:txBody>
-                    <a:bodyPr/>
-                    <a:lstStyle/>
-                    <a:p>
-                      <a:r>
-                        <a:rPr sz="1100" b="0"/>
-                        <a:t>Internal (Gangnam)</a:t>
-                      </a:r>
-                    </a:p>
-                  </a:txBody>
-                  <a:tcPr/>
-                </a:tc>
-                <a:tc>
-                  <a:txBody>
-                    <a:bodyPr/>
-                    <a:lstStyle/>
-                    <a:p>
-                      <a:r>
-                        <a:rPr sz="1100" b="0"/>
-                        <a:t>0.778</a:t>
-                      </a:r>
-                    </a:p>
-                  </a:txBody>
-                  <a:tcPr/>
-                </a:tc>
-                <a:tc>
-                  <a:txBody>
-                    <a:bodyPr/>
-                    <a:lstStyle/>
-                    <a:p>
-                      <a:r>
-                        <a:rPr sz="1100" b="0"/>
-                        <a:t>0.775</a:t>
-                      </a:r>
-                    </a:p>
-                  </a:txBody>
-                  <a:tcPr/>
-                </a:tc>
-                <a:tc>
-                  <a:txBody>
-                    <a:bodyPr/>
-                    <a:lstStyle/>
-                    <a:p>
-                      <a:r>
-                        <a:rPr sz="1100" b="0"/>
-                        <a:t>0.767</a:t>
-                      </a:r>
-                    </a:p>
-                  </a:txBody>
-                  <a:tcPr/>
-                </a:tc>
-              </a:tr>
-              <a:tr h="608888">
-                <a:tc>
-                  <a:txBody>
-                    <a:bodyPr/>
-                    <a:lstStyle/>
-                    <a:p>
-                      <a:r>
-                        <a:rPr sz="1100" b="0"/>
-                        <a:t/>
-                      </a:r>
-                    </a:p>
-                  </a:txBody>
-                  <a:tcPr/>
-                </a:tc>
-                <a:tc>
-                  <a:txBody>
-                    <a:bodyPr/>
-                    <a:lstStyle/>
-                    <a:p>
-                      <a:r>
-                        <a:rPr sz="1100" b="0"/>
-                        <a:t>External (Sinchon)</a:t>
-                      </a:r>
-                    </a:p>
-                  </a:txBody>
-                  <a:tcPr/>
-                </a:tc>
-                <a:tc>
-                  <a:txBody>
-                    <a:bodyPr/>
-                    <a:lstStyle/>
-                    <a:p>
-                      <a:r>
-                        <a:rPr sz="1100" b="0"/>
-                        <a:t>0.729</a:t>
-                      </a:r>
-                    </a:p>
-                  </a:txBody>
-                  <a:tcPr/>
-                </a:tc>
-                <a:tc>
-                  <a:txBody>
-                    <a:bodyPr/>
-                    <a:lstStyle/>
-                    <a:p>
-                      <a:r>
-                        <a:rPr sz="1100" b="0"/>
-                        <a:t>0.728</a:t>
-                      </a:r>
-                    </a:p>
-                  </a:txBody>
-                  <a:tcPr/>
-                </a:tc>
-                <a:tc>
-                  <a:txBody>
-                    <a:bodyPr/>
-                    <a:lstStyle/>
-                    <a:p>
-                      <a:r>
-                        <a:rPr sz="1100" b="0"/>
-                        <a:t>0.727</a:t>
-                      </a:r>
-                    </a:p>
-                  </a:txBody>
-                  <a:tcPr/>
-                </a:tc>
-              </a:tr>
-              <a:tr h="608888">
-                <a:tc>
-                  <a:txBody>
-                    <a:bodyPr/>
-                    <a:lstStyle/>
-                    <a:p>
-                      <a:r>
-                        <a:rPr sz="1100" b="0"/>
-                        <a:t/>
-                      </a:r>
-                    </a:p>
-                  </a:txBody>
-                  <a:tcPr/>
-                </a:tc>
-                <a:tc>
-                  <a:txBody>
-                    <a:bodyPr/>
-                    <a:lstStyle/>
-                    <a:p>
-                      <a:r>
-                        <a:rPr sz="1100" b="0"/>
-                        <a:t>External (New10000)</a:t>
-                      </a:r>
-                    </a:p>
-                  </a:txBody>
-                  <a:tcPr/>
-                </a:tc>
-                <a:tc>
-                  <a:txBody>
-                    <a:bodyPr/>
-                    <a:lstStyle/>
-                    <a:p>
-                      <a:r>
-                        <a:rPr sz="1100" b="0"/>
-                        <a:t>0.658</a:t>
-                      </a:r>
-                    </a:p>
-                  </a:txBody>
-                  <a:tcPr/>
-                </a:tc>
-                <a:tc>
-                  <a:txBody>
-                    <a:bodyPr/>
-                    <a:lstStyle/>
-                    <a:p>
-                      <a:r>
-                        <a:rPr sz="1100" b="0"/>
-                        <a:t>0.659</a:t>
-                      </a:r>
-                    </a:p>
-                  </a:txBody>
-                  <a:tcPr/>
-                </a:tc>
-                <a:tc>
-                  <a:txBody>
-                    <a:bodyPr/>
-                    <a:lstStyle/>
-                    <a:p>
-                      <a:r>
-                        <a:rPr sz="1100" b="0"/>
-                        <a:t>0.658</a:t>
-                      </a:r>
-                    </a:p>
-                  </a:txBody>
-                  <a:tcPr/>
-                </a:tc>
-              </a:tr>
-              <a:tr h="608888">
-                <a:tc>
-                  <a:txBody>
-                    <a:bodyPr/>
-                    <a:lstStyle/>
-                    <a:p>
-                      <a:r>
-                        <a:rPr sz="1100" b="0"/>
-                        <a:t>당뇨병(DM)</a:t>
-                      </a:r>
-                    </a:p>
-                  </a:txBody>
-                  <a:tcPr/>
-                </a:tc>
-                <a:tc>
-                  <a:txBody>
-                    <a:bodyPr/>
-                    <a:lstStyle/>
-                    <a:p>
-                      <a:r>
-                        <a:rPr sz="1100" b="0"/>
-                        <a:t>Internal (Gangnam)</a:t>
-                      </a:r>
-                    </a:p>
-                  </a:txBody>
-                  <a:tcPr/>
-                </a:tc>
-                <a:tc>
-                  <a:txBody>
-                    <a:bodyPr/>
-                    <a:lstStyle/>
-                    <a:p>
-                      <a:r>
-                        <a:rPr sz="1100" b="0"/>
-                        <a:t>0.679</a:t>
-                      </a:r>
-                    </a:p>
-                  </a:txBody>
-                  <a:tcPr/>
-                </a:tc>
-                <a:tc>
-                  <a:txBody>
-                    <a:bodyPr/>
-                    <a:lstStyle/>
-                    <a:p>
-                      <a:r>
-                        <a:rPr sz="1100" b="0"/>
-                        <a:t>0.675</a:t>
-                      </a:r>
-                    </a:p>
-                  </a:txBody>
-                  <a:tcPr/>
-                </a:tc>
-                <a:tc>
-                  <a:txBody>
-                    <a:bodyPr/>
-                    <a:lstStyle/>
-                    <a:p>
-                      <a:r>
-                        <a:rPr sz="1100" b="0"/>
-                        <a:t>0.656</a:t>
-                      </a:r>
-                    </a:p>
-                  </a:txBody>
-                  <a:tcPr/>
-                </a:tc>
-              </a:tr>
-              <a:tr h="608888">
-                <a:tc>
-                  <a:txBody>
-                    <a:bodyPr/>
-                    <a:lstStyle/>
-                    <a:p>
-                      <a:r>
-                        <a:rPr sz="1100" b="0"/>
-                        <a:t/>
-                      </a:r>
-                    </a:p>
-                  </a:txBody>
-                  <a:tcPr/>
-                </a:tc>
-                <a:tc>
-                  <a:txBody>
-                    <a:bodyPr/>
-                    <a:lstStyle/>
-                    <a:p>
-                      <a:r>
-                        <a:rPr sz="1100" b="0"/>
-                        <a:t>External (Sinchon)</a:t>
-                      </a:r>
-                    </a:p>
-                  </a:txBody>
-                  <a:tcPr/>
-                </a:tc>
-                <a:tc>
-                  <a:txBody>
-                    <a:bodyPr/>
-                    <a:lstStyle/>
-                    <a:p>
-                      <a:r>
-                        <a:rPr sz="1100" b="0"/>
-                        <a:t>0.671</a:t>
-                      </a:r>
-                    </a:p>
-                  </a:txBody>
-                  <a:tcPr/>
-                </a:tc>
-                <a:tc>
-                  <a:txBody>
-                    <a:bodyPr/>
-                    <a:lstStyle/>
-                    <a:p>
-                      <a:r>
-                        <a:rPr sz="1100" b="0"/>
-                        <a:t>0.661</a:t>
-                      </a:r>
-                    </a:p>
-                  </a:txBody>
-                  <a:tcPr/>
-                </a:tc>
-                <a:tc>
-                  <a:txBody>
-                    <a:bodyPr/>
-                    <a:lstStyle/>
-                    <a:p>
-                      <a:r>
-                        <a:rPr sz="1100" b="0"/>
-                        <a:t>0.650</a:t>
-                      </a:r>
-                    </a:p>
-                  </a:txBody>
-                  <a:tcPr/>
-                </a:tc>
-              </a:tr>
-              <a:tr h="608888">
-                <a:tc>
-                  <a:txBody>
-                    <a:bodyPr/>
-                    <a:lstStyle/>
-                    <a:p>
-                      <a:r>
-                        <a:rPr sz="1100" b="0"/>
-                        <a:t/>
-                      </a:r>
-                    </a:p>
-                  </a:txBody>
-                  <a:tcPr/>
-                </a:tc>
-                <a:tc>
-                  <a:txBody>
-                    <a:bodyPr/>
-                    <a:lstStyle/>
-                    <a:p>
-                      <a:r>
-                        <a:rPr sz="1100" b="0"/>
-                        <a:t>External (New10000)</a:t>
-                      </a:r>
-                    </a:p>
-                  </a:txBody>
-                  <a:tcPr/>
-                </a:tc>
-                <a:tc>
-                  <a:txBody>
-                    <a:bodyPr/>
-                    <a:lstStyle/>
-                    <a:p>
-                      <a:r>
-                        <a:rPr sz="1100" b="0"/>
-                        <a:t>0.636</a:t>
-                      </a:r>
-                    </a:p>
-                  </a:txBody>
-                  <a:tcPr/>
-                </a:tc>
-                <a:tc>
-                  <a:txBody>
-                    <a:bodyPr/>
-                    <a:lstStyle/>
-                    <a:p>
-                      <a:r>
-                        <a:rPr sz="1100" b="0"/>
-                        <a:t>0.635</a:t>
-                      </a:r>
-                    </a:p>
-                  </a:txBody>
-                  <a:tcPr/>
-                </a:tc>
-                <a:tc>
-                  <a:txBody>
-                    <a:bodyPr/>
-                    <a:lstStyle/>
-                    <a:p>
-                      <a:r>
-                        <a:rPr sz="1100" b="0"/>
-                        <a:t>0.628</a:t>
-                      </a:r>
-                    </a:p>
-                  </a:txBody>
-                  <a:tcPr/>
-                </a:tc>
-              </a:tr>
-              <a:tr h="608888">
-                <a:tc>
-                  <a:txBody>
-                    <a:bodyPr/>
-                    <a:lstStyle/>
-                    <a:p>
-                      <a:r>
-                        <a:rPr sz="1100" b="0"/>
-                        <a:t>만성신장질환(CKD)</a:t>
-                      </a:r>
-                    </a:p>
-                  </a:txBody>
-                  <a:tcPr/>
-                </a:tc>
-                <a:tc>
-                  <a:txBody>
-                    <a:bodyPr/>
-                    <a:lstStyle/>
-                    <a:p>
-                      <a:r>
-                        <a:rPr sz="1100" b="0"/>
-                        <a:t>Internal (Gangnam)</a:t>
-                      </a:r>
-                    </a:p>
-                  </a:txBody>
-                  <a:tcPr/>
-                </a:tc>
-                <a:tc>
-                  <a:txBody>
-                    <a:bodyPr/>
-                    <a:lstStyle/>
-                    <a:p>
-                      <a:r>
-                        <a:rPr sz="1100" b="0"/>
-                        <a:t>0.755</a:t>
-                      </a:r>
-                    </a:p>
-                  </a:txBody>
-                  <a:tcPr/>
-                </a:tc>
-                <a:tc>
-                  <a:txBody>
-                    <a:bodyPr/>
-                    <a:lstStyle/>
-                    <a:p>
-                      <a:r>
-                        <a:rPr sz="1100" b="0"/>
-                        <a:t>0.763</a:t>
-                      </a:r>
-                    </a:p>
-                  </a:txBody>
-                  <a:tcPr/>
-                </a:tc>
-                <a:tc>
-                  <a:txBody>
-                    <a:bodyPr/>
-                    <a:lstStyle/>
-                    <a:p>
-                      <a:r>
-                        <a:rPr sz="1100" b="0"/>
-                        <a:t>0.750</a:t>
-                      </a:r>
-                    </a:p>
-                  </a:txBody>
-                  <a:tcPr/>
-                </a:tc>
-              </a:tr>
-              <a:tr h="608896">
-                <a:tc>
-                  <a:txBody>
-                    <a:bodyPr/>
-                    <a:lstStyle/>
-                    <a:p>
-                      <a:r>
-                        <a:rPr sz="1100" b="0"/>
-                        <a:t/>
-                      </a:r>
-                    </a:p>
-                  </a:txBody>
-                  <a:tcPr/>
-                </a:tc>
-                <a:tc>
-                  <a:txBody>
-                    <a:bodyPr/>
-                    <a:lstStyle/>
-                    <a:p>
-                      <a:r>
-                        <a:rPr sz="1100" b="0"/>
-                        <a:t>External (Sinchon)</a:t>
-                      </a:r>
-                    </a:p>
-                  </a:txBody>
-                  <a:tcPr/>
-                </a:tc>
-                <a:tc>
-                  <a:txBody>
-                    <a:bodyPr/>
-                    <a:lstStyle/>
-                    <a:p>
-                      <a:r>
-                        <a:rPr sz="1100" b="0"/>
-                        <a:t>0.630</a:t>
-                      </a:r>
-                    </a:p>
-                  </a:txBody>
-                  <a:tcPr/>
-                </a:tc>
-                <a:tc>
-                  <a:txBody>
-                    <a:bodyPr/>
-                    <a:lstStyle/>
-                    <a:p>
-                      <a:r>
-                        <a:rPr sz="1100" b="0"/>
-                        <a:t>0.630</a:t>
-                      </a:r>
-                    </a:p>
-                  </a:txBody>
-                  <a:tcPr/>
-                </a:tc>
-                <a:tc>
-                  <a:txBody>
-                    <a:bodyPr/>
-                    <a:lstStyle/>
-                    <a:p>
-                      <a:r>
-                        <a:rPr sz="1100" b="0"/>
-                        <a:t>0.635</a:t>
-                      </a:r>
-                    </a:p>
-                  </a:txBody>
-                  <a:tcPr/>
-                </a:tc>
-              </a:tr>
-            </a:tbl>
-          </a:graphicData>
-        </a:graphic>
-      </p:graphicFrame>
+        </p:nvPicPr>
+        <p:blipFill>
+          <a:blip r:embed="rId2"/>
+          <a:stretch>
+            <a:fillRect/>
+          </a:stretch>
+        </p:blipFill>
+        <p:spPr>
+          <a:xfrm>
+            <a:off x="508000" y="1812276"/>
+            <a:ext cx="11176000" cy="3806168"/>
+          </a:xfrm>
+          <a:prstGeom prst="rect">
+            <a:avLst/>
+          </a:prstGeom>
+        </p:spPr>
+      </p:pic>
     </p:spTree>
   </p:cSld>
   <p:clrMapOvr>
@@ -8722,716 +10456,73 @@
             <p:ph type="title"/>
           </p:nvPr>
         </p:nvSpPr>
-        <p:spPr/>
+        <p:spPr>
+          <a:xfrm>
+            <a:off x="508000" y="365126"/>
+            <a:ext cx="11176000" cy="532342"/>
+          </a:xfrm>
+        </p:spPr>
         <p:txBody>
           <a:bodyPr/>
           <a:lstStyle/>
           <a:p>
             <a:r>
-              <a:t>Table 5. +AEC FPCA-only Coefficient (Internal, * p&lt;0.05, 보정 전)</a:t>
+              <a:t>Discussion — 체성분은 기여하지만 코호트 간 일관되지 않다</a:t>
             </a:r>
           </a:p>
         </p:txBody>
       </p:sp>
-      <p:graphicFrame>
-        <p:nvGraphicFramePr>
-          <p:cNvPr id="3" name="Table 2"/>
-          <p:cNvGraphicFramePr>
-            <a:graphicFrameLocks noGrp="1"/>
-          </p:cNvGraphicFramePr>
-          <p:nvPr/>
-        </p:nvGraphicFramePr>
-        <p:xfrm>
-          <a:off x="508000" y="975360"/>
-          <a:ext cx="11176000" cy="5480000"/>
-        </p:xfrm>
-        <a:graphic>
-          <a:graphicData uri="http://schemas.openxmlformats.org/drawingml/2006/table">
-            <a:tbl>
-              <a:tblPr firstRow="1" bandRow="1">
-                <a:tableStyleId>{5C22544A-7EE6-4342-B048-85BDC9FD1C3A}</a:tableStyleId>
-              </a:tblPr>
-              <a:tblGrid>
-                <a:gridCol w="2235200"/>
-                <a:gridCol w="2235200"/>
-                <a:gridCol w="2235200"/>
-                <a:gridCol w="2235200"/>
-                <a:gridCol w="2235200"/>
-              </a:tblGrid>
-              <a:tr h="548000">
-                <a:tc>
-                  <a:txBody>
-                    <a:bodyPr/>
-                    <a:lstStyle/>
-                    <a:p>
-                      <a:r>
-                        <a:rPr sz="1100" b="1"/>
-                        <a:t>Disease</a:t>
-                      </a:r>
-                    </a:p>
-                  </a:txBody>
-                  <a:tcPr/>
-                </a:tc>
-                <a:tc>
-                  <a:txBody>
-                    <a:bodyPr/>
-                    <a:lstStyle/>
-                    <a:p>
-                      <a:r>
-                        <a:rPr sz="1100" b="1"/>
-                        <a:t>Term</a:t>
-                      </a:r>
-                    </a:p>
-                  </a:txBody>
-                  <a:tcPr/>
-                </a:tc>
-                <a:tc>
-                  <a:txBody>
-                    <a:bodyPr/>
-                    <a:lstStyle/>
-                    <a:p>
-                      <a:r>
-                        <a:rPr sz="1100" b="1"/>
-                        <a:t>Coefficient</a:t>
-                      </a:r>
-                    </a:p>
-                  </a:txBody>
-                  <a:tcPr/>
-                </a:tc>
-                <a:tc>
-                  <a:txBody>
-                    <a:bodyPr/>
-                    <a:lstStyle/>
-                    <a:p>
-                      <a:r>
-                        <a:rPr sz="1100" b="1"/>
-                        <a:t>Odds Ratio</a:t>
-                      </a:r>
-                    </a:p>
-                  </a:txBody>
-                  <a:tcPr/>
-                </a:tc>
-                <a:tc>
-                  <a:txBody>
-                    <a:bodyPr/>
-                    <a:lstStyle/>
-                    <a:p>
-                      <a:r>
-                        <a:rPr sz="1100" b="1"/>
-                        <a:t>p-value</a:t>
-                      </a:r>
-                    </a:p>
-                  </a:txBody>
-                  <a:tcPr/>
-                </a:tc>
-              </a:tr>
-              <a:tr h="548000">
-                <a:tc>
-                  <a:txBody>
-                    <a:bodyPr/>
-                    <a:lstStyle/>
-                    <a:p>
-                      <a:r>
-                        <a:rPr sz="1100" b="0"/>
-                        <a:t>고혈압(HTN)</a:t>
-                      </a:r>
-                    </a:p>
-                  </a:txBody>
-                  <a:tcPr/>
-                </a:tc>
-                <a:tc>
-                  <a:txBody>
-                    <a:bodyPr/>
-                    <a:lstStyle/>
-                    <a:p>
-                      <a:r>
-                        <a:rPr sz="1100" b="0"/>
-                        <a:t>aec_fpca_pc1</a:t>
-                      </a:r>
-                    </a:p>
-                  </a:txBody>
-                  <a:tcPr/>
-                </a:tc>
-                <a:tc>
-                  <a:txBody>
-                    <a:bodyPr/>
-                    <a:lstStyle/>
-                    <a:p>
-                      <a:r>
-                        <a:rPr sz="1100" b="0"/>
-                        <a:t>0.337</a:t>
-                      </a:r>
-                    </a:p>
-                  </a:txBody>
-                  <a:tcPr/>
-                </a:tc>
-                <a:tc>
-                  <a:txBody>
-                    <a:bodyPr/>
-                    <a:lstStyle/>
-                    <a:p>
-                      <a:r>
-                        <a:rPr sz="1100" b="0"/>
-                        <a:t>1.400</a:t>
-                      </a:r>
-                    </a:p>
-                  </a:txBody>
-                  <a:tcPr/>
-                </a:tc>
-                <a:tc>
-                  <a:txBody>
-                    <a:bodyPr/>
-                    <a:lstStyle/>
-                    <a:p>
-                      <a:r>
-                        <a:rPr sz="1100" b="0"/>
-                        <a:t>6.31e-04 *</a:t>
-                      </a:r>
-                    </a:p>
-                  </a:txBody>
-                  <a:tcPr/>
-                </a:tc>
-              </a:tr>
-              <a:tr h="548000">
-                <a:tc>
-                  <a:txBody>
-                    <a:bodyPr/>
-                    <a:lstStyle/>
-                    <a:p>
-                      <a:r>
-                        <a:rPr sz="1100" b="0"/>
-                        <a:t/>
-                      </a:r>
-                    </a:p>
-                  </a:txBody>
-                  <a:tcPr/>
-                </a:tc>
-                <a:tc>
-                  <a:txBody>
-                    <a:bodyPr/>
-                    <a:lstStyle/>
-                    <a:p>
-                      <a:r>
-                        <a:rPr sz="1100" b="0"/>
-                        <a:t>aec_fpca_pc2</a:t>
-                      </a:r>
-                    </a:p>
-                  </a:txBody>
-                  <a:tcPr/>
-                </a:tc>
-                <a:tc>
-                  <a:txBody>
-                    <a:bodyPr/>
-                    <a:lstStyle/>
-                    <a:p>
-                      <a:r>
-                        <a:rPr sz="1100" b="0"/>
-                        <a:t>-0.493</a:t>
-                      </a:r>
-                    </a:p>
-                  </a:txBody>
-                  <a:tcPr/>
-                </a:tc>
-                <a:tc>
-                  <a:txBody>
-                    <a:bodyPr/>
-                    <a:lstStyle/>
-                    <a:p>
-                      <a:r>
-                        <a:rPr sz="1100" b="0"/>
-                        <a:t>0.611</a:t>
-                      </a:r>
-                    </a:p>
-                  </a:txBody>
-                  <a:tcPr/>
-                </a:tc>
-                <a:tc>
-                  <a:txBody>
-                    <a:bodyPr/>
-                    <a:lstStyle/>
-                    <a:p>
-                      <a:r>
-                        <a:rPr sz="1100" b="0"/>
-                        <a:t>4.51e-06 *</a:t>
-                      </a:r>
-                    </a:p>
-                  </a:txBody>
-                  <a:tcPr/>
-                </a:tc>
-              </a:tr>
-              <a:tr h="548000">
-                <a:tc>
-                  <a:txBody>
-                    <a:bodyPr/>
-                    <a:lstStyle/>
-                    <a:p>
-                      <a:r>
-                        <a:rPr sz="1100" b="0"/>
-                        <a:t/>
-                      </a:r>
-                    </a:p>
-                  </a:txBody>
-                  <a:tcPr/>
-                </a:tc>
-                <a:tc>
-                  <a:txBody>
-                    <a:bodyPr/>
-                    <a:lstStyle/>
-                    <a:p>
-                      <a:r>
-                        <a:rPr sz="1100" b="0"/>
-                        <a:t>aec_fpca_pc3</a:t>
-                      </a:r>
-                    </a:p>
-                  </a:txBody>
-                  <a:tcPr/>
-                </a:tc>
-                <a:tc>
-                  <a:txBody>
-                    <a:bodyPr/>
-                    <a:lstStyle/>
-                    <a:p>
-                      <a:r>
-                        <a:rPr sz="1100" b="0"/>
-                        <a:t>0.084</a:t>
-                      </a:r>
-                    </a:p>
-                  </a:txBody>
-                  <a:tcPr/>
-                </a:tc>
-                <a:tc>
-                  <a:txBody>
-                    <a:bodyPr/>
-                    <a:lstStyle/>
-                    <a:p>
-                      <a:r>
-                        <a:rPr sz="1100" b="0"/>
-                        <a:t>1.088</a:t>
-                      </a:r>
-                    </a:p>
-                  </a:txBody>
-                  <a:tcPr/>
-                </a:tc>
-                <a:tc>
-                  <a:txBody>
-                    <a:bodyPr/>
-                    <a:lstStyle/>
-                    <a:p>
-                      <a:r>
-                        <a:rPr sz="1100" b="0"/>
-                        <a:t>0.337</a:t>
-                      </a:r>
-                    </a:p>
-                  </a:txBody>
-                  <a:tcPr/>
-                </a:tc>
-              </a:tr>
-              <a:tr h="548000">
-                <a:tc>
-                  <a:txBody>
-                    <a:bodyPr/>
-                    <a:lstStyle/>
-                    <a:p>
-                      <a:r>
-                        <a:rPr sz="1100" b="0"/>
-                        <a:t>당뇨병(DM)</a:t>
-                      </a:r>
-                    </a:p>
-                  </a:txBody>
-                  <a:tcPr/>
-                </a:tc>
-                <a:tc>
-                  <a:txBody>
-                    <a:bodyPr/>
-                    <a:lstStyle/>
-                    <a:p>
-                      <a:r>
-                        <a:rPr sz="1100" b="0"/>
-                        <a:t>aec_fpca_pc1</a:t>
-                      </a:r>
-                    </a:p>
-                  </a:txBody>
-                  <a:tcPr/>
-                </a:tc>
-                <a:tc>
-                  <a:txBody>
-                    <a:bodyPr/>
-                    <a:lstStyle/>
-                    <a:p>
-                      <a:r>
-                        <a:rPr sz="1100" b="0"/>
-                        <a:t>0.121</a:t>
-                      </a:r>
-                    </a:p>
-                  </a:txBody>
-                  <a:tcPr/>
-                </a:tc>
-                <a:tc>
-                  <a:txBody>
-                    <a:bodyPr/>
-                    <a:lstStyle/>
-                    <a:p>
-                      <a:r>
-                        <a:rPr sz="1100" b="0"/>
-                        <a:t>1.129</a:t>
-                      </a:r>
-                    </a:p>
-                  </a:txBody>
-                  <a:tcPr/>
-                </a:tc>
-                <a:tc>
-                  <a:txBody>
-                    <a:bodyPr/>
-                    <a:lstStyle/>
-                    <a:p>
-                      <a:r>
-                        <a:rPr sz="1100" b="0"/>
-                        <a:t>0.216</a:t>
-                      </a:r>
-                    </a:p>
-                  </a:txBody>
-                  <a:tcPr/>
-                </a:tc>
-              </a:tr>
-              <a:tr h="548000">
-                <a:tc>
-                  <a:txBody>
-                    <a:bodyPr/>
-                    <a:lstStyle/>
-                    <a:p>
-                      <a:r>
-                        <a:rPr sz="1100" b="0"/>
-                        <a:t/>
-                      </a:r>
-                    </a:p>
-                  </a:txBody>
-                  <a:tcPr/>
-                </a:tc>
-                <a:tc>
-                  <a:txBody>
-                    <a:bodyPr/>
-                    <a:lstStyle/>
-                    <a:p>
-                      <a:r>
-                        <a:rPr sz="1100" b="0"/>
-                        <a:t>aec_fpca_pc2</a:t>
-                      </a:r>
-                    </a:p>
-                  </a:txBody>
-                  <a:tcPr/>
-                </a:tc>
-                <a:tc>
-                  <a:txBody>
-                    <a:bodyPr/>
-                    <a:lstStyle/>
-                    <a:p>
-                      <a:r>
-                        <a:rPr sz="1100" b="0"/>
-                        <a:t>-0.520</a:t>
-                      </a:r>
-                    </a:p>
-                  </a:txBody>
-                  <a:tcPr/>
-                </a:tc>
-                <a:tc>
-                  <a:txBody>
-                    <a:bodyPr/>
-                    <a:lstStyle/>
-                    <a:p>
-                      <a:r>
-                        <a:rPr sz="1100" b="0"/>
-                        <a:t>0.595</a:t>
-                      </a:r>
-                    </a:p>
-                  </a:txBody>
-                  <a:tcPr/>
-                </a:tc>
-                <a:tc>
-                  <a:txBody>
-                    <a:bodyPr/>
-                    <a:lstStyle/>
-                    <a:p>
-                      <a:r>
-                        <a:rPr sz="1100" b="0"/>
-                        <a:t>9.23e-06 *</a:t>
-                      </a:r>
-                    </a:p>
-                  </a:txBody>
-                  <a:tcPr/>
-                </a:tc>
-              </a:tr>
-              <a:tr h="548000">
-                <a:tc>
-                  <a:txBody>
-                    <a:bodyPr/>
-                    <a:lstStyle/>
-                    <a:p>
-                      <a:r>
-                        <a:rPr sz="1100" b="0"/>
-                        <a:t/>
-                      </a:r>
-                    </a:p>
-                  </a:txBody>
-                  <a:tcPr/>
-                </a:tc>
-                <a:tc>
-                  <a:txBody>
-                    <a:bodyPr/>
-                    <a:lstStyle/>
-                    <a:p>
-                      <a:r>
-                        <a:rPr sz="1100" b="0"/>
-                        <a:t>aec_fpca_pc3</a:t>
-                      </a:r>
-                    </a:p>
-                  </a:txBody>
-                  <a:tcPr/>
-                </a:tc>
-                <a:tc>
-                  <a:txBody>
-                    <a:bodyPr/>
-                    <a:lstStyle/>
-                    <a:p>
-                      <a:r>
-                        <a:rPr sz="1100" b="0"/>
-                        <a:t>0.127</a:t>
-                      </a:r>
-                    </a:p>
-                  </a:txBody>
-                  <a:tcPr/>
-                </a:tc>
-                <a:tc>
-                  <a:txBody>
-                    <a:bodyPr/>
-                    <a:lstStyle/>
-                    <a:p>
-                      <a:r>
-                        <a:rPr sz="1100" b="0"/>
-                        <a:t>1.136</a:t>
-                      </a:r>
-                    </a:p>
-                  </a:txBody>
-                  <a:tcPr/>
-                </a:tc>
-                <a:tc>
-                  <a:txBody>
-                    <a:bodyPr/>
-                    <a:lstStyle/>
-                    <a:p>
-                      <a:r>
-                        <a:rPr sz="1100" b="0"/>
-                        <a:t>0.173</a:t>
-                      </a:r>
-                    </a:p>
-                  </a:txBody>
-                  <a:tcPr/>
-                </a:tc>
-              </a:tr>
-              <a:tr h="548000">
-                <a:tc>
-                  <a:txBody>
-                    <a:bodyPr/>
-                    <a:lstStyle/>
-                    <a:p>
-                      <a:r>
-                        <a:rPr sz="1100" b="0"/>
-                        <a:t>만성신장질환(CKD)</a:t>
-                      </a:r>
-                    </a:p>
-                  </a:txBody>
-                  <a:tcPr/>
-                </a:tc>
-                <a:tc>
-                  <a:txBody>
-                    <a:bodyPr/>
-                    <a:lstStyle/>
-                    <a:p>
-                      <a:r>
-                        <a:rPr sz="1100" b="0"/>
-                        <a:t>aec_fpca_pc1</a:t>
-                      </a:r>
-                    </a:p>
-                  </a:txBody>
-                  <a:tcPr/>
-                </a:tc>
-                <a:tc>
-                  <a:txBody>
-                    <a:bodyPr/>
-                    <a:lstStyle/>
-                    <a:p>
-                      <a:r>
-                        <a:rPr sz="1100" b="0"/>
-                        <a:t>0.101</a:t>
-                      </a:r>
-                    </a:p>
-                  </a:txBody>
-                  <a:tcPr/>
-                </a:tc>
-                <a:tc>
-                  <a:txBody>
-                    <a:bodyPr/>
-                    <a:lstStyle/>
-                    <a:p>
-                      <a:r>
-                        <a:rPr sz="1100" b="0"/>
-                        <a:t>1.106</a:t>
-                      </a:r>
-                    </a:p>
-                  </a:txBody>
-                  <a:tcPr/>
-                </a:tc>
-                <a:tc>
-                  <a:txBody>
-                    <a:bodyPr/>
-                    <a:lstStyle/>
-                    <a:p>
-                      <a:r>
-                        <a:rPr sz="1100" b="0"/>
-                        <a:t>0.450</a:t>
-                      </a:r>
-                    </a:p>
-                  </a:txBody>
-                  <a:tcPr/>
-                </a:tc>
-              </a:tr>
-              <a:tr h="548000">
-                <a:tc>
-                  <a:txBody>
-                    <a:bodyPr/>
-                    <a:lstStyle/>
-                    <a:p>
-                      <a:r>
-                        <a:rPr sz="1100" b="0"/>
-                        <a:t/>
-                      </a:r>
-                    </a:p>
-                  </a:txBody>
-                  <a:tcPr/>
-                </a:tc>
-                <a:tc>
-                  <a:txBody>
-                    <a:bodyPr/>
-                    <a:lstStyle/>
-                    <a:p>
-                      <a:r>
-                        <a:rPr sz="1100" b="0"/>
-                        <a:t>aec_fpca_pc2</a:t>
-                      </a:r>
-                    </a:p>
-                  </a:txBody>
-                  <a:tcPr/>
-                </a:tc>
-                <a:tc>
-                  <a:txBody>
-                    <a:bodyPr/>
-                    <a:lstStyle/>
-                    <a:p>
-                      <a:r>
-                        <a:rPr sz="1100" b="0"/>
-                        <a:t>-0.371</a:t>
-                      </a:r>
-                    </a:p>
-                  </a:txBody>
-                  <a:tcPr/>
-                </a:tc>
-                <a:tc>
-                  <a:txBody>
-                    <a:bodyPr/>
-                    <a:lstStyle/>
-                    <a:p>
-                      <a:r>
-                        <a:rPr sz="1100" b="0"/>
-                        <a:t>0.690</a:t>
-                      </a:r>
-                    </a:p>
-                  </a:txBody>
-                  <a:tcPr/>
-                </a:tc>
-                <a:tc>
-                  <a:txBody>
-                    <a:bodyPr/>
-                    <a:lstStyle/>
-                    <a:p>
-                      <a:r>
-                        <a:rPr sz="1100" b="0"/>
-                        <a:t>0.018 *</a:t>
-                      </a:r>
-                    </a:p>
-                  </a:txBody>
-                  <a:tcPr/>
-                </a:tc>
-              </a:tr>
-              <a:tr h="548000">
-                <a:tc>
-                  <a:txBody>
-                    <a:bodyPr/>
-                    <a:lstStyle/>
-                    <a:p>
-                      <a:r>
-                        <a:rPr sz="1100" b="0"/>
-                        <a:t/>
-                      </a:r>
-                    </a:p>
-                  </a:txBody>
-                  <a:tcPr/>
-                </a:tc>
-                <a:tc>
-                  <a:txBody>
-                    <a:bodyPr/>
-                    <a:lstStyle/>
-                    <a:p>
-                      <a:r>
-                        <a:rPr sz="1100" b="0"/>
-                        <a:t>aec_fpca_pc3</a:t>
-                      </a:r>
-                    </a:p>
-                  </a:txBody>
-                  <a:tcPr/>
-                </a:tc>
-                <a:tc>
-                  <a:txBody>
-                    <a:bodyPr/>
-                    <a:lstStyle/>
-                    <a:p>
-                      <a:r>
-                        <a:rPr sz="1100" b="0"/>
-                        <a:t>-0.077</a:t>
-                      </a:r>
-                    </a:p>
-                  </a:txBody>
-                  <a:tcPr/>
-                </a:tc>
-                <a:tc>
-                  <a:txBody>
-                    <a:bodyPr/>
-                    <a:lstStyle/>
-                    <a:p>
-                      <a:r>
-                        <a:rPr sz="1100" b="0"/>
-                        <a:t>0.926</a:t>
-                      </a:r>
-                    </a:p>
-                  </a:txBody>
-                  <a:tcPr/>
-                </a:tc>
-                <a:tc>
-                  <a:txBody>
-                    <a:bodyPr/>
-                    <a:lstStyle/>
-                    <a:p>
-                      <a:r>
-                        <a:rPr sz="1100" b="0"/>
-                        <a:t>0.540</a:t>
-                      </a:r>
-                    </a:p>
-                  </a:txBody>
-                  <a:tcPr/>
-                </a:tc>
-              </a:tr>
-            </a:tbl>
-          </a:graphicData>
-        </a:graphic>
-      </p:graphicFrame>
+      <p:sp>
+        <p:nvSpPr>
+          <p:cNvPr id="3" name="Content Placeholder 2"/>
+          <p:cNvSpPr>
+            <a:spLocks noGrp="1"/>
+          </p:cNvSpPr>
+          <p:nvPr>
+            <p:ph idx="1"/>
+          </p:nvPr>
+        </p:nvSpPr>
+        <p:spPr>
+          <a:xfrm>
+            <a:off x="508000" y="897468"/>
+            <a:ext cx="11176000" cy="5063066"/>
+          </a:xfrm>
+        </p:spPr>
+        <p:txBody>
+          <a:bodyPr wrap="square"/>
+          <a:lstStyle/>
+          <a:p>
+            <a:r>
+              <a:rPr sz="1800"/>
+              <a:t>① AEC(FPCA) 추가는 ΔAUC -0.034~+0.039, 변형(FPCA+ratio·FPCA-only·ratio-only) 전체로 봐도 -0.034~+0.039로 전처리·파생 방식을 바꿔도 기여가 작다</a:t>
+            </a:r>
+          </a:p>
+          <a:p>
+            <a:r>
+              <a:rPr sz="1800"/>
+              <a:t>② 체성분은 기여한다 — AEC+체성분 ΔAUC +0.024~+0.071, 체성분만 +0.005~+0.057. Sinchon(n=1,123)은 3/3 질환에서 Baseline 대비 유의, Gangnam(test n=252)은 1/3 질환에 그친다</a:t>
+            </a:r>
+          </a:p>
+          <a:p>
+            <a:r>
+              <a:rPr sz="1800"/>
+              <a:t>③ 크기가 부위·질환·코호트마다 들쭉날쭉하다 (예: CKD Gangnam은 체성분만 +0.005, AEC(FPCA) -0.034) — 곡선 정보가 코호트에 걸쳐 안정적으로 재현되지 않는다</a:t>
+            </a:r>
+          </a:p>
+          <a:p>
+            <a:r>
+              <a:rPr sz="1800"/>
+              <a:t>해석(가설): crop 범위 안에서도 환자마다 해부학적 구성이 달라 같은 slice index가 같은 위치를 뜻하지 않는다 → FPCA·전처리는 위치 불일치를 교정하지 못해 개선의 크기와 일관성이 모두 제한된다</a:t>
+            </a:r>
+          </a:p>
+          <a:p>
+            <a:r>
+              <a:rPr sz="1800"/>
+              <a:t>한계: 위치 불일치를 직접 측정한 것은 아니며, landmark 정렬 후 같은 평가에서 개선이 안정화되는지로 검증해야 한다</a:t>
+            </a:r>
+          </a:p>
+        </p:txBody>
+      </p:sp>
     </p:spTree>
   </p:cSld>
   <p:clrMapOvr>
